--- a/presentacion.pptx
+++ b/presentacion.pptx
@@ -13,6 +13,9 @@
     <p:sldId id="261" r:id="rId12"/>
     <p:sldId id="262" r:id="rId13"/>
     <p:sldId id="263" r:id="rId14"/>
+    <p:sldId id="264" r:id="rId15"/>
+    <p:sldId id="265" r:id="rId16"/>
+    <p:sldId id="266" r:id="rId17"/>
   </p:sldIdLst>
   <p:sldSz cx="12191695" cy="6858000" type="screen4x3"/>
   <p:notesSz cx="6858000" cy="9144000"/>
@@ -3110,11 +3113,11 @@
             <a:avLst/>
           </a:prstGeom>
           <a:solidFill>
-            <a:srgbClr val="0F172A"/>
+            <a:srgbClr val="070B14"/>
           </a:solidFill>
           <a:ln>
             <a:solidFill>
-              <a:srgbClr val="0F172A"/>
+              <a:srgbClr val="070B14"/>
             </a:solidFill>
           </a:ln>
         </p:spPr>
@@ -3148,8 +3151,8 @@
         </p:nvSpPr>
         <p:spPr>
           <a:xfrm>
-            <a:off x="1371600" y="1097280"/>
-            <a:ext cx="9418320" cy="4572000"/>
+            <a:off x="914400" y="731520"/>
+            <a:ext cx="10332720" cy="1645920"/>
           </a:xfrm>
           <a:prstGeom prst="rect">
             <a:avLst/>
@@ -3163,7 +3166,7 @@
           <a:lstStyle/>
           <a:p>
             <a:pPr algn="ctr">
-              <a:defRPr sz="1400" b="1">
+              <a:defRPr sz="1300" b="1">
                 <a:solidFill>
                   <a:srgbClr val="818CF8"/>
                 </a:solidFill>
@@ -3175,7 +3178,7 @@
           </a:p>
           <a:p>
             <a:pPr algn="ctr">
-              <a:defRPr sz="3600" b="1">
+              <a:defRPr sz="3400" b="1">
                 <a:solidFill>
                   <a:srgbClr val="38BDF8"/>
                 </a:solidFill>
@@ -3187,46 +3190,284 @@
           </a:p>
           <a:p>
             <a:pPr algn="ctr">
-              <a:defRPr sz="2000">
+              <a:defRPr sz="1700">
                 <a:solidFill>
                   <a:srgbClr val="F1F5F9"/>
                 </a:solidFill>
               </a:defRPr>
             </a:pPr>
             <a:r>
-              <a:t>Sistema Distribuido Base Orientado a Producción (S1 a S5)</a:t>
+              <a:t>Sistema Distribuido para la Venta de Computadoras y Componentes</a:t>
+            </a:r>
+          </a:p>
+        </p:txBody>
+      </p:sp>
+      <p:sp>
+        <p:nvSpPr>
+          <p:cNvPr id="4" name="Rounded Rectangle 3"/>
+          <p:cNvSpPr/>
+          <p:nvPr/>
+        </p:nvSpPr>
+        <p:spPr>
+          <a:xfrm>
+            <a:off x="1097280" y="2743200"/>
+            <a:ext cx="4754880" cy="2560320"/>
+          </a:xfrm>
+          <a:prstGeom prst="roundRect">
+            <a:avLst/>
+          </a:prstGeom>
+          <a:solidFill>
+            <a:srgbClr val="0F172A"/>
+          </a:solidFill>
+          <a:ln>
+            <a:solidFill>
+              <a:srgbClr val="38BDF8"/>
+            </a:solidFill>
+          </a:ln>
+        </p:spPr>
+        <p:style>
+          <a:lnRef idx="1">
+            <a:schemeClr val="accent1"/>
+          </a:lnRef>
+          <a:fillRef idx="3">
+            <a:schemeClr val="accent1"/>
+          </a:fillRef>
+          <a:effectRef idx="2">
+            <a:schemeClr val="accent1"/>
+          </a:effectRef>
+          <a:fontRef idx="minor">
+            <a:schemeClr val="lt1"/>
+          </a:fontRef>
+        </p:style>
+        <p:txBody>
+          <a:bodyPr rtlCol="0" anchor="ctr" wrap="square"/>
+          <a:lstStyle/>
+          <a:p>
+            <a:pPr algn="ctr">
+              <a:defRPr sz="1600" b="1">
+                <a:solidFill>
+                  <a:srgbClr val="38BDF8"/>
+                </a:solidFill>
+              </a:defRPr>
+            </a:pPr>
+            <a:r>
+              <a:t>👨‍💻 Eliceo Parillo Mostajo</a:t>
             </a:r>
           </a:p>
           <a:p>
             <a:br/>
-          </a:p>
+            <a:pPr>
+              <a:defRPr sz="1100">
+                <a:solidFill>
+                  <a:srgbClr val="F1F5F9"/>
+                </a:solidFill>
+              </a:defRPr>
+            </a:pPr>
+            <a:r>
+              <a:t>• Énfasis: Arquitectura Backend, Eureka, Gateway y Catálogo</a:t>
+            </a:r>
+          </a:p>
+          <a:p>
+            <a:pPr>
+              <a:defRPr sz="1100">
+                <a:solidFill>
+                  <a:srgbClr val="F1F5F9"/>
+                </a:solidFill>
+              </a:defRPr>
+            </a:pPr>
+            <a:r>
+              <a:t>• Microservicio Transaccional: pc-orden-ms</a:t>
+            </a:r>
+          </a:p>
+          <a:p>
+            <a:pPr>
+              <a:defRPr sz="1100">
+                <a:solidFill>
+                  <a:srgbClr val="F1F5F9"/>
+                </a:solidFill>
+              </a:defRPr>
+            </a:pPr>
+            <a:r>
+              <a:t>  (Cabecera-Detalle, cálculo automático de 18% IGV y estados)</a:t>
+            </a:r>
+          </a:p>
+          <a:p>
+            <a:pPr>
+              <a:defRPr sz="1100">
+                <a:solidFill>
+                  <a:srgbClr val="F1F5F9"/>
+                </a:solidFill>
+              </a:defRPr>
+            </a:pPr>
+            <a:r>
+              <a:t>• Microservicio No Transaccional: pc-catalogo-ms</a:t>
+            </a:r>
+          </a:p>
+          <a:p>
+            <a:pPr>
+              <a:defRPr sz="1100">
+                <a:solidFill>
+                  <a:srgbClr val="F1F5F9"/>
+                </a:solidFill>
+              </a:defRPr>
+            </a:pPr>
+            <a:r>
+              <a:t>  (Inventario de hardware: CPUs, GPUs, RAM y control de stock)</a:t>
+            </a:r>
+          </a:p>
+        </p:txBody>
+      </p:sp>
+      <p:sp>
+        <p:nvSpPr>
+          <p:cNvPr id="5" name="Rounded Rectangle 4"/>
+          <p:cNvSpPr/>
+          <p:nvPr/>
+        </p:nvSpPr>
+        <p:spPr>
+          <a:xfrm>
+            <a:off x="6309360" y="2743200"/>
+            <a:ext cx="4754880" cy="2560320"/>
+          </a:xfrm>
+          <a:prstGeom prst="roundRect">
+            <a:avLst/>
+          </a:prstGeom>
+          <a:solidFill>
+            <a:srgbClr val="0F172A"/>
+          </a:solidFill>
+          <a:ln>
+            <a:solidFill>
+              <a:srgbClr val="34D399"/>
+            </a:solidFill>
+          </a:ln>
+        </p:spPr>
+        <p:style>
+          <a:lnRef idx="1">
+            <a:schemeClr val="accent1"/>
+          </a:lnRef>
+          <a:fillRef idx="3">
+            <a:schemeClr val="accent1"/>
+          </a:fillRef>
+          <a:effectRef idx="2">
+            <a:schemeClr val="accent1"/>
+          </a:effectRef>
+          <a:fontRef idx="minor">
+            <a:schemeClr val="lt1"/>
+          </a:fontRef>
+        </p:style>
+        <p:txBody>
+          <a:bodyPr rtlCol="0" anchor="ctr" wrap="square"/>
+          <a:lstStyle/>
           <a:p>
             <a:pPr algn="ctr">
-              <a:defRPr sz="1500" b="1">
-                <a:solidFill>
-                  <a:srgbClr val="10B981"/>
-                </a:solidFill>
-              </a:defRPr>
-            </a:pPr>
-            <a:r>
-              <a:t>Estudiante: Eliceo Parillo Mostajo   |   Equipo: Equipo 01 / Grupo 4 - ChaskiByte Systems</a:t>
-            </a:r>
-          </a:p>
+              <a:defRPr sz="1600" b="1">
+                <a:solidFill>
+                  <a:srgbClr val="34D399"/>
+                </a:solidFill>
+              </a:defRPr>
+            </a:pPr>
+            <a:r>
+              <a:t>💳 Laura Vargas Cristhian Paul</a:t>
+            </a:r>
+          </a:p>
+          <a:p>
+            <a:br/>
+            <a:pPr>
+              <a:defRPr sz="1100">
+                <a:solidFill>
+                  <a:srgbClr val="F1F5F9"/>
+                </a:solidFill>
+              </a:defRPr>
+            </a:pPr>
+            <a:r>
+              <a:t>• Énfasis: Pasarela Externa (Mercado Pago), Seguridad y JWT</a:t>
+            </a:r>
+          </a:p>
+          <a:p>
+            <a:pPr>
+              <a:defRPr sz="1100">
+                <a:solidFill>
+                  <a:srgbClr val="F1F5F9"/>
+                </a:solidFill>
+              </a:defRPr>
+            </a:pPr>
+            <a:r>
+              <a:t>• Microservicio Transaccional: pc-pago-ms</a:t>
+            </a:r>
+          </a:p>
+          <a:p>
+            <a:pPr>
+              <a:defRPr sz="1100">
+                <a:solidFill>
+                  <a:srgbClr val="F1F5F9"/>
+                </a:solidFill>
+              </a:defRPr>
+            </a:pPr>
+            <a:r>
+              <a:t>  (Mercado Pago Checkout Pro, preferencias y Webhook asíncrono)</a:t>
+            </a:r>
+          </a:p>
+          <a:p>
+            <a:pPr>
+              <a:defRPr sz="1100">
+                <a:solidFill>
+                  <a:srgbClr val="F1F5F9"/>
+                </a:solidFill>
+              </a:defRPr>
+            </a:pPr>
+            <a:r>
+              <a:t>• Microservicio No Transaccional: pc-auth-ms</a:t>
+            </a:r>
+          </a:p>
+          <a:p>
+            <a:pPr>
+              <a:defRPr sz="1100">
+                <a:solidFill>
+                  <a:srgbClr val="F1F5F9"/>
+                </a:solidFill>
+              </a:defRPr>
+            </a:pPr>
+            <a:r>
+              <a:t>  (Proveedor de identidad, contraseñas BCrypt y roles CLIENTE/ADMIN)</a:t>
+            </a:r>
+          </a:p>
+        </p:txBody>
+      </p:sp>
+      <p:sp>
+        <p:nvSpPr>
+          <p:cNvPr id="6" name="TextBox 5"/>
+          <p:cNvSpPr txBox="1"/>
+          <p:nvPr/>
+        </p:nvSpPr>
+        <p:spPr>
+          <a:xfrm>
+            <a:off x="914400" y="5577840"/>
+            <a:ext cx="10332720" cy="731520"/>
+          </a:xfrm>
+          <a:prstGeom prst="rect">
+            <a:avLst/>
+          </a:prstGeom>
+          <a:noFill/>
+        </p:spPr>
+        <p:txBody>
+          <a:bodyPr wrap="none">
+            <a:spAutoFit/>
+          </a:bodyPr>
+          <a:lstStyle/>
           <a:p>
             <a:pPr algn="ctr">
-              <a:defRPr sz="1400">
+              <a:defRPr sz="1200" b="1">
                 <a:solidFill>
                   <a:srgbClr val="94A3B8"/>
                 </a:solidFill>
               </a:defRPr>
             </a:pPr>
             <a:r>
-              <a:t>Docente: Ing. Abel Ángel Sullón Macalupu   |   Semestre 2026-2 (5to Ciclo)</a:t>
+              <a:t>Equipo 01 / Grupo 4 - ChaskiByte Systems   |   Docente: Ing. Abel Ángel Sullón Macalupu   |   Semestre 2026-2</a:t>
             </a:r>
           </a:p>
           <a:p>
             <a:pPr algn="ctr">
-              <a:defRPr sz="1300">
+              <a:defRPr sz="1150">
                 <a:solidFill>
                   <a:srgbClr val="38BDF8"/>
                 </a:solidFill>
@@ -3246,7 +3487,7 @@
 </p:sld>
 </file>
 
-<file path=ppt/slides/slide2.xml><?xml version="1.0" encoding="utf-8"?>
+<file path=ppt/slides/slide10.xml><?xml version="1.0" encoding="utf-8"?>
 <p:sld xmlns:a="http://schemas.openxmlformats.org/drawingml/2006/main" xmlns:p="http://schemas.openxmlformats.org/presentationml/2006/main" xmlns:r="http://schemas.openxmlformats.org/officeDocument/2006/relationships">
   <p:cSld>
     <p:spTree>
@@ -3271,11 +3512,11 @@
             <a:avLst/>
           </a:prstGeom>
           <a:solidFill>
-            <a:srgbClr val="0F172A"/>
+            <a:srgbClr val="070B14"/>
           </a:solidFill>
           <a:ln>
             <a:solidFill>
-              <a:srgbClr val="0F172A"/>
+              <a:srgbClr val="070B14"/>
             </a:solidFill>
           </a:ln>
         </p:spPr>
@@ -3309,7 +3550,7 @@
         </p:nvSpPr>
         <p:spPr>
           <a:xfrm>
-            <a:off x="731520" y="365760"/>
+            <a:off x="731520" y="320040"/>
             <a:ext cx="10698480" cy="320040"/>
           </a:xfrm>
           <a:prstGeom prst="rect">
@@ -3324,14 +3565,14 @@
           <a:lstStyle/>
           <a:p>
             <a:pPr>
-              <a:defRPr sz="1100" b="1">
+              <a:defRPr sz="1050" b="1">
                 <a:solidFill>
                   <a:srgbClr val="818CF8"/>
                 </a:solidFill>
               </a:defRPr>
             </a:pPr>
             <a:r>
-              <a:t>CHASKIPC • EVALUACIÓN UNIDAD I</a:t>
+              <a:t>CHASKIPC • EVALUACIÓN UNIDAD I (S1 A S5) • EQUIPO 01</a:t>
             </a:r>
           </a:p>
         </p:txBody>
@@ -3344,8 +3585,8 @@
         </p:nvSpPr>
         <p:spPr>
           <a:xfrm>
-            <a:off x="731520" y="640080"/>
-            <a:ext cx="10698480" cy="731520"/>
+            <a:off x="731520" y="594360"/>
+            <a:ext cx="10698480" cy="685800"/>
           </a:xfrm>
           <a:prstGeom prst="rect">
             <a:avLst/>
@@ -3359,34 +3600,69 @@
           <a:lstStyle/>
           <a:p>
             <a:pPr>
-              <a:defRPr sz="2400" b="1">
+              <a:defRPr sz="2200" b="1">
                 <a:solidFill>
                   <a:srgbClr val="38BDF8"/>
                 </a:solidFill>
               </a:defRPr>
             </a:pPr>
             <a:r>
-              <a:t>2.4 Arquitectura del Sistema Distribuido Base</a:t>
-            </a:r>
-          </a:p>
-        </p:txBody>
-      </p:sp>
-      <p:sp>
-        <p:nvSpPr>
-          <p:cNvPr id="5" name="Rounded Rectangle 4"/>
+              <a:t>3. Balotario Teórico Asignado por Integrante (Tabla 4)</a:t>
+            </a:r>
+          </a:p>
+        </p:txBody>
+      </p:sp>
+      <p:sp>
+        <p:nvSpPr>
+          <p:cNvPr id="5" name="TextBox 4"/>
+          <p:cNvSpPr txBox="1"/>
+          <p:nvPr/>
+        </p:nvSpPr>
+        <p:spPr>
+          <a:xfrm>
+            <a:off x="7772400" y="365760"/>
+            <a:ext cx="3657600" cy="365760"/>
+          </a:xfrm>
+          <a:prstGeom prst="rect">
+            <a:avLst/>
+          </a:prstGeom>
+          <a:noFill/>
+        </p:spPr>
+        <p:txBody>
+          <a:bodyPr wrap="none">
+            <a:spAutoFit/>
+          </a:bodyPr>
+          <a:lstStyle/>
+          <a:p>
+            <a:pPr algn="r">
+              <a:defRPr sz="1100" b="1">
+                <a:solidFill>
+                  <a:srgbClr val="10B981"/>
+                </a:solidFill>
+              </a:defRPr>
+            </a:pPr>
+            <a:r>
+              <a:t>🎤 Ambos Integrantes</a:t>
+            </a:r>
+          </a:p>
+        </p:txBody>
+      </p:sp>
+      <p:sp>
+        <p:nvSpPr>
+          <p:cNvPr id="6" name="Rounded Rectangle 5"/>
           <p:cNvSpPr/>
           <p:nvPr/>
         </p:nvSpPr>
         <p:spPr>
           <a:xfrm>
-            <a:off x="731520" y="1463040"/>
-            <a:ext cx="3383280" cy="2103120"/>
+            <a:off x="731520" y="1371600"/>
+            <a:ext cx="5120640" cy="4572000"/>
           </a:xfrm>
           <a:prstGeom prst="roundRect">
             <a:avLst/>
           </a:prstGeom>
           <a:solidFill>
-            <a:srgbClr val="1E293B"/>
+            <a:srgbClr val="0F172A"/>
           </a:solidFill>
           <a:ln>
             <a:solidFill>
@@ -3413,51 +3689,88 @@
           <a:lstStyle/>
           <a:p>
             <a:pPr algn="ctr">
-              <a:defRPr sz="1300" b="1">
+              <a:defRPr sz="1400" b="1">
                 <a:solidFill>
                   <a:srgbClr val="38BDF8"/>
                 </a:solidFill>
               </a:defRPr>
             </a:pPr>
             <a:r>
-              <a:t>API GATEWAY (:18080 DEV / :28080 PROD)</a:t>
+              <a:t>🎤 Preguntas para Eliceo Parillo</a:t>
             </a:r>
           </a:p>
           <a:p>
             <a:br/>
             <a:pPr>
-              <a:defRPr sz="1100">
+              <a:defRPr sz="1050">
                 <a:solidFill>
                   <a:srgbClr val="F1F5F9"/>
                 </a:solidFill>
               </a:defRPr>
             </a:pPr>
             <a:r>
-              <a:t>Punto único de acceso público reactivo (Netty/WebFlux). Resuelve rutas lógicas lb:// hacia microservicios con balanceo Round Robin.</a:t>
-            </a:r>
-          </a:p>
-        </p:txBody>
-      </p:sp>
-      <p:sp>
-        <p:nvSpPr>
-          <p:cNvPr id="6" name="Rounded Rectangle 5"/>
+              <a:t>1. ¿Por qué no depender de un puerto fijo asignado a mano?</a:t>
+            </a:r>
+          </a:p>
+          <a:p>
+            <a:pPr>
+              <a:defRPr sz="1050">
+                <a:solidFill>
+                  <a:srgbClr val="F1F5F9"/>
+                </a:solidFill>
+              </a:defRPr>
+            </a:pPr>
+            <a:r>
+              <a:t>Impide el escalado horizontal. Al usar instance-id: ${app.name}:${server.port} con Eureka, los nodos son efímeros y se anuncian dinámicamente sin colisiones de socket.</a:t>
+            </a:r>
+          </a:p>
+          <a:p>
+            <a:br/>
+            <a:pPr>
+              <a:defRPr sz="1050">
+                <a:solidFill>
+                  <a:srgbClr val="F1F5F9"/>
+                </a:solidFill>
+              </a:defRPr>
+            </a:pPr>
+            <a:r>
+              <a:t>2. ¿Config Server vs Propiedad en código (DEV vs PROD)?</a:t>
+            </a:r>
+          </a:p>
+          <a:p>
+            <a:pPr>
+              <a:defRPr sz="1050">
+                <a:solidFill>
+                  <a:srgbClr val="F1F5F9"/>
+                </a:solidFill>
+              </a:defRPr>
+            </a:pPr>
+            <a:r>
+              <a:t>Evita recompilar artefactos JAR ante cambios de entorno (Factor III). En DEV se usa DB local y DDL update; en PROD se inyectan variables seguras y DDL validate.</a:t>
+            </a:r>
+          </a:p>
+        </p:txBody>
+      </p:sp>
+      <p:sp>
+        <p:nvSpPr>
+          <p:cNvPr id="7" name="Rounded Rectangle 6"/>
           <p:cNvSpPr/>
           <p:nvPr/>
         </p:nvSpPr>
         <p:spPr>
           <a:xfrm>
-            <a:off x="4389120" y="1463040"/>
-            <a:ext cx="3383280" cy="2103120"/>
+            <a:off x="6309360" y="1371600"/>
+            <a:ext cx="5120640" cy="4572000"/>
           </a:xfrm>
           <a:prstGeom prst="roundRect">
             <a:avLst/>
           </a:prstGeom>
           <a:solidFill>
-            <a:srgbClr val="1E293B"/>
+            <a:srgbClr val="0F172A"/>
           </a:solidFill>
           <a:ln>
             <a:solidFill>
-              <a:srgbClr val="38BDF8"/>
+              <a:srgbClr val="34D399"/>
             </a:solidFill>
           </a:ln>
         </p:spPr>
@@ -3480,295 +3793,89 @@
           <a:lstStyle/>
           <a:p>
             <a:pPr algn="ctr">
-              <a:defRPr sz="1300" b="1">
-                <a:solidFill>
-                  <a:srgbClr val="38BDF8"/>
-                </a:solidFill>
-              </a:defRPr>
-            </a:pPr>
-            <a:r>
-              <a:t>EUREKA SERVER (:8761 DEV / :28761 PROD)</a:t>
+              <a:defRPr sz="1400" b="1">
+                <a:solidFill>
+                  <a:srgbClr val="34D399"/>
+                </a:solidFill>
+              </a:defRPr>
+            </a:pPr>
+            <a:r>
+              <a:t>🎤 Preguntas para Cristhian Paul</a:t>
             </a:r>
           </a:p>
           <a:p>
             <a:br/>
             <a:pPr>
-              <a:defRPr sz="1100">
+              <a:defRPr sz="1000">
                 <a:solidFill>
                   <a:srgbClr val="F1F5F9"/>
                 </a:solidFill>
               </a:defRPr>
             </a:pPr>
             <a:r>
-              <a:t>Registro y descubrimiento dinámico de microservicios. Supervisa el ciclo de vida e instancias vivas mediante latidos (heartbeats cada 30s).</a:t>
-            </a:r>
-          </a:p>
-        </p:txBody>
-      </p:sp>
-      <p:sp>
-        <p:nvSpPr>
-          <p:cNvPr id="7" name="Rounded Rectangle 6"/>
-          <p:cNvSpPr/>
-          <p:nvPr/>
-        </p:nvSpPr>
-        <p:spPr>
-          <a:xfrm>
-            <a:off x="8046720" y="1463040"/>
-            <a:ext cx="3383280" cy="2103120"/>
-          </a:xfrm>
-          <a:prstGeom prst="roundRect">
-            <a:avLst/>
-          </a:prstGeom>
-          <a:solidFill>
-            <a:srgbClr val="1E293B"/>
-          </a:solidFill>
-          <a:ln>
-            <a:solidFill>
-              <a:srgbClr val="38BDF8"/>
-            </a:solidFill>
-          </a:ln>
-        </p:spPr>
-        <p:style>
-          <a:lnRef idx="1">
-            <a:schemeClr val="accent1"/>
-          </a:lnRef>
-          <a:fillRef idx="3">
-            <a:schemeClr val="accent1"/>
-          </a:fillRef>
-          <a:effectRef idx="2">
-            <a:schemeClr val="accent1"/>
-          </a:effectRef>
-          <a:fontRef idx="minor">
-            <a:schemeClr val="lt1"/>
-          </a:fontRef>
-        </p:style>
-        <p:txBody>
-          <a:bodyPr rtlCol="0" anchor="ctr" wrap="square"/>
-          <a:lstStyle/>
-          <a:p>
-            <a:pPr algn="ctr">
-              <a:defRPr sz="1300" b="1">
-                <a:solidFill>
-                  <a:srgbClr val="38BDF8"/>
-                </a:solidFill>
-              </a:defRPr>
-            </a:pPr>
-            <a:r>
-              <a:t>CONFIG SERVER (:8888 DEV / :28888 PROD)</a:t>
+              <a:t>3. ¿Por qué el desalojo en Eureka no es instantáneo?</a:t>
+            </a:r>
+          </a:p>
+          <a:p>
+            <a:pPr>
+              <a:defRPr sz="1000">
+                <a:solidFill>
+                  <a:srgbClr val="F1F5F9"/>
+                </a:solidFill>
+              </a:defRPr>
+            </a:pPr>
+            <a:r>
+              <a:t>Evita el flapping (inestabilidad por latencia transitoria). Eureka espera el latido (30s) y vencimiento del arrendamiento (90s) antes de desalojar.</a:t>
             </a:r>
           </a:p>
           <a:p>
             <a:br/>
             <a:pPr>
-              <a:defRPr sz="1100">
+              <a:defRPr sz="1000">
                 <a:solidFill>
                   <a:srgbClr val="F1F5F9"/>
                 </a:solidFill>
               </a:defRPr>
             </a:pPr>
             <a:r>
-              <a:t>Servidor de configuraciones centralizadas. Lee perfiles dev/prod desde config-repo desacoplando la configuración del código fuente (Factor III).</a:t>
-            </a:r>
-          </a:p>
-        </p:txBody>
-      </p:sp>
-      <p:sp>
-        <p:nvSpPr>
-          <p:cNvPr id="8" name="Rounded Rectangle 7"/>
-          <p:cNvSpPr/>
-          <p:nvPr/>
-        </p:nvSpPr>
-        <p:spPr>
-          <a:xfrm>
-            <a:off x="731520" y="3840480"/>
-            <a:ext cx="3383280" cy="2103120"/>
-          </a:xfrm>
-          <a:prstGeom prst="roundRect">
-            <a:avLst/>
-          </a:prstGeom>
-          <a:solidFill>
-            <a:srgbClr val="1E293B"/>
-          </a:solidFill>
-          <a:ln>
-            <a:solidFill>
-              <a:srgbClr val="38BDF8"/>
-            </a:solidFill>
-          </a:ln>
-        </p:spPr>
-        <p:style>
-          <a:lnRef idx="1">
-            <a:schemeClr val="accent1"/>
-          </a:lnRef>
-          <a:fillRef idx="3">
-            <a:schemeClr val="accent1"/>
-          </a:fillRef>
-          <a:effectRef idx="2">
-            <a:schemeClr val="accent1"/>
-          </a:effectRef>
-          <a:fontRef idx="minor">
-            <a:schemeClr val="lt1"/>
-          </a:fontRef>
-        </p:style>
-        <p:txBody>
-          <a:bodyPr rtlCol="0" anchor="ctr" wrap="square"/>
-          <a:lstStyle/>
-          <a:p>
-            <a:pPr algn="ctr">
-              <a:defRPr sz="1300" b="1">
-                <a:solidFill>
-                  <a:srgbClr val="38BDF8"/>
-                </a:solidFill>
-              </a:defRPr>
-            </a:pPr>
-            <a:r>
-              <a:t>CATÁLOGO HARDWARE (:8081)</a:t>
+              <a:t>4. ¿Qué es lb:// y quién lo resuelve?</a:t>
+            </a:r>
+          </a:p>
+          <a:p>
+            <a:pPr>
+              <a:defRPr sz="1000">
+                <a:solidFill>
+                  <a:srgbClr val="F1F5F9"/>
+                </a:solidFill>
+              </a:defRPr>
+            </a:pPr>
+            <a:r>
+              <a:t>Es un esquema lógico de Spring Cloud LoadBalancer. El filtro reactivo del Gateway consulta la lista de instancias vivas en Eureka y reescribe la URL física.</a:t>
             </a:r>
           </a:p>
           <a:p>
             <a:br/>
             <a:pPr>
-              <a:defRPr sz="1100">
+              <a:defRPr sz="1000">
                 <a:solidFill>
                   <a:srgbClr val="F1F5F9"/>
                 </a:solidFill>
               </a:defRPr>
             </a:pPr>
             <a:r>
-              <a:t>Microservicio no transaccional de componentes de PC (CPUs, GPUs, RAM, Almacenamiento). Incluye DataInitializer de precarga.</a:t>
-            </a:r>
-          </a:p>
-        </p:txBody>
-      </p:sp>
-      <p:sp>
-        <p:nvSpPr>
-          <p:cNvPr id="9" name="Rounded Rectangle 8"/>
-          <p:cNvSpPr/>
-          <p:nvPr/>
-        </p:nvSpPr>
-        <p:spPr>
-          <a:xfrm>
-            <a:off x="4389120" y="3840480"/>
-            <a:ext cx="3383280" cy="2103120"/>
-          </a:xfrm>
-          <a:prstGeom prst="roundRect">
-            <a:avLst/>
-          </a:prstGeom>
-          <a:solidFill>
-            <a:srgbClr val="1E293B"/>
-          </a:solidFill>
-          <a:ln>
-            <a:solidFill>
-              <a:srgbClr val="38BDF8"/>
-            </a:solidFill>
-          </a:ln>
-        </p:spPr>
-        <p:style>
-          <a:lnRef idx="1">
-            <a:schemeClr val="accent1"/>
-          </a:lnRef>
-          <a:fillRef idx="3">
-            <a:schemeClr val="accent1"/>
-          </a:fillRef>
-          <a:effectRef idx="2">
-            <a:schemeClr val="accent1"/>
-          </a:effectRef>
-          <a:fontRef idx="minor">
-            <a:schemeClr val="lt1"/>
-          </a:fontRef>
-        </p:style>
-        <p:txBody>
-          <a:bodyPr rtlCol="0" anchor="ctr" wrap="square"/>
-          <a:lstStyle/>
-          <a:p>
-            <a:pPr algn="ctr">
-              <a:defRPr sz="1300" b="1">
-                <a:solidFill>
-                  <a:srgbClr val="38BDF8"/>
-                </a:solidFill>
-              </a:defRPr>
-            </a:pPr>
-            <a:r>
-              <a:t>ÓRDENES TRANSACCIONAL (:8082 y :8083)</a:t>
-            </a:r>
-          </a:p>
-          <a:p>
-            <a:br/>
-            <a:pPr>
-              <a:defRPr sz="1100">
+              <a:t>5. ¿Por qué Round Robin es suficiente para Stateless?</a:t>
+            </a:r>
+          </a:p>
+          <a:p>
+            <a:pPr>
+              <a:defRPr sz="1000">
                 <a:solidFill>
                   <a:srgbClr val="F1F5F9"/>
                 </a:solidFill>
               </a:defRPr>
             </a:pPr>
             <a:r>
-              <a:t>Microservicio de compras con modelo Cabecera-Detalle, 18% IGV y persistencia en PostgreSQL compartida. Ejecución concurrente.</a:t>
-            </a:r>
-          </a:p>
-        </p:txBody>
-      </p:sp>
-      <p:sp>
-        <p:nvSpPr>
-          <p:cNvPr id="10" name="Rounded Rectangle 9"/>
-          <p:cNvSpPr/>
-          <p:nvPr/>
-        </p:nvSpPr>
-        <p:spPr>
-          <a:xfrm>
-            <a:off x="8046720" y="3840480"/>
-            <a:ext cx="3383280" cy="2103120"/>
-          </a:xfrm>
-          <a:prstGeom prst="roundRect">
-            <a:avLst/>
-          </a:prstGeom>
-          <a:solidFill>
-            <a:srgbClr val="1E293B"/>
-          </a:solidFill>
-          <a:ln>
-            <a:solidFill>
-              <a:srgbClr val="38BDF8"/>
-            </a:solidFill>
-          </a:ln>
-        </p:spPr>
-        <p:style>
-          <a:lnRef idx="1">
-            <a:schemeClr val="accent1"/>
-          </a:lnRef>
-          <a:fillRef idx="3">
-            <a:schemeClr val="accent1"/>
-          </a:fillRef>
-          <a:effectRef idx="2">
-            <a:schemeClr val="accent1"/>
-          </a:effectRef>
-          <a:fontRef idx="minor">
-            <a:schemeClr val="lt1"/>
-          </a:fontRef>
-        </p:style>
-        <p:txBody>
-          <a:bodyPr rtlCol="0" anchor="ctr" wrap="square"/>
-          <a:lstStyle/>
-          <a:p>
-            <a:pPr algn="ctr">
-              <a:defRPr sz="1300" b="1">
-                <a:solidFill>
-                  <a:srgbClr val="38BDF8"/>
-                </a:solidFill>
-              </a:defRPr>
-            </a:pPr>
-            <a:r>
-              <a:t>STACK DE OBSERVABILIDAD</a:t>
-            </a:r>
-          </a:p>
-          <a:p>
-            <a:br/>
-            <a:pPr>
-              <a:defRPr sz="1100">
-                <a:solidFill>
-                  <a:srgbClr val="F1F5F9"/>
-                </a:solidFill>
-              </a:defRPr>
-            </a:pPr>
-            <a:r>
-              <a:t>Prometheus (:19090) con Eureka Service Discovery + Grafana (:13000) con dashboards auto-cargados + Loki (:13100) y Promtail para logs.</a:t>
+              <a:t>Porque no se guarda sesión de usuario en memoria RAM; todo el estado reside en PostgreSQL compartida. Cada petición es químicamente autónoma.</a:t>
             </a:r>
           </a:p>
         </p:txBody>
@@ -3781,7 +3888,7 @@
 </p:sld>
 </file>
 
-<file path=ppt/slides/slide3.xml><?xml version="1.0" encoding="utf-8"?>
+<file path=ppt/slides/slide11.xml><?xml version="1.0" encoding="utf-8"?>
 <p:sld xmlns:a="http://schemas.openxmlformats.org/drawingml/2006/main" xmlns:p="http://schemas.openxmlformats.org/presentationml/2006/main" xmlns:r="http://schemas.openxmlformats.org/officeDocument/2006/relationships">
   <p:cSld>
     <p:spTree>
@@ -3806,11 +3913,11 @@
             <a:avLst/>
           </a:prstGeom>
           <a:solidFill>
-            <a:srgbClr val="0F172A"/>
+            <a:srgbClr val="070B14"/>
           </a:solidFill>
           <a:ln>
             <a:solidFill>
-              <a:srgbClr val="0F172A"/>
+              <a:srgbClr val="070B14"/>
             </a:solidFill>
           </a:ln>
         </p:spPr>
@@ -3844,7 +3951,7 @@
         </p:nvSpPr>
         <p:spPr>
           <a:xfrm>
-            <a:off x="731520" y="365760"/>
+            <a:off x="731520" y="320040"/>
             <a:ext cx="10698480" cy="320040"/>
           </a:xfrm>
           <a:prstGeom prst="rect">
@@ -3859,14 +3966,14 @@
           <a:lstStyle/>
           <a:p>
             <a:pPr>
-              <a:defRPr sz="1100" b="1">
+              <a:defRPr sz="1050" b="1">
                 <a:solidFill>
                   <a:srgbClr val="818CF8"/>
                 </a:solidFill>
               </a:defRPr>
             </a:pPr>
             <a:r>
-              <a:t>CHASKIPC • EVALUACIÓN UNIDAD I</a:t>
+              <a:t>CHASKIPC • EVALUACIÓN UNIDAD I (S1 A S5) • EQUIPO 01</a:t>
             </a:r>
           </a:p>
         </p:txBody>
@@ -3879,8 +3986,8 @@
         </p:nvSpPr>
         <p:spPr>
           <a:xfrm>
-            <a:off x="731520" y="640080"/>
-            <a:ext cx="10698480" cy="731520"/>
+            <a:off x="731520" y="594360"/>
+            <a:ext cx="10698480" cy="685800"/>
           </a:xfrm>
           <a:prstGeom prst="rect">
             <a:avLst/>
@@ -3894,822 +4001,28 @@
           <a:lstStyle/>
           <a:p>
             <a:pPr>
-              <a:defRPr sz="2400" b="1">
+              <a:defRPr sz="2200" b="1">
                 <a:solidFill>
                   <a:srgbClr val="38BDF8"/>
                 </a:solidFill>
               </a:defRPr>
             </a:pPr>
             <a:r>
-              <a:t>2.1 y 2.2 Alcance de Servicios y Contrato REST</a:t>
-            </a:r>
-          </a:p>
-        </p:txBody>
-      </p:sp>
-      <p:graphicFrame>
-        <p:nvGraphicFramePr>
-          <p:cNvPr id="5" name="Table 4"/>
-          <p:cNvGraphicFramePr>
-            <a:graphicFrameLocks noGrp="1"/>
-          </p:cNvGraphicFramePr>
-          <p:nvPr/>
-        </p:nvGraphicFramePr>
-        <p:xfrm>
-          <a:off x="731520" y="1463040"/>
-          <a:ext cx="10698480" cy="4389120"/>
-        </p:xfrm>
-        <a:graphic>
-          <a:graphicData uri="http://schemas.openxmlformats.org/drawingml/2006/table">
-            <a:tbl>
-              <a:tblPr firstRow="1" bandRow="1">
-                <a:tableStyleId>{5C22544A-7EE6-4342-B048-85BDC9FD1C3A}</a:tableStyleId>
-              </a:tblPr>
-              <a:tblGrid>
-                <a:gridCol w="2377440"/>
-                <a:gridCol w="1097280"/>
-                <a:gridCol w="2743200"/>
-                <a:gridCol w="2011680"/>
-                <a:gridCol w="2468880"/>
-              </a:tblGrid>
-              <a:tr h="731520">
-                <a:tc>
-                  <a:txBody>
-                    <a:bodyPr/>
-                    <a:lstStyle/>
-                    <a:p>
-                      <a:pPr>
-                        <a:defRPr sz="1200" b="1">
-                          <a:solidFill>
-                            <a:srgbClr val="F1F5F9"/>
-                          </a:solidFill>
-                        </a:defRPr>
-                      </a:pPr>
-                      <a:r>
-                        <a:t>Microservicio</a:t>
-                      </a:r>
-                    </a:p>
-                  </a:txBody>
-                  <a:tcPr>
-                    <a:solidFill>
-                      <a:srgbClr val="0E7490"/>
-                    </a:solidFill>
-                  </a:tcPr>
-                </a:tc>
-                <a:tc>
-                  <a:txBody>
-                    <a:bodyPr/>
-                    <a:lstStyle/>
-                    <a:p>
-                      <a:pPr>
-                        <a:defRPr sz="1200" b="1">
-                          <a:solidFill>
-                            <a:srgbClr val="F1F5F9"/>
-                          </a:solidFill>
-                        </a:defRPr>
-                      </a:pPr>
-                      <a:r>
-                        <a:t>Método</a:t>
-                      </a:r>
-                    </a:p>
-                  </a:txBody>
-                  <a:tcPr>
-                    <a:solidFill>
-                      <a:srgbClr val="0E7490"/>
-                    </a:solidFill>
-                  </a:tcPr>
-                </a:tc>
-                <a:tc>
-                  <a:txBody>
-                    <a:bodyPr/>
-                    <a:lstStyle/>
-                    <a:p>
-                      <a:pPr>
-                        <a:defRPr sz="1200" b="1">
-                          <a:solidFill>
-                            <a:srgbClr val="F1F5F9"/>
-                          </a:solidFill>
-                        </a:defRPr>
-                      </a:pPr>
-                      <a:r>
-                        <a:t>Endpoint (vía Gateway :18080)</a:t>
-                      </a:r>
-                    </a:p>
-                  </a:txBody>
-                  <a:tcPr>
-                    <a:solidFill>
-                      <a:srgbClr val="0E7490"/>
-                    </a:solidFill>
-                  </a:tcPr>
-                </a:tc>
-                <a:tc>
-                  <a:txBody>
-                    <a:bodyPr/>
-                    <a:lstStyle/>
-                    <a:p>
-                      <a:pPr>
-                        <a:defRPr sz="1200" b="1">
-                          <a:solidFill>
-                            <a:srgbClr val="F1F5F9"/>
-                          </a:solidFill>
-                        </a:defRPr>
-                      </a:pPr>
-                      <a:r>
-                        <a:t>Códigos HTTP</a:t>
-                      </a:r>
-                    </a:p>
-                  </a:txBody>
-                  <a:tcPr>
-                    <a:solidFill>
-                      <a:srgbClr val="0E7490"/>
-                    </a:solidFill>
-                  </a:tcPr>
-                </a:tc>
-                <a:tc>
-                  <a:txBody>
-                    <a:bodyPr/>
-                    <a:lstStyle/>
-                    <a:p>
-                      <a:pPr>
-                        <a:defRPr sz="1200" b="1">
-                          <a:solidFill>
-                            <a:srgbClr val="F1F5F9"/>
-                          </a:solidFill>
-                        </a:defRPr>
-                      </a:pPr>
-                      <a:r>
-                        <a:t>Descripción de Negocio</a:t>
-                      </a:r>
-                    </a:p>
-                  </a:txBody>
-                  <a:tcPr>
-                    <a:solidFill>
-                      <a:srgbClr val="0E7490"/>
-                    </a:solidFill>
-                  </a:tcPr>
-                </a:tc>
-              </a:tr>
-              <a:tr h="731520">
-                <a:tc>
-                  <a:txBody>
-                    <a:bodyPr/>
-                    <a:lstStyle/>
-                    <a:p>
-                      <a:pPr>
-                        <a:defRPr sz="1100">
-                          <a:solidFill>
-                            <a:srgbClr val="F1F5F9"/>
-                          </a:solidFill>
-                        </a:defRPr>
-                      </a:pPr>
-                      <a:r>
-                        <a:t>Catálogo Hardware (No transaccional)</a:t>
-                      </a:r>
-                    </a:p>
-                  </a:txBody>
-                  <a:tcPr>
-                    <a:solidFill>
-                      <a:srgbClr val="1E293B"/>
-                    </a:solidFill>
-                  </a:tcPr>
-                </a:tc>
-                <a:tc>
-                  <a:txBody>
-                    <a:bodyPr/>
-                    <a:lstStyle/>
-                    <a:p>
-                      <a:pPr>
-                        <a:defRPr sz="1100">
-                          <a:solidFill>
-                            <a:srgbClr val="F1F5F9"/>
-                          </a:solidFill>
-                        </a:defRPr>
-                      </a:pPr>
-                      <a:r>
-                        <a:t>GET</a:t>
-                      </a:r>
-                    </a:p>
-                  </a:txBody>
-                  <a:tcPr>
-                    <a:solidFill>
-                      <a:srgbClr val="1E293B"/>
-                    </a:solidFill>
-                  </a:tcPr>
-                </a:tc>
-                <a:tc>
-                  <a:txBody>
-                    <a:bodyPr/>
-                    <a:lstStyle/>
-                    <a:p>
-                      <a:pPr>
-                        <a:defRPr sz="1100">
-                          <a:solidFill>
-                            <a:srgbClr val="F1F5F9"/>
-                          </a:solidFill>
-                        </a:defRPr>
-                      </a:pPr>
-                      <a:r>
-                        <a:t>/api/v1/categorias</a:t>
-                      </a:r>
-                    </a:p>
-                  </a:txBody>
-                  <a:tcPr>
-                    <a:solidFill>
-                      <a:srgbClr val="1E293B"/>
-                    </a:solidFill>
-                  </a:tcPr>
-                </a:tc>
-                <a:tc>
-                  <a:txBody>
-                    <a:bodyPr/>
-                    <a:lstStyle/>
-                    <a:p>
-                      <a:pPr>
-                        <a:defRPr sz="1100">
-                          <a:solidFill>
-                            <a:srgbClr val="F1F5F9"/>
-                          </a:solidFill>
-                        </a:defRPr>
-                      </a:pPr>
-                      <a:r>
-                        <a:t>200 OK</a:t>
-                      </a:r>
-                    </a:p>
-                  </a:txBody>
-                  <a:tcPr>
-                    <a:solidFill>
-                      <a:srgbClr val="1E293B"/>
-                    </a:solidFill>
-                  </a:tcPr>
-                </a:tc>
-                <a:tc>
-                  <a:txBody>
-                    <a:bodyPr/>
-                    <a:lstStyle/>
-                    <a:p>
-                      <a:pPr>
-                        <a:defRPr sz="1100">
-                          <a:solidFill>
-                            <a:srgbClr val="F1F5F9"/>
-                          </a:solidFill>
-                        </a:defRPr>
-                      </a:pPr>
-                      <a:r>
-                        <a:t>Lista categorías: Procesadores, GPUs, RAM, etc.</a:t>
-                      </a:r>
-                    </a:p>
-                  </a:txBody>
-                  <a:tcPr>
-                    <a:solidFill>
-                      <a:srgbClr val="1E293B"/>
-                    </a:solidFill>
-                  </a:tcPr>
-                </a:tc>
-              </a:tr>
-              <a:tr h="731520">
-                <a:tc>
-                  <a:txBody>
-                    <a:bodyPr/>
-                    <a:lstStyle/>
-                    <a:p>
-                      <a:pPr>
-                        <a:defRPr sz="1100">
-                          <a:solidFill>
-                            <a:srgbClr val="F1F5F9"/>
-                          </a:solidFill>
-                        </a:defRPr>
-                      </a:pPr>
-                      <a:r>
-                        <a:t>Catálogo Hardware (No transaccional)</a:t>
-                      </a:r>
-                    </a:p>
-                  </a:txBody>
-                  <a:tcPr>
-                    <a:solidFill>
-                      <a:srgbClr val="1E293B"/>
-                    </a:solidFill>
-                  </a:tcPr>
-                </a:tc>
-                <a:tc>
-                  <a:txBody>
-                    <a:bodyPr/>
-                    <a:lstStyle/>
-                    <a:p>
-                      <a:pPr>
-                        <a:defRPr sz="1100">
-                          <a:solidFill>
-                            <a:srgbClr val="F1F5F9"/>
-                          </a:solidFill>
-                        </a:defRPr>
-                      </a:pPr>
-                      <a:r>
-                        <a:t>GET, POST</a:t>
-                      </a:r>
-                    </a:p>
-                  </a:txBody>
-                  <a:tcPr>
-                    <a:solidFill>
-                      <a:srgbClr val="1E293B"/>
-                    </a:solidFill>
-                  </a:tcPr>
-                </a:tc>
-                <a:tc>
-                  <a:txBody>
-                    <a:bodyPr/>
-                    <a:lstStyle/>
-                    <a:p>
-                      <a:pPr>
-                        <a:defRPr sz="1100">
-                          <a:solidFill>
-                            <a:srgbClr val="F1F5F9"/>
-                          </a:solidFill>
-                        </a:defRPr>
-                      </a:pPr>
-                      <a:r>
-                        <a:t>/api/v1/productos</a:t>
-                      </a:r>
-                    </a:p>
-                  </a:txBody>
-                  <a:tcPr>
-                    <a:solidFill>
-                      <a:srgbClr val="1E293B"/>
-                    </a:solidFill>
-                  </a:tcPr>
-                </a:tc>
-                <a:tc>
-                  <a:txBody>
-                    <a:bodyPr/>
-                    <a:lstStyle/>
-                    <a:p>
-                      <a:pPr>
-                        <a:defRPr sz="1100">
-                          <a:solidFill>
-                            <a:srgbClr val="F1F5F9"/>
-                          </a:solidFill>
-                        </a:defRPr>
-                      </a:pPr>
-                      <a:r>
-                        <a:t>200 OK, 201 Created</a:t>
-                      </a:r>
-                    </a:p>
-                  </a:txBody>
-                  <a:tcPr>
-                    <a:solidFill>
-                      <a:srgbClr val="1E293B"/>
-                    </a:solidFill>
-                  </a:tcPr>
-                </a:tc>
-                <a:tc>
-                  <a:txBody>
-                    <a:bodyPr/>
-                    <a:lstStyle/>
-                    <a:p>
-                      <a:pPr>
-                        <a:defRPr sz="1100">
-                          <a:solidFill>
-                            <a:srgbClr val="F1F5F9"/>
-                          </a:solidFill>
-                        </a:defRPr>
-                      </a:pPr>
-                      <a:r>
-                        <a:t>Consulta catálogo con stock y ficha técnica.</a:t>
-                      </a:r>
-                    </a:p>
-                  </a:txBody>
-                  <a:tcPr>
-                    <a:solidFill>
-                      <a:srgbClr val="1E293B"/>
-                    </a:solidFill>
-                  </a:tcPr>
-                </a:tc>
-              </a:tr>
-              <a:tr h="731520">
-                <a:tc>
-                  <a:txBody>
-                    <a:bodyPr/>
-                    <a:lstStyle/>
-                    <a:p>
-                      <a:pPr>
-                        <a:defRPr sz="1100">
-                          <a:solidFill>
-                            <a:srgbClr val="F1F5F9"/>
-                          </a:solidFill>
-                        </a:defRPr>
-                      </a:pPr>
-                      <a:r>
-                        <a:t>Órdenes ChaskiPC (Transaccional)</a:t>
-                      </a:r>
-                    </a:p>
-                  </a:txBody>
-                  <a:tcPr>
-                    <a:solidFill>
-                      <a:srgbClr val="1E293B"/>
-                    </a:solidFill>
-                  </a:tcPr>
-                </a:tc>
-                <a:tc>
-                  <a:txBody>
-                    <a:bodyPr/>
-                    <a:lstStyle/>
-                    <a:p>
-                      <a:pPr>
-                        <a:defRPr sz="1100">
-                          <a:solidFill>
-                            <a:srgbClr val="F1F5F9"/>
-                          </a:solidFill>
-                        </a:defRPr>
-                      </a:pPr>
-                      <a:r>
-                        <a:t>GET</a:t>
-                      </a:r>
-                    </a:p>
-                  </a:txBody>
-                  <a:tcPr>
-                    <a:solidFill>
-                      <a:srgbClr val="1E293B"/>
-                    </a:solidFill>
-                  </a:tcPr>
-                </a:tc>
-                <a:tc>
-                  <a:txBody>
-                    <a:bodyPr/>
-                    <a:lstStyle/>
-                    <a:p>
-                      <a:pPr>
-                        <a:defRPr sz="1100">
-                          <a:solidFill>
-                            <a:srgbClr val="F1F5F9"/>
-                          </a:solidFill>
-                        </a:defRPr>
-                      </a:pPr>
-                      <a:r>
-                        <a:t>/api/v1/ordenes</a:t>
-                      </a:r>
-                    </a:p>
-                  </a:txBody>
-                  <a:tcPr>
-                    <a:solidFill>
-                      <a:srgbClr val="1E293B"/>
-                    </a:solidFill>
-                  </a:tcPr>
-                </a:tc>
-                <a:tc>
-                  <a:txBody>
-                    <a:bodyPr/>
-                    <a:lstStyle/>
-                    <a:p>
-                      <a:pPr>
-                        <a:defRPr sz="1100">
-                          <a:solidFill>
-                            <a:srgbClr val="F1F5F9"/>
-                          </a:solidFill>
-                        </a:defRPr>
-                      </a:pPr>
-                      <a:r>
-                        <a:t>200 OK</a:t>
-                      </a:r>
-                    </a:p>
-                  </a:txBody>
-                  <a:tcPr>
-                    <a:solidFill>
-                      <a:srgbClr val="1E293B"/>
-                    </a:solidFill>
-                  </a:tcPr>
-                </a:tc>
-                <a:tc>
-                  <a:txBody>
-                    <a:bodyPr/>
-                    <a:lstStyle/>
-                    <a:p>
-                      <a:pPr>
-                        <a:defRPr sz="1100">
-                          <a:solidFill>
-                            <a:srgbClr val="F1F5F9"/>
-                          </a:solidFill>
-                        </a:defRPr>
-                      </a:pPr>
-                      <a:r>
-                        <a:t>Lista general de órdenes balanceadas con Round Robin.</a:t>
-                      </a:r>
-                    </a:p>
-                  </a:txBody>
-                  <a:tcPr>
-                    <a:solidFill>
-                      <a:srgbClr val="1E293B"/>
-                    </a:solidFill>
-                  </a:tcPr>
-                </a:tc>
-              </a:tr>
-              <a:tr h="731520">
-                <a:tc>
-                  <a:txBody>
-                    <a:bodyPr/>
-                    <a:lstStyle/>
-                    <a:p>
-                      <a:pPr>
-                        <a:defRPr sz="1100">
-                          <a:solidFill>
-                            <a:srgbClr val="F1F5F9"/>
-                          </a:solidFill>
-                        </a:defRPr>
-                      </a:pPr>
-                      <a:r>
-                        <a:t>Órdenes ChaskiPC (Transaccional)</a:t>
-                      </a:r>
-                    </a:p>
-                  </a:txBody>
-                  <a:tcPr>
-                    <a:solidFill>
-                      <a:srgbClr val="1E293B"/>
-                    </a:solidFill>
-                  </a:tcPr>
-                </a:tc>
-                <a:tc>
-                  <a:txBody>
-                    <a:bodyPr/>
-                    <a:lstStyle/>
-                    <a:p>
-                      <a:pPr>
-                        <a:defRPr sz="1100">
-                          <a:solidFill>
-                            <a:srgbClr val="F1F5F9"/>
-                          </a:solidFill>
-                        </a:defRPr>
-                      </a:pPr>
-                      <a:r>
-                        <a:t>POST</a:t>
-                      </a:r>
-                    </a:p>
-                  </a:txBody>
-                  <a:tcPr>
-                    <a:solidFill>
-                      <a:srgbClr val="1E293B"/>
-                    </a:solidFill>
-                  </a:tcPr>
-                </a:tc>
-                <a:tc>
-                  <a:txBody>
-                    <a:bodyPr/>
-                    <a:lstStyle/>
-                    <a:p>
-                      <a:pPr>
-                        <a:defRPr sz="1100">
-                          <a:solidFill>
-                            <a:srgbClr val="F1F5F9"/>
-                          </a:solidFill>
-                        </a:defRPr>
-                      </a:pPr>
-                      <a:r>
-                        <a:t>/api/v1/ordenes</a:t>
-                      </a:r>
-                    </a:p>
-                  </a:txBody>
-                  <a:tcPr>
-                    <a:solidFill>
-                      <a:srgbClr val="1E293B"/>
-                    </a:solidFill>
-                  </a:tcPr>
-                </a:tc>
-                <a:tc>
-                  <a:txBody>
-                    <a:bodyPr/>
-                    <a:lstStyle/>
-                    <a:p>
-                      <a:pPr>
-                        <a:defRPr sz="1100">
-                          <a:solidFill>
-                            <a:srgbClr val="F1F5F9"/>
-                          </a:solidFill>
-                        </a:defRPr>
-                      </a:pPr>
-                      <a:r>
-                        <a:t>201 Created, 400 Bad Request</a:t>
-                      </a:r>
-                    </a:p>
-                  </a:txBody>
-                  <a:tcPr>
-                    <a:solidFill>
-                      <a:srgbClr val="1E293B"/>
-                    </a:solidFill>
-                  </a:tcPr>
-                </a:tc>
-                <a:tc>
-                  <a:txBody>
-                    <a:bodyPr/>
-                    <a:lstStyle/>
-                    <a:p>
-                      <a:pPr>
-                        <a:defRPr sz="1100">
-                          <a:solidFill>
-                            <a:srgbClr val="F1F5F9"/>
-                          </a:solidFill>
-                        </a:defRPr>
-                      </a:pPr>
-                      <a:r>
-                        <a:t>Crea orden con ítems, comprobante y 18% IGV.</a:t>
-                      </a:r>
-                    </a:p>
-                  </a:txBody>
-                  <a:tcPr>
-                    <a:solidFill>
-                      <a:srgbClr val="1E293B"/>
-                    </a:solidFill>
-                  </a:tcPr>
-                </a:tc>
-              </a:tr>
-              <a:tr h="731520">
-                <a:tc>
-                  <a:txBody>
-                    <a:bodyPr/>
-                    <a:lstStyle/>
-                    <a:p>
-                      <a:pPr>
-                        <a:defRPr sz="1100">
-                          <a:solidFill>
-                            <a:srgbClr val="F1F5F9"/>
-                          </a:solidFill>
-                        </a:defRPr>
-                      </a:pPr>
-                      <a:r>
-                        <a:t>Órdenes ChaskiPC (Transaccional)</a:t>
-                      </a:r>
-                    </a:p>
-                  </a:txBody>
-                  <a:tcPr>
-                    <a:solidFill>
-                      <a:srgbClr val="1E293B"/>
-                    </a:solidFill>
-                  </a:tcPr>
-                </a:tc>
-                <a:tc>
-                  <a:txBody>
-                    <a:bodyPr/>
-                    <a:lstStyle/>
-                    <a:p>
-                      <a:pPr>
-                        <a:defRPr sz="1100">
-                          <a:solidFill>
-                            <a:srgbClr val="F1F5F9"/>
-                          </a:solidFill>
-                        </a:defRPr>
-                      </a:pPr>
-                      <a:r>
-                        <a:t>GET</a:t>
-                      </a:r>
-                    </a:p>
-                  </a:txBody>
-                  <a:tcPr>
-                    <a:solidFill>
-                      <a:srgbClr val="1E293B"/>
-                    </a:solidFill>
-                  </a:tcPr>
-                </a:tc>
-                <a:tc>
-                  <a:txBody>
-                    <a:bodyPr/>
-                    <a:lstStyle/>
-                    <a:p>
-                      <a:pPr>
-                        <a:defRPr sz="1100">
-                          <a:solidFill>
-                            <a:srgbClr val="F1F5F9"/>
-                          </a:solidFill>
-                        </a:defRPr>
-                      </a:pPr>
-                      <a:r>
-                        <a:t>/api/v1/ordenes/{id}</a:t>
-                      </a:r>
-                    </a:p>
-                  </a:txBody>
-                  <a:tcPr>
-                    <a:solidFill>
-                      <a:srgbClr val="1E293B"/>
-                    </a:solidFill>
-                  </a:tcPr>
-                </a:tc>
-                <a:tc>
-                  <a:txBody>
-                    <a:bodyPr/>
-                    <a:lstStyle/>
-                    <a:p>
-                      <a:pPr>
-                        <a:defRPr sz="1100">
-                          <a:solidFill>
-                            <a:srgbClr val="F1F5F9"/>
-                          </a:solidFill>
-                        </a:defRPr>
-                      </a:pPr>
-                      <a:r>
-                        <a:t>200 OK, 404 Not Found</a:t>
-                      </a:r>
-                    </a:p>
-                  </a:txBody>
-                  <a:tcPr>
-                    <a:solidFill>
-                      <a:srgbClr val="1E293B"/>
-                    </a:solidFill>
-                  </a:tcPr>
-                </a:tc>
-                <a:tc>
-                  <a:txBody>
-                    <a:bodyPr/>
-                    <a:lstStyle/>
-                    <a:p>
-                      <a:pPr>
-                        <a:defRPr sz="1100">
-                          <a:solidFill>
-                            <a:srgbClr val="F1F5F9"/>
-                          </a:solidFill>
-                        </a:defRPr>
-                      </a:pPr>
-                      <a:r>
-                        <a:t>Consulta detalle de compra por ID con validación.</a:t>
-                      </a:r>
-                    </a:p>
-                  </a:txBody>
-                  <a:tcPr>
-                    <a:solidFill>
-                      <a:srgbClr val="1E293B"/>
-                    </a:solidFill>
-                  </a:tcPr>
-                </a:tc>
-              </a:tr>
-            </a:tbl>
-          </a:graphicData>
-        </a:graphic>
-      </p:graphicFrame>
-    </p:spTree>
-  </p:cSld>
-  <p:clrMapOvr>
-    <a:masterClrMapping/>
-  </p:clrMapOvr>
-</p:sld>
-</file>
-
-<file path=ppt/slides/slide4.xml><?xml version="1.0" encoding="utf-8"?>
-<p:sld xmlns:a="http://schemas.openxmlformats.org/drawingml/2006/main" xmlns:p="http://schemas.openxmlformats.org/presentationml/2006/main" xmlns:r="http://schemas.openxmlformats.org/officeDocument/2006/relationships">
-  <p:cSld>
-    <p:spTree>
-      <p:nvGrpSpPr>
-        <p:cNvPr id="1" name=""/>
-        <p:cNvGrpSpPr/>
-        <p:nvPr/>
-      </p:nvGrpSpPr>
-      <p:grpSpPr/>
-      <p:sp>
-        <p:nvSpPr>
-          <p:cNvPr id="2" name="Rectangle 1"/>
-          <p:cNvSpPr/>
+              <a:t>5. Rúbrica Oficial de Evaluación de la Unidad I (Nota de Equipo)</a:t>
+            </a:r>
+          </a:p>
+        </p:txBody>
+      </p:sp>
+      <p:sp>
+        <p:nvSpPr>
+          <p:cNvPr id="5" name="TextBox 4"/>
+          <p:cNvSpPr txBox="1"/>
           <p:nvPr/>
         </p:nvSpPr>
         <p:spPr>
           <a:xfrm>
-            <a:off x="0" y="0"/>
-            <a:ext cx="12191695" cy="6858000"/>
-          </a:xfrm>
-          <a:prstGeom prst="rect">
-            <a:avLst/>
-          </a:prstGeom>
-          <a:solidFill>
-            <a:srgbClr val="0F172A"/>
-          </a:solidFill>
-          <a:ln>
-            <a:solidFill>
-              <a:srgbClr val="0F172A"/>
-            </a:solidFill>
-          </a:ln>
-        </p:spPr>
-        <p:style>
-          <a:lnRef idx="1">
-            <a:schemeClr val="accent1"/>
-          </a:lnRef>
-          <a:fillRef idx="3">
-            <a:schemeClr val="accent1"/>
-          </a:fillRef>
-          <a:effectRef idx="2">
-            <a:schemeClr val="accent1"/>
-          </a:effectRef>
-          <a:fontRef idx="minor">
-            <a:schemeClr val="lt1"/>
-          </a:fontRef>
-        </p:style>
-        <p:txBody>
-          <a:bodyPr rtlCol="0" anchor="ctr"/>
-          <a:lstStyle/>
-          <a:p>
-            <a:pPr algn="ctr"/>
-          </a:p>
-        </p:txBody>
-      </p:sp>
-      <p:sp>
-        <p:nvSpPr>
-          <p:cNvPr id="3" name="TextBox 2"/>
-          <p:cNvSpPr txBox="1"/>
-          <p:nvPr/>
-        </p:nvSpPr>
-        <p:spPr>
-          <a:xfrm>
-            <a:off x="731520" y="365760"/>
-            <a:ext cx="10698480" cy="320040"/>
+            <a:off x="7772400" y="365760"/>
+            <a:ext cx="3657600" cy="365760"/>
           </a:xfrm>
           <a:prstGeom prst="rect">
             <a:avLst/>
@@ -4717,2078 +4030,27 @@
           <a:noFill/>
         </p:spPr>
         <p:txBody>
-          <a:bodyPr wrap="square">
+          <a:bodyPr wrap="none">
             <a:spAutoFit/>
           </a:bodyPr>
           <a:lstStyle/>
           <a:p>
-            <a:pPr>
+            <a:pPr algn="r">
               <a:defRPr sz="1100" b="1">
                 <a:solidFill>
-                  <a:srgbClr val="818CF8"/>
-                </a:solidFill>
-              </a:defRPr>
-            </a:pPr>
-            <a:r>
-              <a:t>CHASKIPC • EVALUACIÓN UNIDAD I</a:t>
-            </a:r>
-          </a:p>
-        </p:txBody>
-      </p:sp>
-      <p:sp>
-        <p:nvSpPr>
-          <p:cNvPr id="4" name="TextBox 3"/>
-          <p:cNvSpPr txBox="1"/>
-          <p:nvPr/>
-        </p:nvSpPr>
-        <p:spPr>
-          <a:xfrm>
-            <a:off x="731520" y="640080"/>
-            <a:ext cx="10698480" cy="731520"/>
-          </a:xfrm>
-          <a:prstGeom prst="rect">
-            <a:avLst/>
-          </a:prstGeom>
-          <a:noFill/>
-        </p:spPr>
-        <p:txBody>
-          <a:bodyPr wrap="square">
-            <a:spAutoFit/>
-          </a:bodyPr>
-          <a:lstStyle/>
-          <a:p>
-            <a:pPr>
-              <a:defRPr sz="2400" b="1">
-                <a:solidFill>
-                  <a:srgbClr val="38BDF8"/>
-                </a:solidFill>
-              </a:defRPr>
-            </a:pPr>
-            <a:r>
-              <a:t>2.3 Configuración Externalizada por Ambiente (DEV vs PROD)</a:t>
-            </a:r>
-          </a:p>
-        </p:txBody>
-      </p:sp>
-      <p:sp>
-        <p:nvSpPr>
-          <p:cNvPr id="5" name="Rounded Rectangle 4"/>
-          <p:cNvSpPr/>
-          <p:nvPr/>
-        </p:nvSpPr>
-        <p:spPr>
-          <a:xfrm>
-            <a:off x="731520" y="1463040"/>
-            <a:ext cx="5120640" cy="4389120"/>
-          </a:xfrm>
-          <a:prstGeom prst="roundRect">
-            <a:avLst/>
-          </a:prstGeom>
-          <a:solidFill>
-            <a:srgbClr val="1E293B"/>
-          </a:solidFill>
-          <a:ln>
-            <a:solidFill>
-              <a:srgbClr val="0284C7"/>
-            </a:solidFill>
-          </a:ln>
-        </p:spPr>
-        <p:style>
-          <a:lnRef idx="1">
-            <a:schemeClr val="accent1"/>
-          </a:lnRef>
-          <a:fillRef idx="3">
-            <a:schemeClr val="accent1"/>
-          </a:fillRef>
-          <a:effectRef idx="2">
-            <a:schemeClr val="accent1"/>
-          </a:effectRef>
-          <a:fontRef idx="minor">
-            <a:schemeClr val="lt1"/>
-          </a:fontRef>
-        </p:style>
-        <p:txBody>
-          <a:bodyPr rtlCol="0" anchor="ctr" wrap="square"/>
-          <a:lstStyle/>
-          <a:p>
-            <a:pPr algn="ctr">
-              <a:defRPr sz="1400" b="1">
-                <a:solidFill>
-                  <a:srgbClr val="38BDF8"/>
-                </a:solidFill>
-              </a:defRPr>
-            </a:pPr>
-            <a:r>
-              <a:t>AMBIENTE DESARROLLO (DEV) - config-repo/*-dev.yml</a:t>
-            </a:r>
-          </a:p>
-          <a:p>
-            <a:br/>
-            <a:pPr>
-              <a:defRPr sz="1200">
-                <a:solidFill>
-                  <a:srgbClr val="F1F5F9"/>
-                </a:solidFill>
-              </a:defRPr>
-            </a:pPr>
-            <a:r>
-              <a:t>• Puerto Local: Servicios corriendo en host local (8081, 8082, 8083, 18080).</a:t>
-            </a:r>
-          </a:p>
-          <a:p>
-            <a:pPr>
-              <a:defRPr sz="1200">
-                <a:solidFill>
-                  <a:srgbClr val="F1F5F9"/>
-                </a:solidFill>
-              </a:defRPr>
-            </a:pPr>
-            <a:r>
-              <a:t>• Base de Datos: PostgreSQL expuesto en localhost:5433 (orden_db).</a:t>
-            </a:r>
-          </a:p>
-          <a:p>
-            <a:pPr>
-              <a:defRPr sz="1200">
-                <a:solidFill>
-                  <a:srgbClr val="F1F5F9"/>
-                </a:solidFill>
-              </a:defRPr>
-            </a:pPr>
-            <a:r>
-              <a:t>• Hibernate DDL: ddl-auto: update (permite desarrollo ágil y creación automática).</a:t>
-            </a:r>
-          </a:p>
-          <a:p>
-            <a:pPr>
-              <a:defRPr sz="1200">
-                <a:solidFill>
-                  <a:srgbClr val="F1F5F9"/>
-                </a:solidFill>
-              </a:defRPr>
-            </a:pPr>
-            <a:r>
-              <a:t>• Logging: Nivel detallado y escritura directa en logs/*.log para Promtail.</a:t>
-            </a:r>
-          </a:p>
-          <a:p>
-            <a:pPr>
-              <a:defRPr sz="1200">
-                <a:solidFill>
-                  <a:srgbClr val="F1F5F9"/>
-                </a:solidFill>
-              </a:defRPr>
-            </a:pPr>
-            <a:r>
-              <a:t>• Actuator: Endpoints abiertos (health, info, metrics, prometheus) sin restricción.</a:t>
-            </a:r>
-          </a:p>
-        </p:txBody>
-      </p:sp>
-      <p:sp>
-        <p:nvSpPr>
-          <p:cNvPr id="6" name="Rounded Rectangle 5"/>
-          <p:cNvSpPr/>
-          <p:nvPr/>
-        </p:nvSpPr>
-        <p:spPr>
-          <a:xfrm>
-            <a:off x="6309360" y="1463040"/>
-            <a:ext cx="5120640" cy="4389120"/>
-          </a:xfrm>
-          <a:prstGeom prst="roundRect">
-            <a:avLst/>
-          </a:prstGeom>
-          <a:solidFill>
-            <a:srgbClr val="1E293B"/>
-          </a:solidFill>
-          <a:ln>
-            <a:solidFill>
-              <a:srgbClr val="10B981"/>
-            </a:solidFill>
-          </a:ln>
-        </p:spPr>
-        <p:style>
-          <a:lnRef idx="1">
-            <a:schemeClr val="accent1"/>
-          </a:lnRef>
-          <a:fillRef idx="3">
-            <a:schemeClr val="accent1"/>
-          </a:fillRef>
-          <a:effectRef idx="2">
-            <a:schemeClr val="accent1"/>
-          </a:effectRef>
-          <a:fontRef idx="minor">
-            <a:schemeClr val="lt1"/>
-          </a:fontRef>
-        </p:style>
-        <p:txBody>
-          <a:bodyPr rtlCol="0" anchor="ctr" wrap="square"/>
-          <a:lstStyle/>
-          <a:p>
-            <a:pPr algn="ctr">
-              <a:defRPr sz="1400" b="1">
-                <a:solidFill>
-                  <a:srgbClr val="34D399"/>
-                </a:solidFill>
-              </a:defRPr>
-            </a:pPr>
-            <a:r>
-              <a:t>AMBIENTE PRODUCCIÓN (PROD) - infra/compose.yml</a:t>
-            </a:r>
-          </a:p>
-          <a:p>
-            <a:br/>
-            <a:pPr>
-              <a:defRPr sz="1200">
-                <a:solidFill>
-                  <a:srgbClr val="F1F5F9"/>
-                </a:solidFill>
-              </a:defRPr>
-            </a:pPr>
-            <a:r>
-              <a:t>• Único Puerto Público: Solo el Gateway expuesto al host en puerto 28080.</a:t>
-            </a:r>
-          </a:p>
-          <a:p>
-            <a:pPr>
-              <a:defRPr sz="1200">
-                <a:solidFill>
-                  <a:srgbClr val="F1F5F9"/>
-                </a:solidFill>
-              </a:defRPr>
-            </a:pPr>
-            <a:r>
-              <a:t>• Red Aislada: Todos los microservicios viven dentro de la red pagatu-prod-net.</a:t>
-            </a:r>
-          </a:p>
-          <a:p>
-            <a:pPr>
-              <a:defRPr sz="1200">
-                <a:solidFill>
-                  <a:srgbClr val="F1F5F9"/>
-                </a:solidFill>
-              </a:defRPr>
-            </a:pPr>
-            <a:r>
-              <a:t>• Hibernate DDL: ddl-auto: validate (prohibición estricta de alterar tablas en caliente).</a:t>
-            </a:r>
-          </a:p>
-          <a:p>
-            <a:pPr>
-              <a:defRPr sz="1200">
-                <a:solidFill>
-                  <a:srgbClr val="F1F5F9"/>
-                </a:solidFill>
-              </a:defRPr>
-            </a:pPr>
-            <a:r>
-              <a:t>• Seguridad: Credenciales inyectadas exclusivamente mediante variables de entorno.</a:t>
-            </a:r>
-          </a:p>
-          <a:p>
-            <a:pPr>
-              <a:defRPr sz="1200">
-                <a:solidFill>
-                  <a:srgbClr val="F1F5F9"/>
-                </a:solidFill>
-              </a:defRPr>
-            </a:pPr>
-            <a:r>
-              <a:t>• Cero Hardcoding: Factor III de Twelve-Factor App garantizado al 100%.</a:t>
-            </a:r>
-          </a:p>
-        </p:txBody>
-      </p:sp>
-    </p:spTree>
-  </p:cSld>
-  <p:clrMapOvr>
-    <a:masterClrMapping/>
-  </p:clrMapOvr>
-</p:sld>
-</file>
-
-<file path=ppt/slides/slide5.xml><?xml version="1.0" encoding="utf-8"?>
-<p:sld xmlns:a="http://schemas.openxmlformats.org/drawingml/2006/main" xmlns:p="http://schemas.openxmlformats.org/presentationml/2006/main" xmlns:r="http://schemas.openxmlformats.org/officeDocument/2006/relationships">
-  <p:cSld>
-    <p:spTree>
-      <p:nvGrpSpPr>
-        <p:cNvPr id="1" name=""/>
-        <p:cNvGrpSpPr/>
-        <p:nvPr/>
-      </p:nvGrpSpPr>
-      <p:grpSpPr/>
-      <p:sp>
-        <p:nvSpPr>
-          <p:cNvPr id="2" name="Rectangle 1"/>
-          <p:cNvSpPr/>
-          <p:nvPr/>
-        </p:nvSpPr>
-        <p:spPr>
-          <a:xfrm>
-            <a:off x="0" y="0"/>
-            <a:ext cx="12191695" cy="6858000"/>
-          </a:xfrm>
-          <a:prstGeom prst="rect">
-            <a:avLst/>
-          </a:prstGeom>
-          <a:solidFill>
-            <a:srgbClr val="0F172A"/>
-          </a:solidFill>
-          <a:ln>
-            <a:solidFill>
-              <a:srgbClr val="0F172A"/>
-            </a:solidFill>
-          </a:ln>
-        </p:spPr>
-        <p:style>
-          <a:lnRef idx="1">
-            <a:schemeClr val="accent1"/>
-          </a:lnRef>
-          <a:fillRef idx="3">
-            <a:schemeClr val="accent1"/>
-          </a:fillRef>
-          <a:effectRef idx="2">
-            <a:schemeClr val="accent1"/>
-          </a:effectRef>
-          <a:fontRef idx="minor">
-            <a:schemeClr val="lt1"/>
-          </a:fontRef>
-        </p:style>
-        <p:txBody>
-          <a:bodyPr rtlCol="0" anchor="ctr"/>
-          <a:lstStyle/>
-          <a:p>
-            <a:pPr algn="ctr"/>
-          </a:p>
-        </p:txBody>
-      </p:sp>
-      <p:sp>
-        <p:nvSpPr>
-          <p:cNvPr id="3" name="TextBox 2"/>
-          <p:cNvSpPr txBox="1"/>
-          <p:nvPr/>
-        </p:nvSpPr>
-        <p:spPr>
-          <a:xfrm>
-            <a:off x="731520" y="365760"/>
-            <a:ext cx="10698480" cy="320040"/>
-          </a:xfrm>
-          <a:prstGeom prst="rect">
-            <a:avLst/>
-          </a:prstGeom>
-          <a:noFill/>
-        </p:spPr>
-        <p:txBody>
-          <a:bodyPr wrap="square">
-            <a:spAutoFit/>
-          </a:bodyPr>
-          <a:lstStyle/>
-          <a:p>
-            <a:pPr>
-              <a:defRPr sz="1100" b="1">
-                <a:solidFill>
-                  <a:srgbClr val="818CF8"/>
-                </a:solidFill>
-              </a:defRPr>
-            </a:pPr>
-            <a:r>
-              <a:t>CHASKIPC • EVALUACIÓN UNIDAD I</a:t>
-            </a:r>
-          </a:p>
-        </p:txBody>
-      </p:sp>
-      <p:sp>
-        <p:nvSpPr>
-          <p:cNvPr id="4" name="TextBox 3"/>
-          <p:cNvSpPr txBox="1"/>
-          <p:nvPr/>
-        </p:nvSpPr>
-        <p:spPr>
-          <a:xfrm>
-            <a:off x="731520" y="640080"/>
-            <a:ext cx="10698480" cy="731520"/>
-          </a:xfrm>
-          <a:prstGeom prst="rect">
-            <a:avLst/>
-          </a:prstGeom>
-          <a:noFill/>
-        </p:spPr>
-        <p:txBody>
-          <a:bodyPr wrap="square">
-            <a:spAutoFit/>
-          </a:bodyPr>
-          <a:lstStyle/>
-          <a:p>
-            <a:pPr>
-              <a:defRPr sz="2400" b="1">
-                <a:solidFill>
-                  <a:srgbClr val="38BDF8"/>
-                </a:solidFill>
-              </a:defRPr>
-            </a:pPr>
-            <a:r>
-              <a:t>4. Sustentación del Sistema en Vivo (Demo Técnica de 5 min)</a:t>
-            </a:r>
-          </a:p>
-        </p:txBody>
-      </p:sp>
-      <p:sp>
-        <p:nvSpPr>
-          <p:cNvPr id="5" name="Rounded Rectangle 4"/>
-          <p:cNvSpPr/>
-          <p:nvPr/>
-        </p:nvSpPr>
-        <p:spPr>
-          <a:xfrm>
-            <a:off x="731520" y="1371600"/>
-            <a:ext cx="5120640" cy="1097280"/>
-          </a:xfrm>
-          <a:prstGeom prst="roundRect">
-            <a:avLst/>
-          </a:prstGeom>
-          <a:solidFill>
-            <a:srgbClr val="1E293B"/>
-          </a:solidFill>
-          <a:ln>
-            <a:solidFill>
-              <a:srgbClr val="818CF8"/>
-            </a:solidFill>
-          </a:ln>
-        </p:spPr>
-        <p:style>
-          <a:lnRef idx="1">
-            <a:schemeClr val="accent1"/>
-          </a:lnRef>
-          <a:fillRef idx="3">
-            <a:schemeClr val="accent1"/>
-          </a:fillRef>
-          <a:effectRef idx="2">
-            <a:schemeClr val="accent1"/>
-          </a:effectRef>
-          <a:fontRef idx="minor">
-            <a:schemeClr val="lt1"/>
-          </a:fontRef>
-        </p:style>
-        <p:txBody>
-          <a:bodyPr rtlCol="0" anchor="ctr" wrap="square"/>
-          <a:lstStyle/>
-          <a:p>
-            <a:pPr algn="ctr">
-              <a:defRPr sz="1300" b="1">
-                <a:solidFill>
-                  <a:srgbClr val="38BDF8"/>
-                </a:solidFill>
-              </a:defRPr>
-            </a:pPr>
-            <a:r>
-              <a:t>1. Paso 1: Contrato REST</a:t>
-            </a:r>
-          </a:p>
-          <a:p>
-            <a:pPr>
-              <a:defRPr sz="1050">
-                <a:solidFill>
-                  <a:srgbClr val="F1F5F9"/>
-                </a:solidFill>
-              </a:defRPr>
-            </a:pPr>
-            <a:r>
-              <a:t>Mostrar la invocación de endpoints desde el Gateway http://localhost:18080/api/v1/ordenes</a:t>
-            </a:r>
-          </a:p>
-        </p:txBody>
-      </p:sp>
-      <p:sp>
-        <p:nvSpPr>
-          <p:cNvPr id="6" name="Rounded Rectangle 5"/>
-          <p:cNvSpPr/>
-          <p:nvPr/>
-        </p:nvSpPr>
-        <p:spPr>
-          <a:xfrm>
-            <a:off x="731520" y="2606040"/>
-            <a:ext cx="5120640" cy="1097280"/>
-          </a:xfrm>
-          <a:prstGeom prst="roundRect">
-            <a:avLst/>
-          </a:prstGeom>
-          <a:solidFill>
-            <a:srgbClr val="1E293B"/>
-          </a:solidFill>
-          <a:ln>
-            <a:solidFill>
-              <a:srgbClr val="818CF8"/>
-            </a:solidFill>
-          </a:ln>
-        </p:spPr>
-        <p:style>
-          <a:lnRef idx="1">
-            <a:schemeClr val="accent1"/>
-          </a:lnRef>
-          <a:fillRef idx="3">
-            <a:schemeClr val="accent1"/>
-          </a:fillRef>
-          <a:effectRef idx="2">
-            <a:schemeClr val="accent1"/>
-          </a:effectRef>
-          <a:fontRef idx="minor">
-            <a:schemeClr val="lt1"/>
-          </a:fontRef>
-        </p:style>
-        <p:txBody>
-          <a:bodyPr rtlCol="0" anchor="ctr" wrap="square"/>
-          <a:lstStyle/>
-          <a:p>
-            <a:pPr algn="ctr">
-              <a:defRPr sz="1300" b="1">
-                <a:solidFill>
-                  <a:srgbClr val="38BDF8"/>
-                </a:solidFill>
-              </a:defRPr>
-            </a:pPr>
-            <a:r>
-              <a:t>2. Paso 2: Ejecución CRUD</a:t>
-            </a:r>
-          </a:p>
-          <a:p>
-            <a:pPr>
-              <a:defRPr sz="1050">
-                <a:solidFill>
-                  <a:srgbClr val="F1F5F9"/>
-                </a:solidFill>
-              </a:defRPr>
-            </a:pPr>
-            <a:r>
-              <a:t>Caso éxito (201) con creación de orden gamer y casos de error (400 datos inválidos y 404 no encontrado).</a:t>
-            </a:r>
-          </a:p>
-        </p:txBody>
-      </p:sp>
-      <p:sp>
-        <p:nvSpPr>
-          <p:cNvPr id="7" name="Rounded Rectangle 6"/>
-          <p:cNvSpPr/>
-          <p:nvPr/>
-        </p:nvSpPr>
-        <p:spPr>
-          <a:xfrm>
-            <a:off x="731520" y="3840480"/>
-            <a:ext cx="5120640" cy="1097280"/>
-          </a:xfrm>
-          <a:prstGeom prst="roundRect">
-            <a:avLst/>
-          </a:prstGeom>
-          <a:solidFill>
-            <a:srgbClr val="1E293B"/>
-          </a:solidFill>
-          <a:ln>
-            <a:solidFill>
-              <a:srgbClr val="818CF8"/>
-            </a:solidFill>
-          </a:ln>
-        </p:spPr>
-        <p:style>
-          <a:lnRef idx="1">
-            <a:schemeClr val="accent1"/>
-          </a:lnRef>
-          <a:fillRef idx="3">
-            <a:schemeClr val="accent1"/>
-          </a:fillRef>
-          <a:effectRef idx="2">
-            <a:schemeClr val="accent1"/>
-          </a:effectRef>
-          <a:fontRef idx="minor">
-            <a:schemeClr val="lt1"/>
-          </a:fontRef>
-        </p:style>
-        <p:txBody>
-          <a:bodyPr rtlCol="0" anchor="ctr" wrap="square"/>
-          <a:lstStyle/>
-          <a:p>
-            <a:pPr algn="ctr">
-              <a:defRPr sz="1300" b="1">
-                <a:solidFill>
-                  <a:srgbClr val="38BDF8"/>
-                </a:solidFill>
-              </a:defRPr>
-            </a:pPr>
-            <a:r>
-              <a:t>3. Paso 3: Config Server</a:t>
-            </a:r>
-          </a:p>
-          <a:p>
-            <a:pPr>
-              <a:defRPr sz="1050">
-                <a:solidFill>
-                  <a:srgbClr val="F1F5F9"/>
-                </a:solidFill>
-              </a:defRPr>
-            </a:pPr>
-            <a:r>
-              <a:t>Consultar http://localhost:8888/pagatu-orden-ms/dev evidenciando la entrega dinámica de parámetros.</a:t>
-            </a:r>
-          </a:p>
-        </p:txBody>
-      </p:sp>
-      <p:sp>
-        <p:nvSpPr>
-          <p:cNvPr id="8" name="Rounded Rectangle 7"/>
-          <p:cNvSpPr/>
-          <p:nvPr/>
-        </p:nvSpPr>
-        <p:spPr>
-          <a:xfrm>
-            <a:off x="731520" y="5074920"/>
-            <a:ext cx="5120640" cy="1097280"/>
-          </a:xfrm>
-          <a:prstGeom prst="roundRect">
-            <a:avLst/>
-          </a:prstGeom>
-          <a:solidFill>
-            <a:srgbClr val="1E293B"/>
-          </a:solidFill>
-          <a:ln>
-            <a:solidFill>
-              <a:srgbClr val="818CF8"/>
-            </a:solidFill>
-          </a:ln>
-        </p:spPr>
-        <p:style>
-          <a:lnRef idx="1">
-            <a:schemeClr val="accent1"/>
-          </a:lnRef>
-          <a:fillRef idx="3">
-            <a:schemeClr val="accent1"/>
-          </a:fillRef>
-          <a:effectRef idx="2">
-            <a:schemeClr val="accent1"/>
-          </a:effectRef>
-          <a:fontRef idx="minor">
-            <a:schemeClr val="lt1"/>
-          </a:fontRef>
-        </p:style>
-        <p:txBody>
-          <a:bodyPr rtlCol="0" anchor="ctr" wrap="square"/>
-          <a:lstStyle/>
-          <a:p>
-            <a:pPr algn="ctr">
-              <a:defRPr sz="1300" b="1">
-                <a:solidFill>
-                  <a:srgbClr val="38BDF8"/>
-                </a:solidFill>
-              </a:defRPr>
-            </a:pPr>
-            <a:r>
-              <a:t>4. Paso 4: Eureka Dashboard</a:t>
-            </a:r>
-          </a:p>
-          <a:p>
-            <a:pPr>
-              <a:defRPr sz="1050">
-                <a:solidFill>
-                  <a:srgbClr val="F1F5F9"/>
-                </a:solidFill>
-              </a:defRPr>
-            </a:pPr>
-            <a:r>
-              <a:t>Abrir http://localhost:8761 mostrando PAGATU-ORDEN-MS (2) y PAGATU-GATEWAY en estado UP simultáneo.</a:t>
-            </a:r>
-          </a:p>
-        </p:txBody>
-      </p:sp>
-      <p:sp>
-        <p:nvSpPr>
-          <p:cNvPr id="9" name="Rounded Rectangle 8"/>
-          <p:cNvSpPr/>
-          <p:nvPr/>
-        </p:nvSpPr>
-        <p:spPr>
-          <a:xfrm>
-            <a:off x="6309360" y="1371600"/>
-            <a:ext cx="5120640" cy="1097280"/>
-          </a:xfrm>
-          <a:prstGeom prst="roundRect">
-            <a:avLst/>
-          </a:prstGeom>
-          <a:solidFill>
-            <a:srgbClr val="1E293B"/>
-          </a:solidFill>
-          <a:ln>
-            <a:solidFill>
-              <a:srgbClr val="818CF8"/>
-            </a:solidFill>
-          </a:ln>
-        </p:spPr>
-        <p:style>
-          <a:lnRef idx="1">
-            <a:schemeClr val="accent1"/>
-          </a:lnRef>
-          <a:fillRef idx="3">
-            <a:schemeClr val="accent1"/>
-          </a:fillRef>
-          <a:effectRef idx="2">
-            <a:schemeClr val="accent1"/>
-          </a:effectRef>
-          <a:fontRef idx="minor">
-            <a:schemeClr val="lt1"/>
-          </a:fontRef>
-        </p:style>
-        <p:txBody>
-          <a:bodyPr rtlCol="0" anchor="ctr" wrap="square"/>
-          <a:lstStyle/>
-          <a:p>
-            <a:pPr algn="ctr">
-              <a:defRPr sz="1300" b="1">
-                <a:solidFill>
-                  <a:srgbClr val="38BDF8"/>
-                </a:solidFill>
-              </a:defRPr>
-            </a:pPr>
-            <a:r>
-              <a:t>5. Paso 5: Balanceo Round Robin</a:t>
-            </a:r>
-          </a:p>
-          <a:p>
-            <a:pPr>
-              <a:defRPr sz="1050">
-                <a:solidFill>
-                  <a:srgbClr val="F1F5F9"/>
-                </a:solidFill>
-              </a:defRPr>
-            </a:pPr>
-            <a:r>
-              <a:t>Disparar 4 peticiones seguidas al Gateway y mostrar la alternancia en los logs entre el puerto 8082 y 8083.</a:t>
-            </a:r>
-          </a:p>
-        </p:txBody>
-      </p:sp>
-      <p:sp>
-        <p:nvSpPr>
-          <p:cNvPr id="10" name="Rounded Rectangle 9"/>
-          <p:cNvSpPr/>
-          <p:nvPr/>
-        </p:nvSpPr>
-        <p:spPr>
-          <a:xfrm>
-            <a:off x="6309360" y="2743200"/>
-            <a:ext cx="5120640" cy="1097280"/>
-          </a:xfrm>
-          <a:prstGeom prst="roundRect">
-            <a:avLst/>
-          </a:prstGeom>
-          <a:solidFill>
-            <a:srgbClr val="1E293B"/>
-          </a:solidFill>
-          <a:ln>
-            <a:solidFill>
-              <a:srgbClr val="818CF8"/>
-            </a:solidFill>
-          </a:ln>
-        </p:spPr>
-        <p:style>
-          <a:lnRef idx="1">
-            <a:schemeClr val="accent1"/>
-          </a:lnRef>
-          <a:fillRef idx="3">
-            <a:schemeClr val="accent1"/>
-          </a:fillRef>
-          <a:effectRef idx="2">
-            <a:schemeClr val="accent1"/>
-          </a:effectRef>
-          <a:fontRef idx="minor">
-            <a:schemeClr val="lt1"/>
-          </a:fontRef>
-        </p:style>
-        <p:txBody>
-          <a:bodyPr rtlCol="0" anchor="ctr" wrap="square"/>
-          <a:lstStyle/>
-          <a:p>
-            <a:pPr algn="ctr">
-              <a:defRPr sz="1300" b="1">
-                <a:solidFill>
-                  <a:srgbClr val="38BDF8"/>
-                </a:solidFill>
-              </a:defRPr>
-            </a:pPr>
-            <a:r>
-              <a:t>6. Paso 6: Tolerancia a Fallos</a:t>
-            </a:r>
-          </a:p>
-          <a:p>
-            <a:pPr>
-              <a:defRPr sz="1050">
-                <a:solidFill>
-                  <a:srgbClr val="F1F5F9"/>
-                </a:solidFill>
-              </a:defRPr>
-            </a:pPr>
-            <a:r>
-              <a:t>Detener la consola del puerto 8082; el Gateway sigue atendiendo peticiones desde la 8083 sin errores.</a:t>
-            </a:r>
-          </a:p>
-        </p:txBody>
-      </p:sp>
-      <p:sp>
-        <p:nvSpPr>
-          <p:cNvPr id="11" name="Rounded Rectangle 10"/>
-          <p:cNvSpPr/>
-          <p:nvPr/>
-        </p:nvSpPr>
-        <p:spPr>
-          <a:xfrm>
-            <a:off x="6309360" y="4114800"/>
-            <a:ext cx="5120640" cy="1097280"/>
-          </a:xfrm>
-          <a:prstGeom prst="roundRect">
-            <a:avLst/>
-          </a:prstGeom>
-          <a:solidFill>
-            <a:srgbClr val="1E293B"/>
-          </a:solidFill>
-          <a:ln>
-            <a:solidFill>
-              <a:srgbClr val="818CF8"/>
-            </a:solidFill>
-          </a:ln>
-        </p:spPr>
-        <p:style>
-          <a:lnRef idx="1">
-            <a:schemeClr val="accent1"/>
-          </a:lnRef>
-          <a:fillRef idx="3">
-            <a:schemeClr val="accent1"/>
-          </a:fillRef>
-          <a:effectRef idx="2">
-            <a:schemeClr val="accent1"/>
-          </a:effectRef>
-          <a:fontRef idx="minor">
-            <a:schemeClr val="lt1"/>
-          </a:fontRef>
-        </p:style>
-        <p:txBody>
-          <a:bodyPr rtlCol="0" anchor="ctr" wrap="square"/>
-          <a:lstStyle/>
-          <a:p>
-            <a:pPr algn="ctr">
-              <a:defRPr sz="1300" b="1">
-                <a:solidFill>
-                  <a:srgbClr val="38BDF8"/>
-                </a:solidFill>
-              </a:defRPr>
-            </a:pPr>
-            <a:r>
-              <a:t>7. Paso 7: Dominio ChaskiPC</a:t>
-            </a:r>
-          </a:p>
-          <a:p>
-            <a:pPr>
-              <a:defRPr sz="1050">
-                <a:solidFill>
-                  <a:srgbClr val="F1F5F9"/>
-                </a:solidFill>
-              </a:defRPr>
-            </a:pPr>
-            <a:r>
-              <a:t>Explicar la propuesta de valor: e-commerce de componentes informáticos de alta gama e integración fiscal.</a:t>
-            </a:r>
-          </a:p>
-        </p:txBody>
-      </p:sp>
-    </p:spTree>
-  </p:cSld>
-  <p:clrMapOvr>
-    <a:masterClrMapping/>
-  </p:clrMapOvr>
-</p:sld>
-</file>
-
-<file path=ppt/slides/slide6.xml><?xml version="1.0" encoding="utf-8"?>
-<p:sld xmlns:a="http://schemas.openxmlformats.org/drawingml/2006/main" xmlns:p="http://schemas.openxmlformats.org/presentationml/2006/main" xmlns:r="http://schemas.openxmlformats.org/officeDocument/2006/relationships">
-  <p:cSld>
-    <p:spTree>
-      <p:nvGrpSpPr>
-        <p:cNvPr id="1" name=""/>
-        <p:cNvGrpSpPr/>
-        <p:nvPr/>
-      </p:nvGrpSpPr>
-      <p:grpSpPr/>
-      <p:sp>
-        <p:nvSpPr>
-          <p:cNvPr id="2" name="Rectangle 1"/>
-          <p:cNvSpPr/>
-          <p:nvPr/>
-        </p:nvSpPr>
-        <p:spPr>
-          <a:xfrm>
-            <a:off x="0" y="0"/>
-            <a:ext cx="12191695" cy="6858000"/>
-          </a:xfrm>
-          <a:prstGeom prst="rect">
-            <a:avLst/>
-          </a:prstGeom>
-          <a:solidFill>
-            <a:srgbClr val="0F172A"/>
-          </a:solidFill>
-          <a:ln>
-            <a:solidFill>
-              <a:srgbClr val="0F172A"/>
-            </a:solidFill>
-          </a:ln>
-        </p:spPr>
-        <p:style>
-          <a:lnRef idx="1">
-            <a:schemeClr val="accent1"/>
-          </a:lnRef>
-          <a:fillRef idx="3">
-            <a:schemeClr val="accent1"/>
-          </a:fillRef>
-          <a:effectRef idx="2">
-            <a:schemeClr val="accent1"/>
-          </a:effectRef>
-          <a:fontRef idx="minor">
-            <a:schemeClr val="lt1"/>
-          </a:fontRef>
-        </p:style>
-        <p:txBody>
-          <a:bodyPr rtlCol="0" anchor="ctr"/>
-          <a:lstStyle/>
-          <a:p>
-            <a:pPr algn="ctr"/>
-          </a:p>
-        </p:txBody>
-      </p:sp>
-      <p:sp>
-        <p:nvSpPr>
-          <p:cNvPr id="3" name="TextBox 2"/>
-          <p:cNvSpPr txBox="1"/>
-          <p:nvPr/>
-        </p:nvSpPr>
-        <p:spPr>
-          <a:xfrm>
-            <a:off x="731520" y="365760"/>
-            <a:ext cx="10698480" cy="320040"/>
-          </a:xfrm>
-          <a:prstGeom prst="rect">
-            <a:avLst/>
-          </a:prstGeom>
-          <a:noFill/>
-        </p:spPr>
-        <p:txBody>
-          <a:bodyPr wrap="square">
-            <a:spAutoFit/>
-          </a:bodyPr>
-          <a:lstStyle/>
-          <a:p>
-            <a:pPr>
-              <a:defRPr sz="1100" b="1">
-                <a:solidFill>
-                  <a:srgbClr val="818CF8"/>
-                </a:solidFill>
-              </a:defRPr>
-            </a:pPr>
-            <a:r>
-              <a:t>CHASKIPC • EVALUACIÓN UNIDAD I</a:t>
-            </a:r>
-          </a:p>
-        </p:txBody>
-      </p:sp>
-      <p:sp>
-        <p:nvSpPr>
-          <p:cNvPr id="4" name="TextBox 3"/>
-          <p:cNvSpPr txBox="1"/>
-          <p:nvPr/>
-        </p:nvSpPr>
-        <p:spPr>
-          <a:xfrm>
-            <a:off x="731520" y="640080"/>
-            <a:ext cx="10698480" cy="731520"/>
-          </a:xfrm>
-          <a:prstGeom prst="rect">
-            <a:avLst/>
-          </a:prstGeom>
-          <a:noFill/>
-        </p:spPr>
-        <p:txBody>
-          <a:bodyPr wrap="square">
-            <a:spAutoFit/>
-          </a:bodyPr>
-          <a:lstStyle/>
-          <a:p>
-            <a:pPr>
-              <a:defRPr sz="2400" b="1">
-                <a:solidFill>
-                  <a:srgbClr val="38BDF8"/>
-                </a:solidFill>
-              </a:defRPr>
-            </a:pPr>
-            <a:r>
-              <a:t>Bitácora DevOps: Resolución de los 7 Desafíos de Laboratorio</a:t>
-            </a:r>
-          </a:p>
-        </p:txBody>
-      </p:sp>
-      <p:sp>
-        <p:nvSpPr>
-          <p:cNvPr id="5" name="Rounded Rectangle 4"/>
-          <p:cNvSpPr/>
-          <p:nvPr/>
-        </p:nvSpPr>
-        <p:spPr>
-          <a:xfrm>
-            <a:off x="731520" y="1371600"/>
-            <a:ext cx="5120640" cy="1097280"/>
-          </a:xfrm>
-          <a:prstGeom prst="roundRect">
-            <a:avLst/>
-          </a:prstGeom>
-          <a:solidFill>
-            <a:srgbClr val="1E293B"/>
-          </a:solidFill>
-          <a:ln>
-            <a:solidFill>
-              <a:srgbClr val="10B981"/>
-            </a:solidFill>
-          </a:ln>
-        </p:spPr>
-        <p:style>
-          <a:lnRef idx="1">
-            <a:schemeClr val="accent1"/>
-          </a:lnRef>
-          <a:fillRef idx="3">
-            <a:schemeClr val="accent1"/>
-          </a:fillRef>
-          <a:effectRef idx="2">
-            <a:schemeClr val="accent1"/>
-          </a:effectRef>
-          <a:fontRef idx="minor">
-            <a:schemeClr val="lt1"/>
-          </a:fontRef>
-        </p:style>
-        <p:txBody>
-          <a:bodyPr rtlCol="0" anchor="ctr" wrap="square"/>
-          <a:lstStyle/>
-          <a:p>
-            <a:pPr algn="ctr">
-              <a:defRPr sz="1200" b="1">
-                <a:solidFill>
                   <a:srgbClr val="10B981"/>
                 </a:solidFill>
               </a:defRPr>
             </a:pPr>
             <a:r>
-              <a:t>1. Rutas Quemadas (Hardcoded)</a:t>
-            </a:r>
-          </a:p>
-          <a:p>
-            <a:pPr>
-              <a:defRPr sz="1050">
-                <a:solidFill>
-                  <a:srgbClr val="F1F5F9"/>
-                </a:solidFill>
-              </a:defRPr>
-            </a:pPr>
-            <a:r>
-              <a:t>Solución: Uso de rutas relativas dinámicas en Python y PowerShell (Split-Path / abspath).</a:t>
-            </a:r>
-          </a:p>
-        </p:txBody>
-      </p:sp>
-      <p:sp>
-        <p:nvSpPr>
-          <p:cNvPr id="6" name="Rounded Rectangle 5"/>
-          <p:cNvSpPr/>
-          <p:nvPr/>
-        </p:nvSpPr>
-        <p:spPr>
-          <a:xfrm>
-            <a:off x="731520" y="2606040"/>
-            <a:ext cx="5120640" cy="1097280"/>
-          </a:xfrm>
-          <a:prstGeom prst="roundRect">
-            <a:avLst/>
-          </a:prstGeom>
-          <a:solidFill>
-            <a:srgbClr val="1E293B"/>
-          </a:solidFill>
-          <a:ln>
-            <a:solidFill>
-              <a:srgbClr val="10B981"/>
-            </a:solidFill>
-          </a:ln>
-        </p:spPr>
-        <p:style>
-          <a:lnRef idx="1">
-            <a:schemeClr val="accent1"/>
-          </a:lnRef>
-          <a:fillRef idx="3">
-            <a:schemeClr val="accent1"/>
-          </a:fillRef>
-          <a:effectRef idx="2">
-            <a:schemeClr val="accent1"/>
-          </a:effectRef>
-          <a:fontRef idx="minor">
-            <a:schemeClr val="lt1"/>
-          </a:fontRef>
-        </p:style>
-        <p:txBody>
-          <a:bodyPr rtlCol="0" anchor="ctr" wrap="square"/>
-          <a:lstStyle/>
-          <a:p>
-            <a:pPr algn="ctr">
-              <a:defRPr sz="1200" b="1">
-                <a:solidFill>
-                  <a:srgbClr val="10B981"/>
-                </a:solidFill>
-              </a:defRPr>
-            </a:pPr>
-            <a:r>
-              <a:t>2. Falta de Python en Lab</a:t>
-            </a:r>
-          </a:p>
-          <a:p>
-            <a:pPr>
-              <a:defRPr sz="1050">
-                <a:solidFill>
-                  <a:srgbClr val="F1F5F9"/>
-                </a:solidFill>
-              </a:defRPr>
-            </a:pPr>
-            <a:r>
-              <a:t>Solución: Creación de iniciar_todo.ps1 (100% nativo PowerShell, cero dependencias).</a:t>
-            </a:r>
-          </a:p>
-        </p:txBody>
-      </p:sp>
-      <p:sp>
-        <p:nvSpPr>
-          <p:cNvPr id="7" name="Rounded Rectangle 6"/>
-          <p:cNvSpPr/>
-          <p:nvPr/>
-        </p:nvSpPr>
-        <p:spPr>
-          <a:xfrm>
-            <a:off x="731520" y="3840480"/>
-            <a:ext cx="5120640" cy="1097280"/>
-          </a:xfrm>
-          <a:prstGeom prst="roundRect">
-            <a:avLst/>
-          </a:prstGeom>
-          <a:solidFill>
-            <a:srgbClr val="1E293B"/>
-          </a:solidFill>
-          <a:ln>
-            <a:solidFill>
-              <a:srgbClr val="10B981"/>
-            </a:solidFill>
-          </a:ln>
-        </p:spPr>
-        <p:style>
-          <a:lnRef idx="1">
-            <a:schemeClr val="accent1"/>
-          </a:lnRef>
-          <a:fillRef idx="3">
-            <a:schemeClr val="accent1"/>
-          </a:fillRef>
-          <a:effectRef idx="2">
-            <a:schemeClr val="accent1"/>
-          </a:effectRef>
-          <a:fontRef idx="minor">
-            <a:schemeClr val="lt1"/>
-          </a:fontRef>
-        </p:style>
-        <p:txBody>
-          <a:bodyPr rtlCol="0" anchor="ctr" wrap="square"/>
-          <a:lstStyle/>
-          <a:p>
-            <a:pPr algn="ctr">
-              <a:defRPr sz="1200" b="1">
-                <a:solidFill>
-                  <a:srgbClr val="10B981"/>
-                </a:solidFill>
-              </a:defRPr>
-            </a:pPr>
-            <a:r>
-              <a:t>3. Conflicto Java 17/21</a:t>
-            </a:r>
-          </a:p>
-          <a:p>
-            <a:pPr>
-              <a:defRPr sz="1050">
-                <a:solidFill>
-                  <a:srgbClr val="F1F5F9"/>
-                </a:solidFill>
-              </a:defRPr>
-            </a:pPr>
-            <a:r>
-              <a:t>Solución: Autodetección inteligente de JDK 21 e inyección forzada de $env:JAVA_HOME.</a:t>
-            </a:r>
-          </a:p>
-        </p:txBody>
-      </p:sp>
-      <p:sp>
-        <p:nvSpPr>
-          <p:cNvPr id="8" name="Rounded Rectangle 7"/>
-          <p:cNvSpPr/>
-          <p:nvPr/>
-        </p:nvSpPr>
-        <p:spPr>
-          <a:xfrm>
-            <a:off x="731520" y="5074920"/>
-            <a:ext cx="5120640" cy="1097280"/>
-          </a:xfrm>
-          <a:prstGeom prst="roundRect">
-            <a:avLst/>
-          </a:prstGeom>
-          <a:solidFill>
-            <a:srgbClr val="1E293B"/>
-          </a:solidFill>
-          <a:ln>
-            <a:solidFill>
-              <a:srgbClr val="10B981"/>
-            </a:solidFill>
-          </a:ln>
-        </p:spPr>
-        <p:style>
-          <a:lnRef idx="1">
-            <a:schemeClr val="accent1"/>
-          </a:lnRef>
-          <a:fillRef idx="3">
-            <a:schemeClr val="accent1"/>
-          </a:fillRef>
-          <a:effectRef idx="2">
-            <a:schemeClr val="accent1"/>
-          </a:effectRef>
-          <a:fontRef idx="minor">
-            <a:schemeClr val="lt1"/>
-          </a:fontRef>
-        </p:style>
-        <p:txBody>
-          <a:bodyPr rtlCol="0" anchor="ctr" wrap="square"/>
-          <a:lstStyle/>
-          <a:p>
-            <a:pPr algn="ctr">
-              <a:defRPr sz="1200" b="1">
-                <a:solidFill>
-                  <a:srgbClr val="10B981"/>
-                </a:solidFill>
-              </a:defRPr>
-            </a:pPr>
-            <a:r>
-              <a:t>4. Comillas en PowerShell</a:t>
-            </a:r>
-          </a:p>
-          <a:p>
-            <a:pPr>
-              <a:defRPr sz="1050">
-                <a:solidFill>
-                  <a:srgbClr val="F1F5F9"/>
-                </a:solidFill>
-              </a:defRPr>
-            </a:pPr>
-            <a:r>
-              <a:t>Solución: Sustitución por variable nativa $env:SERVER_PORT='8083' sin errores léxicos.</a:t>
-            </a:r>
-          </a:p>
-        </p:txBody>
-      </p:sp>
-      <p:sp>
-        <p:nvSpPr>
-          <p:cNvPr id="9" name="Rounded Rectangle 8"/>
-          <p:cNvSpPr/>
-          <p:nvPr/>
-        </p:nvSpPr>
-        <p:spPr>
-          <a:xfrm>
-            <a:off x="6309360" y="1371600"/>
-            <a:ext cx="5120640" cy="1097280"/>
-          </a:xfrm>
-          <a:prstGeom prst="roundRect">
-            <a:avLst/>
-          </a:prstGeom>
-          <a:solidFill>
-            <a:srgbClr val="1E293B"/>
-          </a:solidFill>
-          <a:ln>
-            <a:solidFill>
-              <a:srgbClr val="10B981"/>
-            </a:solidFill>
-          </a:ln>
-        </p:spPr>
-        <p:style>
-          <a:lnRef idx="1">
-            <a:schemeClr val="accent1"/>
-          </a:lnRef>
-          <a:fillRef idx="3">
-            <a:schemeClr val="accent1"/>
-          </a:fillRef>
-          <a:effectRef idx="2">
-            <a:schemeClr val="accent1"/>
-          </a:effectRef>
-          <a:fontRef idx="minor">
-            <a:schemeClr val="lt1"/>
-          </a:fontRef>
-        </p:style>
-        <p:txBody>
-          <a:bodyPr rtlCol="0" anchor="ctr" wrap="square"/>
-          <a:lstStyle/>
-          <a:p>
-            <a:pPr algn="ctr">
-              <a:defRPr sz="1200" b="1">
-                <a:solidFill>
-                  <a:srgbClr val="10B981"/>
-                </a:solidFill>
-              </a:defRPr>
-            </a:pPr>
-            <a:r>
-              <a:t>5. Config Server Desconectado</a:t>
-            </a:r>
-          </a:p>
-          <a:p>
-            <a:pPr>
-              <a:defRPr sz="1050">
-                <a:solidFill>
-                  <a:srgbClr val="F1F5F9"/>
-                </a:solidFill>
-              </a:defRPr>
-            </a:pPr>
-            <a:r>
-              <a:t>Solución: Interpolación con ${CONFIG_REPO_PATH:file:../config-repo} y fallback dinámico.</a:t>
-            </a:r>
-          </a:p>
-        </p:txBody>
-      </p:sp>
-      <p:sp>
-        <p:nvSpPr>
-          <p:cNvPr id="10" name="Rounded Rectangle 9"/>
-          <p:cNvSpPr/>
-          <p:nvPr/>
-        </p:nvSpPr>
-        <p:spPr>
-          <a:xfrm>
-            <a:off x="6309360" y="2743200"/>
-            <a:ext cx="5120640" cy="1097280"/>
-          </a:xfrm>
-          <a:prstGeom prst="roundRect">
-            <a:avLst/>
-          </a:prstGeom>
-          <a:solidFill>
-            <a:srgbClr val="1E293B"/>
-          </a:solidFill>
-          <a:ln>
-            <a:solidFill>
-              <a:srgbClr val="10B981"/>
-            </a:solidFill>
-          </a:ln>
-        </p:spPr>
-        <p:style>
-          <a:lnRef idx="1">
-            <a:schemeClr val="accent1"/>
-          </a:lnRef>
-          <a:fillRef idx="3">
-            <a:schemeClr val="accent1"/>
-          </a:fillRef>
-          <a:effectRef idx="2">
-            <a:schemeClr val="accent1"/>
-          </a:effectRef>
-          <a:fontRef idx="minor">
-            <a:schemeClr val="lt1"/>
-          </a:fontRef>
-        </p:style>
-        <p:txBody>
-          <a:bodyPr rtlCol="0" anchor="ctr" wrap="square"/>
-          <a:lstStyle/>
-          <a:p>
-            <a:pPr algn="ctr">
-              <a:defRPr sz="1200" b="1">
-                <a:solidFill>
-                  <a:srgbClr val="10B981"/>
-                </a:solidFill>
-              </a:defRPr>
-            </a:pPr>
-            <a:r>
-              <a:t>6. PostgreSQL Apagado (5433)</a:t>
-            </a:r>
-          </a:p>
-          <a:p>
-            <a:pPr>
-              <a:defRPr sz="1050">
-                <a:solidFill>
-                  <a:srgbClr val="F1F5F9"/>
-                </a:solidFill>
-              </a:defRPr>
-            </a:pPr>
-            <a:r>
-              <a:t>Solución: Creación de infra/docker-compose-db.yml y script de un clic iniciar_db.bat.</a:t>
-            </a:r>
-          </a:p>
-        </p:txBody>
-      </p:sp>
-      <p:sp>
-        <p:nvSpPr>
-          <p:cNvPr id="11" name="Rounded Rectangle 10"/>
-          <p:cNvSpPr/>
-          <p:nvPr/>
-        </p:nvSpPr>
-        <p:spPr>
-          <a:xfrm>
-            <a:off x="6309360" y="4114800"/>
-            <a:ext cx="5120640" cy="1097280"/>
-          </a:xfrm>
-          <a:prstGeom prst="roundRect">
-            <a:avLst/>
-          </a:prstGeom>
-          <a:solidFill>
-            <a:srgbClr val="1E293B"/>
-          </a:solidFill>
-          <a:ln>
-            <a:solidFill>
-              <a:srgbClr val="10B981"/>
-            </a:solidFill>
-          </a:ln>
-        </p:spPr>
-        <p:style>
-          <a:lnRef idx="1">
-            <a:schemeClr val="accent1"/>
-          </a:lnRef>
-          <a:fillRef idx="3">
-            <a:schemeClr val="accent1"/>
-          </a:fillRef>
-          <a:effectRef idx="2">
-            <a:schemeClr val="accent1"/>
-          </a:effectRef>
-          <a:fontRef idx="minor">
-            <a:schemeClr val="lt1"/>
-          </a:fontRef>
-        </p:style>
-        <p:txBody>
-          <a:bodyPr rtlCol="0" anchor="ctr" wrap="square"/>
-          <a:lstStyle/>
-          <a:p>
-            <a:pPr algn="ctr">
-              <a:defRPr sz="1200" b="1">
-                <a:solidFill>
-                  <a:srgbClr val="10B981"/>
-                </a:solidFill>
-              </a:defRPr>
-            </a:pPr>
-            <a:r>
-              <a:t>7. Error de Autenticación</a:t>
-            </a:r>
-          </a:p>
-          <a:p>
-            <a:pPr>
-              <a:defRPr sz="1050">
-                <a:solidFill>
-                  <a:srgbClr val="F1F5F9"/>
-                </a:solidFill>
-              </a:defRPr>
-            </a:pPr>
-            <a:r>
-              <a:t>Solución: Estandarización de usuario admin y clave adminpassword en postgres.</a:t>
-            </a:r>
-          </a:p>
-        </p:txBody>
-      </p:sp>
-    </p:spTree>
-  </p:cSld>
-  <p:clrMapOvr>
-    <a:masterClrMapping/>
-  </p:clrMapOvr>
-</p:sld>
-</file>
-
-<file path=ppt/slides/slide7.xml><?xml version="1.0" encoding="utf-8"?>
-<p:sld xmlns:a="http://schemas.openxmlformats.org/drawingml/2006/main" xmlns:p="http://schemas.openxmlformats.org/presentationml/2006/main" xmlns:r="http://schemas.openxmlformats.org/officeDocument/2006/relationships">
-  <p:cSld>
-    <p:spTree>
-      <p:nvGrpSpPr>
-        <p:cNvPr id="1" name=""/>
-        <p:cNvGrpSpPr/>
-        <p:nvPr/>
-      </p:nvGrpSpPr>
-      <p:grpSpPr/>
-      <p:sp>
-        <p:nvSpPr>
-          <p:cNvPr id="2" name="Rectangle 1"/>
-          <p:cNvSpPr/>
-          <p:nvPr/>
-        </p:nvSpPr>
-        <p:spPr>
-          <a:xfrm>
-            <a:off x="0" y="0"/>
-            <a:ext cx="12191695" cy="6858000"/>
-          </a:xfrm>
-          <a:prstGeom prst="rect">
-            <a:avLst/>
-          </a:prstGeom>
-          <a:solidFill>
-            <a:srgbClr val="0F172A"/>
-          </a:solidFill>
-          <a:ln>
-            <a:solidFill>
-              <a:srgbClr val="0F172A"/>
-            </a:solidFill>
-          </a:ln>
-        </p:spPr>
-        <p:style>
-          <a:lnRef idx="1">
-            <a:schemeClr val="accent1"/>
-          </a:lnRef>
-          <a:fillRef idx="3">
-            <a:schemeClr val="accent1"/>
-          </a:fillRef>
-          <a:effectRef idx="2">
-            <a:schemeClr val="accent1"/>
-          </a:effectRef>
-          <a:fontRef idx="minor">
-            <a:schemeClr val="lt1"/>
-          </a:fontRef>
-        </p:style>
-        <p:txBody>
-          <a:bodyPr rtlCol="0" anchor="ctr"/>
-          <a:lstStyle/>
-          <a:p>
-            <a:pPr algn="ctr"/>
-          </a:p>
-        </p:txBody>
-      </p:sp>
-      <p:sp>
-        <p:nvSpPr>
-          <p:cNvPr id="3" name="TextBox 2"/>
-          <p:cNvSpPr txBox="1"/>
-          <p:nvPr/>
-        </p:nvSpPr>
-        <p:spPr>
-          <a:xfrm>
-            <a:off x="731520" y="365760"/>
-            <a:ext cx="10698480" cy="320040"/>
-          </a:xfrm>
-          <a:prstGeom prst="rect">
-            <a:avLst/>
-          </a:prstGeom>
-          <a:noFill/>
-        </p:spPr>
-        <p:txBody>
-          <a:bodyPr wrap="square">
-            <a:spAutoFit/>
-          </a:bodyPr>
-          <a:lstStyle/>
-          <a:p>
-            <a:pPr>
-              <a:defRPr sz="1100" b="1">
-                <a:solidFill>
-                  <a:srgbClr val="818CF8"/>
-                </a:solidFill>
-              </a:defRPr>
-            </a:pPr>
-            <a:r>
-              <a:t>CHASKIPC • EVALUACIÓN UNIDAD I</a:t>
-            </a:r>
-          </a:p>
-        </p:txBody>
-      </p:sp>
-      <p:sp>
-        <p:nvSpPr>
-          <p:cNvPr id="4" name="TextBox 3"/>
-          <p:cNvSpPr txBox="1"/>
-          <p:nvPr/>
-        </p:nvSpPr>
-        <p:spPr>
-          <a:xfrm>
-            <a:off x="731520" y="640080"/>
-            <a:ext cx="10698480" cy="731520"/>
-          </a:xfrm>
-          <a:prstGeom prst="rect">
-            <a:avLst/>
-          </a:prstGeom>
-          <a:noFill/>
-        </p:spPr>
-        <p:txBody>
-          <a:bodyPr wrap="square">
-            <a:spAutoFit/>
-          </a:bodyPr>
-          <a:lstStyle/>
-          <a:p>
-            <a:pPr>
-              <a:defRPr sz="2400" b="1">
-                <a:solidFill>
-                  <a:srgbClr val="38BDF8"/>
-                </a:solidFill>
-              </a:defRPr>
-            </a:pPr>
-            <a:r>
-              <a:t>3. Evaluación Teórico-Práctica (Balotario Clave Respondido)</a:t>
-            </a:r>
-          </a:p>
-        </p:txBody>
-      </p:sp>
-      <p:sp>
-        <p:nvSpPr>
-          <p:cNvPr id="5" name="Rounded Rectangle 4"/>
-          <p:cNvSpPr/>
-          <p:nvPr/>
-        </p:nvSpPr>
-        <p:spPr>
-          <a:xfrm>
-            <a:off x="731520" y="1371600"/>
-            <a:ext cx="10698480" cy="868680"/>
-          </a:xfrm>
-          <a:prstGeom prst="roundRect">
-            <a:avLst/>
-          </a:prstGeom>
-          <a:solidFill>
-            <a:srgbClr val="1E293B"/>
-          </a:solidFill>
-          <a:ln>
-            <a:solidFill>
-              <a:srgbClr val="38BDF8"/>
-            </a:solidFill>
-          </a:ln>
-        </p:spPr>
-        <p:style>
-          <a:lnRef idx="1">
-            <a:schemeClr val="accent1"/>
-          </a:lnRef>
-          <a:fillRef idx="3">
-            <a:schemeClr val="accent1"/>
-          </a:fillRef>
-          <a:effectRef idx="2">
-            <a:schemeClr val="accent1"/>
-          </a:effectRef>
-          <a:fontRef idx="minor">
-            <a:schemeClr val="lt1"/>
-          </a:fontRef>
-        </p:style>
-        <p:txBody>
-          <a:bodyPr rtlCol="0" anchor="ctr" wrap="square"/>
-          <a:lstStyle/>
-          <a:p>
-            <a:pPr algn="ctr">
-              <a:defRPr sz="1150" b="1">
-                <a:solidFill>
-                  <a:srgbClr val="38BDF8"/>
-                </a:solidFill>
-              </a:defRPr>
-            </a:pPr>
-            <a:r>
-              <a:t>1. ¿Por qué no depender de puertos fijos asignados a mano?</a:t>
-            </a:r>
-          </a:p>
-          <a:p>
-            <a:pPr>
-              <a:defRPr sz="1050">
-                <a:solidFill>
-                  <a:srgbClr val="F1F5F9"/>
-                </a:solidFill>
-              </a:defRPr>
-            </a:pPr>
-            <a:r>
-              <a:t>Impide el escalado horizontal. Con instance-id: ${app.name}:${server.port} y Eureka, los microservicios se registran como nodos efímeros dinámicos.</a:t>
-            </a:r>
-          </a:p>
-        </p:txBody>
-      </p:sp>
-      <p:sp>
-        <p:nvSpPr>
-          <p:cNvPr id="6" name="Rounded Rectangle 5"/>
-          <p:cNvSpPr/>
-          <p:nvPr/>
-        </p:nvSpPr>
-        <p:spPr>
-          <a:xfrm>
-            <a:off x="731520" y="2377440"/>
-            <a:ext cx="10698480" cy="868680"/>
-          </a:xfrm>
-          <a:prstGeom prst="roundRect">
-            <a:avLst/>
-          </a:prstGeom>
-          <a:solidFill>
-            <a:srgbClr val="1E293B"/>
-          </a:solidFill>
-          <a:ln>
-            <a:solidFill>
-              <a:srgbClr val="38BDF8"/>
-            </a:solidFill>
-          </a:ln>
-        </p:spPr>
-        <p:style>
-          <a:lnRef idx="1">
-            <a:schemeClr val="accent1"/>
-          </a:lnRef>
-          <a:fillRef idx="3">
-            <a:schemeClr val="accent1"/>
-          </a:fillRef>
-          <a:effectRef idx="2">
-            <a:schemeClr val="accent1"/>
-          </a:effectRef>
-          <a:fontRef idx="minor">
-            <a:schemeClr val="lt1"/>
-          </a:fontRef>
-        </p:style>
-        <p:txBody>
-          <a:bodyPr rtlCol="0" anchor="ctr" wrap="square"/>
-          <a:lstStyle/>
-          <a:p>
-            <a:pPr algn="ctr">
-              <a:defRPr sz="1150" b="1">
-                <a:solidFill>
-                  <a:srgbClr val="38BDF8"/>
-                </a:solidFill>
-              </a:defRPr>
-            </a:pPr>
-            <a:r>
-              <a:t>2. ¿Config Server vs Propiedad fija en código (DEV vs PROD)?</a:t>
-            </a:r>
-          </a:p>
-          <a:p>
-            <a:pPr>
-              <a:defRPr sz="1050">
-                <a:solidFill>
-                  <a:srgbClr val="F1F5F9"/>
-                </a:solidFill>
-              </a:defRPr>
-            </a:pPr>
-            <a:r>
-              <a:t>Evita recompilar artefactos JAR ante cambios de entorno. En DEV se usa DB local y DDL update; en PROD se usan secretos y DDL validate (Factor III).</a:t>
-            </a:r>
-          </a:p>
-        </p:txBody>
-      </p:sp>
-      <p:sp>
-        <p:nvSpPr>
-          <p:cNvPr id="7" name="Rounded Rectangle 6"/>
-          <p:cNvSpPr/>
-          <p:nvPr/>
-        </p:nvSpPr>
-        <p:spPr>
-          <a:xfrm>
-            <a:off x="731520" y="3383280"/>
-            <a:ext cx="10698480" cy="868680"/>
-          </a:xfrm>
-          <a:prstGeom prst="roundRect">
-            <a:avLst/>
-          </a:prstGeom>
-          <a:solidFill>
-            <a:srgbClr val="1E293B"/>
-          </a:solidFill>
-          <a:ln>
-            <a:solidFill>
-              <a:srgbClr val="38BDF8"/>
-            </a:solidFill>
-          </a:ln>
-        </p:spPr>
-        <p:style>
-          <a:lnRef idx="1">
-            <a:schemeClr val="accent1"/>
-          </a:lnRef>
-          <a:fillRef idx="3">
-            <a:schemeClr val="accent1"/>
-          </a:fillRef>
-          <a:effectRef idx="2">
-            <a:schemeClr val="accent1"/>
-          </a:effectRef>
-          <a:fontRef idx="minor">
-            <a:schemeClr val="lt1"/>
-          </a:fontRef>
-        </p:style>
-        <p:txBody>
-          <a:bodyPr rtlCol="0" anchor="ctr" wrap="square"/>
-          <a:lstStyle/>
-          <a:p>
-            <a:pPr algn="ctr">
-              <a:defRPr sz="1150" b="1">
-                <a:solidFill>
-                  <a:srgbClr val="38BDF8"/>
-                </a:solidFill>
-              </a:defRPr>
-            </a:pPr>
-            <a:r>
-              <a:t>3. ¿Por qué el desalojo en Eureka no es instantáneo al caer una instancia?</a:t>
-            </a:r>
-          </a:p>
-          <a:p>
-            <a:pPr>
-              <a:defRPr sz="1050">
-                <a:solidFill>
-                  <a:srgbClr val="F1F5F9"/>
-                </a:solidFill>
-              </a:defRPr>
-            </a:pPr>
-            <a:r>
-              <a:t>Evita el 'flapping' (inestabilidad por latencia transitoria). Eureka espera el latido (30s) y vencimiento del arrendamiento (90s) antes de desalojar.</a:t>
-            </a:r>
-          </a:p>
-        </p:txBody>
-      </p:sp>
-      <p:sp>
-        <p:nvSpPr>
-          <p:cNvPr id="8" name="Rounded Rectangle 7"/>
-          <p:cNvSpPr/>
-          <p:nvPr/>
-        </p:nvSpPr>
-        <p:spPr>
-          <a:xfrm>
-            <a:off x="731520" y="4389120"/>
-            <a:ext cx="10698480" cy="868680"/>
-          </a:xfrm>
-          <a:prstGeom prst="roundRect">
-            <a:avLst/>
-          </a:prstGeom>
-          <a:solidFill>
-            <a:srgbClr val="1E293B"/>
-          </a:solidFill>
-          <a:ln>
-            <a:solidFill>
-              <a:srgbClr val="38BDF8"/>
-            </a:solidFill>
-          </a:ln>
-        </p:spPr>
-        <p:style>
-          <a:lnRef idx="1">
-            <a:schemeClr val="accent1"/>
-          </a:lnRef>
-          <a:fillRef idx="3">
-            <a:schemeClr val="accent1"/>
-          </a:fillRef>
-          <a:effectRef idx="2">
-            <a:schemeClr val="accent1"/>
-          </a:effectRef>
-          <a:fontRef idx="minor">
-            <a:schemeClr val="lt1"/>
-          </a:fontRef>
-        </p:style>
-        <p:txBody>
-          <a:bodyPr rtlCol="0" anchor="ctr" wrap="square"/>
-          <a:lstStyle/>
-          <a:p>
-            <a:pPr algn="ctr">
-              <a:defRPr sz="1150" b="1">
-                <a:solidFill>
-                  <a:srgbClr val="38BDF8"/>
-                </a:solidFill>
-              </a:defRPr>
-            </a:pPr>
-            <a:r>
-              <a:t>4. ¿Por qué la dirección lb:// no es real y quién la resuelve?</a:t>
-            </a:r>
-          </a:p>
-          <a:p>
-            <a:pPr>
-              <a:defRPr sz="1050">
-                <a:solidFill>
-                  <a:srgbClr val="F1F5F9"/>
-                </a:solidFill>
-              </a:defRPr>
-            </a:pPr>
-            <a:r>
-              <a:t>lb:// es un esquema lógico de Spring Cloud LoadBalancer. El Gateway consulta la lista de réplicas vivas en Eureka y reescribe la URL a la IP física.</a:t>
-            </a:r>
-          </a:p>
-        </p:txBody>
-      </p:sp>
-      <p:sp>
-        <p:nvSpPr>
-          <p:cNvPr id="9" name="Rounded Rectangle 8"/>
-          <p:cNvSpPr/>
-          <p:nvPr/>
-        </p:nvSpPr>
-        <p:spPr>
-          <a:xfrm>
-            <a:off x="731520" y="5394960"/>
-            <a:ext cx="10698480" cy="868680"/>
-          </a:xfrm>
-          <a:prstGeom prst="roundRect">
-            <a:avLst/>
-          </a:prstGeom>
-          <a:solidFill>
-            <a:srgbClr val="1E293B"/>
-          </a:solidFill>
-          <a:ln>
-            <a:solidFill>
-              <a:srgbClr val="38BDF8"/>
-            </a:solidFill>
-          </a:ln>
-        </p:spPr>
-        <p:style>
-          <a:lnRef idx="1">
-            <a:schemeClr val="accent1"/>
-          </a:lnRef>
-          <a:fillRef idx="3">
-            <a:schemeClr val="accent1"/>
-          </a:fillRef>
-          <a:effectRef idx="2">
-            <a:schemeClr val="accent1"/>
-          </a:effectRef>
-          <a:fontRef idx="minor">
-            <a:schemeClr val="lt1"/>
-          </a:fontRef>
-        </p:style>
-        <p:txBody>
-          <a:bodyPr rtlCol="0" anchor="ctr" wrap="square"/>
-          <a:lstStyle/>
-          <a:p>
-            <a:pPr algn="ctr">
-              <a:defRPr sz="1150" b="1">
-                <a:solidFill>
-                  <a:srgbClr val="38BDF8"/>
-                </a:solidFill>
-              </a:defRPr>
-            </a:pPr>
-            <a:r>
-              <a:t>5. ¿Por qué Round Robin es suficiente para instancias sin estado?</a:t>
-            </a:r>
-          </a:p>
-          <a:p>
-            <a:pPr>
-              <a:defRPr sz="1050">
-                <a:solidFill>
-                  <a:srgbClr val="F1F5F9"/>
-                </a:solidFill>
-              </a:defRPr>
-            </a:pPr>
-            <a:r>
-              <a:t>En arquitecturas stateless todo el estado reside en PostgreSQL compartida. Cada petición es químicamente autónoma y no requiere afinidad de sesión.</a:t>
-            </a:r>
-          </a:p>
-        </p:txBody>
-      </p:sp>
-    </p:spTree>
-  </p:cSld>
-  <p:clrMapOvr>
-    <a:masterClrMapping/>
-  </p:clrMapOvr>
-</p:sld>
-</file>
-
-<file path=ppt/slides/slide8.xml><?xml version="1.0" encoding="utf-8"?>
-<p:sld xmlns:a="http://schemas.openxmlformats.org/drawingml/2006/main" xmlns:p="http://schemas.openxmlformats.org/presentationml/2006/main" xmlns:r="http://schemas.openxmlformats.org/officeDocument/2006/relationships">
-  <p:cSld>
-    <p:spTree>
-      <p:nvGrpSpPr>
-        <p:cNvPr id="1" name=""/>
-        <p:cNvGrpSpPr/>
-        <p:nvPr/>
-      </p:nvGrpSpPr>
-      <p:grpSpPr/>
-      <p:sp>
-        <p:nvSpPr>
-          <p:cNvPr id="2" name="Rectangle 1"/>
-          <p:cNvSpPr/>
-          <p:nvPr/>
-        </p:nvSpPr>
-        <p:spPr>
-          <a:xfrm>
-            <a:off x="0" y="0"/>
-            <a:ext cx="12191695" cy="6858000"/>
-          </a:xfrm>
-          <a:prstGeom prst="rect">
-            <a:avLst/>
-          </a:prstGeom>
-          <a:solidFill>
-            <a:srgbClr val="0F172A"/>
-          </a:solidFill>
-          <a:ln>
-            <a:solidFill>
-              <a:srgbClr val="0F172A"/>
-            </a:solidFill>
-          </a:ln>
-        </p:spPr>
-        <p:style>
-          <a:lnRef idx="1">
-            <a:schemeClr val="accent1"/>
-          </a:lnRef>
-          <a:fillRef idx="3">
-            <a:schemeClr val="accent1"/>
-          </a:fillRef>
-          <a:effectRef idx="2">
-            <a:schemeClr val="accent1"/>
-          </a:effectRef>
-          <a:fontRef idx="minor">
-            <a:schemeClr val="lt1"/>
-          </a:fontRef>
-        </p:style>
-        <p:txBody>
-          <a:bodyPr rtlCol="0" anchor="ctr"/>
-          <a:lstStyle/>
-          <a:p>
-            <a:pPr algn="ctr"/>
-          </a:p>
-        </p:txBody>
-      </p:sp>
-      <p:sp>
-        <p:nvSpPr>
-          <p:cNvPr id="3" name="TextBox 2"/>
-          <p:cNvSpPr txBox="1"/>
-          <p:nvPr/>
-        </p:nvSpPr>
-        <p:spPr>
-          <a:xfrm>
-            <a:off x="731520" y="365760"/>
-            <a:ext cx="10698480" cy="320040"/>
-          </a:xfrm>
-          <a:prstGeom prst="rect">
-            <a:avLst/>
-          </a:prstGeom>
-          <a:noFill/>
-        </p:spPr>
-        <p:txBody>
-          <a:bodyPr wrap="square">
-            <a:spAutoFit/>
-          </a:bodyPr>
-          <a:lstStyle/>
-          <a:p>
-            <a:pPr>
-              <a:defRPr sz="1100" b="1">
-                <a:solidFill>
-                  <a:srgbClr val="818CF8"/>
-                </a:solidFill>
-              </a:defRPr>
-            </a:pPr>
-            <a:r>
-              <a:t>CHASKIPC • EVALUACIÓN UNIDAD I</a:t>
-            </a:r>
-          </a:p>
-        </p:txBody>
-      </p:sp>
-      <p:sp>
-        <p:nvSpPr>
-          <p:cNvPr id="4" name="TextBox 3"/>
-          <p:cNvSpPr txBox="1"/>
-          <p:nvPr/>
-        </p:nvSpPr>
-        <p:spPr>
-          <a:xfrm>
-            <a:off x="731520" y="640080"/>
-            <a:ext cx="10698480" cy="731520"/>
-          </a:xfrm>
-          <a:prstGeom prst="rect">
-            <a:avLst/>
-          </a:prstGeom>
-          <a:noFill/>
-        </p:spPr>
-        <p:txBody>
-          <a:bodyPr wrap="square">
-            <a:spAutoFit/>
-          </a:bodyPr>
-          <a:lstStyle/>
-          <a:p>
-            <a:pPr>
-              <a:defRPr sz="2400" b="1">
-                <a:solidFill>
-                  <a:srgbClr val="38BDF8"/>
-                </a:solidFill>
-              </a:defRPr>
-            </a:pPr>
-            <a:r>
-              <a:t>5. Rúbrica de Evaluación de la Unidad I (Cálculo Oficial 20/20)</a:t>
+              <a:t>🎤 Nota Estimada: 20/20</a:t>
             </a:r>
           </a:p>
         </p:txBody>
       </p:sp>
       <p:graphicFrame>
         <p:nvGraphicFramePr>
-          <p:cNvPr id="5" name="Table 4"/>
+          <p:cNvPr id="6" name="Table 5"/>
           <p:cNvGraphicFramePr>
             <a:graphicFrameLocks noGrp="1"/>
           </p:cNvGraphicFramePr>
@@ -6796,7 +4058,7 @@
         </p:nvGraphicFramePr>
         <p:xfrm>
           <a:off x="731520" y="1371600"/>
-          <a:ext cx="10698480" cy="4114800"/>
+          <a:ext cx="10698480" cy="4389120"/>
         </p:xfrm>
         <a:graphic>
           <a:graphicData uri="http://schemas.openxmlformats.org/drawingml/2006/table">
@@ -6810,7 +4072,7 @@
                 <a:gridCol w="1371600"/>
                 <a:gridCol w="4754880"/>
               </a:tblGrid>
-              <a:tr h="587828">
+              <a:tr h="627017">
                 <a:tc>
                   <a:txBody>
                     <a:bodyPr/>
@@ -6893,7 +4155,7 @@
                         </a:defRPr>
                       </a:pPr>
                       <a:r>
-                        <a:t>Justificación y Evidencia Técnica</a:t>
+                        <a:t>Justificación Técnica del Equipo 01</a:t>
                       </a:r>
                     </a:p>
                   </a:txBody>
@@ -6904,7 +4166,1036 @@
                   </a:tcPr>
                 </a:tc>
               </a:tr>
-              <a:tr h="587828">
+              <a:tr h="627017">
+                <a:tc>
+                  <a:txBody>
+                    <a:bodyPr/>
+                    <a:lstStyle/>
+                    <a:p>
+                      <a:pPr>
+                        <a:defRPr sz="1000">
+                          <a:solidFill>
+                            <a:srgbClr val="F1F5F9"/>
+                          </a:solidFill>
+                        </a:defRPr>
+                      </a:pPr>
+                      <a:r>
+                        <a:t>1. Servicio REST funcional y persistente</a:t>
+                      </a:r>
+                    </a:p>
+                  </a:txBody>
+                  <a:tcPr>
+                    <a:solidFill>
+                      <a:srgbClr val="0F172A"/>
+                    </a:solidFill>
+                  </a:tcPr>
+                </a:tc>
+                <a:tc>
+                  <a:txBody>
+                    <a:bodyPr/>
+                    <a:lstStyle/>
+                    <a:p>
+                      <a:pPr>
+                        <a:defRPr sz="1000">
+                          <a:solidFill>
+                            <a:srgbClr val="F1F5F9"/>
+                          </a:solidFill>
+                        </a:defRPr>
+                      </a:pPr>
+                      <a:r>
+                        <a:t>15%</a:t>
+                      </a:r>
+                    </a:p>
+                  </a:txBody>
+                  <a:tcPr>
+                    <a:solidFill>
+                      <a:srgbClr val="0F172A"/>
+                    </a:solidFill>
+                  </a:tcPr>
+                </a:tc>
+                <a:tc>
+                  <a:txBody>
+                    <a:bodyPr/>
+                    <a:lstStyle/>
+                    <a:p>
+                      <a:pPr>
+                        <a:defRPr sz="1000">
+                          <a:solidFill>
+                            <a:srgbClr val="F1F5F9"/>
+                          </a:solidFill>
+                        </a:defRPr>
+                      </a:pPr>
+                      <a:r>
+                        <a:t>Nivel A (20)</a:t>
+                      </a:r>
+                    </a:p>
+                  </a:txBody>
+                  <a:tcPr>
+                    <a:solidFill>
+                      <a:srgbClr val="0F172A"/>
+                    </a:solidFill>
+                  </a:tcPr>
+                </a:tc>
+                <a:tc>
+                  <a:txBody>
+                    <a:bodyPr/>
+                    <a:lstStyle/>
+                    <a:p>
+                      <a:pPr>
+                        <a:defRPr sz="1000">
+                          <a:solidFill>
+                            <a:srgbClr val="F1F5F9"/>
+                          </a:solidFill>
+                        </a:defRPr>
+                      </a:pPr>
+                      <a:r>
+                        <a:t>JPA sobre PostgreSQL (5433), CRUD de órdenes con DataInitializer y 18% IGV.</a:t>
+                      </a:r>
+                    </a:p>
+                  </a:txBody>
+                  <a:tcPr>
+                    <a:solidFill>
+                      <a:srgbClr val="0F172A"/>
+                    </a:solidFill>
+                  </a:tcPr>
+                </a:tc>
+              </a:tr>
+              <a:tr h="627017">
+                <a:tc>
+                  <a:txBody>
+                    <a:bodyPr/>
+                    <a:lstStyle/>
+                    <a:p>
+                      <a:pPr>
+                        <a:defRPr sz="1000">
+                          <a:solidFill>
+                            <a:srgbClr val="F1F5F9"/>
+                          </a:solidFill>
+                        </a:defRPr>
+                      </a:pPr>
+                      <a:r>
+                        <a:t>2. Configuración externa por ambiente</a:t>
+                      </a:r>
+                    </a:p>
+                  </a:txBody>
+                  <a:tcPr>
+                    <a:solidFill>
+                      <a:srgbClr val="0F172A"/>
+                    </a:solidFill>
+                  </a:tcPr>
+                </a:tc>
+                <a:tc>
+                  <a:txBody>
+                    <a:bodyPr/>
+                    <a:lstStyle/>
+                    <a:p>
+                      <a:pPr>
+                        <a:defRPr sz="1000">
+                          <a:solidFill>
+                            <a:srgbClr val="F1F5F9"/>
+                          </a:solidFill>
+                        </a:defRPr>
+                      </a:pPr>
+                      <a:r>
+                        <a:t>15%</a:t>
+                      </a:r>
+                    </a:p>
+                  </a:txBody>
+                  <a:tcPr>
+                    <a:solidFill>
+                      <a:srgbClr val="0F172A"/>
+                    </a:solidFill>
+                  </a:tcPr>
+                </a:tc>
+                <a:tc>
+                  <a:txBody>
+                    <a:bodyPr/>
+                    <a:lstStyle/>
+                    <a:p>
+                      <a:pPr>
+                        <a:defRPr sz="1000">
+                          <a:solidFill>
+                            <a:srgbClr val="F1F5F9"/>
+                          </a:solidFill>
+                        </a:defRPr>
+                      </a:pPr>
+                      <a:r>
+                        <a:t>Nivel A (20)</a:t>
+                      </a:r>
+                    </a:p>
+                  </a:txBody>
+                  <a:tcPr>
+                    <a:solidFill>
+                      <a:srgbClr val="0F172A"/>
+                    </a:solidFill>
+                  </a:tcPr>
+                </a:tc>
+                <a:tc>
+                  <a:txBody>
+                    <a:bodyPr/>
+                    <a:lstStyle/>
+                    <a:p>
+                      <a:pPr>
+                        <a:defRPr sz="1000">
+                          <a:solidFill>
+                            <a:srgbClr val="F1F5F9"/>
+                          </a:solidFill>
+                        </a:defRPr>
+                      </a:pPr>
+                      <a:r>
+                        <a:t>Config Server operativo con segregación real entre DEV y PROD en config-repo.</a:t>
+                      </a:r>
+                    </a:p>
+                  </a:txBody>
+                  <a:tcPr>
+                    <a:solidFill>
+                      <a:srgbClr val="0F172A"/>
+                    </a:solidFill>
+                  </a:tcPr>
+                </a:tc>
+              </a:tr>
+              <a:tr h="627017">
+                <a:tc>
+                  <a:txBody>
+                    <a:bodyPr/>
+                    <a:lstStyle/>
+                    <a:p>
+                      <a:pPr>
+                        <a:defRPr sz="1000">
+                          <a:solidFill>
+                            <a:srgbClr val="F1F5F9"/>
+                          </a:solidFill>
+                        </a:defRPr>
+                      </a:pPr>
+                      <a:r>
+                        <a:t>3. Registro y descubrimiento de servicios</a:t>
+                      </a:r>
+                    </a:p>
+                  </a:txBody>
+                  <a:tcPr>
+                    <a:solidFill>
+                      <a:srgbClr val="0F172A"/>
+                    </a:solidFill>
+                  </a:tcPr>
+                </a:tc>
+                <a:tc>
+                  <a:txBody>
+                    <a:bodyPr/>
+                    <a:lstStyle/>
+                    <a:p>
+                      <a:pPr>
+                        <a:defRPr sz="1000">
+                          <a:solidFill>
+                            <a:srgbClr val="F1F5F9"/>
+                          </a:solidFill>
+                        </a:defRPr>
+                      </a:pPr>
+                      <a:r>
+                        <a:t>20%</a:t>
+                      </a:r>
+                    </a:p>
+                  </a:txBody>
+                  <a:tcPr>
+                    <a:solidFill>
+                      <a:srgbClr val="0F172A"/>
+                    </a:solidFill>
+                  </a:tcPr>
+                </a:tc>
+                <a:tc>
+                  <a:txBody>
+                    <a:bodyPr/>
+                    <a:lstStyle/>
+                    <a:p>
+                      <a:pPr>
+                        <a:defRPr sz="1000">
+                          <a:solidFill>
+                            <a:srgbClr val="F1F5F9"/>
+                          </a:solidFill>
+                        </a:defRPr>
+                      </a:pPr>
+                      <a:r>
+                        <a:t>Nivel A (20)</a:t>
+                      </a:r>
+                    </a:p>
+                  </a:txBody>
+                  <a:tcPr>
+                    <a:solidFill>
+                      <a:srgbClr val="0F172A"/>
+                    </a:solidFill>
+                  </a:tcPr>
+                </a:tc>
+                <a:tc>
+                  <a:txBody>
+                    <a:bodyPr/>
+                    <a:lstStyle/>
+                    <a:p>
+                      <a:pPr>
+                        <a:defRPr sz="1000">
+                          <a:solidFill>
+                            <a:srgbClr val="F1F5F9"/>
+                          </a:solidFill>
+                        </a:defRPr>
+                      </a:pPr>
+                      <a:r>
+                        <a:t>Eureka Server administrando el ciclo de vida y latidos de todos los nodos en vivo.</a:t>
+                      </a:r>
+                    </a:p>
+                  </a:txBody>
+                  <a:tcPr>
+                    <a:solidFill>
+                      <a:srgbClr val="0F172A"/>
+                    </a:solidFill>
+                  </a:tcPr>
+                </a:tc>
+              </a:tr>
+              <a:tr h="627017">
+                <a:tc>
+                  <a:txBody>
+                    <a:bodyPr/>
+                    <a:lstStyle/>
+                    <a:p>
+                      <a:pPr>
+                        <a:defRPr sz="1000">
+                          <a:solidFill>
+                            <a:srgbClr val="F1F5F9"/>
+                          </a:solidFill>
+                        </a:defRPr>
+                      </a:pPr>
+                      <a:r>
+                        <a:t>4. Punto único de acceso mediante Gateway</a:t>
+                      </a:r>
+                    </a:p>
+                  </a:txBody>
+                  <a:tcPr>
+                    <a:solidFill>
+                      <a:srgbClr val="0F172A"/>
+                    </a:solidFill>
+                  </a:tcPr>
+                </a:tc>
+                <a:tc>
+                  <a:txBody>
+                    <a:bodyPr/>
+                    <a:lstStyle/>
+                    <a:p>
+                      <a:pPr>
+                        <a:defRPr sz="1000">
+                          <a:solidFill>
+                            <a:srgbClr val="F1F5F9"/>
+                          </a:solidFill>
+                        </a:defRPr>
+                      </a:pPr>
+                      <a:r>
+                        <a:t>20%</a:t>
+                      </a:r>
+                    </a:p>
+                  </a:txBody>
+                  <a:tcPr>
+                    <a:solidFill>
+                      <a:srgbClr val="0F172A"/>
+                    </a:solidFill>
+                  </a:tcPr>
+                </a:tc>
+                <a:tc>
+                  <a:txBody>
+                    <a:bodyPr/>
+                    <a:lstStyle/>
+                    <a:p>
+                      <a:pPr>
+                        <a:defRPr sz="1000">
+                          <a:solidFill>
+                            <a:srgbClr val="F1F5F9"/>
+                          </a:solidFill>
+                        </a:defRPr>
+                      </a:pPr>
+                      <a:r>
+                        <a:t>Nivel A (20)</a:t>
+                      </a:r>
+                    </a:p>
+                  </a:txBody>
+                  <a:tcPr>
+                    <a:solidFill>
+                      <a:srgbClr val="0F172A"/>
+                    </a:solidFill>
+                  </a:tcPr>
+                </a:tc>
+                <a:tc>
+                  <a:txBody>
+                    <a:bodyPr/>
+                    <a:lstStyle/>
+                    <a:p>
+                      <a:pPr>
+                        <a:defRPr sz="1000">
+                          <a:solidFill>
+                            <a:srgbClr val="F1F5F9"/>
+                          </a:solidFill>
+                        </a:defRPr>
+                      </a:pPr>
+                      <a:r>
+                        <a:t>Spring Cloud Gateway enrutando peticiones dinámicas en el puerto 18080 con lb://.</a:t>
+                      </a:r>
+                    </a:p>
+                  </a:txBody>
+                  <a:tcPr>
+                    <a:solidFill>
+                      <a:srgbClr val="0F172A"/>
+                    </a:solidFill>
+                  </a:tcPr>
+                </a:tc>
+              </a:tr>
+              <a:tr h="627017">
+                <a:tc>
+                  <a:txBody>
+                    <a:bodyPr/>
+                    <a:lstStyle/>
+                    <a:p>
+                      <a:pPr>
+                        <a:defRPr sz="1000">
+                          <a:solidFill>
+                            <a:srgbClr val="F1F5F9"/>
+                          </a:solidFill>
+                        </a:defRPr>
+                      </a:pPr>
+                      <a:r>
+                        <a:t>5. Distribución de tráfico entre instancias</a:t>
+                      </a:r>
+                    </a:p>
+                  </a:txBody>
+                  <a:tcPr>
+                    <a:solidFill>
+                      <a:srgbClr val="0F172A"/>
+                    </a:solidFill>
+                  </a:tcPr>
+                </a:tc>
+                <a:tc>
+                  <a:txBody>
+                    <a:bodyPr/>
+                    <a:lstStyle/>
+                    <a:p>
+                      <a:pPr>
+                        <a:defRPr sz="1000">
+                          <a:solidFill>
+                            <a:srgbClr val="F1F5F9"/>
+                          </a:solidFill>
+                        </a:defRPr>
+                      </a:pPr>
+                      <a:r>
+                        <a:t>20%</a:t>
+                      </a:r>
+                    </a:p>
+                  </a:txBody>
+                  <a:tcPr>
+                    <a:solidFill>
+                      <a:srgbClr val="0F172A"/>
+                    </a:solidFill>
+                  </a:tcPr>
+                </a:tc>
+                <a:tc>
+                  <a:txBody>
+                    <a:bodyPr/>
+                    <a:lstStyle/>
+                    <a:p>
+                      <a:pPr>
+                        <a:defRPr sz="1000">
+                          <a:solidFill>
+                            <a:srgbClr val="F1F5F9"/>
+                          </a:solidFill>
+                        </a:defRPr>
+                      </a:pPr>
+                      <a:r>
+                        <a:t>Nivel A (20)</a:t>
+                      </a:r>
+                    </a:p>
+                  </a:txBody>
+                  <a:tcPr>
+                    <a:solidFill>
+                      <a:srgbClr val="0F172A"/>
+                    </a:solidFill>
+                  </a:tcPr>
+                </a:tc>
+                <a:tc>
+                  <a:txBody>
+                    <a:bodyPr/>
+                    <a:lstStyle/>
+                    <a:p>
+                      <a:pPr>
+                        <a:defRPr sz="1000">
+                          <a:solidFill>
+                            <a:srgbClr val="F1F5F9"/>
+                          </a:solidFill>
+                        </a:defRPr>
+                      </a:pPr>
+                      <a:r>
+                        <a:t>Dos réplicas (8082 y 8083) balanceadas por Round Robin y tolerancia a fallos.</a:t>
+                      </a:r>
+                    </a:p>
+                  </a:txBody>
+                  <a:tcPr>
+                    <a:solidFill>
+                      <a:srgbClr val="0F172A"/>
+                    </a:solidFill>
+                  </a:tcPr>
+                </a:tc>
+              </a:tr>
+              <a:tr h="627018">
+                <a:tc>
+                  <a:txBody>
+                    <a:bodyPr/>
+                    <a:lstStyle/>
+                    <a:p>
+                      <a:pPr>
+                        <a:defRPr sz="1000">
+                          <a:solidFill>
+                            <a:srgbClr val="F1F5F9"/>
+                          </a:solidFill>
+                        </a:defRPr>
+                      </a:pPr>
+                      <a:r>
+                        <a:t>6. Ejecución reproducible y documentación</a:t>
+                      </a:r>
+                    </a:p>
+                  </a:txBody>
+                  <a:tcPr>
+                    <a:solidFill>
+                      <a:srgbClr val="0F172A"/>
+                    </a:solidFill>
+                  </a:tcPr>
+                </a:tc>
+                <a:tc>
+                  <a:txBody>
+                    <a:bodyPr/>
+                    <a:lstStyle/>
+                    <a:p>
+                      <a:pPr>
+                        <a:defRPr sz="1000">
+                          <a:solidFill>
+                            <a:srgbClr val="F1F5F9"/>
+                          </a:solidFill>
+                        </a:defRPr>
+                      </a:pPr>
+                      <a:r>
+                        <a:t>10%</a:t>
+                      </a:r>
+                    </a:p>
+                  </a:txBody>
+                  <a:tcPr>
+                    <a:solidFill>
+                      <a:srgbClr val="0F172A"/>
+                    </a:solidFill>
+                  </a:tcPr>
+                </a:tc>
+                <a:tc>
+                  <a:txBody>
+                    <a:bodyPr/>
+                    <a:lstStyle/>
+                    <a:p>
+                      <a:pPr>
+                        <a:defRPr sz="1000">
+                          <a:solidFill>
+                            <a:srgbClr val="F1F5F9"/>
+                          </a:solidFill>
+                        </a:defRPr>
+                      </a:pPr>
+                      <a:r>
+                        <a:t>Nivel A (20)</a:t>
+                      </a:r>
+                    </a:p>
+                  </a:txBody>
+                  <a:tcPr>
+                    <a:solidFill>
+                      <a:srgbClr val="0F172A"/>
+                    </a:solidFill>
+                  </a:tcPr>
+                </a:tc>
+                <a:tc>
+                  <a:txBody>
+                    <a:bodyPr/>
+                    <a:lstStyle/>
+                    <a:p>
+                      <a:pPr>
+                        <a:defRPr sz="1000">
+                          <a:solidFill>
+                            <a:srgbClr val="F1F5F9"/>
+                          </a:solidFill>
+                        </a:defRPr>
+                      </a:pPr>
+                      <a:r>
+                        <a:t>Lanzadores de 1 clic, README completo y portabilidad multi-entorno probada.</a:t>
+                      </a:r>
+                    </a:p>
+                  </a:txBody>
+                  <a:tcPr>
+                    <a:solidFill>
+                      <a:srgbClr val="0F172A"/>
+                    </a:solidFill>
+                  </a:tcPr>
+                </a:tc>
+              </a:tr>
+            </a:tbl>
+          </a:graphicData>
+        </a:graphic>
+      </p:graphicFrame>
+    </p:spTree>
+  </p:cSld>
+  <p:clrMapOvr>
+    <a:masterClrMapping/>
+  </p:clrMapOvr>
+</p:sld>
+</file>
+
+<file path=ppt/slides/slide2.xml><?xml version="1.0" encoding="utf-8"?>
+<p:sld xmlns:a="http://schemas.openxmlformats.org/drawingml/2006/main" xmlns:p="http://schemas.openxmlformats.org/presentationml/2006/main" xmlns:r="http://schemas.openxmlformats.org/officeDocument/2006/relationships">
+  <p:cSld>
+    <p:spTree>
+      <p:nvGrpSpPr>
+        <p:cNvPr id="1" name=""/>
+        <p:cNvGrpSpPr/>
+        <p:nvPr/>
+      </p:nvGrpSpPr>
+      <p:grpSpPr/>
+      <p:sp>
+        <p:nvSpPr>
+          <p:cNvPr id="2" name="Rectangle 1"/>
+          <p:cNvSpPr/>
+          <p:nvPr/>
+        </p:nvSpPr>
+        <p:spPr>
+          <a:xfrm>
+            <a:off x="0" y="0"/>
+            <a:ext cx="12191695" cy="6858000"/>
+          </a:xfrm>
+          <a:prstGeom prst="rect">
+            <a:avLst/>
+          </a:prstGeom>
+          <a:solidFill>
+            <a:srgbClr val="070B14"/>
+          </a:solidFill>
+          <a:ln>
+            <a:solidFill>
+              <a:srgbClr val="070B14"/>
+            </a:solidFill>
+          </a:ln>
+        </p:spPr>
+        <p:style>
+          <a:lnRef idx="1">
+            <a:schemeClr val="accent1"/>
+          </a:lnRef>
+          <a:fillRef idx="3">
+            <a:schemeClr val="accent1"/>
+          </a:fillRef>
+          <a:effectRef idx="2">
+            <a:schemeClr val="accent1"/>
+          </a:effectRef>
+          <a:fontRef idx="minor">
+            <a:schemeClr val="lt1"/>
+          </a:fontRef>
+        </p:style>
+        <p:txBody>
+          <a:bodyPr rtlCol="0" anchor="ctr"/>
+          <a:lstStyle/>
+          <a:p>
+            <a:pPr algn="ctr"/>
+          </a:p>
+        </p:txBody>
+      </p:sp>
+      <p:sp>
+        <p:nvSpPr>
+          <p:cNvPr id="3" name="TextBox 2"/>
+          <p:cNvSpPr txBox="1"/>
+          <p:nvPr/>
+        </p:nvSpPr>
+        <p:spPr>
+          <a:xfrm>
+            <a:off x="731520" y="320040"/>
+            <a:ext cx="10698480" cy="320040"/>
+          </a:xfrm>
+          <a:prstGeom prst="rect">
+            <a:avLst/>
+          </a:prstGeom>
+          <a:noFill/>
+        </p:spPr>
+        <p:txBody>
+          <a:bodyPr wrap="square">
+            <a:spAutoFit/>
+          </a:bodyPr>
+          <a:lstStyle/>
+          <a:p>
+            <a:pPr>
+              <a:defRPr sz="1050" b="1">
+                <a:solidFill>
+                  <a:srgbClr val="818CF8"/>
+                </a:solidFill>
+              </a:defRPr>
+            </a:pPr>
+            <a:r>
+              <a:t>CHASKIPC • EVALUACIÓN UNIDAD I (S1 A S5) • EQUIPO 01</a:t>
+            </a:r>
+          </a:p>
+        </p:txBody>
+      </p:sp>
+      <p:sp>
+        <p:nvSpPr>
+          <p:cNvPr id="4" name="TextBox 3"/>
+          <p:cNvSpPr txBox="1"/>
+          <p:nvPr/>
+        </p:nvSpPr>
+        <p:spPr>
+          <a:xfrm>
+            <a:off x="731520" y="594360"/>
+            <a:ext cx="10698480" cy="685800"/>
+          </a:xfrm>
+          <a:prstGeom prst="rect">
+            <a:avLst/>
+          </a:prstGeom>
+          <a:noFill/>
+        </p:spPr>
+        <p:txBody>
+          <a:bodyPr wrap="square">
+            <a:spAutoFit/>
+          </a:bodyPr>
+          <a:lstStyle/>
+          <a:p>
+            <a:pPr>
+              <a:defRPr sz="2200" b="1">
+                <a:solidFill>
+                  <a:srgbClr val="38BDF8"/>
+                </a:solidFill>
+              </a:defRPr>
+            </a:pPr>
+            <a:r>
+              <a:t>1. Dominio del Proyecto y Asignación de Roles</a:t>
+            </a:r>
+          </a:p>
+        </p:txBody>
+      </p:sp>
+      <p:sp>
+        <p:nvSpPr>
+          <p:cNvPr id="5" name="TextBox 4"/>
+          <p:cNvSpPr txBox="1"/>
+          <p:nvPr/>
+        </p:nvSpPr>
+        <p:spPr>
+          <a:xfrm>
+            <a:off x="7772400" y="365760"/>
+            <a:ext cx="3657600" cy="365760"/>
+          </a:xfrm>
+          <a:prstGeom prst="rect">
+            <a:avLst/>
+          </a:prstGeom>
+          <a:noFill/>
+        </p:spPr>
+        <p:txBody>
+          <a:bodyPr wrap="none">
+            <a:spAutoFit/>
+          </a:bodyPr>
+          <a:lstStyle/>
+          <a:p>
+            <a:pPr algn="r">
+              <a:defRPr sz="1100" b="1">
+                <a:solidFill>
+                  <a:srgbClr val="10B981"/>
+                </a:solidFill>
+              </a:defRPr>
+            </a:pPr>
+            <a:r>
+              <a:t>🎤 Eliceo Parillo (Min 1-2)</a:t>
+            </a:r>
+          </a:p>
+        </p:txBody>
+      </p:sp>
+      <p:sp>
+        <p:nvSpPr>
+          <p:cNvPr id="6" name="Rounded Rectangle 5"/>
+          <p:cNvSpPr/>
+          <p:nvPr/>
+        </p:nvSpPr>
+        <p:spPr>
+          <a:xfrm>
+            <a:off x="731520" y="1371600"/>
+            <a:ext cx="5120640" cy="2011680"/>
+          </a:xfrm>
+          <a:prstGeom prst="roundRect">
+            <a:avLst/>
+          </a:prstGeom>
+          <a:solidFill>
+            <a:srgbClr val="0F172A"/>
+          </a:solidFill>
+          <a:ln>
+            <a:solidFill>
+              <a:srgbClr val="38BDF8"/>
+            </a:solidFill>
+          </a:ln>
+        </p:spPr>
+        <p:style>
+          <a:lnRef idx="1">
+            <a:schemeClr val="accent1"/>
+          </a:lnRef>
+          <a:fillRef idx="3">
+            <a:schemeClr val="accent1"/>
+          </a:fillRef>
+          <a:effectRef idx="2">
+            <a:schemeClr val="accent1"/>
+          </a:effectRef>
+          <a:fontRef idx="minor">
+            <a:schemeClr val="lt1"/>
+          </a:fontRef>
+        </p:style>
+        <p:txBody>
+          <a:bodyPr rtlCol="0" anchor="ctr" wrap="square"/>
+          <a:lstStyle/>
+          <a:p>
+            <a:pPr algn="ctr">
+              <a:defRPr sz="1400" b="1">
+                <a:solidFill>
+                  <a:srgbClr val="38BDF8"/>
+                </a:solidFill>
+              </a:defRPr>
+            </a:pPr>
+            <a:r>
+              <a:t>🎯 Problema y Flujo Operativo</a:t>
+            </a:r>
+          </a:p>
+          <a:p>
+            <a:br/>
+            <a:pPr>
+              <a:defRPr sz="1100">
+                <a:solidFill>
+                  <a:srgbClr val="F1F5F9"/>
+                </a:solidFill>
+              </a:defRPr>
+            </a:pPr>
+            <a:r>
+              <a:t>Resuelve la adquisición y cotización de hardware gamer y computadoras ensambladas con stock en tiempo real.</a:t>
+            </a:r>
+            <a:br/>
+            <a:br/>
+            <a:r>
+              <a:t>Flujo Operativo Distribuido:</a:t>
+            </a:r>
+            <a:br/>
+            <a:r>
+              <a:t>Catálogo (pc-catalogo) ➔ Órdenes (pc-orden) ➔ Pagos (pc-pago) ➔ Seguridad (pc-auth)</a:t>
+            </a:r>
+          </a:p>
+        </p:txBody>
+      </p:sp>
+      <p:sp>
+        <p:nvSpPr>
+          <p:cNvPr id="7" name="Rounded Rectangle 6"/>
+          <p:cNvSpPr/>
+          <p:nvPr/>
+        </p:nvSpPr>
+        <p:spPr>
+          <a:xfrm>
+            <a:off x="6309360" y="1371600"/>
+            <a:ext cx="5120640" cy="2011680"/>
+          </a:xfrm>
+          <a:prstGeom prst="roundRect">
+            <a:avLst/>
+          </a:prstGeom>
+          <a:solidFill>
+            <a:srgbClr val="0F172A"/>
+          </a:solidFill>
+          <a:ln>
+            <a:solidFill>
+              <a:srgbClr val="10B981"/>
+            </a:solidFill>
+          </a:ln>
+        </p:spPr>
+        <p:style>
+          <a:lnRef idx="1">
+            <a:schemeClr val="accent1"/>
+          </a:lnRef>
+          <a:fillRef idx="3">
+            <a:schemeClr val="accent1"/>
+          </a:fillRef>
+          <a:effectRef idx="2">
+            <a:schemeClr val="accent1"/>
+          </a:effectRef>
+          <a:fontRef idx="minor">
+            <a:schemeClr val="lt1"/>
+          </a:fontRef>
+        </p:style>
+        <p:txBody>
+          <a:bodyPr rtlCol="0" anchor="ctr" wrap="square"/>
+          <a:lstStyle/>
+          <a:p>
+            <a:pPr algn="ctr">
+              <a:defRPr sz="1400" b="1">
+                <a:solidFill>
+                  <a:srgbClr val="10B981"/>
+                </a:solidFill>
+              </a:defRPr>
+            </a:pPr>
+            <a:r>
+              <a:t>👥 Actores y Pasarela Externa</a:t>
+            </a:r>
+          </a:p>
+          <a:p>
+            <a:br/>
+            <a:pPr>
+              <a:defRPr sz="1100">
+                <a:solidFill>
+                  <a:srgbClr val="F1F5F9"/>
+                </a:solidFill>
+              </a:defRPr>
+            </a:pPr>
+            <a:r>
+              <a:t>• Cliente / Comprador: Explora componentes, filtra ficha técnica y paga en línea.</a:t>
+            </a:r>
+            <a:br/>
+            <a:r>
+              <a:t>• Administrador: Administra inventario, repone existencias y audita transacciones.</a:t>
+            </a:r>
+            <a:br/>
+            <a:r>
+              <a:t>• Servicio Externo Real: Mercado Pago API (Checkout Pro / Webhook IPN Sandbox).</a:t>
+            </a:r>
+          </a:p>
+        </p:txBody>
+      </p:sp>
+      <p:graphicFrame>
+        <p:nvGraphicFramePr>
+          <p:cNvPr id="8" name="Table 7"/>
+          <p:cNvGraphicFramePr>
+            <a:graphicFrameLocks noGrp="1"/>
+          </p:cNvGraphicFramePr>
+          <p:nvPr/>
+        </p:nvGraphicFramePr>
+        <p:xfrm>
+          <a:off x="731520" y="3657600"/>
+          <a:ext cx="10698480" cy="2560320"/>
+        </p:xfrm>
+        <a:graphic>
+          <a:graphicData uri="http://schemas.openxmlformats.org/drawingml/2006/table">
+            <a:tbl>
+              <a:tblPr firstRow="1" bandRow="1">
+                <a:tableStyleId>{5C22544A-7EE6-4342-B048-85BDC9FD1C3A}</a:tableStyleId>
+              </a:tblPr>
+              <a:tblGrid>
+                <a:gridCol w="2377440"/>
+                <a:gridCol w="2926080"/>
+                <a:gridCol w="2286000"/>
+                <a:gridCol w="1828800"/>
+                <a:gridCol w="1280160"/>
+              </a:tblGrid>
+              <a:tr h="853440">
+                <a:tc>
+                  <a:txBody>
+                    <a:bodyPr/>
+                    <a:lstStyle/>
+                    <a:p>
+                      <a:pPr>
+                        <a:defRPr sz="1100" b="1">
+                          <a:solidFill>
+                            <a:srgbClr val="F1F5F9"/>
+                          </a:solidFill>
+                        </a:defRPr>
+                      </a:pPr>
+                      <a:r>
+                        <a:t>Integrante</a:t>
+                      </a:r>
+                    </a:p>
+                  </a:txBody>
+                  <a:tcPr>
+                    <a:solidFill>
+                      <a:srgbClr val="0E7490"/>
+                    </a:solidFill>
+                  </a:tcPr>
+                </a:tc>
+                <a:tc>
+                  <a:txBody>
+                    <a:bodyPr/>
+                    <a:lstStyle/>
+                    <a:p>
+                      <a:pPr>
+                        <a:defRPr sz="1100" b="1">
+                          <a:solidFill>
+                            <a:srgbClr val="F1F5F9"/>
+                          </a:solidFill>
+                        </a:defRPr>
+                      </a:pPr>
+                      <a:r>
+                        <a:t>Énfasis / Rol Previsto</a:t>
+                      </a:r>
+                    </a:p>
+                  </a:txBody>
+                  <a:tcPr>
+                    <a:solidFill>
+                      <a:srgbClr val="0E7490"/>
+                    </a:solidFill>
+                  </a:tcPr>
+                </a:tc>
+                <a:tc>
+                  <a:txBody>
+                    <a:bodyPr/>
+                    <a:lstStyle/>
+                    <a:p>
+                      <a:pPr>
+                        <a:defRPr sz="1100" b="1">
+                          <a:solidFill>
+                            <a:srgbClr val="F1F5F9"/>
+                          </a:solidFill>
+                        </a:defRPr>
+                      </a:pPr>
+                      <a:r>
+                        <a:t>Ms. Transaccional</a:t>
+                      </a:r>
+                    </a:p>
+                  </a:txBody>
+                  <a:tcPr>
+                    <a:solidFill>
+                      <a:srgbClr val="0E7490"/>
+                    </a:solidFill>
+                  </a:tcPr>
+                </a:tc>
+                <a:tc>
+                  <a:txBody>
+                    <a:bodyPr/>
+                    <a:lstStyle/>
+                    <a:p>
+                      <a:pPr>
+                        <a:defRPr sz="1100" b="1">
+                          <a:solidFill>
+                            <a:srgbClr val="F1F5F9"/>
+                          </a:solidFill>
+                        </a:defRPr>
+                      </a:pPr>
+                      <a:r>
+                        <a:t>Ms. No Transaccional</a:t>
+                      </a:r>
+                    </a:p>
+                  </a:txBody>
+                  <a:tcPr>
+                    <a:solidFill>
+                      <a:srgbClr val="0E7490"/>
+                    </a:solidFill>
+                  </a:tcPr>
+                </a:tc>
+                <a:tc>
+                  <a:txBody>
+                    <a:bodyPr/>
+                    <a:lstStyle/>
+                    <a:p>
+                      <a:pPr>
+                        <a:defRPr sz="1100" b="1">
+                          <a:solidFill>
+                            <a:srgbClr val="F1F5F9"/>
+                          </a:solidFill>
+                        </a:defRPr>
+                      </a:pPr>
+                      <a:r>
+                        <a:t>Estado U1</a:t>
+                      </a:r>
+                    </a:p>
+                  </a:txBody>
+                  <a:tcPr>
+                    <a:solidFill>
+                      <a:srgbClr val="0E7490"/>
+                    </a:solidFill>
+                  </a:tcPr>
+                </a:tc>
+              </a:tr>
+              <a:tr h="853440">
                 <a:tc>
                   <a:txBody>
                     <a:bodyPr/>
@@ -6918,13 +5209,13 @@
                         </a:defRPr>
                       </a:pPr>
                       <a:r>
-                        <a:t>1. Servicio REST funcional y persistente</a:t>
+                        <a:t>Eliceo Parillo Mostajo</a:t>
                       </a:r>
                     </a:p>
                   </a:txBody>
                   <a:tcPr>
                     <a:solidFill>
-                      <a:srgbClr val="1E293B"/>
+                      <a:srgbClr val="0F172A"/>
                     </a:solidFill>
                   </a:tcPr>
                 </a:tc>
@@ -6941,13 +5232,13 @@
                         </a:defRPr>
                       </a:pPr>
                       <a:r>
-                        <a:t>15%</a:t>
+                        <a:t>Arquitectura backend, órdenes de compra y catálogo hardware</a:t>
                       </a:r>
                     </a:p>
                   </a:txBody>
                   <a:tcPr>
                     <a:solidFill>
-                      <a:srgbClr val="1E293B"/>
+                      <a:srgbClr val="0F172A"/>
                     </a:solidFill>
                   </a:tcPr>
                 </a:tc>
@@ -6964,13 +5255,13 @@
                         </a:defRPr>
                       </a:pPr>
                       <a:r>
-                        <a:t>Nivel A (20)</a:t>
+                        <a:t>pc-orden-ms (Cabecera-Detalle, IGV)</a:t>
                       </a:r>
                     </a:p>
                   </a:txBody>
                   <a:tcPr>
                     <a:solidFill>
-                      <a:srgbClr val="1E293B"/>
+                      <a:srgbClr val="0F172A"/>
                     </a:solidFill>
                   </a:tcPr>
                 </a:tc>
@@ -6987,38 +5278,13 @@
                         </a:defRPr>
                       </a:pPr>
                       <a:r>
-                        <a:t>JPA sobre PostgreSQL (5433), CRUD de catálogo y órdenes con DataInitializer.</a:t>
+                        <a:t>pc-catalogo-ms (Hardware)</a:t>
                       </a:r>
                     </a:p>
                   </a:txBody>
                   <a:tcPr>
                     <a:solidFill>
-                      <a:srgbClr val="1E293B"/>
-                    </a:solidFill>
-                  </a:tcPr>
-                </a:tc>
-              </a:tr>
-              <a:tr h="587828">
-                <a:tc>
-                  <a:txBody>
-                    <a:bodyPr/>
-                    <a:lstStyle/>
-                    <a:p>
-                      <a:pPr>
-                        <a:defRPr sz="1050">
-                          <a:solidFill>
-                            <a:srgbClr val="F1F5F9"/>
-                          </a:solidFill>
-                        </a:defRPr>
-                      </a:pPr>
-                      <a:r>
-                        <a:t>2. Configuración externa por ambiente</a:t>
-                      </a:r>
-                    </a:p>
-                  </a:txBody>
-                  <a:tcPr>
-                    <a:solidFill>
-                      <a:srgbClr val="1E293B"/>
+                      <a:srgbClr val="0F172A"/>
                     </a:solidFill>
                   </a:tcPr>
                 </a:tc>
@@ -7035,13 +5301,38 @@
                         </a:defRPr>
                       </a:pPr>
                       <a:r>
-                        <a:t>15%</a:t>
+                        <a:t>Operativo</a:t>
                       </a:r>
                     </a:p>
                   </a:txBody>
                   <a:tcPr>
                     <a:solidFill>
-                      <a:srgbClr val="1E293B"/>
+                      <a:srgbClr val="0F172A"/>
+                    </a:solidFill>
+                  </a:tcPr>
+                </a:tc>
+              </a:tr>
+              <a:tr h="853440">
+                <a:tc>
+                  <a:txBody>
+                    <a:bodyPr/>
+                    <a:lstStyle/>
+                    <a:p>
+                      <a:pPr>
+                        <a:defRPr sz="1050">
+                          <a:solidFill>
+                            <a:srgbClr val="F1F5F9"/>
+                          </a:solidFill>
+                        </a:defRPr>
+                      </a:pPr>
+                      <a:r>
+                        <a:t>Laura Vargas Cristhian Paul</a:t>
+                      </a:r>
+                    </a:p>
+                  </a:txBody>
+                  <a:tcPr>
+                    <a:solidFill>
+                      <a:srgbClr val="0F172A"/>
                     </a:solidFill>
                   </a:tcPr>
                 </a:tc>
@@ -7058,13 +5349,13 @@
                         </a:defRPr>
                       </a:pPr>
                       <a:r>
-                        <a:t>Nivel A (20)</a:t>
+                        <a:t>Pasarela de pagos externa, seguridad y tokens JWT</a:t>
                       </a:r>
                     </a:p>
                   </a:txBody>
                   <a:tcPr>
                     <a:solidFill>
-                      <a:srgbClr val="1E293B"/>
+                      <a:srgbClr val="0F172A"/>
                     </a:solidFill>
                   </a:tcPr>
                 </a:tc>
@@ -7081,38 +5372,13 @@
                         </a:defRPr>
                       </a:pPr>
                       <a:r>
-                        <a:t>Config Server operativo con segregación verificable entre DEV y PROD en config-repo.</a:t>
+                        <a:t>pc-pago-ms (Mercado Pago)</a:t>
                       </a:r>
                     </a:p>
                   </a:txBody>
                   <a:tcPr>
                     <a:solidFill>
-                      <a:srgbClr val="1E293B"/>
-                    </a:solidFill>
-                  </a:tcPr>
-                </a:tc>
-              </a:tr>
-              <a:tr h="587828">
-                <a:tc>
-                  <a:txBody>
-                    <a:bodyPr/>
-                    <a:lstStyle/>
-                    <a:p>
-                      <a:pPr>
-                        <a:defRPr sz="1050">
-                          <a:solidFill>
-                            <a:srgbClr val="F1F5F9"/>
-                          </a:solidFill>
-                        </a:defRPr>
-                      </a:pPr>
-                      <a:r>
-                        <a:t>3. Registro y descubrimiento de servicios</a:t>
-                      </a:r>
-                    </a:p>
-                  </a:txBody>
-                  <a:tcPr>
-                    <a:solidFill>
-                      <a:srgbClr val="1E293B"/>
+                      <a:srgbClr val="0F172A"/>
                     </a:solidFill>
                   </a:tcPr>
                 </a:tc>
@@ -7129,13 +5395,13 @@
                         </a:defRPr>
                       </a:pPr>
                       <a:r>
-                        <a:t>20%</a:t>
+                        <a:t>pc-auth-ms (JWT, BCrypt)</a:t>
                       </a:r>
                     </a:p>
                   </a:txBody>
                   <a:tcPr>
                     <a:solidFill>
-                      <a:srgbClr val="1E293B"/>
+                      <a:srgbClr val="0F172A"/>
                     </a:solidFill>
                   </a:tcPr>
                 </a:tc>
@@ -7152,13 +5418,2096 @@
                         </a:defRPr>
                       </a:pPr>
                       <a:r>
-                        <a:t>Nivel A (20)</a:t>
+                        <a:t>Diseñado U2</a:t>
                       </a:r>
                     </a:p>
                   </a:txBody>
                   <a:tcPr>
                     <a:solidFill>
-                      <a:srgbClr val="1E293B"/>
+                      <a:srgbClr val="0F172A"/>
+                    </a:solidFill>
+                  </a:tcPr>
+                </a:tc>
+              </a:tr>
+            </a:tbl>
+          </a:graphicData>
+        </a:graphic>
+      </p:graphicFrame>
+    </p:spTree>
+  </p:cSld>
+  <p:clrMapOvr>
+    <a:masterClrMapping/>
+  </p:clrMapOvr>
+</p:sld>
+</file>
+
+<file path=ppt/slides/slide3.xml><?xml version="1.0" encoding="utf-8"?>
+<p:sld xmlns:a="http://schemas.openxmlformats.org/drawingml/2006/main" xmlns:p="http://schemas.openxmlformats.org/presentationml/2006/main" xmlns:r="http://schemas.openxmlformats.org/officeDocument/2006/relationships">
+  <p:cSld>
+    <p:spTree>
+      <p:nvGrpSpPr>
+        <p:cNvPr id="1" name=""/>
+        <p:cNvGrpSpPr/>
+        <p:nvPr/>
+      </p:nvGrpSpPr>
+      <p:grpSpPr/>
+      <p:sp>
+        <p:nvSpPr>
+          <p:cNvPr id="2" name="Rectangle 1"/>
+          <p:cNvSpPr/>
+          <p:nvPr/>
+        </p:nvSpPr>
+        <p:spPr>
+          <a:xfrm>
+            <a:off x="0" y="0"/>
+            <a:ext cx="12191695" cy="6858000"/>
+          </a:xfrm>
+          <a:prstGeom prst="rect">
+            <a:avLst/>
+          </a:prstGeom>
+          <a:solidFill>
+            <a:srgbClr val="070B14"/>
+          </a:solidFill>
+          <a:ln>
+            <a:solidFill>
+              <a:srgbClr val="070B14"/>
+            </a:solidFill>
+          </a:ln>
+        </p:spPr>
+        <p:style>
+          <a:lnRef idx="1">
+            <a:schemeClr val="accent1"/>
+          </a:lnRef>
+          <a:fillRef idx="3">
+            <a:schemeClr val="accent1"/>
+          </a:fillRef>
+          <a:effectRef idx="2">
+            <a:schemeClr val="accent1"/>
+          </a:effectRef>
+          <a:fontRef idx="minor">
+            <a:schemeClr val="lt1"/>
+          </a:fontRef>
+        </p:style>
+        <p:txBody>
+          <a:bodyPr rtlCol="0" anchor="ctr"/>
+          <a:lstStyle/>
+          <a:p>
+            <a:pPr algn="ctr"/>
+          </a:p>
+        </p:txBody>
+      </p:sp>
+      <p:sp>
+        <p:nvSpPr>
+          <p:cNvPr id="3" name="TextBox 2"/>
+          <p:cNvSpPr txBox="1"/>
+          <p:nvPr/>
+        </p:nvSpPr>
+        <p:spPr>
+          <a:xfrm>
+            <a:off x="731520" y="320040"/>
+            <a:ext cx="10698480" cy="320040"/>
+          </a:xfrm>
+          <a:prstGeom prst="rect">
+            <a:avLst/>
+          </a:prstGeom>
+          <a:noFill/>
+        </p:spPr>
+        <p:txBody>
+          <a:bodyPr wrap="square">
+            <a:spAutoFit/>
+          </a:bodyPr>
+          <a:lstStyle/>
+          <a:p>
+            <a:pPr>
+              <a:defRPr sz="1050" b="1">
+                <a:solidFill>
+                  <a:srgbClr val="818CF8"/>
+                </a:solidFill>
+              </a:defRPr>
+            </a:pPr>
+            <a:r>
+              <a:t>CHASKIPC • EVALUACIÓN UNIDAD I (S1 A S5) • EQUIPO 01</a:t>
+            </a:r>
+          </a:p>
+        </p:txBody>
+      </p:sp>
+      <p:sp>
+        <p:nvSpPr>
+          <p:cNvPr id="4" name="TextBox 3"/>
+          <p:cNvSpPr txBox="1"/>
+          <p:nvPr/>
+        </p:nvSpPr>
+        <p:spPr>
+          <a:xfrm>
+            <a:off x="731520" y="594360"/>
+            <a:ext cx="10698480" cy="685800"/>
+          </a:xfrm>
+          <a:prstGeom prst="rect">
+            <a:avLst/>
+          </a:prstGeom>
+          <a:noFill/>
+        </p:spPr>
+        <p:txBody>
+          <a:bodyPr wrap="square">
+            <a:spAutoFit/>
+          </a:bodyPr>
+          <a:lstStyle/>
+          <a:p>
+            <a:pPr>
+              <a:defRPr sz="2200" b="1">
+                <a:solidFill>
+                  <a:srgbClr val="38BDF8"/>
+                </a:solidFill>
+              </a:defRPr>
+            </a:pPr>
+            <a:r>
+              <a:t>2.4 Arquitectura del Sistema Distribuido Base</a:t>
+            </a:r>
+          </a:p>
+        </p:txBody>
+      </p:sp>
+      <p:sp>
+        <p:nvSpPr>
+          <p:cNvPr id="5" name="TextBox 4"/>
+          <p:cNvSpPr txBox="1"/>
+          <p:nvPr/>
+        </p:nvSpPr>
+        <p:spPr>
+          <a:xfrm>
+            <a:off x="7772400" y="365760"/>
+            <a:ext cx="3657600" cy="365760"/>
+          </a:xfrm>
+          <a:prstGeom prst="rect">
+            <a:avLst/>
+          </a:prstGeom>
+          <a:noFill/>
+        </p:spPr>
+        <p:txBody>
+          <a:bodyPr wrap="none">
+            <a:spAutoFit/>
+          </a:bodyPr>
+          <a:lstStyle/>
+          <a:p>
+            <a:pPr algn="r">
+              <a:defRPr sz="1100" b="1">
+                <a:solidFill>
+                  <a:srgbClr val="10B981"/>
+                </a:solidFill>
+              </a:defRPr>
+            </a:pPr>
+            <a:r>
+              <a:t>🎤 Eliceo Parillo (Min 3-4)</a:t>
+            </a:r>
+          </a:p>
+        </p:txBody>
+      </p:sp>
+      <p:sp>
+        <p:nvSpPr>
+          <p:cNvPr id="6" name="Rounded Rectangle 5"/>
+          <p:cNvSpPr/>
+          <p:nvPr/>
+        </p:nvSpPr>
+        <p:spPr>
+          <a:xfrm>
+            <a:off x="731520" y="1371600"/>
+            <a:ext cx="3383280" cy="2194560"/>
+          </a:xfrm>
+          <a:prstGeom prst="roundRect">
+            <a:avLst/>
+          </a:prstGeom>
+          <a:solidFill>
+            <a:srgbClr val="0F172A"/>
+          </a:solidFill>
+          <a:ln>
+            <a:solidFill>
+              <a:srgbClr val="38BDF8"/>
+            </a:solidFill>
+          </a:ln>
+        </p:spPr>
+        <p:style>
+          <a:lnRef idx="1">
+            <a:schemeClr val="accent1"/>
+          </a:lnRef>
+          <a:fillRef idx="3">
+            <a:schemeClr val="accent1"/>
+          </a:fillRef>
+          <a:effectRef idx="2">
+            <a:schemeClr val="accent1"/>
+          </a:effectRef>
+          <a:fontRef idx="minor">
+            <a:schemeClr val="lt1"/>
+          </a:fontRef>
+        </p:style>
+        <p:txBody>
+          <a:bodyPr rtlCol="0" anchor="ctr" wrap="square"/>
+          <a:lstStyle/>
+          <a:p>
+            <a:pPr algn="ctr">
+              <a:defRPr sz="1200" b="1">
+                <a:solidFill>
+                  <a:srgbClr val="38BDF8"/>
+                </a:solidFill>
+              </a:defRPr>
+            </a:pPr>
+            <a:r>
+              <a:t>API GATEWAY (:18080 DEV / :28080 PROD)</a:t>
+            </a:r>
+          </a:p>
+          <a:p>
+            <a:br/>
+            <a:pPr>
+              <a:defRPr sz="1050">
+                <a:solidFill>
+                  <a:srgbClr val="F1F5F9"/>
+                </a:solidFill>
+              </a:defRPr>
+            </a:pPr>
+            <a:r>
+              <a:t>Punto único de acceso reactivo (Netty/WebFlux). Resuelve rutas lb:// hacia microservicios con balanceo Round Robin.</a:t>
+            </a:r>
+          </a:p>
+        </p:txBody>
+      </p:sp>
+      <p:sp>
+        <p:nvSpPr>
+          <p:cNvPr id="7" name="Rounded Rectangle 6"/>
+          <p:cNvSpPr/>
+          <p:nvPr/>
+        </p:nvSpPr>
+        <p:spPr>
+          <a:xfrm>
+            <a:off x="4389120" y="1371600"/>
+            <a:ext cx="3383280" cy="2194560"/>
+          </a:xfrm>
+          <a:prstGeom prst="roundRect">
+            <a:avLst/>
+          </a:prstGeom>
+          <a:solidFill>
+            <a:srgbClr val="0F172A"/>
+          </a:solidFill>
+          <a:ln>
+            <a:solidFill>
+              <a:srgbClr val="38BDF8"/>
+            </a:solidFill>
+          </a:ln>
+        </p:spPr>
+        <p:style>
+          <a:lnRef idx="1">
+            <a:schemeClr val="accent1"/>
+          </a:lnRef>
+          <a:fillRef idx="3">
+            <a:schemeClr val="accent1"/>
+          </a:fillRef>
+          <a:effectRef idx="2">
+            <a:schemeClr val="accent1"/>
+          </a:effectRef>
+          <a:fontRef idx="minor">
+            <a:schemeClr val="lt1"/>
+          </a:fontRef>
+        </p:style>
+        <p:txBody>
+          <a:bodyPr rtlCol="0" anchor="ctr" wrap="square"/>
+          <a:lstStyle/>
+          <a:p>
+            <a:pPr algn="ctr">
+              <a:defRPr sz="1200" b="1">
+                <a:solidFill>
+                  <a:srgbClr val="38BDF8"/>
+                </a:solidFill>
+              </a:defRPr>
+            </a:pPr>
+            <a:r>
+              <a:t>EUREKA SERVER (:8761 DEV / :28761 PROD)</a:t>
+            </a:r>
+          </a:p>
+          <a:p>
+            <a:br/>
+            <a:pPr>
+              <a:defRPr sz="1050">
+                <a:solidFill>
+                  <a:srgbClr val="F1F5F9"/>
+                </a:solidFill>
+              </a:defRPr>
+            </a:pPr>
+            <a:r>
+              <a:t>Service Registry dinámico. Supervisa el ciclo de vida y latidos periódicos (heartbeats cada 30s) sin puertos cableados a mano.</a:t>
+            </a:r>
+          </a:p>
+        </p:txBody>
+      </p:sp>
+      <p:sp>
+        <p:nvSpPr>
+          <p:cNvPr id="8" name="Rounded Rectangle 7"/>
+          <p:cNvSpPr/>
+          <p:nvPr/>
+        </p:nvSpPr>
+        <p:spPr>
+          <a:xfrm>
+            <a:off x="8046720" y="1371600"/>
+            <a:ext cx="3383280" cy="2194560"/>
+          </a:xfrm>
+          <a:prstGeom prst="roundRect">
+            <a:avLst/>
+          </a:prstGeom>
+          <a:solidFill>
+            <a:srgbClr val="0F172A"/>
+          </a:solidFill>
+          <a:ln>
+            <a:solidFill>
+              <a:srgbClr val="38BDF8"/>
+            </a:solidFill>
+          </a:ln>
+        </p:spPr>
+        <p:style>
+          <a:lnRef idx="1">
+            <a:schemeClr val="accent1"/>
+          </a:lnRef>
+          <a:fillRef idx="3">
+            <a:schemeClr val="accent1"/>
+          </a:fillRef>
+          <a:effectRef idx="2">
+            <a:schemeClr val="accent1"/>
+          </a:effectRef>
+          <a:fontRef idx="minor">
+            <a:schemeClr val="lt1"/>
+          </a:fontRef>
+        </p:style>
+        <p:txBody>
+          <a:bodyPr rtlCol="0" anchor="ctr" wrap="square"/>
+          <a:lstStyle/>
+          <a:p>
+            <a:pPr algn="ctr">
+              <a:defRPr sz="1200" b="1">
+                <a:solidFill>
+                  <a:srgbClr val="38BDF8"/>
+                </a:solidFill>
+              </a:defRPr>
+            </a:pPr>
+            <a:r>
+              <a:t>CONFIG SERVER (:8888 DEV / :28888 PROD)</a:t>
+            </a:r>
+          </a:p>
+          <a:p>
+            <a:br/>
+            <a:pPr>
+              <a:defRPr sz="1050">
+                <a:solidFill>
+                  <a:srgbClr val="F1F5F9"/>
+                </a:solidFill>
+              </a:defRPr>
+            </a:pPr>
+            <a:r>
+              <a:t>Configuración centralizada. Sirve perfiles dev/prod desde config-repo desacoplando parámetros del código (Factor III).</a:t>
+            </a:r>
+          </a:p>
+        </p:txBody>
+      </p:sp>
+      <p:sp>
+        <p:nvSpPr>
+          <p:cNvPr id="9" name="Rounded Rectangle 8"/>
+          <p:cNvSpPr/>
+          <p:nvPr/>
+        </p:nvSpPr>
+        <p:spPr>
+          <a:xfrm>
+            <a:off x="731520" y="3840480"/>
+            <a:ext cx="3383280" cy="2194560"/>
+          </a:xfrm>
+          <a:prstGeom prst="roundRect">
+            <a:avLst/>
+          </a:prstGeom>
+          <a:solidFill>
+            <a:srgbClr val="0F172A"/>
+          </a:solidFill>
+          <a:ln>
+            <a:solidFill>
+              <a:srgbClr val="38BDF8"/>
+            </a:solidFill>
+          </a:ln>
+        </p:spPr>
+        <p:style>
+          <a:lnRef idx="1">
+            <a:schemeClr val="accent1"/>
+          </a:lnRef>
+          <a:fillRef idx="3">
+            <a:schemeClr val="accent1"/>
+          </a:fillRef>
+          <a:effectRef idx="2">
+            <a:schemeClr val="accent1"/>
+          </a:effectRef>
+          <a:fontRef idx="minor">
+            <a:schemeClr val="lt1"/>
+          </a:fontRef>
+        </p:style>
+        <p:txBody>
+          <a:bodyPr rtlCol="0" anchor="ctr" wrap="square"/>
+          <a:lstStyle/>
+          <a:p>
+            <a:pPr algn="ctr">
+              <a:defRPr sz="1200" b="1">
+                <a:solidFill>
+                  <a:srgbClr val="38BDF8"/>
+                </a:solidFill>
+              </a:defRPr>
+            </a:pPr>
+            <a:r>
+              <a:t>CATÁLOGO HARDWARE (:8081)</a:t>
+            </a:r>
+          </a:p>
+          <a:p>
+            <a:br/>
+            <a:pPr>
+              <a:defRPr sz="1050">
+                <a:solidFill>
+                  <a:srgbClr val="F1F5F9"/>
+                </a:solidFill>
+              </a:defRPr>
+            </a:pPr>
+            <a:r>
+              <a:t>Microservicio no transaccional con inventario de componentes (CPUs, GPUs, RAM). Incluye DataInitializer de precarga.</a:t>
+            </a:r>
+          </a:p>
+        </p:txBody>
+      </p:sp>
+      <p:sp>
+        <p:nvSpPr>
+          <p:cNvPr id="10" name="Rounded Rectangle 9"/>
+          <p:cNvSpPr/>
+          <p:nvPr/>
+        </p:nvSpPr>
+        <p:spPr>
+          <a:xfrm>
+            <a:off x="4389120" y="3840480"/>
+            <a:ext cx="3383280" cy="2194560"/>
+          </a:xfrm>
+          <a:prstGeom prst="roundRect">
+            <a:avLst/>
+          </a:prstGeom>
+          <a:solidFill>
+            <a:srgbClr val="0F172A"/>
+          </a:solidFill>
+          <a:ln>
+            <a:solidFill>
+              <a:srgbClr val="38BDF8"/>
+            </a:solidFill>
+          </a:ln>
+        </p:spPr>
+        <p:style>
+          <a:lnRef idx="1">
+            <a:schemeClr val="accent1"/>
+          </a:lnRef>
+          <a:fillRef idx="3">
+            <a:schemeClr val="accent1"/>
+          </a:fillRef>
+          <a:effectRef idx="2">
+            <a:schemeClr val="accent1"/>
+          </a:effectRef>
+          <a:fontRef idx="minor">
+            <a:schemeClr val="lt1"/>
+          </a:fontRef>
+        </p:style>
+        <p:txBody>
+          <a:bodyPr rtlCol="0" anchor="ctr" wrap="square"/>
+          <a:lstStyle/>
+          <a:p>
+            <a:pPr algn="ctr">
+              <a:defRPr sz="1200" b="1">
+                <a:solidFill>
+                  <a:srgbClr val="38BDF8"/>
+                </a:solidFill>
+              </a:defRPr>
+            </a:pPr>
+            <a:r>
+              <a:t>ÓRDENES TRANSACCIONAL (:8082 y :8083)</a:t>
+            </a:r>
+          </a:p>
+          <a:p>
+            <a:br/>
+            <a:pPr>
+              <a:defRPr sz="1050">
+                <a:solidFill>
+                  <a:srgbClr val="F1F5F9"/>
+                </a:solidFill>
+              </a:defRPr>
+            </a:pPr>
+            <a:r>
+              <a:t>Microservicio de compras con modelo Cabecera-Detalle, 18% IGV y persistencia en PostgreSQL compartida. 2 réplicas concurrentes.</a:t>
+            </a:r>
+          </a:p>
+        </p:txBody>
+      </p:sp>
+      <p:sp>
+        <p:nvSpPr>
+          <p:cNvPr id="11" name="Rounded Rectangle 10"/>
+          <p:cNvSpPr/>
+          <p:nvPr/>
+        </p:nvSpPr>
+        <p:spPr>
+          <a:xfrm>
+            <a:off x="8046720" y="3840480"/>
+            <a:ext cx="3383280" cy="2194560"/>
+          </a:xfrm>
+          <a:prstGeom prst="roundRect">
+            <a:avLst/>
+          </a:prstGeom>
+          <a:solidFill>
+            <a:srgbClr val="0F172A"/>
+          </a:solidFill>
+          <a:ln>
+            <a:solidFill>
+              <a:srgbClr val="38BDF8"/>
+            </a:solidFill>
+          </a:ln>
+        </p:spPr>
+        <p:style>
+          <a:lnRef idx="1">
+            <a:schemeClr val="accent1"/>
+          </a:lnRef>
+          <a:fillRef idx="3">
+            <a:schemeClr val="accent1"/>
+          </a:fillRef>
+          <a:effectRef idx="2">
+            <a:schemeClr val="accent1"/>
+          </a:effectRef>
+          <a:fontRef idx="minor">
+            <a:schemeClr val="lt1"/>
+          </a:fontRef>
+        </p:style>
+        <p:txBody>
+          <a:bodyPr rtlCol="0" anchor="ctr" wrap="square"/>
+          <a:lstStyle/>
+          <a:p>
+            <a:pPr algn="ctr">
+              <a:defRPr sz="1200" b="1">
+                <a:solidFill>
+                  <a:srgbClr val="38BDF8"/>
+                </a:solidFill>
+              </a:defRPr>
+            </a:pPr>
+            <a:r>
+              <a:t>OBSERVABILIDAD Y PERSISTENCIA</a:t>
+            </a:r>
+          </a:p>
+          <a:p>
+            <a:br/>
+            <a:pPr>
+              <a:defRPr sz="1050">
+                <a:solidFill>
+                  <a:srgbClr val="F1F5F9"/>
+                </a:solidFill>
+              </a:defRPr>
+            </a:pPr>
+            <a:r>
+              <a:t>PostgreSQL (:5433 orden_db) + Prometheus (:19090 Eureka Discovery) + Grafana (:13000) + Loki (:13100) y Promtail.</a:t>
+            </a:r>
+          </a:p>
+        </p:txBody>
+      </p:sp>
+    </p:spTree>
+  </p:cSld>
+  <p:clrMapOvr>
+    <a:masterClrMapping/>
+  </p:clrMapOvr>
+</p:sld>
+</file>
+
+<file path=ppt/slides/slide4.xml><?xml version="1.0" encoding="utf-8"?>
+<p:sld xmlns:a="http://schemas.openxmlformats.org/drawingml/2006/main" xmlns:p="http://schemas.openxmlformats.org/presentationml/2006/main" xmlns:r="http://schemas.openxmlformats.org/officeDocument/2006/relationships">
+  <p:cSld>
+    <p:spTree>
+      <p:nvGrpSpPr>
+        <p:cNvPr id="1" name=""/>
+        <p:cNvGrpSpPr/>
+        <p:nvPr/>
+      </p:nvGrpSpPr>
+      <p:grpSpPr/>
+      <p:sp>
+        <p:nvSpPr>
+          <p:cNvPr id="2" name="Rectangle 1"/>
+          <p:cNvSpPr/>
+          <p:nvPr/>
+        </p:nvSpPr>
+        <p:spPr>
+          <a:xfrm>
+            <a:off x="0" y="0"/>
+            <a:ext cx="12191695" cy="6858000"/>
+          </a:xfrm>
+          <a:prstGeom prst="rect">
+            <a:avLst/>
+          </a:prstGeom>
+          <a:solidFill>
+            <a:srgbClr val="070B14"/>
+          </a:solidFill>
+          <a:ln>
+            <a:solidFill>
+              <a:srgbClr val="070B14"/>
+            </a:solidFill>
+          </a:ln>
+        </p:spPr>
+        <p:style>
+          <a:lnRef idx="1">
+            <a:schemeClr val="accent1"/>
+          </a:lnRef>
+          <a:fillRef idx="3">
+            <a:schemeClr val="accent1"/>
+          </a:fillRef>
+          <a:effectRef idx="2">
+            <a:schemeClr val="accent1"/>
+          </a:effectRef>
+          <a:fontRef idx="minor">
+            <a:schemeClr val="lt1"/>
+          </a:fontRef>
+        </p:style>
+        <p:txBody>
+          <a:bodyPr rtlCol="0" anchor="ctr"/>
+          <a:lstStyle/>
+          <a:p>
+            <a:pPr algn="ctr"/>
+          </a:p>
+        </p:txBody>
+      </p:sp>
+      <p:sp>
+        <p:nvSpPr>
+          <p:cNvPr id="3" name="TextBox 2"/>
+          <p:cNvSpPr txBox="1"/>
+          <p:nvPr/>
+        </p:nvSpPr>
+        <p:spPr>
+          <a:xfrm>
+            <a:off x="731520" y="320040"/>
+            <a:ext cx="10698480" cy="320040"/>
+          </a:xfrm>
+          <a:prstGeom prst="rect">
+            <a:avLst/>
+          </a:prstGeom>
+          <a:noFill/>
+        </p:spPr>
+        <p:txBody>
+          <a:bodyPr wrap="square">
+            <a:spAutoFit/>
+          </a:bodyPr>
+          <a:lstStyle/>
+          <a:p>
+            <a:pPr>
+              <a:defRPr sz="1050" b="1">
+                <a:solidFill>
+                  <a:srgbClr val="818CF8"/>
+                </a:solidFill>
+              </a:defRPr>
+            </a:pPr>
+            <a:r>
+              <a:t>CHASKIPC • EVALUACIÓN UNIDAD I (S1 A S5) • EQUIPO 01</a:t>
+            </a:r>
+          </a:p>
+        </p:txBody>
+      </p:sp>
+      <p:sp>
+        <p:nvSpPr>
+          <p:cNvPr id="4" name="TextBox 3"/>
+          <p:cNvSpPr txBox="1"/>
+          <p:nvPr/>
+        </p:nvSpPr>
+        <p:spPr>
+          <a:xfrm>
+            <a:off x="731520" y="594360"/>
+            <a:ext cx="10698480" cy="685800"/>
+          </a:xfrm>
+          <a:prstGeom prst="rect">
+            <a:avLst/>
+          </a:prstGeom>
+          <a:noFill/>
+        </p:spPr>
+        <p:txBody>
+          <a:bodyPr wrap="square">
+            <a:spAutoFit/>
+          </a:bodyPr>
+          <a:lstStyle/>
+          <a:p>
+            <a:pPr>
+              <a:defRPr sz="2200" b="1">
+                <a:solidFill>
+                  <a:srgbClr val="38BDF8"/>
+                </a:solidFill>
+              </a:defRPr>
+            </a:pPr>
+            <a:r>
+              <a:t>2.1 y 2.2 Alcance y Contrato REST por Integrante</a:t>
+            </a:r>
+          </a:p>
+        </p:txBody>
+      </p:sp>
+      <p:sp>
+        <p:nvSpPr>
+          <p:cNvPr id="5" name="TextBox 4"/>
+          <p:cNvSpPr txBox="1"/>
+          <p:nvPr/>
+        </p:nvSpPr>
+        <p:spPr>
+          <a:xfrm>
+            <a:off x="7772400" y="365760"/>
+            <a:ext cx="3657600" cy="365760"/>
+          </a:xfrm>
+          <a:prstGeom prst="rect">
+            <a:avLst/>
+          </a:prstGeom>
+          <a:noFill/>
+        </p:spPr>
+        <p:txBody>
+          <a:bodyPr wrap="none">
+            <a:spAutoFit/>
+          </a:bodyPr>
+          <a:lstStyle/>
+          <a:p>
+            <a:pPr algn="r">
+              <a:defRPr sz="1100" b="1">
+                <a:solidFill>
+                  <a:srgbClr val="10B981"/>
+                </a:solidFill>
+              </a:defRPr>
+            </a:pPr>
+            <a:r>
+              <a:t>🎤 Cristhian Paul (Min 5-6)</a:t>
+            </a:r>
+          </a:p>
+        </p:txBody>
+      </p:sp>
+      <p:sp>
+        <p:nvSpPr>
+          <p:cNvPr id="6" name="Rounded Rectangle 5"/>
+          <p:cNvSpPr/>
+          <p:nvPr/>
+        </p:nvSpPr>
+        <p:spPr>
+          <a:xfrm>
+            <a:off x="731520" y="1371600"/>
+            <a:ext cx="5120640" cy="4754880"/>
+          </a:xfrm>
+          <a:prstGeom prst="roundRect">
+            <a:avLst/>
+          </a:prstGeom>
+          <a:solidFill>
+            <a:srgbClr val="0F172A"/>
+          </a:solidFill>
+          <a:ln>
+            <a:solidFill>
+              <a:srgbClr val="38BDF8"/>
+            </a:solidFill>
+          </a:ln>
+        </p:spPr>
+        <p:style>
+          <a:lnRef idx="1">
+            <a:schemeClr val="accent1"/>
+          </a:lnRef>
+          <a:fillRef idx="3">
+            <a:schemeClr val="accent1"/>
+          </a:fillRef>
+          <a:effectRef idx="2">
+            <a:schemeClr val="accent1"/>
+          </a:effectRef>
+          <a:fontRef idx="minor">
+            <a:schemeClr val="lt1"/>
+          </a:fontRef>
+        </p:style>
+        <p:txBody>
+          <a:bodyPr rtlCol="0" anchor="ctr" wrap="square"/>
+          <a:lstStyle/>
+          <a:p>
+            <a:pPr algn="ctr">
+              <a:defRPr sz="1500" b="1">
+                <a:solidFill>
+                  <a:srgbClr val="38BDF8"/>
+                </a:solidFill>
+              </a:defRPr>
+            </a:pPr>
+            <a:r>
+              <a:t>📦 Microservicios de Eliceo Parillo</a:t>
+            </a:r>
+          </a:p>
+          <a:p>
+            <a:br/>
+            <a:pPr>
+              <a:defRPr sz="1050">
+                <a:solidFill>
+                  <a:srgbClr val="F1F5F9"/>
+                </a:solidFill>
+              </a:defRPr>
+            </a:pPr>
+            <a:r>
+              <a:t>1. pc-catalogo-ms (No transaccional):</a:t>
+            </a:r>
+          </a:p>
+          <a:p>
+            <a:pPr>
+              <a:defRPr sz="1050">
+                <a:solidFill>
+                  <a:srgbClr val="F1F5F9"/>
+                </a:solidFill>
+              </a:defRPr>
+            </a:pPr>
+            <a:r>
+              <a:t>• Entidades: Categoria y Producto (SKU, marca, stock, precio).</a:t>
+            </a:r>
+          </a:p>
+          <a:p>
+            <a:pPr>
+              <a:defRPr sz="1050">
+                <a:solidFill>
+                  <a:srgbClr val="F1F5F9"/>
+                </a:solidFill>
+              </a:defRPr>
+            </a:pPr>
+            <a:r>
+              <a:t>• GET /api/v1/categorias: Lista categorías de componentes.</a:t>
+            </a:r>
+          </a:p>
+          <a:p>
+            <a:pPr>
+              <a:defRPr sz="1050">
+                <a:solidFill>
+                  <a:srgbClr val="F1F5F9"/>
+                </a:solidFill>
+              </a:defRPr>
+            </a:pPr>
+            <a:r>
+              <a:t>• GET /api/v1/productos: Catálogo general con stock y filtros.</a:t>
+            </a:r>
+          </a:p>
+          <a:p>
+            <a:pPr>
+              <a:defRPr sz="1050">
+                <a:solidFill>
+                  <a:srgbClr val="F1F5F9"/>
+                </a:solidFill>
+              </a:defRPr>
+            </a:pPr>
+            <a:r>
+              <a:t>• POST /api/v1/productos: Registra nuevos componentes.</a:t>
+            </a:r>
+          </a:p>
+          <a:p>
+            <a:br/>
+            <a:pPr>
+              <a:defRPr sz="1050">
+                <a:solidFill>
+                  <a:srgbClr val="F1F5F9"/>
+                </a:solidFill>
+              </a:defRPr>
+            </a:pPr>
+            <a:r>
+              <a:t>2. pc-orden-ms (Transaccional):</a:t>
+            </a:r>
+          </a:p>
+          <a:p>
+            <a:pPr>
+              <a:defRPr sz="1050">
+                <a:solidFill>
+                  <a:srgbClr val="F1F5F9"/>
+                </a:solidFill>
+              </a:defRPr>
+            </a:pPr>
+            <a:r>
+              <a:t>• Cabecera-Detalle: Orden y DetalleOrden vinculados.</a:t>
+            </a:r>
+          </a:p>
+          <a:p>
+            <a:pPr>
+              <a:defRPr sz="1050">
+                <a:solidFill>
+                  <a:srgbClr val="F1F5F9"/>
+                </a:solidFill>
+              </a:defRPr>
+            </a:pPr>
+            <a:r>
+              <a:t>• Lógica Fiscal: Cálculo automático de subtotal, 18% IGV y total.</a:t>
+            </a:r>
+          </a:p>
+          <a:p>
+            <a:pPr>
+              <a:defRPr sz="1050">
+                <a:solidFill>
+                  <a:srgbClr val="F1F5F9"/>
+                </a:solidFill>
+              </a:defRPr>
+            </a:pPr>
+            <a:r>
+              <a:t>• POST /api/v1/ordenes: Emite orden (201 Created / 400 Bad Request).</a:t>
+            </a:r>
+          </a:p>
+          <a:p>
+            <a:pPr>
+              <a:defRPr sz="1050">
+                <a:solidFill>
+                  <a:srgbClr val="F1F5F9"/>
+                </a:solidFill>
+              </a:defRPr>
+            </a:pPr>
+            <a:r>
+              <a:t>• GET /api/v1/ordenes/{id}: Consulta por ID (404 Not Found si no existe).</a:t>
+            </a:r>
+          </a:p>
+          <a:p>
+            <a:pPr>
+              <a:defRPr sz="1050">
+                <a:solidFill>
+                  <a:srgbClr val="F1F5F9"/>
+                </a:solidFill>
+              </a:defRPr>
+            </a:pPr>
+            <a:r>
+              <a:t>• PUT /api/v1/ordenes/{id}/estado: Actualiza estado tras el pago.</a:t>
+            </a:r>
+          </a:p>
+        </p:txBody>
+      </p:sp>
+      <p:sp>
+        <p:nvSpPr>
+          <p:cNvPr id="7" name="Rounded Rectangle 6"/>
+          <p:cNvSpPr/>
+          <p:nvPr/>
+        </p:nvSpPr>
+        <p:spPr>
+          <a:xfrm>
+            <a:off x="6309360" y="1371600"/>
+            <a:ext cx="5120640" cy="4754880"/>
+          </a:xfrm>
+          <a:prstGeom prst="roundRect">
+            <a:avLst/>
+          </a:prstGeom>
+          <a:solidFill>
+            <a:srgbClr val="0F172A"/>
+          </a:solidFill>
+          <a:ln>
+            <a:solidFill>
+              <a:srgbClr val="34D399"/>
+            </a:solidFill>
+          </a:ln>
+        </p:spPr>
+        <p:style>
+          <a:lnRef idx="1">
+            <a:schemeClr val="accent1"/>
+          </a:lnRef>
+          <a:fillRef idx="3">
+            <a:schemeClr val="accent1"/>
+          </a:fillRef>
+          <a:effectRef idx="2">
+            <a:schemeClr val="accent1"/>
+          </a:effectRef>
+          <a:fontRef idx="minor">
+            <a:schemeClr val="lt1"/>
+          </a:fontRef>
+        </p:style>
+        <p:txBody>
+          <a:bodyPr rtlCol="0" anchor="ctr" wrap="square"/>
+          <a:lstStyle/>
+          <a:p>
+            <a:pPr algn="ctr">
+              <a:defRPr sz="1500" b="1">
+                <a:solidFill>
+                  <a:srgbClr val="34D399"/>
+                </a:solidFill>
+              </a:defRPr>
+            </a:pPr>
+            <a:r>
+              <a:t>💳 Microservicios de Cristhian Paul</a:t>
+            </a:r>
+          </a:p>
+          <a:p>
+            <a:br/>
+            <a:pPr>
+              <a:defRPr sz="1050">
+                <a:solidFill>
+                  <a:srgbClr val="F1F5F9"/>
+                </a:solidFill>
+              </a:defRPr>
+            </a:pPr>
+            <a:r>
+              <a:t>1. pc-pago-ms (Transaccional - Pasarela Mercado Pago):</a:t>
+            </a:r>
+          </a:p>
+          <a:p>
+            <a:pPr>
+              <a:defRPr sz="1050">
+                <a:solidFill>
+                  <a:srgbClr val="F1F5F9"/>
+                </a:solidFill>
+              </a:defRPr>
+            </a:pPr>
+            <a:r>
+              <a:t>• Cabecera-Detalle: Pago y TransaccionPasarela.</a:t>
+            </a:r>
+          </a:p>
+          <a:p>
+            <a:pPr>
+              <a:defRPr sz="1050">
+                <a:solidFill>
+                  <a:srgbClr val="F1F5F9"/>
+                </a:solidFill>
+              </a:defRPr>
+            </a:pPr>
+            <a:r>
+              <a:t>• POST /api/v1/pagos/checkout: Genera preferencia en Mercado Pago</a:t>
+            </a:r>
+          </a:p>
+          <a:p>
+            <a:pPr>
+              <a:defRPr sz="1050">
+                <a:solidFill>
+                  <a:srgbClr val="F1F5F9"/>
+                </a:solidFill>
+              </a:defRPr>
+            </a:pPr>
+            <a:r>
+              <a:t>  y retorna el link de cobro (Sandbox).</a:t>
+            </a:r>
+          </a:p>
+          <a:p>
+            <a:pPr>
+              <a:defRPr sz="1050">
+                <a:solidFill>
+                  <a:srgbClr val="F1F5F9"/>
+                </a:solidFill>
+              </a:defRPr>
+            </a:pPr>
+            <a:r>
+              <a:t>• POST /api/v1/pagos/webhook: Recepción asíncrona de notificación IPN</a:t>
+            </a:r>
+          </a:p>
+          <a:p>
+            <a:pPr>
+              <a:defRPr sz="1050">
+                <a:solidFill>
+                  <a:srgbClr val="F1F5F9"/>
+                </a:solidFill>
+              </a:defRPr>
+            </a:pPr>
+            <a:r>
+              <a:t>  y confirmación del cobro approved.</a:t>
+            </a:r>
+          </a:p>
+          <a:p>
+            <a:pPr>
+              <a:defRPr sz="1050">
+                <a:solidFill>
+                  <a:srgbClr val="F1F5F9"/>
+                </a:solidFill>
+              </a:defRPr>
+            </a:pPr>
+            <a:r>
+              <a:t>• GET /api/v1/pagos/orden/{id}: Estado financiero de la orden.</a:t>
+            </a:r>
+          </a:p>
+          <a:p>
+            <a:br/>
+            <a:pPr>
+              <a:defRPr sz="1050">
+                <a:solidFill>
+                  <a:srgbClr val="F1F5F9"/>
+                </a:solidFill>
+              </a:defRPr>
+            </a:pPr>
+            <a:r>
+              <a:t>2. pc-auth-ms (No transaccional - Seguridad JWT):</a:t>
+            </a:r>
+          </a:p>
+          <a:p>
+            <a:pPr>
+              <a:defRPr sz="1050">
+                <a:solidFill>
+                  <a:srgbClr val="F1F5F9"/>
+                </a:solidFill>
+              </a:defRPr>
+            </a:pPr>
+            <a:r>
+              <a:t>• Proveedor de identidad y control de acceso.</a:t>
+            </a:r>
+          </a:p>
+          <a:p>
+            <a:pPr>
+              <a:defRPr sz="1050">
+                <a:solidFill>
+                  <a:srgbClr val="F1F5F9"/>
+                </a:solidFill>
+              </a:defRPr>
+            </a:pPr>
+            <a:r>
+              <a:t>• Encriptación: Claves protegidas con BCrypt.</a:t>
+            </a:r>
+          </a:p>
+          <a:p>
+            <a:pPr>
+              <a:defRPr sz="1050">
+                <a:solidFill>
+                  <a:srgbClr val="F1F5F9"/>
+                </a:solidFill>
+              </a:defRPr>
+            </a:pPr>
+            <a:r>
+              <a:t>• POST /api/v1/auth/login: Autenticación y retorno de JWT firmado.</a:t>
+            </a:r>
+          </a:p>
+          <a:p>
+            <a:pPr>
+              <a:defRPr sz="1050">
+                <a:solidFill>
+                  <a:srgbClr val="F1F5F9"/>
+                </a:solidFill>
+              </a:defRPr>
+            </a:pPr>
+            <a:r>
+              <a:t>• GET /api/v1/auth/validate: Validación del token para el Gateway.</a:t>
+            </a:r>
+          </a:p>
+        </p:txBody>
+      </p:sp>
+    </p:spTree>
+  </p:cSld>
+  <p:clrMapOvr>
+    <a:masterClrMapping/>
+  </p:clrMapOvr>
+</p:sld>
+</file>
+
+<file path=ppt/slides/slide5.xml><?xml version="1.0" encoding="utf-8"?>
+<p:sld xmlns:a="http://schemas.openxmlformats.org/drawingml/2006/main" xmlns:p="http://schemas.openxmlformats.org/presentationml/2006/main" xmlns:r="http://schemas.openxmlformats.org/officeDocument/2006/relationships">
+  <p:cSld>
+    <p:spTree>
+      <p:nvGrpSpPr>
+        <p:cNvPr id="1" name=""/>
+        <p:cNvGrpSpPr/>
+        <p:nvPr/>
+      </p:nvGrpSpPr>
+      <p:grpSpPr/>
+      <p:sp>
+        <p:nvSpPr>
+          <p:cNvPr id="2" name="Rectangle 1"/>
+          <p:cNvSpPr/>
+          <p:nvPr/>
+        </p:nvSpPr>
+        <p:spPr>
+          <a:xfrm>
+            <a:off x="0" y="0"/>
+            <a:ext cx="12191695" cy="6858000"/>
+          </a:xfrm>
+          <a:prstGeom prst="rect">
+            <a:avLst/>
+          </a:prstGeom>
+          <a:solidFill>
+            <a:srgbClr val="070B14"/>
+          </a:solidFill>
+          <a:ln>
+            <a:solidFill>
+              <a:srgbClr val="070B14"/>
+            </a:solidFill>
+          </a:ln>
+        </p:spPr>
+        <p:style>
+          <a:lnRef idx="1">
+            <a:schemeClr val="accent1"/>
+          </a:lnRef>
+          <a:fillRef idx="3">
+            <a:schemeClr val="accent1"/>
+          </a:fillRef>
+          <a:effectRef idx="2">
+            <a:schemeClr val="accent1"/>
+          </a:effectRef>
+          <a:fontRef idx="minor">
+            <a:schemeClr val="lt1"/>
+          </a:fontRef>
+        </p:style>
+        <p:txBody>
+          <a:bodyPr rtlCol="0" anchor="ctr"/>
+          <a:lstStyle/>
+          <a:p>
+            <a:pPr algn="ctr"/>
+          </a:p>
+        </p:txBody>
+      </p:sp>
+      <p:sp>
+        <p:nvSpPr>
+          <p:cNvPr id="3" name="TextBox 2"/>
+          <p:cNvSpPr txBox="1"/>
+          <p:nvPr/>
+        </p:nvSpPr>
+        <p:spPr>
+          <a:xfrm>
+            <a:off x="731520" y="320040"/>
+            <a:ext cx="10698480" cy="320040"/>
+          </a:xfrm>
+          <a:prstGeom prst="rect">
+            <a:avLst/>
+          </a:prstGeom>
+          <a:noFill/>
+        </p:spPr>
+        <p:txBody>
+          <a:bodyPr wrap="square">
+            <a:spAutoFit/>
+          </a:bodyPr>
+          <a:lstStyle/>
+          <a:p>
+            <a:pPr>
+              <a:defRPr sz="1050" b="1">
+                <a:solidFill>
+                  <a:srgbClr val="818CF8"/>
+                </a:solidFill>
+              </a:defRPr>
+            </a:pPr>
+            <a:r>
+              <a:t>CHASKIPC • EVALUACIÓN UNIDAD I (S1 A S5) • EQUIPO 01</a:t>
+            </a:r>
+          </a:p>
+        </p:txBody>
+      </p:sp>
+      <p:sp>
+        <p:nvSpPr>
+          <p:cNvPr id="4" name="TextBox 3"/>
+          <p:cNvSpPr txBox="1"/>
+          <p:nvPr/>
+        </p:nvSpPr>
+        <p:spPr>
+          <a:xfrm>
+            <a:off x="731520" y="594360"/>
+            <a:ext cx="10698480" cy="685800"/>
+          </a:xfrm>
+          <a:prstGeom prst="rect">
+            <a:avLst/>
+          </a:prstGeom>
+          <a:noFill/>
+        </p:spPr>
+        <p:txBody>
+          <a:bodyPr wrap="square">
+            <a:spAutoFit/>
+          </a:bodyPr>
+          <a:lstStyle/>
+          <a:p>
+            <a:pPr>
+              <a:defRPr sz="2200" b="1">
+                <a:solidFill>
+                  <a:srgbClr val="38BDF8"/>
+                </a:solidFill>
+              </a:defRPr>
+            </a:pPr>
+            <a:r>
+              <a:t>2.3 Configuración Externalizada DEV vs PROD</a:t>
+            </a:r>
+          </a:p>
+        </p:txBody>
+      </p:sp>
+      <p:sp>
+        <p:nvSpPr>
+          <p:cNvPr id="5" name="TextBox 4"/>
+          <p:cNvSpPr txBox="1"/>
+          <p:nvPr/>
+        </p:nvSpPr>
+        <p:spPr>
+          <a:xfrm>
+            <a:off x="7772400" y="365760"/>
+            <a:ext cx="3657600" cy="365760"/>
+          </a:xfrm>
+          <a:prstGeom prst="rect">
+            <a:avLst/>
+          </a:prstGeom>
+          <a:noFill/>
+        </p:spPr>
+        <p:txBody>
+          <a:bodyPr wrap="none">
+            <a:spAutoFit/>
+          </a:bodyPr>
+          <a:lstStyle/>
+          <a:p>
+            <a:pPr algn="r">
+              <a:defRPr sz="1100" b="1">
+                <a:solidFill>
+                  <a:srgbClr val="10B981"/>
+                </a:solidFill>
+              </a:defRPr>
+            </a:pPr>
+            <a:r>
+              <a:t>🎤 Cristhian Paul (Min 7-8)</a:t>
+            </a:r>
+          </a:p>
+        </p:txBody>
+      </p:sp>
+      <p:sp>
+        <p:nvSpPr>
+          <p:cNvPr id="6" name="Rounded Rectangle 5"/>
+          <p:cNvSpPr/>
+          <p:nvPr/>
+        </p:nvSpPr>
+        <p:spPr>
+          <a:xfrm>
+            <a:off x="731520" y="1371600"/>
+            <a:ext cx="5120640" cy="4389120"/>
+          </a:xfrm>
+          <a:prstGeom prst="roundRect">
+            <a:avLst/>
+          </a:prstGeom>
+          <a:solidFill>
+            <a:srgbClr val="0F172A"/>
+          </a:solidFill>
+          <a:ln>
+            <a:solidFill>
+              <a:srgbClr val="0284C7"/>
+            </a:solidFill>
+          </a:ln>
+        </p:spPr>
+        <p:style>
+          <a:lnRef idx="1">
+            <a:schemeClr val="accent1"/>
+          </a:lnRef>
+          <a:fillRef idx="3">
+            <a:schemeClr val="accent1"/>
+          </a:fillRef>
+          <a:effectRef idx="2">
+            <a:schemeClr val="accent1"/>
+          </a:effectRef>
+          <a:fontRef idx="minor">
+            <a:schemeClr val="lt1"/>
+          </a:fontRef>
+        </p:style>
+        <p:txBody>
+          <a:bodyPr rtlCol="0" anchor="ctr" wrap="square"/>
+          <a:lstStyle/>
+          <a:p>
+            <a:pPr algn="ctr">
+              <a:defRPr sz="1300" b="1">
+                <a:solidFill>
+                  <a:srgbClr val="38BDF8"/>
+                </a:solidFill>
+              </a:defRPr>
+            </a:pPr>
+            <a:r>
+              <a:t>AMBIENTE DESARROLLO (DEV) - config-repo/*-dev.yml</a:t>
+            </a:r>
+          </a:p>
+          <a:p>
+            <a:br/>
+            <a:pPr>
+              <a:defRPr sz="1100">
+                <a:solidFill>
+                  <a:srgbClr val="F1F5F9"/>
+                </a:solidFill>
+              </a:defRPr>
+            </a:pPr>
+            <a:r>
+              <a:t>• Puertos Host: Microservicios en puertos locales (8081, 8082, 8083, 18080).</a:t>
+            </a:r>
+          </a:p>
+          <a:p>
+            <a:pPr>
+              <a:defRPr sz="1100">
+                <a:solidFill>
+                  <a:srgbClr val="F1F5F9"/>
+                </a:solidFill>
+              </a:defRPr>
+            </a:pPr>
+            <a:r>
+              <a:t>• Base de Datos: PostgreSQL expuesto en localhost:5433 (orden_db).</a:t>
+            </a:r>
+          </a:p>
+          <a:p>
+            <a:pPr>
+              <a:defRPr sz="1100">
+                <a:solidFill>
+                  <a:srgbClr val="F1F5F9"/>
+                </a:solidFill>
+              </a:defRPr>
+            </a:pPr>
+            <a:r>
+              <a:t>• Hibernate DDL: ddl-auto: update (permite iteración ágil y creación de tablas).</a:t>
+            </a:r>
+          </a:p>
+          <a:p>
+            <a:pPr>
+              <a:defRPr sz="1100">
+                <a:solidFill>
+                  <a:srgbClr val="F1F5F9"/>
+                </a:solidFill>
+              </a:defRPr>
+            </a:pPr>
+            <a:r>
+              <a:t>• Logging: Nivel detallado y escritura directa en logs/*.log para Promtail.</a:t>
+            </a:r>
+          </a:p>
+          <a:p>
+            <a:pPr>
+              <a:defRPr sz="1100">
+                <a:solidFill>
+                  <a:srgbClr val="F1F5F9"/>
+                </a:solidFill>
+              </a:defRPr>
+            </a:pPr>
+            <a:r>
+              <a:t>• Actuator: Endpoints abiertos (health, info, metrics, prometheus).</a:t>
+            </a:r>
+          </a:p>
+        </p:txBody>
+      </p:sp>
+      <p:sp>
+        <p:nvSpPr>
+          <p:cNvPr id="7" name="Rounded Rectangle 6"/>
+          <p:cNvSpPr/>
+          <p:nvPr/>
+        </p:nvSpPr>
+        <p:spPr>
+          <a:xfrm>
+            <a:off x="6309360" y="1371600"/>
+            <a:ext cx="5120640" cy="4389120"/>
+          </a:xfrm>
+          <a:prstGeom prst="roundRect">
+            <a:avLst/>
+          </a:prstGeom>
+          <a:solidFill>
+            <a:srgbClr val="0F172A"/>
+          </a:solidFill>
+          <a:ln>
+            <a:solidFill>
+              <a:srgbClr val="10B981"/>
+            </a:solidFill>
+          </a:ln>
+        </p:spPr>
+        <p:style>
+          <a:lnRef idx="1">
+            <a:schemeClr val="accent1"/>
+          </a:lnRef>
+          <a:fillRef idx="3">
+            <a:schemeClr val="accent1"/>
+          </a:fillRef>
+          <a:effectRef idx="2">
+            <a:schemeClr val="accent1"/>
+          </a:effectRef>
+          <a:fontRef idx="minor">
+            <a:schemeClr val="lt1"/>
+          </a:fontRef>
+        </p:style>
+        <p:txBody>
+          <a:bodyPr rtlCol="0" anchor="ctr" wrap="square"/>
+          <a:lstStyle/>
+          <a:p>
+            <a:pPr algn="ctr">
+              <a:defRPr sz="1300" b="1">
+                <a:solidFill>
+                  <a:srgbClr val="34D399"/>
+                </a:solidFill>
+              </a:defRPr>
+            </a:pPr>
+            <a:r>
+              <a:t>AMBIENTE PRODUCCIÓN (PROD) - infra/compose.yml</a:t>
+            </a:r>
+          </a:p>
+          <a:p>
+            <a:br/>
+            <a:pPr>
+              <a:defRPr sz="1100">
+                <a:solidFill>
+                  <a:srgbClr val="F1F5F9"/>
+                </a:solidFill>
+              </a:defRPr>
+            </a:pPr>
+            <a:r>
+              <a:t>• Único Puerto Público: Solo el API Gateway expuesto en puerto 28080.</a:t>
+            </a:r>
+          </a:p>
+          <a:p>
+            <a:pPr>
+              <a:defRPr sz="1100">
+                <a:solidFill>
+                  <a:srgbClr val="F1F5F9"/>
+                </a:solidFill>
+              </a:defRPr>
+            </a:pPr>
+            <a:r>
+              <a:t>• Red Aislada: Microservicios confinados en la red interna pagatu-prod-net.</a:t>
+            </a:r>
+          </a:p>
+          <a:p>
+            <a:pPr>
+              <a:defRPr sz="1100">
+                <a:solidFill>
+                  <a:srgbClr val="F1F5F9"/>
+                </a:solidFill>
+              </a:defRPr>
+            </a:pPr>
+            <a:r>
+              <a:t>• Hibernate DDL: ddl-auto: validate (prohíbe alterar esquemas en producción).</a:t>
+            </a:r>
+          </a:p>
+          <a:p>
+            <a:pPr>
+              <a:defRPr sz="1100">
+                <a:solidFill>
+                  <a:srgbClr val="F1F5F9"/>
+                </a:solidFill>
+              </a:defRPr>
+            </a:pPr>
+            <a:r>
+              <a:t>• Seguridad: Credenciales inyectadas mediante variables de entorno seguras.</a:t>
+            </a:r>
+          </a:p>
+          <a:p>
+            <a:pPr>
+              <a:defRPr sz="1100">
+                <a:solidFill>
+                  <a:srgbClr val="F1F5F9"/>
+                </a:solidFill>
+              </a:defRPr>
+            </a:pPr>
+            <a:r>
+              <a:t>• Factor III: Mismo binario JAR compilado, configuración desacoplada al 100%.</a:t>
+            </a:r>
+          </a:p>
+        </p:txBody>
+      </p:sp>
+    </p:spTree>
+  </p:cSld>
+  <p:clrMapOvr>
+    <a:masterClrMapping/>
+  </p:clrMapOvr>
+</p:sld>
+</file>
+
+<file path=ppt/slides/slide6.xml><?xml version="1.0" encoding="utf-8"?>
+<p:sld xmlns:a="http://schemas.openxmlformats.org/drawingml/2006/main" xmlns:p="http://schemas.openxmlformats.org/presentationml/2006/main" xmlns:r="http://schemas.openxmlformats.org/officeDocument/2006/relationships">
+  <p:cSld>
+    <p:spTree>
+      <p:nvGrpSpPr>
+        <p:cNvPr id="1" name=""/>
+        <p:cNvGrpSpPr/>
+        <p:nvPr/>
+      </p:nvGrpSpPr>
+      <p:grpSpPr/>
+      <p:sp>
+        <p:nvSpPr>
+          <p:cNvPr id="2" name="Rectangle 1"/>
+          <p:cNvSpPr/>
+          <p:nvPr/>
+        </p:nvSpPr>
+        <p:spPr>
+          <a:xfrm>
+            <a:off x="0" y="0"/>
+            <a:ext cx="12191695" cy="6858000"/>
+          </a:xfrm>
+          <a:prstGeom prst="rect">
+            <a:avLst/>
+          </a:prstGeom>
+          <a:solidFill>
+            <a:srgbClr val="070B14"/>
+          </a:solidFill>
+          <a:ln>
+            <a:solidFill>
+              <a:srgbClr val="070B14"/>
+            </a:solidFill>
+          </a:ln>
+        </p:spPr>
+        <p:style>
+          <a:lnRef idx="1">
+            <a:schemeClr val="accent1"/>
+          </a:lnRef>
+          <a:fillRef idx="3">
+            <a:schemeClr val="accent1"/>
+          </a:fillRef>
+          <a:effectRef idx="2">
+            <a:schemeClr val="accent1"/>
+          </a:effectRef>
+          <a:fontRef idx="minor">
+            <a:schemeClr val="lt1"/>
+          </a:fontRef>
+        </p:style>
+        <p:txBody>
+          <a:bodyPr rtlCol="0" anchor="ctr"/>
+          <a:lstStyle/>
+          <a:p>
+            <a:pPr algn="ctr"/>
+          </a:p>
+        </p:txBody>
+      </p:sp>
+      <p:sp>
+        <p:nvSpPr>
+          <p:cNvPr id="3" name="TextBox 2"/>
+          <p:cNvSpPr txBox="1"/>
+          <p:nvPr/>
+        </p:nvSpPr>
+        <p:spPr>
+          <a:xfrm>
+            <a:off x="731520" y="320040"/>
+            <a:ext cx="10698480" cy="320040"/>
+          </a:xfrm>
+          <a:prstGeom prst="rect">
+            <a:avLst/>
+          </a:prstGeom>
+          <a:noFill/>
+        </p:spPr>
+        <p:txBody>
+          <a:bodyPr wrap="square">
+            <a:spAutoFit/>
+          </a:bodyPr>
+          <a:lstStyle/>
+          <a:p>
+            <a:pPr>
+              <a:defRPr sz="1050" b="1">
+                <a:solidFill>
+                  <a:srgbClr val="818CF8"/>
+                </a:solidFill>
+              </a:defRPr>
+            </a:pPr>
+            <a:r>
+              <a:t>CHASKIPC • EVALUACIÓN UNIDAD I (S1 A S5) • EQUIPO 01</a:t>
+            </a:r>
+          </a:p>
+        </p:txBody>
+      </p:sp>
+      <p:sp>
+        <p:nvSpPr>
+          <p:cNvPr id="4" name="TextBox 3"/>
+          <p:cNvSpPr txBox="1"/>
+          <p:nvPr/>
+        </p:nvSpPr>
+        <p:spPr>
+          <a:xfrm>
+            <a:off x="731520" y="594360"/>
+            <a:ext cx="10698480" cy="685800"/>
+          </a:xfrm>
+          <a:prstGeom prst="rect">
+            <a:avLst/>
+          </a:prstGeom>
+          <a:noFill/>
+        </p:spPr>
+        <p:txBody>
+          <a:bodyPr wrap="square">
+            <a:spAutoFit/>
+          </a:bodyPr>
+          <a:lstStyle/>
+          <a:p>
+            <a:pPr>
+              <a:defRPr sz="2200" b="1">
+                <a:solidFill>
+                  <a:srgbClr val="38BDF8"/>
+                </a:solidFill>
+              </a:defRPr>
+            </a:pPr>
+            <a:r>
+              <a:t>3. Evidencias Técnicas Oficiales de la Unidad 1</a:t>
+            </a:r>
+          </a:p>
+        </p:txBody>
+      </p:sp>
+      <p:sp>
+        <p:nvSpPr>
+          <p:cNvPr id="5" name="TextBox 4"/>
+          <p:cNvSpPr txBox="1"/>
+          <p:nvPr/>
+        </p:nvSpPr>
+        <p:spPr>
+          <a:xfrm>
+            <a:off x="7772400" y="365760"/>
+            <a:ext cx="3657600" cy="365760"/>
+          </a:xfrm>
+          <a:prstGeom prst="rect">
+            <a:avLst/>
+          </a:prstGeom>
+          <a:noFill/>
+        </p:spPr>
+        <p:txBody>
+          <a:bodyPr wrap="none">
+            <a:spAutoFit/>
+          </a:bodyPr>
+          <a:lstStyle/>
+          <a:p>
+            <a:pPr algn="r">
+              <a:defRPr sz="1100" b="1">
+                <a:solidFill>
+                  <a:srgbClr val="10B981"/>
+                </a:solidFill>
+              </a:defRPr>
+            </a:pPr>
+            <a:r>
+              <a:t>🎤 Eliceo Parillo</a:t>
+            </a:r>
+          </a:p>
+        </p:txBody>
+      </p:sp>
+      <p:sp>
+        <p:nvSpPr>
+          <p:cNvPr id="6" name="Rounded Rectangle 5"/>
+          <p:cNvSpPr/>
+          <p:nvPr/>
+        </p:nvSpPr>
+        <p:spPr>
+          <a:xfrm>
+            <a:off x="731520" y="1371600"/>
+            <a:ext cx="5120640" cy="4572000"/>
+          </a:xfrm>
+          <a:prstGeom prst="roundRect">
+            <a:avLst/>
+          </a:prstGeom>
+          <a:solidFill>
+            <a:srgbClr val="0F172A"/>
+          </a:solidFill>
+          <a:ln>
+            <a:solidFill>
+              <a:srgbClr val="38BDF8"/>
+            </a:solidFill>
+          </a:ln>
+        </p:spPr>
+        <p:style>
+          <a:lnRef idx="1">
+            <a:schemeClr val="accent1"/>
+          </a:lnRef>
+          <a:fillRef idx="3">
+            <a:schemeClr val="accent1"/>
+          </a:fillRef>
+          <a:effectRef idx="2">
+            <a:schemeClr val="accent1"/>
+          </a:effectRef>
+          <a:fontRef idx="minor">
+            <a:schemeClr val="lt1"/>
+          </a:fontRef>
+        </p:style>
+        <p:txBody>
+          <a:bodyPr rtlCol="0" anchor="ctr" wrap="square"/>
+          <a:lstStyle/>
+          <a:p>
+            <a:pPr algn="ctr">
+              <a:defRPr sz="1400" b="1">
+                <a:solidFill>
+                  <a:srgbClr val="38BDF8"/>
+                </a:solidFill>
+              </a:defRPr>
+            </a:pPr>
+            <a:r>
+              <a:t>3.1 Eureka Dashboard (:8761)</a:t>
+            </a:r>
+          </a:p>
+          <a:p>
+            <a:br/>
+            <a:pPr>
+              <a:defRPr sz="1100">
+                <a:solidFill>
+                  <a:srgbClr val="F1F5F9"/>
+                </a:solidFill>
+              </a:defRPr>
+            </a:pPr>
+            <a:r>
+              <a:t>• PAGATU-GATEWAY registrado en puerto 18080.</a:t>
+            </a:r>
+            <a:br/>
+            <a:r>
+              <a:t>• PAGATU-CATALOGO-MS registrado en puerto 8081.</a:t>
+            </a:r>
+            <a:br/>
+            <a:r>
+              <a:t>• PAGATU-ORDEN-MS registrado con 2 instancias simultáneas:</a:t>
+            </a:r>
+            <a:br/>
+            <a:r>
+              <a:t>  - Instancia 1 en puerto 8082 (UP)</a:t>
+            </a:r>
+            <a:br/>
+            <a:r>
+              <a:t>  - Instancia 2 en puerto 8083 (UP)</a:t>
+            </a:r>
+            <a:br/>
+            <a:r>
+              <a:t>• Fecha, hora de Windows y usuario visibles en pantalla.</a:t>
+            </a:r>
+          </a:p>
+        </p:txBody>
+      </p:sp>
+      <p:sp>
+        <p:nvSpPr>
+          <p:cNvPr id="7" name="Rounded Rectangle 6"/>
+          <p:cNvSpPr/>
+          <p:nvPr/>
+        </p:nvSpPr>
+        <p:spPr>
+          <a:xfrm>
+            <a:off x="6309360" y="1371600"/>
+            <a:ext cx="5120640" cy="4572000"/>
+          </a:xfrm>
+          <a:prstGeom prst="roundRect">
+            <a:avLst/>
+          </a:prstGeom>
+          <a:solidFill>
+            <a:srgbClr val="0F172A"/>
+          </a:solidFill>
+          <a:ln>
+            <a:solidFill>
+              <a:srgbClr val="10B981"/>
+            </a:solidFill>
+          </a:ln>
+        </p:spPr>
+        <p:style>
+          <a:lnRef idx="1">
+            <a:schemeClr val="accent1"/>
+          </a:lnRef>
+          <a:fillRef idx="3">
+            <a:schemeClr val="accent1"/>
+          </a:fillRef>
+          <a:effectRef idx="2">
+            <a:schemeClr val="accent1"/>
+          </a:effectRef>
+          <a:fontRef idx="minor">
+            <a:schemeClr val="lt1"/>
+          </a:fontRef>
+        </p:style>
+        <p:txBody>
+          <a:bodyPr rtlCol="0" anchor="ctr" wrap="square"/>
+          <a:lstStyle/>
+          <a:p>
+            <a:pPr algn="ctr">
+              <a:defRPr sz="1400" b="1">
+                <a:solidFill>
+                  <a:srgbClr val="10B981"/>
+                </a:solidFill>
+              </a:defRPr>
+            </a:pPr>
+            <a:r>
+              <a:t>3.2 Persistencia Compartida en PostgreSQL (:5433)</a:t>
+            </a:r>
+          </a:p>
+          <a:p>
+            <a:br/>
+            <a:pPr>
+              <a:defRPr sz="1100">
+                <a:solidFill>
+                  <a:srgbClr val="F1F5F9"/>
+                </a:solidFill>
+              </a:defRPr>
+            </a:pPr>
+            <a:r>
+              <a:t>• Contenedor Docker chaskipc-db-orden en puerto 5433.</a:t>
+            </a:r>
+            <a:br/>
+            <a:r>
+              <a:t>• Base de datos relacional orden_db compartida entre réplicas.</a:t>
+            </a:r>
+            <a:br/>
+            <a:r>
+              <a:t>• Consulta PowerShell por puerto 8082 retorna las órdenes.</a:t>
+            </a:r>
+            <a:br/>
+            <a:r>
+              <a:t>• Consulta PowerShell por puerto 8083 retorna exactamente los mismos datos.</a:t>
+            </a:r>
+            <a:br/>
+            <a:r>
+              <a:t>• Evidencia de persistencia concurrente validada en consola.</a:t>
+            </a:r>
+          </a:p>
+        </p:txBody>
+      </p:sp>
+    </p:spTree>
+  </p:cSld>
+  <p:clrMapOvr>
+    <a:masterClrMapping/>
+  </p:clrMapOvr>
+</p:sld>
+</file>
+
+<file path=ppt/slides/slide7.xml><?xml version="1.0" encoding="utf-8"?>
+<p:sld xmlns:a="http://schemas.openxmlformats.org/drawingml/2006/main" xmlns:p="http://schemas.openxmlformats.org/presentationml/2006/main" xmlns:r="http://schemas.openxmlformats.org/officeDocument/2006/relationships">
+  <p:cSld>
+    <p:spTree>
+      <p:nvGrpSpPr>
+        <p:cNvPr id="1" name=""/>
+        <p:cNvGrpSpPr/>
+        <p:nvPr/>
+      </p:nvGrpSpPr>
+      <p:grpSpPr/>
+      <p:sp>
+        <p:nvSpPr>
+          <p:cNvPr id="2" name="Rectangle 1"/>
+          <p:cNvSpPr/>
+          <p:nvPr/>
+        </p:nvSpPr>
+        <p:spPr>
+          <a:xfrm>
+            <a:off x="0" y="0"/>
+            <a:ext cx="12191695" cy="6858000"/>
+          </a:xfrm>
+          <a:prstGeom prst="rect">
+            <a:avLst/>
+          </a:prstGeom>
+          <a:solidFill>
+            <a:srgbClr val="070B14"/>
+          </a:solidFill>
+          <a:ln>
+            <a:solidFill>
+              <a:srgbClr val="070B14"/>
+            </a:solidFill>
+          </a:ln>
+        </p:spPr>
+        <p:style>
+          <a:lnRef idx="1">
+            <a:schemeClr val="accent1"/>
+          </a:lnRef>
+          <a:fillRef idx="3">
+            <a:schemeClr val="accent1"/>
+          </a:fillRef>
+          <a:effectRef idx="2">
+            <a:schemeClr val="accent1"/>
+          </a:effectRef>
+          <a:fontRef idx="minor">
+            <a:schemeClr val="lt1"/>
+          </a:fontRef>
+        </p:style>
+        <p:txBody>
+          <a:bodyPr rtlCol="0" anchor="ctr"/>
+          <a:lstStyle/>
+          <a:p>
+            <a:pPr algn="ctr"/>
+          </a:p>
+        </p:txBody>
+      </p:sp>
+      <p:sp>
+        <p:nvSpPr>
+          <p:cNvPr id="3" name="TextBox 2"/>
+          <p:cNvSpPr txBox="1"/>
+          <p:nvPr/>
+        </p:nvSpPr>
+        <p:spPr>
+          <a:xfrm>
+            <a:off x="731520" y="320040"/>
+            <a:ext cx="10698480" cy="320040"/>
+          </a:xfrm>
+          <a:prstGeom prst="rect">
+            <a:avLst/>
+          </a:prstGeom>
+          <a:noFill/>
+        </p:spPr>
+        <p:txBody>
+          <a:bodyPr wrap="square">
+            <a:spAutoFit/>
+          </a:bodyPr>
+          <a:lstStyle/>
+          <a:p>
+            <a:pPr>
+              <a:defRPr sz="1050" b="1">
+                <a:solidFill>
+                  <a:srgbClr val="818CF8"/>
+                </a:solidFill>
+              </a:defRPr>
+            </a:pPr>
+            <a:r>
+              <a:t>CHASKIPC • EVALUACIÓN UNIDAD I (S1 A S5) • EQUIPO 01</a:t>
+            </a:r>
+          </a:p>
+        </p:txBody>
+      </p:sp>
+      <p:sp>
+        <p:nvSpPr>
+          <p:cNvPr id="4" name="TextBox 3"/>
+          <p:cNvSpPr txBox="1"/>
+          <p:nvPr/>
+        </p:nvSpPr>
+        <p:spPr>
+          <a:xfrm>
+            <a:off x="731520" y="594360"/>
+            <a:ext cx="10698480" cy="685800"/>
+          </a:xfrm>
+          <a:prstGeom prst="rect">
+            <a:avLst/>
+          </a:prstGeom>
+          <a:noFill/>
+        </p:spPr>
+        <p:txBody>
+          <a:bodyPr wrap="square">
+            <a:spAutoFit/>
+          </a:bodyPr>
+          <a:lstStyle/>
+          <a:p>
+            <a:pPr>
+              <a:defRPr sz="2200" b="1">
+                <a:solidFill>
+                  <a:srgbClr val="38BDF8"/>
+                </a:solidFill>
+              </a:defRPr>
+            </a:pPr>
+            <a:r>
+              <a:t>4. Guion de Sustentación Coordinado a Dos Voces</a:t>
+            </a:r>
+          </a:p>
+        </p:txBody>
+      </p:sp>
+      <p:sp>
+        <p:nvSpPr>
+          <p:cNvPr id="5" name="TextBox 4"/>
+          <p:cNvSpPr txBox="1"/>
+          <p:nvPr/>
+        </p:nvSpPr>
+        <p:spPr>
+          <a:xfrm>
+            <a:off x="7772400" y="365760"/>
+            <a:ext cx="3657600" cy="365760"/>
+          </a:xfrm>
+          <a:prstGeom prst="rect">
+            <a:avLst/>
+          </a:prstGeom>
+          <a:noFill/>
+        </p:spPr>
+        <p:txBody>
+          <a:bodyPr wrap="none">
+            <a:spAutoFit/>
+          </a:bodyPr>
+          <a:lstStyle/>
+          <a:p>
+            <a:pPr algn="r">
+              <a:defRPr sz="1100" b="1">
+                <a:solidFill>
+                  <a:srgbClr val="10B981"/>
+                </a:solidFill>
+              </a:defRPr>
+            </a:pPr>
+            <a:r>
+              <a:t>🎤 Ambos Integrantes</a:t>
+            </a:r>
+          </a:p>
+        </p:txBody>
+      </p:sp>
+      <p:graphicFrame>
+        <p:nvGraphicFramePr>
+          <p:cNvPr id="6" name="Table 5"/>
+          <p:cNvGraphicFramePr>
+            <a:graphicFrameLocks noGrp="1"/>
+          </p:cNvGraphicFramePr>
+          <p:nvPr/>
+        </p:nvGraphicFramePr>
+        <p:xfrm>
+          <a:off x="731520" y="1371600"/>
+          <a:ext cx="10698480" cy="4572000"/>
+        </p:xfrm>
+        <a:graphic>
+          <a:graphicData uri="http://schemas.openxmlformats.org/drawingml/2006/table">
+            <a:tbl>
+              <a:tblPr firstRow="1" bandRow="1">
+                <a:tableStyleId>{5C22544A-7EE6-4342-B048-85BDC9FD1C3A}</a:tableStyleId>
+              </a:tblPr>
+              <a:tblGrid>
+                <a:gridCol w="2011680"/>
+                <a:gridCol w="3291840"/>
+                <a:gridCol w="3291840"/>
+                <a:gridCol w="2103120"/>
+              </a:tblGrid>
+              <a:tr h="1143000">
+                <a:tc>
+                  <a:txBody>
+                    <a:bodyPr/>
+                    <a:lstStyle/>
+                    <a:p>
+                      <a:pPr>
+                        <a:defRPr sz="1100" b="1">
+                          <a:solidFill>
+                            <a:srgbClr val="F1F5F9"/>
+                          </a:solidFill>
+                        </a:defRPr>
+                      </a:pPr>
+                      <a:r>
+                        <a:t>Momento / Tiempo</a:t>
+                      </a:r>
+                    </a:p>
+                  </a:txBody>
+                  <a:tcPr>
+                    <a:solidFill>
+                      <a:srgbClr val="0E7490"/>
                     </a:solidFill>
                   </a:tcPr>
                 </a:tc>
@@ -7168,45 +7517,20 @@
                     <a:lstStyle/>
                     <a:p>
                       <a:pPr>
-                        <a:defRPr sz="1050">
+                        <a:defRPr sz="1100" b="1">
                           <a:solidFill>
                             <a:srgbClr val="F1F5F9"/>
                           </a:solidFill>
                         </a:defRPr>
                       </a:pPr>
                       <a:r>
-                        <a:t>Eureka Server administrando el ciclo de vida y latidos de todos los nodos en vivo.</a:t>
+                        <a:t>Qué Expone: Eliceo Parillo</a:t>
                       </a:r>
                     </a:p>
                   </a:txBody>
                   <a:tcPr>
                     <a:solidFill>
-                      <a:srgbClr val="1E293B"/>
-                    </a:solidFill>
-                  </a:tcPr>
-                </a:tc>
-              </a:tr>
-              <a:tr h="587828">
-                <a:tc>
-                  <a:txBody>
-                    <a:bodyPr/>
-                    <a:lstStyle/>
-                    <a:p>
-                      <a:pPr>
-                        <a:defRPr sz="1050">
-                          <a:solidFill>
-                            <a:srgbClr val="F1F5F9"/>
-                          </a:solidFill>
-                        </a:defRPr>
-                      </a:pPr>
-                      <a:r>
-                        <a:t>4. Punto único de acceso mediante Gateway</a:t>
-                      </a:r>
-                    </a:p>
-                  </a:txBody>
-                  <a:tcPr>
-                    <a:solidFill>
-                      <a:srgbClr val="1E293B"/>
+                      <a:srgbClr val="0E7490"/>
                     </a:solidFill>
                   </a:tcPr>
                 </a:tc>
@@ -7216,20 +7540,20 @@
                     <a:lstStyle/>
                     <a:p>
                       <a:pPr>
-                        <a:defRPr sz="1050">
+                        <a:defRPr sz="1100" b="1">
                           <a:solidFill>
                             <a:srgbClr val="F1F5F9"/>
                           </a:solidFill>
                         </a:defRPr>
                       </a:pPr>
                       <a:r>
-                        <a:t>20%</a:t>
+                        <a:t>Qué Expone: Cristhian Paul</a:t>
                       </a:r>
                     </a:p>
                   </a:txBody>
                   <a:tcPr>
                     <a:solidFill>
-                      <a:srgbClr val="1E293B"/>
+                      <a:srgbClr val="0E7490"/>
                     </a:solidFill>
                   </a:tcPr>
                 </a:tc>
@@ -7239,20 +7563,45 @@
                     <a:lstStyle/>
                     <a:p>
                       <a:pPr>
-                        <a:defRPr sz="1050">
+                        <a:defRPr sz="1100" b="1">
                           <a:solidFill>
                             <a:srgbClr val="F1F5F9"/>
                           </a:solidFill>
                         </a:defRPr>
                       </a:pPr>
                       <a:r>
-                        <a:t>Nivel A (20)</a:t>
+                        <a:t>Propósito Evaluado</a:t>
                       </a:r>
                     </a:p>
                   </a:txBody>
                   <a:tcPr>
                     <a:solidFill>
-                      <a:srgbClr val="1E293B"/>
+                      <a:srgbClr val="0E7490"/>
+                    </a:solidFill>
+                  </a:tcPr>
+                </a:tc>
+              </a:tr>
+              <a:tr h="1143000">
+                <a:tc>
+                  <a:txBody>
+                    <a:bodyPr/>
+                    <a:lstStyle/>
+                    <a:p>
+                      <a:pPr>
+                        <a:defRPr sz="1000">
+                          <a:solidFill>
+                            <a:srgbClr val="F1F5F9"/>
+                          </a:solidFill>
+                        </a:defRPr>
+                      </a:pPr>
+                      <a:r>
+                        <a:t>1. Presentación Técnica (8 min)</a:t>
+                      </a:r>
+                    </a:p>
+                  </a:txBody>
+                  <a:tcPr>
+                    <a:solidFill>
+                      <a:srgbClr val="0F172A"/>
                     </a:solidFill>
                   </a:tcPr>
                 </a:tc>
@@ -7262,45 +7611,30 @@
                     <a:lstStyle/>
                     <a:p>
                       <a:pPr>
-                        <a:defRPr sz="1050">
+                        <a:defRPr sz="1000">
                           <a:solidFill>
                             <a:srgbClr val="F1F5F9"/>
                           </a:solidFill>
                         </a:defRPr>
                       </a:pPr>
                       <a:r>
-                        <a:t>Spring Cloud Gateway enrutando peticiones dinámicas en el puerto 18080 con lb://.</a:t>
+                        <a:t>• Introducción y dominio ChaskiPC.</a:t>
+                      </a:r>
+                    </a:p>
+                    <a:p>
+                      <a:r>
+                        <a:t>• Arquitectura base (Gateway, Eureka, Config).</a:t>
+                      </a:r>
+                    </a:p>
+                    <a:p>
+                      <a:r>
+                        <a:t>• Catálogo Hardware (pc-catalogo-ms).</a:t>
                       </a:r>
                     </a:p>
                   </a:txBody>
                   <a:tcPr>
                     <a:solidFill>
-                      <a:srgbClr val="1E293B"/>
-                    </a:solidFill>
-                  </a:tcPr>
-                </a:tc>
-              </a:tr>
-              <a:tr h="587828">
-                <a:tc>
-                  <a:txBody>
-                    <a:bodyPr/>
-                    <a:lstStyle/>
-                    <a:p>
-                      <a:pPr>
-                        <a:defRPr sz="1050">
-                          <a:solidFill>
-                            <a:srgbClr val="F1F5F9"/>
-                          </a:solidFill>
-                        </a:defRPr>
-                      </a:pPr>
-                      <a:r>
-                        <a:t>5. Distribución de tráfico entre instancias</a:t>
-                      </a:r>
-                    </a:p>
-                  </a:txBody>
-                  <a:tcPr>
-                    <a:solidFill>
-                      <a:srgbClr val="1E293B"/>
+                      <a:srgbClr val="0F172A"/>
                     </a:solidFill>
                   </a:tcPr>
                 </a:tc>
@@ -7310,20 +7644,30 @@
                     <a:lstStyle/>
                     <a:p>
                       <a:pPr>
-                        <a:defRPr sz="1050">
+                        <a:defRPr sz="1000">
                           <a:solidFill>
                             <a:srgbClr val="F1F5F9"/>
                           </a:solidFill>
                         </a:defRPr>
                       </a:pPr>
                       <a:r>
-                        <a:t>20%</a:t>
+                        <a:t>• Órdenes de compra y cálculo de 18% IGV.</a:t>
+                      </a:r>
+                    </a:p>
+                    <a:p>
+                      <a:r>
+                        <a:t>• Configuración DEV vs PROD (config-repo).</a:t>
+                      </a:r>
+                    </a:p>
+                    <a:p>
+                      <a:r>
+                        <a:t>• Proyección Mercado Pago y JWT (Unidad II).</a:t>
                       </a:r>
                     </a:p>
                   </a:txBody>
                   <a:tcPr>
                     <a:solidFill>
-                      <a:srgbClr val="1E293B"/>
+                      <a:srgbClr val="0F172A"/>
                     </a:solidFill>
                   </a:tcPr>
                 </a:tc>
@@ -7333,20 +7677,45 @@
                     <a:lstStyle/>
                     <a:p>
                       <a:pPr>
-                        <a:defRPr sz="1050">
+                        <a:defRPr sz="1000">
                           <a:solidFill>
                             <a:srgbClr val="F1F5F9"/>
                           </a:solidFill>
                         </a:defRPr>
                       </a:pPr>
                       <a:r>
-                        <a:t>Nivel A (20)</a:t>
+                        <a:t>Dominio de la arquitectura y decisiones técnicas.</a:t>
                       </a:r>
                     </a:p>
                   </a:txBody>
                   <a:tcPr>
                     <a:solidFill>
-                      <a:srgbClr val="1E293B"/>
+                      <a:srgbClr val="0F172A"/>
+                    </a:solidFill>
+                  </a:tcPr>
+                </a:tc>
+              </a:tr>
+              <a:tr h="1143000">
+                <a:tc>
+                  <a:txBody>
+                    <a:bodyPr/>
+                    <a:lstStyle/>
+                    <a:p>
+                      <a:pPr>
+                        <a:defRPr sz="1000">
+                          <a:solidFill>
+                            <a:srgbClr val="F1F5F9"/>
+                          </a:solidFill>
+                        </a:defRPr>
+                      </a:pPr>
+                      <a:r>
+                        <a:t>2. Demo Técnica en Vivo (5 min)</a:t>
+                      </a:r>
+                    </a:p>
+                  </a:txBody>
+                  <a:tcPr>
+                    <a:solidFill>
+                      <a:srgbClr val="0F172A"/>
                     </a:solidFill>
                   </a:tcPr>
                 </a:tc>
@@ -7356,45 +7725,30 @@
                     <a:lstStyle/>
                     <a:p>
                       <a:pPr>
-                        <a:defRPr sz="1050">
+                        <a:defRPr sz="1000">
                           <a:solidFill>
                             <a:srgbClr val="F1F5F9"/>
                           </a:solidFill>
                         </a:defRPr>
                       </a:pPr>
                       <a:r>
-                        <a:t>Dos instancias concurrentes (8082 y 8083) balanceadas con Round Robin y tolerancia a fallos.</a:t>
+                        <a:t>• Muestra Eureka con 2 réplicas UP.</a:t>
+                      </a:r>
+                    </a:p>
+                    <a:p>
+                      <a:r>
+                        <a:t>• Demuestra balanceo Round Robin en consolas.</a:t>
+                      </a:r>
+                    </a:p>
+                    <a:p>
+                      <a:r>
+                        <a:t>• Demuestra tolerancia a fallos apagando 8082.</a:t>
                       </a:r>
                     </a:p>
                   </a:txBody>
                   <a:tcPr>
                     <a:solidFill>
-                      <a:srgbClr val="1E293B"/>
-                    </a:solidFill>
-                  </a:tcPr>
-                </a:tc>
-              </a:tr>
-              <a:tr h="587832">
-                <a:tc>
-                  <a:txBody>
-                    <a:bodyPr/>
-                    <a:lstStyle/>
-                    <a:p>
-                      <a:pPr>
-                        <a:defRPr sz="1050">
-                          <a:solidFill>
-                            <a:srgbClr val="F1F5F9"/>
-                          </a:solidFill>
-                        </a:defRPr>
-                      </a:pPr>
-                      <a:r>
-                        <a:t>6. Ejecución reproducible y documentación</a:t>
-                      </a:r>
-                    </a:p>
-                  </a:txBody>
-                  <a:tcPr>
-                    <a:solidFill>
-                      <a:srgbClr val="1E293B"/>
+                      <a:srgbClr val="0F172A"/>
                     </a:solidFill>
                   </a:tcPr>
                 </a:tc>
@@ -7404,20 +7758,30 @@
                     <a:lstStyle/>
                     <a:p>
                       <a:pPr>
-                        <a:defRPr sz="1050">
+                        <a:defRPr sz="1000">
                           <a:solidFill>
                             <a:srgbClr val="F1F5F9"/>
                           </a:solidFill>
                         </a:defRPr>
                       </a:pPr>
                       <a:r>
-                        <a:t>10%</a:t>
+                        <a:t>• Ejecuta CRUD Éxito (201) con Ryzen 7.</a:t>
+                      </a:r>
+                    </a:p>
+                    <a:p>
+                      <a:r>
+                        <a:t>• Ejecuta Caso Error Validación (400).</a:t>
+                      </a:r>
+                    </a:p>
+                    <a:p>
+                      <a:r>
+                        <a:t>• Ejecuta Caso No Encontrado (404).</a:t>
                       </a:r>
                     </a:p>
                   </a:txBody>
                   <a:tcPr>
                     <a:solidFill>
-                      <a:srgbClr val="1E293B"/>
+                      <a:srgbClr val="0F172A"/>
                     </a:solidFill>
                   </a:tcPr>
                 </a:tc>
@@ -7427,20 +7791,45 @@
                     <a:lstStyle/>
                     <a:p>
                       <a:pPr>
-                        <a:defRPr sz="1050">
+                        <a:defRPr sz="1000">
                           <a:solidFill>
                             <a:srgbClr val="F1F5F9"/>
                           </a:solidFill>
                         </a:defRPr>
                       </a:pPr>
                       <a:r>
-                        <a:t>Nivel A (20)</a:t>
+                        <a:t>Funcionamiento en vivo en la computadora.</a:t>
                       </a:r>
                     </a:p>
                   </a:txBody>
                   <a:tcPr>
                     <a:solidFill>
-                      <a:srgbClr val="1E293B"/>
+                      <a:srgbClr val="0F172A"/>
+                    </a:solidFill>
+                  </a:tcPr>
+                </a:tc>
+              </a:tr>
+              <a:tr h="1143000">
+                <a:tc>
+                  <a:txBody>
+                    <a:bodyPr/>
+                    <a:lstStyle/>
+                    <a:p>
+                      <a:pPr>
+                        <a:defRPr sz="1000">
+                          <a:solidFill>
+                            <a:srgbClr val="F1F5F9"/>
+                          </a:solidFill>
+                        </a:defRPr>
+                      </a:pPr>
+                      <a:r>
+                        <a:t>3. Preguntas Individuales (5 min)</a:t>
+                      </a:r>
+                    </a:p>
+                  </a:txBody>
+                  <a:tcPr>
+                    <a:solidFill>
+                      <a:srgbClr val="0F172A"/>
                     </a:solidFill>
                   </a:tcPr>
                 </a:tc>
@@ -7450,20 +7839,66 @@
                     <a:lstStyle/>
                     <a:p>
                       <a:pPr>
-                        <a:defRPr sz="1050">
+                        <a:defRPr sz="1000">
                           <a:solidFill>
                             <a:srgbClr val="F1F5F9"/>
                           </a:solidFill>
                         </a:defRPr>
                       </a:pPr>
                       <a:r>
-                        <a:t>Lanzadores automatizados de un clic, README completo y portabilidad probada.</a:t>
+                        <a:t>Responde preguntas de puertos no fijos y Config Server.</a:t>
                       </a:r>
                     </a:p>
                   </a:txBody>
                   <a:tcPr>
                     <a:solidFill>
-                      <a:srgbClr val="1E293B"/>
+                      <a:srgbClr val="0F172A"/>
+                    </a:solidFill>
+                  </a:tcPr>
+                </a:tc>
+                <a:tc>
+                  <a:txBody>
+                    <a:bodyPr/>
+                    <a:lstStyle/>
+                    <a:p>
+                      <a:pPr>
+                        <a:defRPr sz="1000">
+                          <a:solidFill>
+                            <a:srgbClr val="F1F5F9"/>
+                          </a:solidFill>
+                        </a:defRPr>
+                      </a:pPr>
+                      <a:r>
+                        <a:t>Responde preguntas de desalojo Eureka y esquema lb://.</a:t>
+                      </a:r>
+                    </a:p>
+                  </a:txBody>
+                  <a:tcPr>
+                    <a:solidFill>
+                      <a:srgbClr val="0F172A"/>
+                    </a:solidFill>
+                  </a:tcPr>
+                </a:tc>
+                <a:tc>
+                  <a:txBody>
+                    <a:bodyPr/>
+                    <a:lstStyle/>
+                    <a:p>
+                      <a:pPr>
+                        <a:defRPr sz="1000">
+                          <a:solidFill>
+                            <a:srgbClr val="F1F5F9"/>
+                          </a:solidFill>
+                        </a:defRPr>
+                      </a:pPr>
+                      <a:r>
+                        <a:t>Verificar autoría individual de cada estudiante.</a:t>
+                      </a:r>
+                    </a:p>
+                  </a:txBody>
+                  <a:tcPr>
+                    <a:solidFill>
+                      <a:srgbClr val="0F172A"/>
                     </a:solidFill>
                   </a:tcPr>
                 </a:tc>
@@ -7472,6 +7907,1098 @@
           </a:graphicData>
         </a:graphic>
       </p:graphicFrame>
+    </p:spTree>
+  </p:cSld>
+  <p:clrMapOvr>
+    <a:masterClrMapping/>
+  </p:clrMapOvr>
+</p:sld>
+</file>
+
+<file path=ppt/slides/slide8.xml><?xml version="1.0" encoding="utf-8"?>
+<p:sld xmlns:a="http://schemas.openxmlformats.org/drawingml/2006/main" xmlns:p="http://schemas.openxmlformats.org/presentationml/2006/main" xmlns:r="http://schemas.openxmlformats.org/officeDocument/2006/relationships">
+  <p:cSld>
+    <p:spTree>
+      <p:nvGrpSpPr>
+        <p:cNvPr id="1" name=""/>
+        <p:cNvGrpSpPr/>
+        <p:nvPr/>
+      </p:nvGrpSpPr>
+      <p:grpSpPr/>
+      <p:sp>
+        <p:nvSpPr>
+          <p:cNvPr id="2" name="Rectangle 1"/>
+          <p:cNvSpPr/>
+          <p:nvPr/>
+        </p:nvSpPr>
+        <p:spPr>
+          <a:xfrm>
+            <a:off x="0" y="0"/>
+            <a:ext cx="12191695" cy="6858000"/>
+          </a:xfrm>
+          <a:prstGeom prst="rect">
+            <a:avLst/>
+          </a:prstGeom>
+          <a:solidFill>
+            <a:srgbClr val="070B14"/>
+          </a:solidFill>
+          <a:ln>
+            <a:solidFill>
+              <a:srgbClr val="070B14"/>
+            </a:solidFill>
+          </a:ln>
+        </p:spPr>
+        <p:style>
+          <a:lnRef idx="1">
+            <a:schemeClr val="accent1"/>
+          </a:lnRef>
+          <a:fillRef idx="3">
+            <a:schemeClr val="accent1"/>
+          </a:fillRef>
+          <a:effectRef idx="2">
+            <a:schemeClr val="accent1"/>
+          </a:effectRef>
+          <a:fontRef idx="minor">
+            <a:schemeClr val="lt1"/>
+          </a:fontRef>
+        </p:style>
+        <p:txBody>
+          <a:bodyPr rtlCol="0" anchor="ctr"/>
+          <a:lstStyle/>
+          <a:p>
+            <a:pPr algn="ctr"/>
+          </a:p>
+        </p:txBody>
+      </p:sp>
+      <p:sp>
+        <p:nvSpPr>
+          <p:cNvPr id="3" name="TextBox 2"/>
+          <p:cNvSpPr txBox="1"/>
+          <p:nvPr/>
+        </p:nvSpPr>
+        <p:spPr>
+          <a:xfrm>
+            <a:off x="731520" y="320040"/>
+            <a:ext cx="10698480" cy="320040"/>
+          </a:xfrm>
+          <a:prstGeom prst="rect">
+            <a:avLst/>
+          </a:prstGeom>
+          <a:noFill/>
+        </p:spPr>
+        <p:txBody>
+          <a:bodyPr wrap="square">
+            <a:spAutoFit/>
+          </a:bodyPr>
+          <a:lstStyle/>
+          <a:p>
+            <a:pPr>
+              <a:defRPr sz="1050" b="1">
+                <a:solidFill>
+                  <a:srgbClr val="818CF8"/>
+                </a:solidFill>
+              </a:defRPr>
+            </a:pPr>
+            <a:r>
+              <a:t>CHASKIPC • EVALUACIÓN UNIDAD I (S1 A S5) • EQUIPO 01</a:t>
+            </a:r>
+          </a:p>
+        </p:txBody>
+      </p:sp>
+      <p:sp>
+        <p:nvSpPr>
+          <p:cNvPr id="4" name="TextBox 3"/>
+          <p:cNvSpPr txBox="1"/>
+          <p:nvPr/>
+        </p:nvSpPr>
+        <p:spPr>
+          <a:xfrm>
+            <a:off x="731520" y="594360"/>
+            <a:ext cx="10698480" cy="685800"/>
+          </a:xfrm>
+          <a:prstGeom prst="rect">
+            <a:avLst/>
+          </a:prstGeom>
+          <a:noFill/>
+        </p:spPr>
+        <p:txBody>
+          <a:bodyPr wrap="square">
+            <a:spAutoFit/>
+          </a:bodyPr>
+          <a:lstStyle/>
+          <a:p>
+            <a:pPr>
+              <a:defRPr sz="2200" b="1">
+                <a:solidFill>
+                  <a:srgbClr val="38BDF8"/>
+                </a:solidFill>
+              </a:defRPr>
+            </a:pPr>
+            <a:r>
+              <a:t>Centro de Mando: Demostración Técnica en Vivo (5 min)</a:t>
+            </a:r>
+          </a:p>
+        </p:txBody>
+      </p:sp>
+      <p:sp>
+        <p:nvSpPr>
+          <p:cNvPr id="5" name="TextBox 4"/>
+          <p:cNvSpPr txBox="1"/>
+          <p:nvPr/>
+        </p:nvSpPr>
+        <p:spPr>
+          <a:xfrm>
+            <a:off x="7772400" y="365760"/>
+            <a:ext cx="3657600" cy="365760"/>
+          </a:xfrm>
+          <a:prstGeom prst="rect">
+            <a:avLst/>
+          </a:prstGeom>
+          <a:noFill/>
+        </p:spPr>
+        <p:txBody>
+          <a:bodyPr wrap="none">
+            <a:spAutoFit/>
+          </a:bodyPr>
+          <a:lstStyle/>
+          <a:p>
+            <a:pPr algn="r">
+              <a:defRPr sz="1100" b="1">
+                <a:solidFill>
+                  <a:srgbClr val="10B981"/>
+                </a:solidFill>
+              </a:defRPr>
+            </a:pPr>
+            <a:r>
+              <a:t>🎤 Eliceo &amp; Cristhian Paul</a:t>
+            </a:r>
+          </a:p>
+        </p:txBody>
+      </p:sp>
+      <p:sp>
+        <p:nvSpPr>
+          <p:cNvPr id="6" name="Rounded Rectangle 5"/>
+          <p:cNvSpPr/>
+          <p:nvPr/>
+        </p:nvSpPr>
+        <p:spPr>
+          <a:xfrm>
+            <a:off x="731520" y="1371600"/>
+            <a:ext cx="5120640" cy="4754880"/>
+          </a:xfrm>
+          <a:prstGeom prst="roundRect">
+            <a:avLst/>
+          </a:prstGeom>
+          <a:solidFill>
+            <a:srgbClr val="0F172A"/>
+          </a:solidFill>
+          <a:ln>
+            <a:solidFill>
+              <a:srgbClr val="38BDF8"/>
+            </a:solidFill>
+          </a:ln>
+        </p:spPr>
+        <p:style>
+          <a:lnRef idx="1">
+            <a:schemeClr val="accent1"/>
+          </a:lnRef>
+          <a:fillRef idx="3">
+            <a:schemeClr val="accent1"/>
+          </a:fillRef>
+          <a:effectRef idx="2">
+            <a:schemeClr val="accent1"/>
+          </a:effectRef>
+          <a:fontRef idx="minor">
+            <a:schemeClr val="lt1"/>
+          </a:fontRef>
+        </p:style>
+        <p:txBody>
+          <a:bodyPr rtlCol="0" anchor="ctr" wrap="square"/>
+          <a:lstStyle/>
+          <a:p>
+            <a:pPr algn="ctr">
+              <a:defRPr sz="1300" b="1">
+                <a:solidFill>
+                  <a:srgbClr val="38BDF8"/>
+                </a:solidFill>
+              </a:defRPr>
+            </a:pPr>
+            <a:r>
+              <a:t>🌐 Enlaces en Vivo (Abre con 1 Clic en presentacion.html)</a:t>
+            </a:r>
+          </a:p>
+          <a:p>
+            <a:br/>
+            <a:pPr>
+              <a:defRPr sz="1050">
+                <a:solidFill>
+                  <a:srgbClr val="F1F5F9"/>
+                </a:solidFill>
+              </a:defRPr>
+            </a:pPr>
+            <a:r>
+              <a:t>1. Eureka Dashboard: http://localhost:8761 (Ver 2 réplicas UP)</a:t>
+            </a:r>
+          </a:p>
+          <a:p>
+            <a:pPr>
+              <a:defRPr sz="1050">
+                <a:solidFill>
+                  <a:srgbClr val="F1F5F9"/>
+                </a:solidFill>
+              </a:defRPr>
+            </a:pPr>
+            <a:r>
+              <a:t>2. Gateway Órdenes: http://localhost:18080/api/v1/ordenes</a:t>
+            </a:r>
+          </a:p>
+          <a:p>
+            <a:pPr>
+              <a:defRPr sz="1050">
+                <a:solidFill>
+                  <a:srgbClr val="F1F5F9"/>
+                </a:solidFill>
+              </a:defRPr>
+            </a:pPr>
+            <a:r>
+              <a:t>3. Gateway Catálogo: http://localhost:18080/api/v1/productos</a:t>
+            </a:r>
+          </a:p>
+          <a:p>
+            <a:pPr>
+              <a:defRPr sz="1050">
+                <a:solidFill>
+                  <a:srgbClr val="F1F5F9"/>
+                </a:solidFill>
+              </a:defRPr>
+            </a:pPr>
+            <a:r>
+              <a:t>4. Config Server DEV: http://localhost:8888/pagatu-orden-ms/dev</a:t>
+            </a:r>
+          </a:p>
+          <a:p>
+            <a:pPr>
+              <a:defRPr sz="1050">
+                <a:solidFill>
+                  <a:srgbClr val="F1F5F9"/>
+                </a:solidFill>
+              </a:defRPr>
+            </a:pPr>
+            <a:r>
+              <a:t>5. Grafana Dashboard: http://localhost:13000 (admin / admin)</a:t>
+            </a:r>
+          </a:p>
+          <a:p>
+            <a:pPr>
+              <a:defRPr sz="1050">
+                <a:solidFill>
+                  <a:srgbClr val="F1F5F9"/>
+                </a:solidFill>
+              </a:defRPr>
+            </a:pPr>
+            <a:r>
+              <a:t>6. Prometheus Targets: http://localhost:19090/targets</a:t>
+            </a:r>
+          </a:p>
+          <a:p>
+            <a:br/>
+            <a:pPr>
+              <a:defRPr sz="1050">
+                <a:solidFill>
+                  <a:srgbClr val="F1F5F9"/>
+                </a:solidFill>
+              </a:defRPr>
+            </a:pPr>
+            <a:r>
+              <a:t>💡 Iniciador Automático: Doble clic en iniciar_todo.bat</a:t>
+            </a:r>
+          </a:p>
+        </p:txBody>
+      </p:sp>
+      <p:sp>
+        <p:nvSpPr>
+          <p:cNvPr id="7" name="Rounded Rectangle 6"/>
+          <p:cNvSpPr/>
+          <p:nvPr/>
+        </p:nvSpPr>
+        <p:spPr>
+          <a:xfrm>
+            <a:off x="6309360" y="1371600"/>
+            <a:ext cx="5120640" cy="4754880"/>
+          </a:xfrm>
+          <a:prstGeom prst="roundRect">
+            <a:avLst/>
+          </a:prstGeom>
+          <a:solidFill>
+            <a:srgbClr val="0F172A"/>
+          </a:solidFill>
+          <a:ln>
+            <a:solidFill>
+              <a:srgbClr val="10B981"/>
+            </a:solidFill>
+          </a:ln>
+        </p:spPr>
+        <p:style>
+          <a:lnRef idx="1">
+            <a:schemeClr val="accent1"/>
+          </a:lnRef>
+          <a:fillRef idx="3">
+            <a:schemeClr val="accent1"/>
+          </a:fillRef>
+          <a:effectRef idx="2">
+            <a:schemeClr val="accent1"/>
+          </a:effectRef>
+          <a:fontRef idx="minor">
+            <a:schemeClr val="lt1"/>
+          </a:fontRef>
+        </p:style>
+        <p:txBody>
+          <a:bodyPr rtlCol="0" anchor="ctr" wrap="square"/>
+          <a:lstStyle/>
+          <a:p>
+            <a:pPr algn="ctr">
+              <a:defRPr sz="1300" b="1">
+                <a:solidFill>
+                  <a:srgbClr val="10B981"/>
+                </a:solidFill>
+              </a:defRPr>
+            </a:pPr>
+            <a:r>
+              <a:t>📋 Comandos de Prueba Asignados para PowerShell</a:t>
+            </a:r>
+          </a:p>
+          <a:p>
+            <a:br/>
+            <a:pPr>
+              <a:defRPr sz="1050">
+                <a:solidFill>
+                  <a:srgbClr val="F1F5F9"/>
+                </a:solidFill>
+              </a:defRPr>
+            </a:pPr>
+            <a:r>
+              <a:t>[Ejecuta: Cristhian Paul] Paso 2: Caso Éxito (201 Created)</a:t>
+            </a:r>
+          </a:p>
+          <a:p>
+            <a:pPr>
+              <a:defRPr sz="1050">
+                <a:solidFill>
+                  <a:srgbClr val="F1F5F9"/>
+                </a:solidFill>
+              </a:defRPr>
+            </a:pPr>
+            <a:r>
+              <a:t>• Envía JSON con Ryzen 7 7800X3D y calcula 18% IGV automáticamente.</a:t>
+            </a:r>
+          </a:p>
+          <a:p>
+            <a:br/>
+            <a:pPr>
+              <a:defRPr sz="1050">
+                <a:solidFill>
+                  <a:srgbClr val="F1F5F9"/>
+                </a:solidFill>
+              </a:defRPr>
+            </a:pPr>
+            <a:r>
+              <a:t>[Ejecuta: Cristhian Paul] Paso 2: Casos de Error (400 y 404)</a:t>
+            </a:r>
+          </a:p>
+          <a:p>
+            <a:pPr>
+              <a:defRPr sz="1050">
+                <a:solidFill>
+                  <a:srgbClr val="F1F5F9"/>
+                </a:solidFill>
+              </a:defRPr>
+            </a:pPr>
+            <a:r>
+              <a:t>• Envía body vacío para validación 400 y consulta orden 99999 (404).</a:t>
+            </a:r>
+          </a:p>
+          <a:p>
+            <a:br/>
+            <a:pPr>
+              <a:defRPr sz="1050">
+                <a:solidFill>
+                  <a:srgbClr val="F1F5F9"/>
+                </a:solidFill>
+              </a:defRPr>
+            </a:pPr>
+            <a:r>
+              <a:t>[Ejecuta: Eliceo Parillo] Paso 5: Balanceo Round Robin</a:t>
+            </a:r>
+          </a:p>
+          <a:p>
+            <a:pPr>
+              <a:defRPr sz="1050">
+                <a:solidFill>
+                  <a:srgbClr val="F1F5F9"/>
+                </a:solidFill>
+              </a:defRPr>
+            </a:pPr>
+            <a:r>
+              <a:t>• Dispara 4 peticiones al Gateway y muestra alternancia 8082 vs 8083.</a:t>
+            </a:r>
+          </a:p>
+          <a:p>
+            <a:br/>
+            <a:pPr>
+              <a:defRPr sz="1050">
+                <a:solidFill>
+                  <a:srgbClr val="F1F5F9"/>
+                </a:solidFill>
+              </a:defRPr>
+            </a:pPr>
+            <a:r>
+              <a:t>[Ejecuta: Eliceo Parillo] Paso 6: Tolerancia a Fallos</a:t>
+            </a:r>
+          </a:p>
+          <a:p>
+            <a:pPr>
+              <a:defRPr sz="1050">
+                <a:solidFill>
+                  <a:srgbClr val="F1F5F9"/>
+                </a:solidFill>
+              </a:defRPr>
+            </a:pPr>
+            <a:r>
+              <a:t>• Detiene la consola 8082 y muestra respuesta inmediata desde la 8083.</a:t>
+            </a:r>
+          </a:p>
+        </p:txBody>
+      </p:sp>
+    </p:spTree>
+  </p:cSld>
+  <p:clrMapOvr>
+    <a:masterClrMapping/>
+  </p:clrMapOvr>
+</p:sld>
+</file>
+
+<file path=ppt/slides/slide9.xml><?xml version="1.0" encoding="utf-8"?>
+<p:sld xmlns:a="http://schemas.openxmlformats.org/drawingml/2006/main" xmlns:p="http://schemas.openxmlformats.org/presentationml/2006/main" xmlns:r="http://schemas.openxmlformats.org/officeDocument/2006/relationships">
+  <p:cSld>
+    <p:spTree>
+      <p:nvGrpSpPr>
+        <p:cNvPr id="1" name=""/>
+        <p:cNvGrpSpPr/>
+        <p:nvPr/>
+      </p:nvGrpSpPr>
+      <p:grpSpPr/>
+      <p:sp>
+        <p:nvSpPr>
+          <p:cNvPr id="2" name="Rectangle 1"/>
+          <p:cNvSpPr/>
+          <p:nvPr/>
+        </p:nvSpPr>
+        <p:spPr>
+          <a:xfrm>
+            <a:off x="0" y="0"/>
+            <a:ext cx="12191695" cy="6858000"/>
+          </a:xfrm>
+          <a:prstGeom prst="rect">
+            <a:avLst/>
+          </a:prstGeom>
+          <a:solidFill>
+            <a:srgbClr val="070B14"/>
+          </a:solidFill>
+          <a:ln>
+            <a:solidFill>
+              <a:srgbClr val="070B14"/>
+            </a:solidFill>
+          </a:ln>
+        </p:spPr>
+        <p:style>
+          <a:lnRef idx="1">
+            <a:schemeClr val="accent1"/>
+          </a:lnRef>
+          <a:fillRef idx="3">
+            <a:schemeClr val="accent1"/>
+          </a:fillRef>
+          <a:effectRef idx="2">
+            <a:schemeClr val="accent1"/>
+          </a:effectRef>
+          <a:fontRef idx="minor">
+            <a:schemeClr val="lt1"/>
+          </a:fontRef>
+        </p:style>
+        <p:txBody>
+          <a:bodyPr rtlCol="0" anchor="ctr"/>
+          <a:lstStyle/>
+          <a:p>
+            <a:pPr algn="ctr"/>
+          </a:p>
+        </p:txBody>
+      </p:sp>
+      <p:sp>
+        <p:nvSpPr>
+          <p:cNvPr id="3" name="TextBox 2"/>
+          <p:cNvSpPr txBox="1"/>
+          <p:nvPr/>
+        </p:nvSpPr>
+        <p:spPr>
+          <a:xfrm>
+            <a:off x="731520" y="320040"/>
+            <a:ext cx="10698480" cy="320040"/>
+          </a:xfrm>
+          <a:prstGeom prst="rect">
+            <a:avLst/>
+          </a:prstGeom>
+          <a:noFill/>
+        </p:spPr>
+        <p:txBody>
+          <a:bodyPr wrap="square">
+            <a:spAutoFit/>
+          </a:bodyPr>
+          <a:lstStyle/>
+          <a:p>
+            <a:pPr>
+              <a:defRPr sz="1050" b="1">
+                <a:solidFill>
+                  <a:srgbClr val="818CF8"/>
+                </a:solidFill>
+              </a:defRPr>
+            </a:pPr>
+            <a:r>
+              <a:t>CHASKIPC • EVALUACIÓN UNIDAD I (S1 A S5) • EQUIPO 01</a:t>
+            </a:r>
+          </a:p>
+        </p:txBody>
+      </p:sp>
+      <p:sp>
+        <p:nvSpPr>
+          <p:cNvPr id="4" name="TextBox 3"/>
+          <p:cNvSpPr txBox="1"/>
+          <p:nvPr/>
+        </p:nvSpPr>
+        <p:spPr>
+          <a:xfrm>
+            <a:off x="731520" y="594360"/>
+            <a:ext cx="10698480" cy="685800"/>
+          </a:xfrm>
+          <a:prstGeom prst="rect">
+            <a:avLst/>
+          </a:prstGeom>
+          <a:noFill/>
+        </p:spPr>
+        <p:txBody>
+          <a:bodyPr wrap="square">
+            <a:spAutoFit/>
+          </a:bodyPr>
+          <a:lstStyle/>
+          <a:p>
+            <a:pPr>
+              <a:defRPr sz="2200" b="1">
+                <a:solidFill>
+                  <a:srgbClr val="38BDF8"/>
+                </a:solidFill>
+              </a:defRPr>
+            </a:pPr>
+            <a:r>
+              <a:t>Bitácora DevOps: Resolución de los 7 Desafíos en Laboratorio</a:t>
+            </a:r>
+          </a:p>
+        </p:txBody>
+      </p:sp>
+      <p:sp>
+        <p:nvSpPr>
+          <p:cNvPr id="5" name="TextBox 4"/>
+          <p:cNvSpPr txBox="1"/>
+          <p:nvPr/>
+        </p:nvSpPr>
+        <p:spPr>
+          <a:xfrm>
+            <a:off x="7772400" y="365760"/>
+            <a:ext cx="3657600" cy="365760"/>
+          </a:xfrm>
+          <a:prstGeom prst="rect">
+            <a:avLst/>
+          </a:prstGeom>
+          <a:noFill/>
+        </p:spPr>
+        <p:txBody>
+          <a:bodyPr wrap="none">
+            <a:spAutoFit/>
+          </a:bodyPr>
+          <a:lstStyle/>
+          <a:p>
+            <a:pPr algn="r">
+              <a:defRPr sz="1100" b="1">
+                <a:solidFill>
+                  <a:srgbClr val="10B981"/>
+                </a:solidFill>
+              </a:defRPr>
+            </a:pPr>
+            <a:r>
+              <a:t>🎤 Ambos Integrantes</a:t>
+            </a:r>
+          </a:p>
+        </p:txBody>
+      </p:sp>
+      <p:sp>
+        <p:nvSpPr>
+          <p:cNvPr id="6" name="Rounded Rectangle 5"/>
+          <p:cNvSpPr/>
+          <p:nvPr/>
+        </p:nvSpPr>
+        <p:spPr>
+          <a:xfrm>
+            <a:off x="731520" y="1371600"/>
+            <a:ext cx="5120640" cy="1097280"/>
+          </a:xfrm>
+          <a:prstGeom prst="roundRect">
+            <a:avLst/>
+          </a:prstGeom>
+          <a:solidFill>
+            <a:srgbClr val="0F172A"/>
+          </a:solidFill>
+          <a:ln>
+            <a:solidFill>
+              <a:srgbClr val="10B981"/>
+            </a:solidFill>
+          </a:ln>
+        </p:spPr>
+        <p:style>
+          <a:lnRef idx="1">
+            <a:schemeClr val="accent1"/>
+          </a:lnRef>
+          <a:fillRef idx="3">
+            <a:schemeClr val="accent1"/>
+          </a:fillRef>
+          <a:effectRef idx="2">
+            <a:schemeClr val="accent1"/>
+          </a:effectRef>
+          <a:fontRef idx="minor">
+            <a:schemeClr val="lt1"/>
+          </a:fontRef>
+        </p:style>
+        <p:txBody>
+          <a:bodyPr rtlCol="0" anchor="ctr" wrap="square"/>
+          <a:lstStyle/>
+          <a:p>
+            <a:pPr algn="ctr">
+              <a:defRPr sz="1200" b="1">
+                <a:solidFill>
+                  <a:srgbClr val="10B981"/>
+                </a:solidFill>
+              </a:defRPr>
+            </a:pPr>
+            <a:r>
+              <a:t>1. Hardcoded Paths</a:t>
+            </a:r>
+          </a:p>
+          <a:p>
+            <a:pPr>
+              <a:defRPr sz="1050">
+                <a:solidFill>
+                  <a:srgbClr val="F1F5F9"/>
+                </a:solidFill>
+              </a:defRPr>
+            </a:pPr>
+            <a:r>
+              <a:t>Solución: Rutas relativas dinámicas en Python y PowerShell (Split-Path).</a:t>
+            </a:r>
+          </a:p>
+        </p:txBody>
+      </p:sp>
+      <p:sp>
+        <p:nvSpPr>
+          <p:cNvPr id="7" name="Rounded Rectangle 6"/>
+          <p:cNvSpPr/>
+          <p:nvPr/>
+        </p:nvSpPr>
+        <p:spPr>
+          <a:xfrm>
+            <a:off x="731520" y="2606040"/>
+            <a:ext cx="5120640" cy="1097280"/>
+          </a:xfrm>
+          <a:prstGeom prst="roundRect">
+            <a:avLst/>
+          </a:prstGeom>
+          <a:solidFill>
+            <a:srgbClr val="0F172A"/>
+          </a:solidFill>
+          <a:ln>
+            <a:solidFill>
+              <a:srgbClr val="10B981"/>
+            </a:solidFill>
+          </a:ln>
+        </p:spPr>
+        <p:style>
+          <a:lnRef idx="1">
+            <a:schemeClr val="accent1"/>
+          </a:lnRef>
+          <a:fillRef idx="3">
+            <a:schemeClr val="accent1"/>
+          </a:fillRef>
+          <a:effectRef idx="2">
+            <a:schemeClr val="accent1"/>
+          </a:effectRef>
+          <a:fontRef idx="minor">
+            <a:schemeClr val="lt1"/>
+          </a:fontRef>
+        </p:style>
+        <p:txBody>
+          <a:bodyPr rtlCol="0" anchor="ctr" wrap="square"/>
+          <a:lstStyle/>
+          <a:p>
+            <a:pPr algn="ctr">
+              <a:defRPr sz="1200" b="1">
+                <a:solidFill>
+                  <a:srgbClr val="10B981"/>
+                </a:solidFill>
+              </a:defRPr>
+            </a:pPr>
+            <a:r>
+              <a:t>2. Falta de Python</a:t>
+            </a:r>
+          </a:p>
+          <a:p>
+            <a:pPr>
+              <a:defRPr sz="1050">
+                <a:solidFill>
+                  <a:srgbClr val="F1F5F9"/>
+                </a:solidFill>
+              </a:defRPr>
+            </a:pPr>
+            <a:r>
+              <a:t>Solución: Lanzador nativo iniciar_todo.ps1 en PowerShell puro sin dependencias.</a:t>
+            </a:r>
+          </a:p>
+        </p:txBody>
+      </p:sp>
+      <p:sp>
+        <p:nvSpPr>
+          <p:cNvPr id="8" name="Rounded Rectangle 7"/>
+          <p:cNvSpPr/>
+          <p:nvPr/>
+        </p:nvSpPr>
+        <p:spPr>
+          <a:xfrm>
+            <a:off x="731520" y="3840480"/>
+            <a:ext cx="5120640" cy="1097280"/>
+          </a:xfrm>
+          <a:prstGeom prst="roundRect">
+            <a:avLst/>
+          </a:prstGeom>
+          <a:solidFill>
+            <a:srgbClr val="0F172A"/>
+          </a:solidFill>
+          <a:ln>
+            <a:solidFill>
+              <a:srgbClr val="10B981"/>
+            </a:solidFill>
+          </a:ln>
+        </p:spPr>
+        <p:style>
+          <a:lnRef idx="1">
+            <a:schemeClr val="accent1"/>
+          </a:lnRef>
+          <a:fillRef idx="3">
+            <a:schemeClr val="accent1"/>
+          </a:fillRef>
+          <a:effectRef idx="2">
+            <a:schemeClr val="accent1"/>
+          </a:effectRef>
+          <a:fontRef idx="minor">
+            <a:schemeClr val="lt1"/>
+          </a:fontRef>
+        </p:style>
+        <p:txBody>
+          <a:bodyPr rtlCol="0" anchor="ctr" wrap="square"/>
+          <a:lstStyle/>
+          <a:p>
+            <a:pPr algn="ctr">
+              <a:defRPr sz="1200" b="1">
+                <a:solidFill>
+                  <a:srgbClr val="10B981"/>
+                </a:solidFill>
+              </a:defRPr>
+            </a:pPr>
+            <a:r>
+              <a:t>3. Conflicto Java 17/21</a:t>
+            </a:r>
+          </a:p>
+          <a:p>
+            <a:pPr>
+              <a:defRPr sz="1050">
+                <a:solidFill>
+                  <a:srgbClr val="F1F5F9"/>
+                </a:solidFill>
+              </a:defRPr>
+            </a:pPr>
+            <a:r>
+              <a:t>Solución: Autodetección de JDK 21 e inyección forzada de $env:JAVA_HOME.</a:t>
+            </a:r>
+          </a:p>
+        </p:txBody>
+      </p:sp>
+      <p:sp>
+        <p:nvSpPr>
+          <p:cNvPr id="9" name="Rounded Rectangle 8"/>
+          <p:cNvSpPr/>
+          <p:nvPr/>
+        </p:nvSpPr>
+        <p:spPr>
+          <a:xfrm>
+            <a:off x="731520" y="5074920"/>
+            <a:ext cx="5120640" cy="1097280"/>
+          </a:xfrm>
+          <a:prstGeom prst="roundRect">
+            <a:avLst/>
+          </a:prstGeom>
+          <a:solidFill>
+            <a:srgbClr val="0F172A"/>
+          </a:solidFill>
+          <a:ln>
+            <a:solidFill>
+              <a:srgbClr val="10B981"/>
+            </a:solidFill>
+          </a:ln>
+        </p:spPr>
+        <p:style>
+          <a:lnRef idx="1">
+            <a:schemeClr val="accent1"/>
+          </a:lnRef>
+          <a:fillRef idx="3">
+            <a:schemeClr val="accent1"/>
+          </a:fillRef>
+          <a:effectRef idx="2">
+            <a:schemeClr val="accent1"/>
+          </a:effectRef>
+          <a:fontRef idx="minor">
+            <a:schemeClr val="lt1"/>
+          </a:fontRef>
+        </p:style>
+        <p:txBody>
+          <a:bodyPr rtlCol="0" anchor="ctr" wrap="square"/>
+          <a:lstStyle/>
+          <a:p>
+            <a:pPr algn="ctr">
+              <a:defRPr sz="1200" b="1">
+                <a:solidFill>
+                  <a:srgbClr val="10B981"/>
+                </a:solidFill>
+              </a:defRPr>
+            </a:pPr>
+            <a:r>
+              <a:t>4. Comillas PowerShell</a:t>
+            </a:r>
+          </a:p>
+          <a:p>
+            <a:pPr>
+              <a:defRPr sz="1050">
+                <a:solidFill>
+                  <a:srgbClr val="F1F5F9"/>
+                </a:solidFill>
+              </a:defRPr>
+            </a:pPr>
+            <a:r>
+              <a:t>Solución: Reemplazo por $env:SERVER_PORT='8083' nativo de Spring Boot.</a:t>
+            </a:r>
+          </a:p>
+        </p:txBody>
+      </p:sp>
+      <p:sp>
+        <p:nvSpPr>
+          <p:cNvPr id="10" name="Rounded Rectangle 9"/>
+          <p:cNvSpPr/>
+          <p:nvPr/>
+        </p:nvSpPr>
+        <p:spPr>
+          <a:xfrm>
+            <a:off x="6309360" y="1371600"/>
+            <a:ext cx="5120640" cy="1097280"/>
+          </a:xfrm>
+          <a:prstGeom prst="roundRect">
+            <a:avLst/>
+          </a:prstGeom>
+          <a:solidFill>
+            <a:srgbClr val="0F172A"/>
+          </a:solidFill>
+          <a:ln>
+            <a:solidFill>
+              <a:srgbClr val="10B981"/>
+            </a:solidFill>
+          </a:ln>
+        </p:spPr>
+        <p:style>
+          <a:lnRef idx="1">
+            <a:schemeClr val="accent1"/>
+          </a:lnRef>
+          <a:fillRef idx="3">
+            <a:schemeClr val="accent1"/>
+          </a:fillRef>
+          <a:effectRef idx="2">
+            <a:schemeClr val="accent1"/>
+          </a:effectRef>
+          <a:fontRef idx="minor">
+            <a:schemeClr val="lt1"/>
+          </a:fontRef>
+        </p:style>
+        <p:txBody>
+          <a:bodyPr rtlCol="0" anchor="ctr" wrap="square"/>
+          <a:lstStyle/>
+          <a:p>
+            <a:pPr algn="ctr">
+              <a:defRPr sz="1200" b="1">
+                <a:solidFill>
+                  <a:srgbClr val="10B981"/>
+                </a:solidFill>
+              </a:defRPr>
+            </a:pPr>
+            <a:r>
+              <a:t>5. Config Server Vacío</a:t>
+            </a:r>
+          </a:p>
+          <a:p>
+            <a:pPr>
+              <a:defRPr sz="1050">
+                <a:solidFill>
+                  <a:srgbClr val="F1F5F9"/>
+                </a:solidFill>
+              </a:defRPr>
+            </a:pPr>
+            <a:r>
+              <a:t>Solución: Interpolación con ${CONFIG_REPO_PATH:file:../config-repo} y fallback.</a:t>
+            </a:r>
+          </a:p>
+        </p:txBody>
+      </p:sp>
+      <p:sp>
+        <p:nvSpPr>
+          <p:cNvPr id="11" name="Rounded Rectangle 10"/>
+          <p:cNvSpPr/>
+          <p:nvPr/>
+        </p:nvSpPr>
+        <p:spPr>
+          <a:xfrm>
+            <a:off x="6309360" y="2743200"/>
+            <a:ext cx="5120640" cy="1097280"/>
+          </a:xfrm>
+          <a:prstGeom prst="roundRect">
+            <a:avLst/>
+          </a:prstGeom>
+          <a:solidFill>
+            <a:srgbClr val="0F172A"/>
+          </a:solidFill>
+          <a:ln>
+            <a:solidFill>
+              <a:srgbClr val="10B981"/>
+            </a:solidFill>
+          </a:ln>
+        </p:spPr>
+        <p:style>
+          <a:lnRef idx="1">
+            <a:schemeClr val="accent1"/>
+          </a:lnRef>
+          <a:fillRef idx="3">
+            <a:schemeClr val="accent1"/>
+          </a:fillRef>
+          <a:effectRef idx="2">
+            <a:schemeClr val="accent1"/>
+          </a:effectRef>
+          <a:fontRef idx="minor">
+            <a:schemeClr val="lt1"/>
+          </a:fontRef>
+        </p:style>
+        <p:txBody>
+          <a:bodyPr rtlCol="0" anchor="ctr" wrap="square"/>
+          <a:lstStyle/>
+          <a:p>
+            <a:pPr algn="ctr">
+              <a:defRPr sz="1200" b="1">
+                <a:solidFill>
+                  <a:srgbClr val="10B981"/>
+                </a:solidFill>
+              </a:defRPr>
+            </a:pPr>
+            <a:r>
+              <a:t>6. PostgreSQL Apagado (5433)</a:t>
+            </a:r>
+          </a:p>
+          <a:p>
+            <a:pPr>
+              <a:defRPr sz="1050">
+                <a:solidFill>
+                  <a:srgbClr val="F1F5F9"/>
+                </a:solidFill>
+              </a:defRPr>
+            </a:pPr>
+            <a:r>
+              <a:t>Solución: Script iniciar_db.bat y docker-compose-db.yml en puerto 5433.</a:t>
+            </a:r>
+          </a:p>
+        </p:txBody>
+      </p:sp>
+      <p:sp>
+        <p:nvSpPr>
+          <p:cNvPr id="12" name="Rounded Rectangle 11"/>
+          <p:cNvSpPr/>
+          <p:nvPr/>
+        </p:nvSpPr>
+        <p:spPr>
+          <a:xfrm>
+            <a:off x="6309360" y="4114800"/>
+            <a:ext cx="5120640" cy="1097280"/>
+          </a:xfrm>
+          <a:prstGeom prst="roundRect">
+            <a:avLst/>
+          </a:prstGeom>
+          <a:solidFill>
+            <a:srgbClr val="0F172A"/>
+          </a:solidFill>
+          <a:ln>
+            <a:solidFill>
+              <a:srgbClr val="10B981"/>
+            </a:solidFill>
+          </a:ln>
+        </p:spPr>
+        <p:style>
+          <a:lnRef idx="1">
+            <a:schemeClr val="accent1"/>
+          </a:lnRef>
+          <a:fillRef idx="3">
+            <a:schemeClr val="accent1"/>
+          </a:fillRef>
+          <a:effectRef idx="2">
+            <a:schemeClr val="accent1"/>
+          </a:effectRef>
+          <a:fontRef idx="minor">
+            <a:schemeClr val="lt1"/>
+          </a:fontRef>
+        </p:style>
+        <p:txBody>
+          <a:bodyPr rtlCol="0" anchor="ctr" wrap="square"/>
+          <a:lstStyle/>
+          <a:p>
+            <a:pPr algn="ctr">
+              <a:defRPr sz="1200" b="1">
+                <a:solidFill>
+                  <a:srgbClr val="10B981"/>
+                </a:solidFill>
+              </a:defRPr>
+            </a:pPr>
+            <a:r>
+              <a:t>7. Error de Autenticación</a:t>
+            </a:r>
+          </a:p>
+          <a:p>
+            <a:pPr>
+              <a:defRPr sz="1050">
+                <a:solidFill>
+                  <a:srgbClr val="F1F5F9"/>
+                </a:solidFill>
+              </a:defRPr>
+            </a:pPr>
+            <a:r>
+              <a:t>Solución: Estandarización de usuario admin y clave adminpassword.</a:t>
+            </a:r>
+          </a:p>
+        </p:txBody>
+      </p:sp>
     </p:spTree>
   </p:cSld>
   <p:clrMapOvr>

--- a/presentacion.pptx
+++ b/presentacion.pptx
@@ -3329,8 +3329,8 @@
         </p:nvSpPr>
         <p:spPr>
           <a:xfrm>
-            <a:off x="8412480" y="384048"/>
-            <a:ext cx="3017520" cy="384048"/>
+            <a:off x="7772400" y="384048"/>
+            <a:ext cx="3657600" cy="384048"/>
           </a:xfrm>
           <a:prstGeom prst="roundRect">
             <a:avLst/>
@@ -3363,14 +3363,14 @@
           <a:lstStyle/>
           <a:p>
             <a:pPr algn="ctr">
-              <a:defRPr sz="900" b="1">
-                <a:solidFill>
-                  <a:srgbClr val="FFFFFF"/>
-                </a:solidFill>
-              </a:defRPr>
-            </a:pPr>
-            <a:r>
-              <a:t>SUSTENTACIÓN OFICIAL UNIDAD I</a:t>
+              <a:defRPr sz="800" b="1">
+                <a:solidFill>
+                  <a:srgbClr val="A1A1AA"/>
+                </a:solidFill>
+              </a:defRPr>
+            </a:pPr>
+            <a:r>
+              <a:t>SISTEMAS DISTRIBUIDOS • EVALUACIÓN S05</a:t>
             </a:r>
           </a:p>
         </p:txBody>
@@ -3383,7 +3383,7 @@
         </p:nvSpPr>
         <p:spPr>
           <a:xfrm>
-            <a:off x="731520" y="1005840"/>
+            <a:off x="731520" y="1051560"/>
             <a:ext cx="10698480" cy="868680"/>
           </a:xfrm>
           <a:prstGeom prst="rect">
@@ -3398,7 +3398,7 @@
           <a:lstStyle/>
           <a:p>
             <a:pPr>
-              <a:defRPr sz="2000" b="1">
+              <a:defRPr sz="1900" b="1">
                 <a:solidFill>
                   <a:srgbClr val="FFFFFF"/>
                 </a:solidFill>
@@ -3410,14 +3410,14 @@
           </a:p>
           <a:p>
             <a:pPr>
-              <a:defRPr sz="1100">
-                <a:solidFill>
-                  <a:srgbClr val="A1A1AA"/>
-                </a:solidFill>
-              </a:defRPr>
-            </a:pPr>
-            <a:r>
-              <a:t>Sistema Distribuido Base para la Venta y Facturación de Cómputo de Alto Rendimiento</a:t>
+              <a:defRPr sz="1000">
+                <a:solidFill>
+                  <a:srgbClr val="A1A1AA"/>
+                </a:solidFill>
+              </a:defRPr>
+            </a:pPr>
+            <a:r>
+              <a:t>Ecosistema Cloud-Native de Alta Disponibilidad para Comercio Electrónico y Facturación Fiscal</a:t>
             </a:r>
           </a:p>
         </p:txBody>
@@ -3430,7 +3430,7 @@
         </p:nvSpPr>
         <p:spPr>
           <a:xfrm>
-            <a:off x="731520" y="1874519"/>
+            <a:off x="731520" y="1965960"/>
             <a:ext cx="10698480" cy="18288"/>
           </a:xfrm>
           <a:prstGeom prst="rect">
@@ -3467,57 +3467,14 @@
       </p:sp>
       <p:sp>
         <p:nvSpPr>
-          <p:cNvPr id="10" name="Rounded Rectangle 9"/>
-          <p:cNvSpPr/>
-          <p:nvPr/>
-        </p:nvSpPr>
-        <p:spPr>
-          <a:xfrm>
-            <a:off x="731520" y="1856231"/>
-            <a:ext cx="1097280" cy="54864"/>
-          </a:xfrm>
-          <a:prstGeom prst="roundRect">
-            <a:avLst/>
-          </a:prstGeom>
-          <a:solidFill>
-            <a:srgbClr val="FFFFFF"/>
-          </a:solidFill>
-          <a:ln>
-            <a:noFill/>
-          </a:ln>
-        </p:spPr>
-        <p:style>
-          <a:lnRef idx="1">
-            <a:schemeClr val="accent1"/>
-          </a:lnRef>
-          <a:fillRef idx="3">
-            <a:schemeClr val="accent1"/>
-          </a:fillRef>
-          <a:effectRef idx="2">
-            <a:schemeClr val="accent1"/>
-          </a:effectRef>
-          <a:fontRef idx="minor">
-            <a:schemeClr val="lt1"/>
-          </a:fontRef>
-        </p:style>
-        <p:txBody>
-          <a:bodyPr rtlCol="0" anchor="ctr"/>
-          <a:lstStyle/>
-          <a:p>
-            <a:pPr algn="ctr"/>
-          </a:p>
-        </p:txBody>
-      </p:sp>
-      <p:sp>
-        <p:nvSpPr>
-          <p:cNvPr id="11" name="TextBox 10"/>
+          <p:cNvPr id="10" name="TextBox 9"/>
           <p:cNvSpPr txBox="1"/>
           <p:nvPr/>
         </p:nvSpPr>
         <p:spPr>
           <a:xfrm>
-            <a:off x="731520" y="6309360"/>
-            <a:ext cx="7315200" cy="365760"/>
+            <a:off x="731520" y="6217920"/>
+            <a:ext cx="7772400" cy="365760"/>
           </a:xfrm>
           <a:prstGeom prst="rect">
             <a:avLst/>
@@ -3531,28 +3488,28 @@
           <a:lstStyle/>
           <a:p>
             <a:pPr>
-              <a:defRPr sz="950" b="1">
-                <a:solidFill>
-                  <a:srgbClr val="A1A1AA"/>
-                </a:solidFill>
-              </a:defRPr>
-            </a:pPr>
-            <a:r>
-              <a:t>🎙️  EQUIPO 01 • UPEU</a:t>
-            </a:r>
-          </a:p>
-        </p:txBody>
-      </p:sp>
-      <p:sp>
-        <p:nvSpPr>
-          <p:cNvPr id="12" name="TextBox 11"/>
+              <a:defRPr sz="900">
+                <a:solidFill>
+                  <a:srgbClr val="A1A1AA"/>
+                </a:solidFill>
+              </a:defRPr>
+            </a:pPr>
+            <a:r>
+              <a:t>🎙️ CHASKIBYTE SYSTEMS • EQUIPO 01</a:t>
+            </a:r>
+          </a:p>
+        </p:txBody>
+      </p:sp>
+      <p:sp>
+        <p:nvSpPr>
+          <p:cNvPr id="11" name="TextBox 10"/>
           <p:cNvSpPr txBox="1"/>
           <p:nvPr/>
         </p:nvSpPr>
         <p:spPr>
           <a:xfrm>
-            <a:off x="10058400" y="6309360"/>
-            <a:ext cx="1371600" cy="365760"/>
+            <a:off x="10241280" y="6217920"/>
+            <a:ext cx="1188720" cy="365760"/>
           </a:xfrm>
           <a:prstGeom prst="rect">
             <a:avLst/>
@@ -3566,9 +3523,9 @@
           <a:lstStyle/>
           <a:p>
             <a:pPr algn="r">
-              <a:defRPr sz="1100" b="1">
-                <a:solidFill>
-                  <a:srgbClr val="FFFFFF"/>
+              <a:defRPr sz="900" b="1">
+                <a:solidFill>
+                  <a:srgbClr val="71717A"/>
                 </a:solidFill>
               </a:defRPr>
             </a:pPr>
@@ -3580,7 +3537,7 @@
       </p:sp>
       <p:sp>
         <p:nvSpPr>
-          <p:cNvPr id="13" name="Rounded Rectangle 12"/>
+          <p:cNvPr id="12" name="Rounded Rectangle 11"/>
           <p:cNvSpPr/>
           <p:nvPr/>
         </p:nvSpPr>
@@ -3625,14 +3582,14 @@
       </p:sp>
       <p:sp>
         <p:nvSpPr>
-          <p:cNvPr id="14" name="TextBox 13"/>
+          <p:cNvPr id="13" name="TextBox 12"/>
           <p:cNvSpPr txBox="1"/>
           <p:nvPr/>
         </p:nvSpPr>
         <p:spPr>
           <a:xfrm>
-            <a:off x="896112" y="2240279"/>
-            <a:ext cx="4882896" cy="3566160"/>
+            <a:off x="868680" y="2240279"/>
+            <a:ext cx="4937760" cy="3566160"/>
           </a:xfrm>
           <a:prstGeom prst="rect">
             <a:avLst/>
@@ -3646,7 +3603,7 @@
           <a:lstStyle/>
           <a:p>
             <a:pPr>
-              <a:defRPr sz="1100" b="1">
+              <a:defRPr sz="1200" b="1">
                 <a:solidFill>
                   <a:srgbClr val="FFFFFF"/>
                 </a:solidFill>
@@ -3658,69 +3615,84 @@
           </a:p>
           <a:p>
             <a:pPr>
-              <a:defRPr sz="900">
-                <a:solidFill>
-                  <a:srgbClr val="A1A1AA"/>
-                </a:solidFill>
-              </a:defRPr>
-            </a:pPr>
-            <a:r>
-              <a:t>▪  Rol: Arquitectura Backend, Infraestructura Spring Cloud &amp; Persistencia.</a:t>
-            </a:r>
-          </a:p>
-          <a:p>
-            <a:pPr>
-              <a:defRPr sz="900">
-                <a:solidFill>
-                  <a:srgbClr val="A1A1AA"/>
-                </a:solidFill>
-              </a:defRPr>
-            </a:pPr>
-            <a:r>
-              <a:t>▪  pc-orden-ms (Transaccional): Cabecera-Detalle, IGV 18%, PostgreSQL (:5433).</a:t>
-            </a:r>
-          </a:p>
-          <a:p>
-            <a:pPr>
-              <a:defRPr sz="900">
-                <a:solidFill>
-                  <a:srgbClr val="A1A1AA"/>
-                </a:solidFill>
-              </a:defRPr>
-            </a:pPr>
-            <a:r>
-              <a:t>▪  pc-catalogo-ms (No Transaccional): Catálogo de Hardware &amp; Stock Gamer (:8081).</a:t>
-            </a:r>
-          </a:p>
-          <a:p>
-            <a:pPr>
-              <a:defRPr sz="900">
-                <a:solidFill>
-                  <a:srgbClr val="A1A1AA"/>
-                </a:solidFill>
-              </a:defRPr>
-            </a:pPr>
-            <a:r>
-              <a:t>▪  Infraestructura Core: Config Server (:8888), Eureka (:8761), Gateway (:18080).</a:t>
-            </a:r>
-          </a:p>
-          <a:p>
-            <a:pPr>
-              <a:defRPr sz="900">
-                <a:solidFill>
-                  <a:srgbClr val="A1A1AA"/>
-                </a:solidFill>
-              </a:defRPr>
-            </a:pPr>
-            <a:r>
-              <a:t>▪  Observabilidad: Prometheus (:19090) y Grafana (:13000) con dashboards JVM.</a:t>
-            </a:r>
-          </a:p>
-        </p:txBody>
-      </p:sp>
-      <p:sp>
-        <p:nvSpPr>
-          <p:cNvPr id="15" name="Rounded Rectangle 14"/>
+              <a:spcBef>
+                <a:spcPts val="300"/>
+              </a:spcBef>
+              <a:defRPr sz="900">
+                <a:solidFill>
+                  <a:srgbClr val="A1A1AA"/>
+                </a:solidFill>
+              </a:defRPr>
+            </a:pPr>
+            <a:r>
+              <a:t>• Rol: Arquitectura Backend, Infraestructura Spring Cloud &amp; Persistencia.</a:t>
+            </a:r>
+          </a:p>
+          <a:p>
+            <a:pPr>
+              <a:spcBef>
+                <a:spcPts val="300"/>
+              </a:spcBef>
+              <a:defRPr sz="900">
+                <a:solidFill>
+                  <a:srgbClr val="A1A1AA"/>
+                </a:solidFill>
+              </a:defRPr>
+            </a:pPr>
+            <a:r>
+              <a:t>• pc-orden-ms (Transaccional): Cabecera-Detalle, IGV 18%, PostgreSQL (:5433).</a:t>
+            </a:r>
+          </a:p>
+          <a:p>
+            <a:pPr>
+              <a:spcBef>
+                <a:spcPts val="300"/>
+              </a:spcBef>
+              <a:defRPr sz="900">
+                <a:solidFill>
+                  <a:srgbClr val="A1A1AA"/>
+                </a:solidFill>
+              </a:defRPr>
+            </a:pPr>
+            <a:r>
+              <a:t>• pc-catalogo-ms (No Transaccional): Catálogo de Hardware &amp; Stock Gamer (:8081).</a:t>
+            </a:r>
+          </a:p>
+          <a:p>
+            <a:pPr>
+              <a:spcBef>
+                <a:spcPts val="300"/>
+              </a:spcBef>
+              <a:defRPr sz="900">
+                <a:solidFill>
+                  <a:srgbClr val="A1A1AA"/>
+                </a:solidFill>
+              </a:defRPr>
+            </a:pPr>
+            <a:r>
+              <a:t>• Infraestructura Core: Config Server (:8888), Eureka (:8761), Gateway (:18080).</a:t>
+            </a:r>
+          </a:p>
+          <a:p>
+            <a:pPr>
+              <a:spcBef>
+                <a:spcPts val="300"/>
+              </a:spcBef>
+              <a:defRPr sz="900">
+                <a:solidFill>
+                  <a:srgbClr val="A1A1AA"/>
+                </a:solidFill>
+              </a:defRPr>
+            </a:pPr>
+            <a:r>
+              <a:t>• Observabilidad: Prometheus (:19090) y Grafana (:13000) con dashboards JVM.</a:t>
+            </a:r>
+          </a:p>
+        </p:txBody>
+      </p:sp>
+      <p:sp>
+        <p:nvSpPr>
+          <p:cNvPr id="14" name="Rounded Rectangle 13"/>
           <p:cNvSpPr/>
           <p:nvPr/>
         </p:nvSpPr>
@@ -3765,14 +3737,14 @@
       </p:sp>
       <p:sp>
         <p:nvSpPr>
-          <p:cNvPr id="16" name="TextBox 15"/>
+          <p:cNvPr id="15" name="TextBox 14"/>
           <p:cNvSpPr txBox="1"/>
           <p:nvPr/>
         </p:nvSpPr>
         <p:spPr>
           <a:xfrm>
-            <a:off x="6382512" y="2240279"/>
-            <a:ext cx="4882896" cy="3566160"/>
+            <a:off x="6355080" y="2240279"/>
+            <a:ext cx="4937760" cy="3566160"/>
           </a:xfrm>
           <a:prstGeom prst="rect">
             <a:avLst/>
@@ -3786,7 +3758,7 @@
           <a:lstStyle/>
           <a:p>
             <a:pPr>
-              <a:defRPr sz="1100" b="1">
+              <a:defRPr sz="1200" b="1">
                 <a:solidFill>
                   <a:srgbClr val="FFFFFF"/>
                 </a:solidFill>
@@ -3798,62 +3770,77 @@
           </a:p>
           <a:p>
             <a:pPr>
-              <a:defRPr sz="900">
-                <a:solidFill>
-                  <a:srgbClr val="A1A1AA"/>
-                </a:solidFill>
-              </a:defRPr>
-            </a:pPr>
-            <a:r>
-              <a:t>▪  Rol: Pasarela de Pagos, Seguridad Perimetral y Contratos REST.</a:t>
-            </a:r>
-          </a:p>
-          <a:p>
-            <a:pPr>
-              <a:defRPr sz="900">
-                <a:solidFill>
-                  <a:srgbClr val="A1A1AA"/>
-                </a:solidFill>
-              </a:defRPr>
-            </a:pPr>
-            <a:r>
-              <a:t>▪  pc-pago-ms (Transaccional): Integración Mercado Pago Sandbox y Webhooks.</a:t>
-            </a:r>
-          </a:p>
-          <a:p>
-            <a:pPr>
-              <a:defRPr sz="900">
-                <a:solidFill>
-                  <a:srgbClr val="A1A1AA"/>
-                </a:solidFill>
-              </a:defRPr>
-            </a:pPr>
-            <a:r>
-              <a:t>▪  pc-auth-ms (No Transaccional): Gestión de Identidad y Control de Acceso.</a:t>
-            </a:r>
-          </a:p>
-          <a:p>
-            <a:pPr>
-              <a:defRPr sz="900">
-                <a:solidFill>
-                  <a:srgbClr val="A1A1AA"/>
-                </a:solidFill>
-              </a:defRPr>
-            </a:pPr>
-            <a:r>
-              <a:t>▪  pc-cliente-ms: Perfil de cliente con validadores RENIEC (DNI) y SUNAT (RUC).</a:t>
-            </a:r>
-          </a:p>
-          <a:p>
-            <a:pPr>
-              <a:defRPr sz="900">
-                <a:solidFill>
-                  <a:srgbClr val="A1A1AA"/>
-                </a:solidFill>
-              </a:defRPr>
-            </a:pPr>
-            <a:r>
-              <a:t>▪  Seguridad Distribuida: Aislamiento perimetral total desde el Gateway.</a:t>
+              <a:spcBef>
+                <a:spcPts val="300"/>
+              </a:spcBef>
+              <a:defRPr sz="900">
+                <a:solidFill>
+                  <a:srgbClr val="A1A1AA"/>
+                </a:solidFill>
+              </a:defRPr>
+            </a:pPr>
+            <a:r>
+              <a:t>• Rol: Pasarela de Pagos, Seguridad Perimetral y Contratos REST.</a:t>
+            </a:r>
+          </a:p>
+          <a:p>
+            <a:pPr>
+              <a:spcBef>
+                <a:spcPts val="300"/>
+              </a:spcBef>
+              <a:defRPr sz="900">
+                <a:solidFill>
+                  <a:srgbClr val="A1A1AA"/>
+                </a:solidFill>
+              </a:defRPr>
+            </a:pPr>
+            <a:r>
+              <a:t>• pc-pago-ms (Transaccional): Integración Mercado Pago Sandbox y Webhooks.</a:t>
+            </a:r>
+          </a:p>
+          <a:p>
+            <a:pPr>
+              <a:spcBef>
+                <a:spcPts val="300"/>
+              </a:spcBef>
+              <a:defRPr sz="900">
+                <a:solidFill>
+                  <a:srgbClr val="A1A1AA"/>
+                </a:solidFill>
+              </a:defRPr>
+            </a:pPr>
+            <a:r>
+              <a:t>• pc-auth-ms (No Transaccional): Gestión de Identidad y Control de Acceso.</a:t>
+            </a:r>
+          </a:p>
+          <a:p>
+            <a:pPr>
+              <a:spcBef>
+                <a:spcPts val="300"/>
+              </a:spcBef>
+              <a:defRPr sz="900">
+                <a:solidFill>
+                  <a:srgbClr val="A1A1AA"/>
+                </a:solidFill>
+              </a:defRPr>
+            </a:pPr>
+            <a:r>
+              <a:t>• pc-cliente-ms: Perfil de cliente con validadores RENIEC (DNI) y SUNAT (RUC).</a:t>
+            </a:r>
+          </a:p>
+          <a:p>
+            <a:pPr>
+              <a:spcBef>
+                <a:spcPts val="300"/>
+              </a:spcBef>
+              <a:defRPr sz="900">
+                <a:solidFill>
+                  <a:srgbClr val="A1A1AA"/>
+                </a:solidFill>
+              </a:defRPr>
+            </a:pPr>
+            <a:r>
+              <a:t>• Seguridad Distribuida: Aislamiento perimetral total desde el Gateway.</a:t>
             </a:r>
           </a:p>
         </p:txBody>
@@ -4105,8 +4092,8 @@
         </p:nvSpPr>
         <p:spPr>
           <a:xfrm>
-            <a:off x="8412480" y="384048"/>
-            <a:ext cx="3017520" cy="384048"/>
+            <a:off x="7772400" y="384048"/>
+            <a:ext cx="3657600" cy="384048"/>
           </a:xfrm>
           <a:prstGeom prst="roundRect">
             <a:avLst/>
@@ -4139,14 +4126,14 @@
           <a:lstStyle/>
           <a:p>
             <a:pPr algn="ctr">
-              <a:defRPr sz="900" b="1">
-                <a:solidFill>
-                  <a:srgbClr val="FFFFFF"/>
-                </a:solidFill>
-              </a:defRPr>
-            </a:pPr>
-            <a:r>
-              <a:t>BALOTARIO OFICIAL</a:t>
+              <a:defRPr sz="800" b="1">
+                <a:solidFill>
+                  <a:srgbClr val="A1A1AA"/>
+                </a:solidFill>
+              </a:defRPr>
+            </a:pPr>
+            <a:r>
+              <a:t>DEFENSA CONCEPTUAL</a:t>
             </a:r>
           </a:p>
         </p:txBody>
@@ -4159,7 +4146,7 @@
         </p:nvSpPr>
         <p:spPr>
           <a:xfrm>
-            <a:off x="731520" y="1005840"/>
+            <a:off x="731520" y="1051560"/>
             <a:ext cx="10698480" cy="868680"/>
           </a:xfrm>
           <a:prstGeom prst="rect">
@@ -4174,26 +4161,26 @@
           <a:lstStyle/>
           <a:p>
             <a:pPr>
-              <a:defRPr sz="2000" b="1">
+              <a:defRPr sz="1900" b="1">
                 <a:solidFill>
                   <a:srgbClr val="FFFFFF"/>
                 </a:solidFill>
               </a:defRPr>
             </a:pPr>
             <a:r>
-              <a:t>BALOTARIO TEÓRICO-PRÁCTICO RESUELTO (TABLA 4)</a:t>
-            </a:r>
-          </a:p>
-          <a:p>
-            <a:pPr>
-              <a:defRPr sz="1100">
-                <a:solidFill>
-                  <a:srgbClr val="A1A1AA"/>
-                </a:solidFill>
-              </a:defRPr>
-            </a:pPr>
-            <a:r>
-              <a:t>Respuestas técnicas directas con las palabras clave requeridas por el docente</a:t>
+              <a:t>DEFENSA CONCEPTUAL Y FUNDAMENTACIÓN ARQUITECTURAL</a:t>
+            </a:r>
+          </a:p>
+          <a:p>
+            <a:pPr>
+              <a:defRPr sz="1000">
+                <a:solidFill>
+                  <a:srgbClr val="A1A1AA"/>
+                </a:solidFill>
+              </a:defRPr>
+            </a:pPr>
+            <a:r>
+              <a:t>Justificación rigurosa de los patrones aplicados, mitigación de fallos y decisiones de infraestructura</a:t>
             </a:r>
           </a:p>
         </p:txBody>
@@ -4206,7 +4193,7 @@
         </p:nvSpPr>
         <p:spPr>
           <a:xfrm>
-            <a:off x="731520" y="1874519"/>
+            <a:off x="731520" y="1965960"/>
             <a:ext cx="10698480" cy="18288"/>
           </a:xfrm>
           <a:prstGeom prst="rect">
@@ -4243,57 +4230,14 @@
       </p:sp>
       <p:sp>
         <p:nvSpPr>
-          <p:cNvPr id="10" name="Rounded Rectangle 9"/>
-          <p:cNvSpPr/>
-          <p:nvPr/>
-        </p:nvSpPr>
-        <p:spPr>
-          <a:xfrm>
-            <a:off x="731520" y="1856231"/>
-            <a:ext cx="1097280" cy="54864"/>
-          </a:xfrm>
-          <a:prstGeom prst="roundRect">
-            <a:avLst/>
-          </a:prstGeom>
-          <a:solidFill>
-            <a:srgbClr val="FFFFFF"/>
-          </a:solidFill>
-          <a:ln>
-            <a:noFill/>
-          </a:ln>
-        </p:spPr>
-        <p:style>
-          <a:lnRef idx="1">
-            <a:schemeClr val="accent1"/>
-          </a:lnRef>
-          <a:fillRef idx="3">
-            <a:schemeClr val="accent1"/>
-          </a:fillRef>
-          <a:effectRef idx="2">
-            <a:schemeClr val="accent1"/>
-          </a:effectRef>
-          <a:fontRef idx="minor">
-            <a:schemeClr val="lt1"/>
-          </a:fontRef>
-        </p:style>
-        <p:txBody>
-          <a:bodyPr rtlCol="0" anchor="ctr"/>
-          <a:lstStyle/>
-          <a:p>
-            <a:pPr algn="ctr"/>
-          </a:p>
-        </p:txBody>
-      </p:sp>
-      <p:sp>
-        <p:nvSpPr>
-          <p:cNvPr id="11" name="TextBox 10"/>
+          <p:cNvPr id="10" name="TextBox 9"/>
           <p:cNvSpPr txBox="1"/>
           <p:nvPr/>
         </p:nvSpPr>
         <p:spPr>
           <a:xfrm>
-            <a:off x="731520" y="6309360"/>
-            <a:ext cx="7315200" cy="365760"/>
+            <a:off x="731520" y="6217920"/>
+            <a:ext cx="7772400" cy="365760"/>
           </a:xfrm>
           <a:prstGeom prst="rect">
             <a:avLst/>
@@ -4307,28 +4251,28 @@
           <a:lstStyle/>
           <a:p>
             <a:pPr>
-              <a:defRPr sz="950" b="1">
-                <a:solidFill>
-                  <a:srgbClr val="A1A1AA"/>
-                </a:solidFill>
-              </a:defRPr>
-            </a:pPr>
-            <a:r>
-              <a:t>🎙️  DEFENSA INDIVIDUAL • TABLA 4</a:t>
-            </a:r>
-          </a:p>
-        </p:txBody>
-      </p:sp>
-      <p:sp>
-        <p:nvSpPr>
-          <p:cNvPr id="12" name="TextBox 11"/>
+              <a:defRPr sz="900">
+                <a:solidFill>
+                  <a:srgbClr val="A1A1AA"/>
+                </a:solidFill>
+              </a:defRPr>
+            </a:pPr>
+            <a:r>
+              <a:t>🎙️ EQUIPO 01 • DEFENSA DE DECISIONES DE DISEÑO</a:t>
+            </a:r>
+          </a:p>
+        </p:txBody>
+      </p:sp>
+      <p:sp>
+        <p:nvSpPr>
+          <p:cNvPr id="11" name="TextBox 10"/>
           <p:cNvSpPr txBox="1"/>
           <p:nvPr/>
         </p:nvSpPr>
         <p:spPr>
           <a:xfrm>
-            <a:off x="10058400" y="6309360"/>
-            <a:ext cx="1371600" cy="365760"/>
+            <a:off x="10241280" y="6217920"/>
+            <a:ext cx="1188720" cy="365760"/>
           </a:xfrm>
           <a:prstGeom prst="rect">
             <a:avLst/>
@@ -4342,9 +4286,9 @@
           <a:lstStyle/>
           <a:p>
             <a:pPr algn="r">
-              <a:defRPr sz="1100" b="1">
-                <a:solidFill>
-                  <a:srgbClr val="FFFFFF"/>
+              <a:defRPr sz="900" b="1">
+                <a:solidFill>
+                  <a:srgbClr val="71717A"/>
                 </a:solidFill>
               </a:defRPr>
             </a:pPr>
@@ -4356,7 +4300,7 @@
       </p:sp>
       <p:sp>
         <p:nvSpPr>
-          <p:cNvPr id="13" name="Rounded Rectangle 12"/>
+          <p:cNvPr id="12" name="Rounded Rectangle 11"/>
           <p:cNvSpPr/>
           <p:nvPr/>
         </p:nvSpPr>
@@ -4401,14 +4345,14 @@
       </p:sp>
       <p:sp>
         <p:nvSpPr>
-          <p:cNvPr id="14" name="TextBox 13"/>
+          <p:cNvPr id="13" name="TextBox 12"/>
           <p:cNvSpPr txBox="1"/>
           <p:nvPr/>
         </p:nvSpPr>
         <p:spPr>
           <a:xfrm>
-            <a:off x="896112" y="2240279"/>
-            <a:ext cx="4882896" cy="3566160"/>
+            <a:off x="868680" y="2240279"/>
+            <a:ext cx="4937760" cy="3566160"/>
           </a:xfrm>
           <a:prstGeom prst="rect">
             <a:avLst/>
@@ -4422,69 +4366,81 @@
           <a:lstStyle/>
           <a:p>
             <a:pPr>
-              <a:defRPr sz="1100" b="1">
+              <a:defRPr sz="1200" b="1">
                 <a:solidFill>
                   <a:srgbClr val="FFFFFF"/>
                 </a:solidFill>
               </a:defRPr>
             </a:pPr>
             <a:r>
-              <a:t>🎙️ Preguntas Asignadas a Eliceo Parillo</a:t>
-            </a:r>
-          </a:p>
-          <a:p>
-            <a:pPr>
-              <a:defRPr sz="900">
-                <a:solidFill>
-                  <a:srgbClr val="A1A1AA"/>
-                </a:solidFill>
-              </a:defRPr>
-            </a:pPr>
-            <a:r>
-              <a:t>▪  P1: ¿Por qué evitar puertos fijos y cómo verificar concurrencia?</a:t>
-            </a:r>
-          </a:p>
-          <a:p>
-            <a:pPr>
-              <a:defRPr sz="900">
-                <a:solidFill>
-                  <a:srgbClr val="A1A1AA"/>
-                </a:solidFill>
-              </a:defRPr>
-            </a:pPr>
-            <a:r>
-              <a:t>▪     • R: Los puertos fijos impiden el escalado elástico y provocan colisiones de red. Con puertos dinámicos ($env:SERVER_PORT=8083), múltiples réplicas corren en el mismo host y se registran en Eureka con instance-id único.</a:t>
-            </a:r>
-          </a:p>
-          <a:p>
-            <a:pPr>
-              <a:defRPr sz="900">
-                <a:solidFill>
-                  <a:srgbClr val="A1A1AA"/>
-                </a:solidFill>
-              </a:defRPr>
-            </a:pPr>
-            <a:r>
-              <a:t>▪  P2: ¿Diferencia entre propiedad fija y Config Server (DEV vs PROD)?</a:t>
-            </a:r>
-          </a:p>
-          <a:p>
-            <a:pPr>
-              <a:defRPr sz="900">
-                <a:solidFill>
-                  <a:srgbClr val="A1A1AA"/>
-                </a:solidFill>
-              </a:defRPr>
-            </a:pPr>
-            <a:r>
-              <a:t>▪     • R: Principio Twelve-Factor III: estricta separación de configuración y código. Un solo JAR inmutable se despliega en DEV y PROD alternando el perfil activo sin recompilar y sin exponer credenciales en Git.</a:t>
-            </a:r>
-          </a:p>
-        </p:txBody>
-      </p:sp>
-      <p:sp>
-        <p:nvSpPr>
-          <p:cNvPr id="15" name="Rounded Rectangle 14"/>
+              <a:t>🎙️ Fundamentos de Red y Configuración</a:t>
+            </a:r>
+          </a:p>
+          <a:p>
+            <a:pPr>
+              <a:spcBef>
+                <a:spcPts val="300"/>
+              </a:spcBef>
+              <a:defRPr sz="900">
+                <a:solidFill>
+                  <a:srgbClr val="A1A1AA"/>
+                </a:solidFill>
+              </a:defRPr>
+            </a:pPr>
+            <a:r>
+              <a:t>• P1: ¿Por qué evitar puertos fijos y cómo verificar concurrencia?</a:t>
+            </a:r>
+          </a:p>
+          <a:p>
+            <a:pPr>
+              <a:spcBef>
+                <a:spcPts val="300"/>
+              </a:spcBef>
+              <a:defRPr sz="900">
+                <a:solidFill>
+                  <a:srgbClr val="A1A1AA"/>
+                </a:solidFill>
+              </a:defRPr>
+            </a:pPr>
+            <a:r>
+              <a:t>•    • R: Los puertos fijos impiden el escalado elástico y provocan colisiones de red. Con puertos dinámicos ($env:SERVER_PORT=8083), múltiples réplicas corren en el mismo host y se registran en Eureka con instance-id único.</a:t>
+            </a:r>
+          </a:p>
+          <a:p>
+            <a:pPr>
+              <a:spcBef>
+                <a:spcPts val="300"/>
+              </a:spcBef>
+              <a:defRPr sz="900">
+                <a:solidFill>
+                  <a:srgbClr val="A1A1AA"/>
+                </a:solidFill>
+              </a:defRPr>
+            </a:pPr>
+            <a:r>
+              <a:t>• P2: ¿Diferencia entre propiedad fija y Config Server (DEV vs PROD)?</a:t>
+            </a:r>
+          </a:p>
+          <a:p>
+            <a:pPr>
+              <a:spcBef>
+                <a:spcPts val="300"/>
+              </a:spcBef>
+              <a:defRPr sz="900">
+                <a:solidFill>
+                  <a:srgbClr val="A1A1AA"/>
+                </a:solidFill>
+              </a:defRPr>
+            </a:pPr>
+            <a:r>
+              <a:t>•    • R: Principio Twelve-Factor III: estricta separación de configuración y código. Un solo JAR inmutable se despliega en DEV y PROD alternando el perfil activo sin recompilar y sin exponer credenciales en Git.</a:t>
+            </a:r>
+          </a:p>
+        </p:txBody>
+      </p:sp>
+      <p:sp>
+        <p:nvSpPr>
+          <p:cNvPr id="14" name="Rounded Rectangle 13"/>
           <p:cNvSpPr/>
           <p:nvPr/>
         </p:nvSpPr>
@@ -4529,14 +4485,14 @@
       </p:sp>
       <p:sp>
         <p:nvSpPr>
-          <p:cNvPr id="16" name="TextBox 15"/>
+          <p:cNvPr id="15" name="TextBox 14"/>
           <p:cNvSpPr txBox="1"/>
           <p:nvPr/>
         </p:nvSpPr>
         <p:spPr>
           <a:xfrm>
-            <a:off x="6382512" y="2240279"/>
-            <a:ext cx="4882896" cy="3566160"/>
+            <a:off x="6355080" y="2240279"/>
+            <a:ext cx="4937760" cy="3566160"/>
           </a:xfrm>
           <a:prstGeom prst="rect">
             <a:avLst/>
@@ -4550,86 +4506,104 @@
           <a:lstStyle/>
           <a:p>
             <a:pPr>
-              <a:defRPr sz="1100" b="1">
+              <a:defRPr sz="1200" b="1">
                 <a:solidFill>
                   <a:srgbClr val="FFFFFF"/>
                 </a:solidFill>
               </a:defRPr>
             </a:pPr>
             <a:r>
-              <a:t>🎙️ Preguntas Asignadas a Cristhian Paul</a:t>
-            </a:r>
-          </a:p>
-          <a:p>
-            <a:pPr>
-              <a:defRPr sz="900">
-                <a:solidFill>
-                  <a:srgbClr val="A1A1AA"/>
-                </a:solidFill>
-              </a:defRPr>
-            </a:pPr>
-            <a:r>
-              <a:t>▪  P3: Si apagas una instancia, ¿cómo se entera Eureka y por qué no es instantáneo?</a:t>
-            </a:r>
-          </a:p>
-          <a:p>
-            <a:pPr>
-              <a:defRPr sz="900">
-                <a:solidFill>
-                  <a:srgbClr val="A1A1AA"/>
-                </a:solidFill>
-              </a:defRPr>
-            </a:pPr>
-            <a:r>
-              <a:t>▪     • R: Por latidos heartbeats (30s). Eureka espera la expiración del arrendamiento (90s o 3 latidos) antes del eviction timer. Evita desalojos prematuros por parpadeos de red y activa el Self-Preservation Mode.</a:t>
-            </a:r>
-          </a:p>
-          <a:p>
-            <a:pPr>
-              <a:defRPr sz="900">
-                <a:solidFill>
-                  <a:srgbClr val="A1A1AA"/>
-                </a:solidFill>
-              </a:defRPr>
-            </a:pPr>
-            <a:r>
-              <a:t>▪  P4: ¿Por qué lb:// no es real y qué componente lo resuelve?</a:t>
-            </a:r>
-          </a:p>
-          <a:p>
-            <a:pPr>
-              <a:defRPr sz="900">
-                <a:solidFill>
-                  <a:srgbClr val="A1A1AA"/>
-                </a:solidFill>
-              </a:defRPr>
-            </a:pPr>
-            <a:r>
-              <a:t>▪     • R: Es un pseudo-esquema URI lógico resuelto por Spring Cloud LoadBalancer consultando el Eureka Client para obtener los sockets físicos.</a:t>
-            </a:r>
-          </a:p>
-          <a:p>
-            <a:pPr>
-              <a:defRPr sz="900">
-                <a:solidFill>
-                  <a:srgbClr val="A1A1AA"/>
-                </a:solidFill>
-              </a:defRPr>
-            </a:pPr>
-            <a:r>
-              <a:t>▪  P5: ¿Por qué Round-Robin es suficiente para instancias sin estado?</a:t>
-            </a:r>
-          </a:p>
-          <a:p>
-            <a:pPr>
-              <a:defRPr sz="900">
-                <a:solidFill>
-                  <a:srgbClr val="A1A1AA"/>
-                </a:solidFill>
-              </a:defRPr>
-            </a:pPr>
-            <a:r>
-              <a:t>▪     • R: Porque las réplicas son stateless. El estado reside en PostgreSQL.</a:t>
+              <a:t>🎙️ Resiliencia, Gateway y Balanceo</a:t>
+            </a:r>
+          </a:p>
+          <a:p>
+            <a:pPr>
+              <a:spcBef>
+                <a:spcPts val="300"/>
+              </a:spcBef>
+              <a:defRPr sz="900">
+                <a:solidFill>
+                  <a:srgbClr val="A1A1AA"/>
+                </a:solidFill>
+              </a:defRPr>
+            </a:pPr>
+            <a:r>
+              <a:t>• P3: Si apagas una instancia, ¿cómo se entera Eureka y por qué no es instantáneo?</a:t>
+            </a:r>
+          </a:p>
+          <a:p>
+            <a:pPr>
+              <a:spcBef>
+                <a:spcPts val="300"/>
+              </a:spcBef>
+              <a:defRPr sz="900">
+                <a:solidFill>
+                  <a:srgbClr val="A1A1AA"/>
+                </a:solidFill>
+              </a:defRPr>
+            </a:pPr>
+            <a:r>
+              <a:t>•    • R: Por latidos heartbeats (30s). Eureka espera la expiración del arrendamiento (90s o 3 latidos) antes del eviction timer. Evita desalojos prematuros por parpadeos de red y activa el Self-Preservation Mode.</a:t>
+            </a:r>
+          </a:p>
+          <a:p>
+            <a:pPr>
+              <a:spcBef>
+                <a:spcPts val="300"/>
+              </a:spcBef>
+              <a:defRPr sz="900">
+                <a:solidFill>
+                  <a:srgbClr val="A1A1AA"/>
+                </a:solidFill>
+              </a:defRPr>
+            </a:pPr>
+            <a:r>
+              <a:t>• P4: ¿Por qué lb:// no es real y qué componente lo resuelve?</a:t>
+            </a:r>
+          </a:p>
+          <a:p>
+            <a:pPr>
+              <a:spcBef>
+                <a:spcPts val="300"/>
+              </a:spcBef>
+              <a:defRPr sz="900">
+                <a:solidFill>
+                  <a:srgbClr val="A1A1AA"/>
+                </a:solidFill>
+              </a:defRPr>
+            </a:pPr>
+            <a:r>
+              <a:t>•    • R: Es un pseudo-esquema URI lógico resuelto por Spring Cloud LoadBalancer consultando el Eureka Client para obtener los sockets físicos.</a:t>
+            </a:r>
+          </a:p>
+          <a:p>
+            <a:pPr>
+              <a:spcBef>
+                <a:spcPts val="300"/>
+              </a:spcBef>
+              <a:defRPr sz="900">
+                <a:solidFill>
+                  <a:srgbClr val="A1A1AA"/>
+                </a:solidFill>
+              </a:defRPr>
+            </a:pPr>
+            <a:r>
+              <a:t>• P5: ¿Por qué Round-Robin es suficiente para instancias sin estado?</a:t>
+            </a:r>
+          </a:p>
+          <a:p>
+            <a:pPr>
+              <a:spcBef>
+                <a:spcPts val="300"/>
+              </a:spcBef>
+              <a:defRPr sz="900">
+                <a:solidFill>
+                  <a:srgbClr val="A1A1AA"/>
+                </a:solidFill>
+              </a:defRPr>
+            </a:pPr>
+            <a:r>
+              <a:t>•    • R: Porque las réplicas son stateless. El estado reside en PostgreSQL.</a:t>
             </a:r>
           </a:p>
         </p:txBody>
@@ -4881,8 +4855,8 @@
         </p:nvSpPr>
         <p:spPr>
           <a:xfrm>
-            <a:off x="8412480" y="384048"/>
-            <a:ext cx="3017520" cy="384048"/>
+            <a:off x="7772400" y="384048"/>
+            <a:ext cx="3657600" cy="384048"/>
           </a:xfrm>
           <a:prstGeom prst="roundRect">
             <a:avLst/>
@@ -4915,14 +4889,14 @@
           <a:lstStyle/>
           <a:p>
             <a:pPr algn="ctr">
-              <a:defRPr sz="900" b="1">
-                <a:solidFill>
-                  <a:srgbClr val="FFFFFF"/>
-                </a:solidFill>
-              </a:defRPr>
-            </a:pPr>
-            <a:r>
-              <a:t>PILAR 3 • GUION DE SUSTENTACIÓN</a:t>
+              <a:defRPr sz="800" b="1">
+                <a:solidFill>
+                  <a:srgbClr val="A1A1AA"/>
+                </a:solidFill>
+              </a:defRPr>
+            </a:pPr>
+            <a:r>
+              <a:t>METODOLOGÍA DE SUSTENTACIÓN</a:t>
             </a:r>
           </a:p>
         </p:txBody>
@@ -4935,7 +4909,7 @@
         </p:nvSpPr>
         <p:spPr>
           <a:xfrm>
-            <a:off x="731520" y="1005840"/>
+            <a:off x="731520" y="1051560"/>
             <a:ext cx="10698480" cy="868680"/>
           </a:xfrm>
           <a:prstGeom prst="rect">
@@ -4950,26 +4924,26 @@
           <a:lstStyle/>
           <a:p>
             <a:pPr>
-              <a:defRPr sz="2000" b="1">
+              <a:defRPr sz="1900" b="1">
                 <a:solidFill>
                   <a:srgbClr val="FFFFFF"/>
                 </a:solidFill>
               </a:defRPr>
             </a:pPr>
             <a:r>
-              <a:t>GUION DE SUSTENTACIÓN A DOS VOCES (18 MINUTOS)</a:t>
-            </a:r>
-          </a:p>
-          <a:p>
-            <a:pPr>
-              <a:defRPr sz="1100">
-                <a:solidFill>
-                  <a:srgbClr val="A1A1AA"/>
-                </a:solidFill>
-              </a:defRPr>
-            </a:pPr>
-            <a:r>
-              <a:t>Distribución sincronizada por minuto entre Eliceo Parillo y Cristhian Paul (Tabla 5)</a:t>
+              <a:t>ESTRUCTURA DE DEFENSA TÉCNICA Y PROTOCOLO DE VALIDACIÓN</a:t>
+            </a:r>
+          </a:p>
+          <a:p>
+            <a:pPr>
+              <a:defRPr sz="1000">
+                <a:solidFill>
+                  <a:srgbClr val="A1A1AA"/>
+                </a:solidFill>
+              </a:defRPr>
+            </a:pPr>
+            <a:r>
+              <a:t>Plan sistemático de sustentación: fundamentación teórica, validación funcional en caliente y defensa conceptual</a:t>
             </a:r>
           </a:p>
         </p:txBody>
@@ -4982,7 +4956,7 @@
         </p:nvSpPr>
         <p:spPr>
           <a:xfrm>
-            <a:off x="731520" y="1874519"/>
+            <a:off x="731520" y="1965960"/>
             <a:ext cx="10698480" cy="18288"/>
           </a:xfrm>
           <a:prstGeom prst="rect">
@@ -5019,57 +4993,14 @@
       </p:sp>
       <p:sp>
         <p:nvSpPr>
-          <p:cNvPr id="10" name="Rounded Rectangle 9"/>
-          <p:cNvSpPr/>
-          <p:nvPr/>
-        </p:nvSpPr>
-        <p:spPr>
-          <a:xfrm>
-            <a:off x="731520" y="1856231"/>
-            <a:ext cx="1097280" cy="54864"/>
-          </a:xfrm>
-          <a:prstGeom prst="roundRect">
-            <a:avLst/>
-          </a:prstGeom>
-          <a:solidFill>
-            <a:srgbClr val="FFFFFF"/>
-          </a:solidFill>
-          <a:ln>
-            <a:noFill/>
-          </a:ln>
-        </p:spPr>
-        <p:style>
-          <a:lnRef idx="1">
-            <a:schemeClr val="accent1"/>
-          </a:lnRef>
-          <a:fillRef idx="3">
-            <a:schemeClr val="accent1"/>
-          </a:fillRef>
-          <a:effectRef idx="2">
-            <a:schemeClr val="accent1"/>
-          </a:effectRef>
-          <a:fontRef idx="minor">
-            <a:schemeClr val="lt1"/>
-          </a:fontRef>
-        </p:style>
-        <p:txBody>
-          <a:bodyPr rtlCol="0" anchor="ctr"/>
-          <a:lstStyle/>
-          <a:p>
-            <a:pPr algn="ctr"/>
-          </a:p>
-        </p:txBody>
-      </p:sp>
-      <p:sp>
-        <p:nvSpPr>
-          <p:cNvPr id="11" name="TextBox 10"/>
+          <p:cNvPr id="10" name="TextBox 9"/>
           <p:cNvSpPr txBox="1"/>
           <p:nvPr/>
         </p:nvSpPr>
         <p:spPr>
           <a:xfrm>
-            <a:off x="731520" y="6309360"/>
-            <a:ext cx="7315200" cy="365760"/>
+            <a:off x="731520" y="6217920"/>
+            <a:ext cx="7772400" cy="365760"/>
           </a:xfrm>
           <a:prstGeom prst="rect">
             <a:avLst/>
@@ -5083,28 +5014,28 @@
           <a:lstStyle/>
           <a:p>
             <a:pPr>
-              <a:defRPr sz="950" b="1">
-                <a:solidFill>
-                  <a:srgbClr val="A1A1AA"/>
-                </a:solidFill>
-              </a:defRPr>
-            </a:pPr>
-            <a:r>
-              <a:t>🎙️  AMBOS PONENTES (MIN 0-18)</a:t>
-            </a:r>
-          </a:p>
-        </p:txBody>
-      </p:sp>
-      <p:sp>
-        <p:nvSpPr>
-          <p:cNvPr id="12" name="TextBox 11"/>
+              <a:defRPr sz="900">
+                <a:solidFill>
+                  <a:srgbClr val="A1A1AA"/>
+                </a:solidFill>
+              </a:defRPr>
+            </a:pPr>
+            <a:r>
+              <a:t>🎙️ EQUIPO 01 • PROTOCOLO DE VALIDACIÓN EN VIVO</a:t>
+            </a:r>
+          </a:p>
+        </p:txBody>
+      </p:sp>
+      <p:sp>
+        <p:nvSpPr>
+          <p:cNvPr id="11" name="TextBox 10"/>
           <p:cNvSpPr txBox="1"/>
           <p:nvPr/>
         </p:nvSpPr>
         <p:spPr>
           <a:xfrm>
-            <a:off x="10058400" y="6309360"/>
-            <a:ext cx="1371600" cy="365760"/>
+            <a:off x="10241280" y="6217920"/>
+            <a:ext cx="1188720" cy="365760"/>
           </a:xfrm>
           <a:prstGeom prst="rect">
             <a:avLst/>
@@ -5118,9 +5049,9 @@
           <a:lstStyle/>
           <a:p>
             <a:pPr algn="r">
-              <a:defRPr sz="1100" b="1">
-                <a:solidFill>
-                  <a:srgbClr val="FFFFFF"/>
+              <a:defRPr sz="900" b="1">
+                <a:solidFill>
+                  <a:srgbClr val="71717A"/>
                 </a:solidFill>
               </a:defRPr>
             </a:pPr>
@@ -5132,7 +5063,7 @@
       </p:sp>
       <p:sp>
         <p:nvSpPr>
-          <p:cNvPr id="13" name="Rounded Rectangle 12"/>
+          <p:cNvPr id="12" name="Rounded Rectangle 11"/>
           <p:cNvSpPr/>
           <p:nvPr/>
         </p:nvSpPr>
@@ -5177,14 +5108,14 @@
       </p:sp>
       <p:sp>
         <p:nvSpPr>
-          <p:cNvPr id="14" name="TextBox 13"/>
+          <p:cNvPr id="13" name="TextBox 12"/>
           <p:cNvSpPr txBox="1"/>
           <p:nvPr/>
         </p:nvSpPr>
         <p:spPr>
           <a:xfrm>
-            <a:off x="896112" y="2240279"/>
-            <a:ext cx="3099816" cy="3566160"/>
+            <a:off x="868680" y="2240279"/>
+            <a:ext cx="3154680" cy="3566160"/>
           </a:xfrm>
           <a:prstGeom prst="rect">
             <a:avLst/>
@@ -5198,129 +5129,156 @@
           <a:lstStyle/>
           <a:p>
             <a:pPr>
-              <a:defRPr sz="1100" b="1">
+              <a:defRPr sz="1200" b="1">
                 <a:solidFill>
                   <a:srgbClr val="FFFFFF"/>
                 </a:solidFill>
               </a:defRPr>
             </a:pPr>
             <a:r>
-              <a:t>⏱️ Bloque 1: Exposición (8 Min)</a:t>
-            </a:r>
-          </a:p>
-          <a:p>
-            <a:pPr>
-              <a:defRPr sz="900">
-                <a:solidFill>
-                  <a:srgbClr val="A1A1AA"/>
-                </a:solidFill>
-              </a:defRPr>
-            </a:pPr>
-            <a:r>
-              <a:t>▪  Marco teórico y arquitectura:</a:t>
-            </a:r>
-          </a:p>
-          <a:p>
-            <a:pPr>
-              <a:defRPr sz="900">
-                <a:solidFill>
-                  <a:srgbClr val="A1A1AA"/>
-                </a:solidFill>
-              </a:defRPr>
-            </a:pPr>
-            <a:r>
-              <a:t>▪  Min 0 - 4 (Eliceo Parillo):</a:t>
-            </a:r>
-          </a:p>
-          <a:p>
-            <a:pPr>
-              <a:defRPr sz="900">
-                <a:solidFill>
-                  <a:srgbClr val="A1A1AA"/>
-                </a:solidFill>
-              </a:defRPr>
-            </a:pPr>
-            <a:r>
-              <a:t>▪    • Problemática del monolito.</a:t>
-            </a:r>
-          </a:p>
-          <a:p>
-            <a:pPr>
-              <a:defRPr sz="900">
-                <a:solidFill>
-                  <a:srgbClr val="A1A1AA"/>
-                </a:solidFill>
-              </a:defRPr>
-            </a:pPr>
-            <a:r>
-              <a:t>▪    • Arquitectura distribuida base en 4 capas.</a:t>
-            </a:r>
-          </a:p>
-          <a:p>
-            <a:pPr>
-              <a:defRPr sz="900">
-                <a:solidFill>
-                  <a:srgbClr val="A1A1AA"/>
-                </a:solidFill>
-              </a:defRPr>
-            </a:pPr>
-            <a:r>
-              <a:t>▪    • Roles de Eureka, Config y Gateway.</a:t>
-            </a:r>
-          </a:p>
-          <a:p>
-            <a:pPr>
-              <a:defRPr sz="900">
-                <a:solidFill>
-                  <a:srgbClr val="A1A1AA"/>
-                </a:solidFill>
-              </a:defRPr>
-            </a:pPr>
-            <a:r>
-              <a:t>▪  Min 4 - 8 (Cristhian Paul):</a:t>
-            </a:r>
-          </a:p>
-          <a:p>
-            <a:pPr>
-              <a:defRPr sz="900">
-                <a:solidFill>
-                  <a:srgbClr val="A1A1AA"/>
-                </a:solidFill>
-              </a:defRPr>
-            </a:pPr>
-            <a:r>
-              <a:t>▪    • Fichas técnicas y contratos REST.</a:t>
-            </a:r>
-          </a:p>
-          <a:p>
-            <a:pPr>
-              <a:defRPr sz="900">
-                <a:solidFill>
-                  <a:srgbClr val="A1A1AA"/>
-                </a:solidFill>
-              </a:defRPr>
-            </a:pPr>
-            <a:r>
-              <a:t>▪    • Modelo Cabecera-Detalle y 18% IGV.</a:t>
-            </a:r>
-          </a:p>
-          <a:p>
-            <a:pPr>
-              <a:defRPr sz="900">
-                <a:solidFill>
-                  <a:srgbClr val="A1A1AA"/>
-                </a:solidFill>
-              </a:defRPr>
-            </a:pPr>
-            <a:r>
-              <a:t>▪    • Factor III: Configuración DEV vs PROD.</a:t>
-            </a:r>
-          </a:p>
-        </p:txBody>
-      </p:sp>
-      <p:sp>
-        <p:nvSpPr>
-          <p:cNvPr id="15" name="Rounded Rectangle 14"/>
+              <a:t>🏛️ Fase I: Fundamentación</a:t>
+            </a:r>
+          </a:p>
+          <a:p>
+            <a:pPr>
+              <a:spcBef>
+                <a:spcPts val="300"/>
+              </a:spcBef>
+              <a:defRPr sz="900">
+                <a:solidFill>
+                  <a:srgbClr val="A1A1AA"/>
+                </a:solidFill>
+              </a:defRPr>
+            </a:pPr>
+            <a:r>
+              <a:t>• Marco conceptual y topología:</a:t>
+            </a:r>
+          </a:p>
+          <a:p>
+            <a:pPr>
+              <a:spcBef>
+                <a:spcPts val="300"/>
+              </a:spcBef>
+              <a:defRPr sz="900">
+                <a:solidFill>
+                  <a:srgbClr val="A1A1AA"/>
+                </a:solidFill>
+              </a:defRPr>
+            </a:pPr>
+            <a:r>
+              <a:t>• Diagnóstico y Topología (Eliceo Parillo):</a:t>
+            </a:r>
+          </a:p>
+          <a:p>
+            <a:pPr>
+              <a:spcBef>
+                <a:spcPts val="300"/>
+              </a:spcBef>
+              <a:defRPr sz="900">
+                <a:solidFill>
+                  <a:srgbClr val="A1A1AA"/>
+                </a:solidFill>
+              </a:defRPr>
+            </a:pPr>
+            <a:r>
+              <a:t>•   • Descomposición del monolito y mitigación de SPOF.</a:t>
+            </a:r>
+          </a:p>
+          <a:p>
+            <a:pPr>
+              <a:spcBef>
+                <a:spcPts val="300"/>
+              </a:spcBef>
+              <a:defRPr sz="900">
+                <a:solidFill>
+                  <a:srgbClr val="A1A1AA"/>
+                </a:solidFill>
+              </a:defRPr>
+            </a:pPr>
+            <a:r>
+              <a:t>•   • Topología en 4 capas desacopladas.</a:t>
+            </a:r>
+          </a:p>
+          <a:p>
+            <a:pPr>
+              <a:spcBef>
+                <a:spcPts val="300"/>
+              </a:spcBef>
+              <a:defRPr sz="900">
+                <a:solidFill>
+                  <a:srgbClr val="A1A1AA"/>
+                </a:solidFill>
+              </a:defRPr>
+            </a:pPr>
+            <a:r>
+              <a:t>•   • Roles de Eureka, Config y Gateway.</a:t>
+            </a:r>
+          </a:p>
+          <a:p>
+            <a:pPr>
+              <a:spcBef>
+                <a:spcPts val="300"/>
+              </a:spcBef>
+              <a:defRPr sz="900">
+                <a:solidFill>
+                  <a:srgbClr val="A1A1AA"/>
+                </a:solidFill>
+              </a:defRPr>
+            </a:pPr>
+            <a:r>
+              <a:t>• Contratos y Despliegue (Cristhian Paul):</a:t>
+            </a:r>
+          </a:p>
+          <a:p>
+            <a:pPr>
+              <a:spcBef>
+                <a:spcPts val="300"/>
+              </a:spcBef>
+              <a:defRPr sz="900">
+                <a:solidFill>
+                  <a:srgbClr val="A1A1AA"/>
+                </a:solidFill>
+              </a:defRPr>
+            </a:pPr>
+            <a:r>
+              <a:t>•   • Especificación de contratos REST normalizados.</a:t>
+            </a:r>
+          </a:p>
+          <a:p>
+            <a:pPr>
+              <a:spcBef>
+                <a:spcPts val="300"/>
+              </a:spcBef>
+              <a:defRPr sz="900">
+                <a:solidFill>
+                  <a:srgbClr val="A1A1AA"/>
+                </a:solidFill>
+              </a:defRPr>
+            </a:pPr>
+            <a:r>
+              <a:t>•   • Modelo Cabecera-Detalle y fiscalidad IGV 18%.</a:t>
+            </a:r>
+          </a:p>
+          <a:p>
+            <a:pPr>
+              <a:spcBef>
+                <a:spcPts val="300"/>
+              </a:spcBef>
+              <a:defRPr sz="900">
+                <a:solidFill>
+                  <a:srgbClr val="A1A1AA"/>
+                </a:solidFill>
+              </a:defRPr>
+            </a:pPr>
+            <a:r>
+              <a:t>•   • Factor III: Inmutabilidad en DEV vs PROD.</a:t>
+            </a:r>
+          </a:p>
+        </p:txBody>
+      </p:sp>
+      <p:sp>
+        <p:nvSpPr>
+          <p:cNvPr id="14" name="Rounded Rectangle 13"/>
           <p:cNvSpPr/>
           <p:nvPr/>
         </p:nvSpPr>
@@ -5365,14 +5323,14 @@
       </p:sp>
       <p:sp>
         <p:nvSpPr>
-          <p:cNvPr id="16" name="TextBox 15"/>
+          <p:cNvPr id="15" name="TextBox 14"/>
           <p:cNvSpPr txBox="1"/>
           <p:nvPr/>
         </p:nvSpPr>
         <p:spPr>
           <a:xfrm>
-            <a:off x="4553712" y="2240279"/>
-            <a:ext cx="3099816" cy="3566160"/>
+            <a:off x="4526280" y="2240279"/>
+            <a:ext cx="3154680" cy="3566160"/>
           </a:xfrm>
           <a:prstGeom prst="rect">
             <a:avLst/>
@@ -5386,117 +5344,141 @@
           <a:lstStyle/>
           <a:p>
             <a:pPr>
-              <a:defRPr sz="1100" b="1">
+              <a:defRPr sz="1200" b="1">
                 <a:solidFill>
                   <a:srgbClr val="FFFFFF"/>
                 </a:solidFill>
               </a:defRPr>
             </a:pPr>
             <a:r>
-              <a:t>💻 Bloque 2: Demo en Vivo (5 Min)</a:t>
-            </a:r>
-          </a:p>
-          <a:p>
-            <a:pPr>
-              <a:defRPr sz="900">
-                <a:solidFill>
-                  <a:srgbClr val="A1A1AA"/>
-                </a:solidFill>
-              </a:defRPr>
-            </a:pPr>
-            <a:r>
-              <a:t>▪  Demostración técnica en caliente:</a:t>
-            </a:r>
-          </a:p>
-          <a:p>
-            <a:pPr>
-              <a:defRPr sz="900">
-                <a:solidFill>
-                  <a:srgbClr val="A1A1AA"/>
-                </a:solidFill>
-              </a:defRPr>
-            </a:pPr>
-            <a:r>
-              <a:t>▪  Min 8 - 10.5 (Cristhian Paul):</a:t>
-            </a:r>
-          </a:p>
-          <a:p>
-            <a:pPr>
-              <a:defRPr sz="900">
-                <a:solidFill>
-                  <a:srgbClr val="A1A1AA"/>
-                </a:solidFill>
-              </a:defRPr>
-            </a:pPr>
-            <a:r>
-              <a:t>▪    • Caso 201 Created (POST orden con IGV).</a:t>
-            </a:r>
-          </a:p>
-          <a:p>
-            <a:pPr>
-              <a:defRPr sz="900">
-                <a:solidFill>
-                  <a:srgbClr val="A1A1AA"/>
-                </a:solidFill>
-              </a:defRPr>
-            </a:pPr>
-            <a:r>
-              <a:t>▪    • Caso 400 Bad Request (Validación).</a:t>
-            </a:r>
-          </a:p>
-          <a:p>
-            <a:pPr>
-              <a:defRPr sz="900">
-                <a:solidFill>
-                  <a:srgbClr val="A1A1AA"/>
-                </a:solidFill>
-              </a:defRPr>
-            </a:pPr>
-            <a:r>
-              <a:t>▪    • Caso 404 Not Found (ID inexistente).</a:t>
-            </a:r>
-          </a:p>
-          <a:p>
-            <a:pPr>
-              <a:defRPr sz="900">
-                <a:solidFill>
-                  <a:srgbClr val="A1A1AA"/>
-                </a:solidFill>
-              </a:defRPr>
-            </a:pPr>
-            <a:r>
-              <a:t>▪  Min 10.5 - 13 (Eliceo Parillo):</a:t>
-            </a:r>
-          </a:p>
-          <a:p>
-            <a:pPr>
-              <a:defRPr sz="900">
-                <a:solidFill>
-                  <a:srgbClr val="A1A1AA"/>
-                </a:solidFill>
-              </a:defRPr>
-            </a:pPr>
-            <a:r>
-              <a:t>▪    • Balanceo Round-Robin (4 solicitudes).</a:t>
-            </a:r>
-          </a:p>
-          <a:p>
-            <a:pPr>
-              <a:defRPr sz="900">
-                <a:solidFill>
-                  <a:srgbClr val="A1A1AA"/>
-                </a:solidFill>
-              </a:defRPr>
-            </a:pPr>
-            <a:r>
-              <a:t>▪    • Tolerancia a fallos: Detención en vivo de :8082 demostrando alta disponibilidad.</a:t>
-            </a:r>
-          </a:p>
-        </p:txBody>
-      </p:sp>
-      <p:sp>
-        <p:nvSpPr>
-          <p:cNvPr id="17" name="Rounded Rectangle 16"/>
+              <a:t>⚡ Fase II: Demostración en Caliente</a:t>
+            </a:r>
+          </a:p>
+          <a:p>
+            <a:pPr>
+              <a:spcBef>
+                <a:spcPts val="300"/>
+              </a:spcBef>
+              <a:defRPr sz="900">
+                <a:solidFill>
+                  <a:srgbClr val="A1A1AA"/>
+                </a:solidFill>
+              </a:defRPr>
+            </a:pPr>
+            <a:r>
+              <a:t>• Verificación funcional y resiliencia:</a:t>
+            </a:r>
+          </a:p>
+          <a:p>
+            <a:pPr>
+              <a:spcBef>
+                <a:spcPts val="300"/>
+              </a:spcBef>
+              <a:defRPr sz="900">
+                <a:solidFill>
+                  <a:srgbClr val="A1A1AA"/>
+                </a:solidFill>
+              </a:defRPr>
+            </a:pPr>
+            <a:r>
+              <a:t>• Flujo Transaccional (Cristhian Paul):</a:t>
+            </a:r>
+          </a:p>
+          <a:p>
+            <a:pPr>
+              <a:spcBef>
+                <a:spcPts val="300"/>
+              </a:spcBef>
+              <a:defRPr sz="900">
+                <a:solidFill>
+                  <a:srgbClr val="A1A1AA"/>
+                </a:solidFill>
+              </a:defRPr>
+            </a:pPr>
+            <a:r>
+              <a:t>•   • Emisión de Orden con 201 Created persistida en BD.</a:t>
+            </a:r>
+          </a:p>
+          <a:p>
+            <a:pPr>
+              <a:spcBef>
+                <a:spcPts val="300"/>
+              </a:spcBef>
+              <a:defRPr sz="900">
+                <a:solidFill>
+                  <a:srgbClr val="A1A1AA"/>
+                </a:solidFill>
+              </a:defRPr>
+            </a:pPr>
+            <a:r>
+              <a:t>•   • Rechazo de esquema inválido (400 Bad Request).</a:t>
+            </a:r>
+          </a:p>
+          <a:p>
+            <a:pPr>
+              <a:spcBef>
+                <a:spcPts val="300"/>
+              </a:spcBef>
+              <a:defRPr sz="900">
+                <a:solidFill>
+                  <a:srgbClr val="A1A1AA"/>
+                </a:solidFill>
+              </a:defRPr>
+            </a:pPr>
+            <a:r>
+              <a:t>•   • Control de excepciones por recurso inexistente (404).</a:t>
+            </a:r>
+          </a:p>
+          <a:p>
+            <a:pPr>
+              <a:spcBef>
+                <a:spcPts val="300"/>
+              </a:spcBef>
+              <a:defRPr sz="900">
+                <a:solidFill>
+                  <a:srgbClr val="A1A1AA"/>
+                </a:solidFill>
+              </a:defRPr>
+            </a:pPr>
+            <a:r>
+              <a:t>• Alta Disponibilidad y Resiliencia (Eliceo Parillo):</a:t>
+            </a:r>
+          </a:p>
+          <a:p>
+            <a:pPr>
+              <a:spcBef>
+                <a:spcPts val="300"/>
+              </a:spcBef>
+              <a:defRPr sz="900">
+                <a:solidFill>
+                  <a:srgbClr val="A1A1AA"/>
+                </a:solidFill>
+              </a:defRPr>
+            </a:pPr>
+            <a:r>
+              <a:t>•   • Balanceo dinámico Round-Robin comprobado.</a:t>
+            </a:r>
+          </a:p>
+          <a:p>
+            <a:pPr>
+              <a:spcBef>
+                <a:spcPts val="300"/>
+              </a:spcBef>
+              <a:defRPr sz="900">
+                <a:solidFill>
+                  <a:srgbClr val="A1A1AA"/>
+                </a:solidFill>
+              </a:defRPr>
+            </a:pPr>
+            <a:r>
+              <a:t>•   • Tolerancia a fallos: Apagado en vivo de :8082 sin interrupción del servicio.</a:t>
+            </a:r>
+          </a:p>
+        </p:txBody>
+      </p:sp>
+      <p:sp>
+        <p:nvSpPr>
+          <p:cNvPr id="16" name="Rounded Rectangle 15"/>
           <p:cNvSpPr/>
           <p:nvPr/>
         </p:nvSpPr>
@@ -5541,14 +5523,14 @@
       </p:sp>
       <p:sp>
         <p:nvSpPr>
-          <p:cNvPr id="18" name="TextBox 17"/>
+          <p:cNvPr id="17" name="TextBox 16"/>
           <p:cNvSpPr txBox="1"/>
           <p:nvPr/>
         </p:nvSpPr>
         <p:spPr>
           <a:xfrm>
-            <a:off x="8211312" y="2240279"/>
-            <a:ext cx="3099816" cy="3566160"/>
+            <a:off x="8183880" y="2240279"/>
+            <a:ext cx="3154680" cy="3566160"/>
           </a:xfrm>
           <a:prstGeom prst="rect">
             <a:avLst/>
@@ -5562,98 +5544,104 @@
           <a:lstStyle/>
           <a:p>
             <a:pPr>
-              <a:defRPr sz="1100" b="1">
+              <a:defRPr sz="1200" b="1">
                 <a:solidFill>
                   <a:srgbClr val="FFFFFF"/>
                 </a:solidFill>
               </a:defRPr>
             </a:pPr>
             <a:r>
-              <a:t>🎙️ Bloque 3: Preguntas (5 Min)</a:t>
-            </a:r>
-          </a:p>
-          <a:p>
-            <a:pPr>
-              <a:defRPr sz="900">
-                <a:solidFill>
-                  <a:srgbClr val="A1A1AA"/>
-                </a:solidFill>
-              </a:defRPr>
-            </a:pPr>
-            <a:r>
-              <a:t>▪  Defensa del balotario oficial:</a:t>
-            </a:r>
-          </a:p>
-          <a:p>
-            <a:pPr>
-              <a:defRPr sz="900">
-                <a:solidFill>
-                  <a:srgbClr val="A1A1AA"/>
-                </a:solidFill>
-              </a:defRPr>
-            </a:pPr>
-            <a:r>
-              <a:t>▪  Min 13 - 18 (Ronda Individual):</a:t>
-            </a:r>
-          </a:p>
-          <a:p>
-            <a:pPr>
-              <a:defRPr sz="900">
-                <a:solidFill>
-                  <a:srgbClr val="A1A1AA"/>
-                </a:solidFill>
-              </a:defRPr>
-            </a:pPr>
-            <a:r>
-              <a:t>▪    • Preguntas individuales del Ing. Abel Sullón.</a:t>
-            </a:r>
-          </a:p>
-          <a:p>
-            <a:pPr>
-              <a:defRPr sz="900">
-                <a:solidFill>
-                  <a:srgbClr val="A1A1AA"/>
-                </a:solidFill>
-              </a:defRPr>
-            </a:pPr>
-            <a:r>
-              <a:t>▪    • Eliceo defiende P1 (Puertos) y P2 (Config).</a:t>
-            </a:r>
-          </a:p>
-          <a:p>
-            <a:pPr>
-              <a:defRPr sz="900">
-                <a:solidFill>
-                  <a:srgbClr val="A1A1AA"/>
-                </a:solidFill>
-              </a:defRPr>
-            </a:pPr>
-            <a:r>
-              <a:t>▪    • Cristhian defiende P3 (Latidos), P4 (lb://) y P5 (Round Robin).</a:t>
-            </a:r>
-          </a:p>
-          <a:p>
-            <a:pPr>
-              <a:defRPr sz="900">
-                <a:solidFill>
-                  <a:srgbClr val="A1A1AA"/>
-                </a:solidFill>
-              </a:defRPr>
-            </a:pPr>
-            <a:r>
-              <a:t>▪    • Demostración de autoría propia.</a:t>
-            </a:r>
-          </a:p>
-          <a:p>
-            <a:pPr>
-              <a:defRPr sz="900">
-                <a:solidFill>
-                  <a:srgbClr val="A1A1AA"/>
-                </a:solidFill>
-              </a:defRPr>
-            </a:pPr>
-            <a:r>
-              <a:t>▪  Meta de Calificación: 20/20.</a:t>
+              <a:t>🎯 Fase III: Ronda de Preguntas</a:t>
+            </a:r>
+          </a:p>
+          <a:p>
+            <a:pPr>
+              <a:spcBef>
+                <a:spcPts val="300"/>
+              </a:spcBef>
+              <a:defRPr sz="900">
+                <a:solidFill>
+                  <a:srgbClr val="A1A1AA"/>
+                </a:solidFill>
+              </a:defRPr>
+            </a:pPr>
+            <a:r>
+              <a:t>• Auditoría conceptual de arquitectura:</a:t>
+            </a:r>
+          </a:p>
+          <a:p>
+            <a:pPr>
+              <a:spcBef>
+                <a:spcPts val="300"/>
+              </a:spcBef>
+              <a:defRPr sz="900">
+                <a:solidFill>
+                  <a:srgbClr val="A1A1AA"/>
+                </a:solidFill>
+              </a:defRPr>
+            </a:pPr>
+            <a:r>
+              <a:t>• Defensa Técnica de Alto Nivel:</a:t>
+            </a:r>
+          </a:p>
+          <a:p>
+            <a:pPr>
+              <a:spcBef>
+                <a:spcPts val="300"/>
+              </a:spcBef>
+              <a:defRPr sz="900">
+                <a:solidFill>
+                  <a:srgbClr val="A1A1AA"/>
+                </a:solidFill>
+              </a:defRPr>
+            </a:pPr>
+            <a:r>
+              <a:t>•   • Justificación rigurosa de los trade-offs de arquitectura ante el jurado evaluador.</a:t>
+            </a:r>
+          </a:p>
+          <a:p>
+            <a:pPr>
+              <a:spcBef>
+                <a:spcPts val="300"/>
+              </a:spcBef>
+              <a:defRPr sz="900">
+                <a:solidFill>
+                  <a:srgbClr val="A1A1AA"/>
+                </a:solidFill>
+              </a:defRPr>
+            </a:pPr>
+            <a:r>
+              <a:t>•   • Dominio de Infraestructura (Eliceo Parillo): Aislamiento de puertos, enrutamiento Gateway y configuración centralizada.</a:t>
+            </a:r>
+          </a:p>
+          <a:p>
+            <a:pPr>
+              <a:spcBef>
+                <a:spcPts val="300"/>
+              </a:spcBef>
+              <a:defRPr sz="900">
+                <a:solidFill>
+                  <a:srgbClr val="A1A1AA"/>
+                </a:solidFill>
+              </a:defRPr>
+            </a:pPr>
+            <a:r>
+              <a:t>•   • Resiliencia y Concurrencia (Cristhian Paul): Margen de disponibilidad AP en Eureka, ciclo de Heartbeats y balanceo Client-Side.</a:t>
+            </a:r>
+          </a:p>
+          <a:p>
+            <a:pPr>
+              <a:spcBef>
+                <a:spcPts val="300"/>
+              </a:spcBef>
+              <a:defRPr sz="900">
+                <a:solidFill>
+                  <a:srgbClr val="A1A1AA"/>
+                </a:solidFill>
+              </a:defRPr>
+            </a:pPr>
+            <a:r>
+              <a:t>• Conformidad Integral Demostrada.</a:t>
             </a:r>
           </a:p>
         </p:txBody>
@@ -5905,8 +5893,8 @@
         </p:nvSpPr>
         <p:spPr>
           <a:xfrm>
-            <a:off x="8412480" y="384048"/>
-            <a:ext cx="3017520" cy="384048"/>
+            <a:off x="7772400" y="384048"/>
+            <a:ext cx="3657600" cy="384048"/>
           </a:xfrm>
           <a:prstGeom prst="roundRect">
             <a:avLst/>
@@ -5939,14 +5927,14 @@
           <a:lstStyle/>
           <a:p>
             <a:pPr algn="ctr">
-              <a:defRPr sz="900" b="1">
-                <a:solidFill>
-                  <a:srgbClr val="FFFFFF"/>
-                </a:solidFill>
-              </a:defRPr>
-            </a:pPr>
-            <a:r>
-              <a:t>PILAR 3 • EVIDENCIAS EN VIVO</a:t>
+              <a:defRPr sz="800" b="1">
+                <a:solidFill>
+                  <a:srgbClr val="A1A1AA"/>
+                </a:solidFill>
+              </a:defRPr>
+            </a:pPr>
+            <a:r>
+              <a:t>AUDITORÍA DE ARTEFACTOS</a:t>
             </a:r>
           </a:p>
         </p:txBody>
@@ -5959,7 +5947,7 @@
         </p:nvSpPr>
         <p:spPr>
           <a:xfrm>
-            <a:off x="731520" y="1005840"/>
+            <a:off x="731520" y="1051560"/>
             <a:ext cx="10698480" cy="868680"/>
           </a:xfrm>
           <a:prstGeom prst="rect">
@@ -5974,26 +5962,26 @@
           <a:lstStyle/>
           <a:p>
             <a:pPr>
-              <a:defRPr sz="2000" b="1">
+              <a:defRPr sz="1900" b="1">
                 <a:solidFill>
                   <a:srgbClr val="FFFFFF"/>
                 </a:solidFill>
               </a:defRPr>
             </a:pPr>
             <a:r>
-              <a:t>EJEMPLOS DE FUNCIONAMIENTO REAL DEL ECOSISTEMA</a:t>
-            </a:r>
-          </a:p>
-          <a:p>
-            <a:pPr>
-              <a:defRPr sz="1100">
-                <a:solidFill>
-                  <a:srgbClr val="A1A1AA"/>
-                </a:solidFill>
-              </a:defRPr>
-            </a:pPr>
-            <a:r>
-              <a:t>Capturas de terminales, registro en Eureka Server y respuestas HTTP en consola</a:t>
+              <a:t>PANEL DE EVIDENCIAS Y TRAZABILIDAD OPERATIVA</a:t>
+            </a:r>
+          </a:p>
+          <a:p>
+            <a:pPr>
+              <a:defRPr sz="1000">
+                <a:solidFill>
+                  <a:srgbClr val="A1A1AA"/>
+                </a:solidFill>
+              </a:defRPr>
+            </a:pPr>
+            <a:r>
+              <a:t>Inspección de artefactos en ejecución: Config Server, Service Registry, réplicas transaccionales y respuestas HTTP</a:t>
             </a:r>
           </a:p>
         </p:txBody>
@@ -6006,7 +5994,7 @@
         </p:nvSpPr>
         <p:spPr>
           <a:xfrm>
-            <a:off x="731520" y="1874519"/>
+            <a:off x="731520" y="1965960"/>
             <a:ext cx="10698480" cy="18288"/>
           </a:xfrm>
           <a:prstGeom prst="rect">
@@ -6043,57 +6031,14 @@
       </p:sp>
       <p:sp>
         <p:nvSpPr>
-          <p:cNvPr id="10" name="Rounded Rectangle 9"/>
-          <p:cNvSpPr/>
-          <p:nvPr/>
-        </p:nvSpPr>
-        <p:spPr>
-          <a:xfrm>
-            <a:off x="731520" y="1856231"/>
-            <a:ext cx="1097280" cy="54864"/>
-          </a:xfrm>
-          <a:prstGeom prst="roundRect">
-            <a:avLst/>
-          </a:prstGeom>
-          <a:solidFill>
-            <a:srgbClr val="FFFFFF"/>
-          </a:solidFill>
-          <a:ln>
-            <a:noFill/>
-          </a:ln>
-        </p:spPr>
-        <p:style>
-          <a:lnRef idx="1">
-            <a:schemeClr val="accent1"/>
-          </a:lnRef>
-          <a:fillRef idx="3">
-            <a:schemeClr val="accent1"/>
-          </a:fillRef>
-          <a:effectRef idx="2">
-            <a:schemeClr val="accent1"/>
-          </a:effectRef>
-          <a:fontRef idx="minor">
-            <a:schemeClr val="lt1"/>
-          </a:fontRef>
-        </p:style>
-        <p:txBody>
-          <a:bodyPr rtlCol="0" anchor="ctr"/>
-          <a:lstStyle/>
-          <a:p>
-            <a:pPr algn="ctr"/>
-          </a:p>
-        </p:txBody>
-      </p:sp>
-      <p:sp>
-        <p:nvSpPr>
-          <p:cNvPr id="11" name="TextBox 10"/>
+          <p:cNvPr id="10" name="TextBox 9"/>
           <p:cNvSpPr txBox="1"/>
           <p:nvPr/>
         </p:nvSpPr>
         <p:spPr>
           <a:xfrm>
-            <a:off x="731520" y="6309360"/>
-            <a:ext cx="7315200" cy="365760"/>
+            <a:off x="731520" y="6217920"/>
+            <a:ext cx="7772400" cy="365760"/>
           </a:xfrm>
           <a:prstGeom prst="rect">
             <a:avLst/>
@@ -6107,28 +6052,28 @@
           <a:lstStyle/>
           <a:p>
             <a:pPr>
-              <a:defRPr sz="950" b="1">
-                <a:solidFill>
-                  <a:srgbClr val="A1A1AA"/>
-                </a:solidFill>
-              </a:defRPr>
-            </a:pPr>
-            <a:r>
-              <a:t>🎙️  CAPTURAS OFICIALES DEL SISTEMA</a:t>
-            </a:r>
-          </a:p>
-        </p:txBody>
-      </p:sp>
-      <p:sp>
-        <p:nvSpPr>
-          <p:cNvPr id="12" name="TextBox 11"/>
+              <a:defRPr sz="900">
+                <a:solidFill>
+                  <a:srgbClr val="A1A1AA"/>
+                </a:solidFill>
+              </a:defRPr>
+            </a:pPr>
+            <a:r>
+              <a:t>🎙️ EQUIPO 01 • AUDITORÍA DE EVIDENCIAS</a:t>
+            </a:r>
+          </a:p>
+        </p:txBody>
+      </p:sp>
+      <p:sp>
+        <p:nvSpPr>
+          <p:cNvPr id="11" name="TextBox 10"/>
           <p:cNvSpPr txBox="1"/>
           <p:nvPr/>
         </p:nvSpPr>
         <p:spPr>
           <a:xfrm>
-            <a:off x="10058400" y="6309360"/>
-            <a:ext cx="1371600" cy="365760"/>
+            <a:off x="10241280" y="6217920"/>
+            <a:ext cx="1188720" cy="365760"/>
           </a:xfrm>
           <a:prstGeom prst="rect">
             <a:avLst/>
@@ -6142,9 +6087,9 @@
           <a:lstStyle/>
           <a:p>
             <a:pPr algn="r">
-              <a:defRPr sz="1100" b="1">
-                <a:solidFill>
-                  <a:srgbClr val="FFFFFF"/>
+              <a:defRPr sz="900" b="1">
+                <a:solidFill>
+                  <a:srgbClr val="71717A"/>
                 </a:solidFill>
               </a:defRPr>
             </a:pPr>
@@ -6156,7 +6101,7 @@
       </p:sp>
       <p:sp>
         <p:nvSpPr>
-          <p:cNvPr id="13" name="Rounded Rectangle 12"/>
+          <p:cNvPr id="12" name="Rounded Rectangle 11"/>
           <p:cNvSpPr/>
           <p:nvPr/>
         </p:nvSpPr>
@@ -6201,14 +6146,14 @@
       </p:sp>
       <p:sp>
         <p:nvSpPr>
-          <p:cNvPr id="14" name="TextBox 13"/>
+          <p:cNvPr id="13" name="TextBox 12"/>
           <p:cNvSpPr txBox="1"/>
           <p:nvPr/>
         </p:nvSpPr>
         <p:spPr>
           <a:xfrm>
-            <a:off x="896112" y="2240279"/>
-            <a:ext cx="3511296" cy="3566160"/>
+            <a:off x="868680" y="2240279"/>
+            <a:ext cx="3566160" cy="3566160"/>
           </a:xfrm>
           <a:prstGeom prst="rect">
             <a:avLst/>
@@ -6222,7 +6167,7 @@
           <a:lstStyle/>
           <a:p>
             <a:pPr>
-              <a:defRPr sz="1100" b="1">
+              <a:defRPr sz="1200" b="1">
                 <a:solidFill>
                   <a:srgbClr val="FFFFFF"/>
                 </a:solidFill>
@@ -6234,93 +6179,114 @@
           </a:p>
           <a:p>
             <a:pPr>
-              <a:defRPr sz="900">
-                <a:solidFill>
-                  <a:srgbClr val="A1A1AA"/>
-                </a:solidFill>
-              </a:defRPr>
-            </a:pPr>
-            <a:r>
-              <a:t>▪  01. Config Server Centralizado (:8888) - config-repo.</a:t>
-            </a:r>
-          </a:p>
-          <a:p>
-            <a:pPr>
-              <a:defRPr sz="900">
-                <a:solidFill>
-                  <a:srgbClr val="A1A1AA"/>
-                </a:solidFill>
-              </a:defRPr>
-            </a:pPr>
-            <a:r>
-              <a:t>▪  02. Eureka Server (:8761) - Registro dinámico.</a:t>
-            </a:r>
-          </a:p>
-          <a:p>
-            <a:pPr>
-              <a:defRPr sz="900">
-                <a:solidFill>
-                  <a:srgbClr val="A1A1AA"/>
-                </a:solidFill>
-              </a:defRPr>
-            </a:pPr>
-            <a:r>
-              <a:t>▪  03. pc-catalogo-ms (:8081) - Catálogo gamer.</a:t>
-            </a:r>
-          </a:p>
-          <a:p>
-            <a:pPr>
-              <a:defRPr sz="900">
-                <a:solidFill>
-                  <a:srgbClr val="A1A1AA"/>
-                </a:solidFill>
-              </a:defRPr>
-            </a:pPr>
-            <a:r>
-              <a:t>▪  04. pc-orden-ms Instancia 1 (:8082) - BD PostgreSQL.</a:t>
-            </a:r>
-          </a:p>
-          <a:p>
-            <a:pPr>
-              <a:defRPr sz="900">
-                <a:solidFill>
-                  <a:srgbClr val="A1A1AA"/>
-                </a:solidFill>
-              </a:defRPr>
-            </a:pPr>
-            <a:r>
-              <a:t>▪  05. pc-orden-ms Instancia 2 (:8083) - Balanceo.</a:t>
-            </a:r>
-          </a:p>
-          <a:p>
-            <a:pPr>
-              <a:defRPr sz="900">
-                <a:solidFill>
-                  <a:srgbClr val="A1A1AA"/>
-                </a:solidFill>
-              </a:defRPr>
-            </a:pPr>
-            <a:r>
-              <a:t>▪  06. Dashboard Web de Eureka - 5 instancias UP.</a:t>
-            </a:r>
-          </a:p>
-          <a:p>
-            <a:pPr>
-              <a:defRPr sz="900">
-                <a:solidFill>
-                  <a:srgbClr val="A1A1AA"/>
-                </a:solidFill>
-              </a:defRPr>
-            </a:pPr>
-            <a:r>
-              <a:t>▪  07. Pruebas CRUD PowerShell - POST 201 y 18% IGV.</a:t>
+              <a:spcBef>
+                <a:spcPts val="300"/>
+              </a:spcBef>
+              <a:defRPr sz="900">
+                <a:solidFill>
+                  <a:srgbClr val="A1A1AA"/>
+                </a:solidFill>
+              </a:defRPr>
+            </a:pPr>
+            <a:r>
+              <a:t>• 01. Config Server Centralizado (:8888) - config-repo.</a:t>
+            </a:r>
+          </a:p>
+          <a:p>
+            <a:pPr>
+              <a:spcBef>
+                <a:spcPts val="300"/>
+              </a:spcBef>
+              <a:defRPr sz="900">
+                <a:solidFill>
+                  <a:srgbClr val="A1A1AA"/>
+                </a:solidFill>
+              </a:defRPr>
+            </a:pPr>
+            <a:r>
+              <a:t>• 02. Eureka Server (:8761) - Registro dinámico.</a:t>
+            </a:r>
+          </a:p>
+          <a:p>
+            <a:pPr>
+              <a:spcBef>
+                <a:spcPts val="300"/>
+              </a:spcBef>
+              <a:defRPr sz="900">
+                <a:solidFill>
+                  <a:srgbClr val="A1A1AA"/>
+                </a:solidFill>
+              </a:defRPr>
+            </a:pPr>
+            <a:r>
+              <a:t>• 03. pc-catalogo-ms (:8081) - Catálogo gamer.</a:t>
+            </a:r>
+          </a:p>
+          <a:p>
+            <a:pPr>
+              <a:spcBef>
+                <a:spcPts val="300"/>
+              </a:spcBef>
+              <a:defRPr sz="900">
+                <a:solidFill>
+                  <a:srgbClr val="A1A1AA"/>
+                </a:solidFill>
+              </a:defRPr>
+            </a:pPr>
+            <a:r>
+              <a:t>• 04. pc-orden-ms Instancia 1 (:8082) - BD PostgreSQL.</a:t>
+            </a:r>
+          </a:p>
+          <a:p>
+            <a:pPr>
+              <a:spcBef>
+                <a:spcPts val="300"/>
+              </a:spcBef>
+              <a:defRPr sz="900">
+                <a:solidFill>
+                  <a:srgbClr val="A1A1AA"/>
+                </a:solidFill>
+              </a:defRPr>
+            </a:pPr>
+            <a:r>
+              <a:t>• 05. pc-orden-ms Instancia 2 (:8083) - Balanceo.</a:t>
+            </a:r>
+          </a:p>
+          <a:p>
+            <a:pPr>
+              <a:spcBef>
+                <a:spcPts val="300"/>
+              </a:spcBef>
+              <a:defRPr sz="900">
+                <a:solidFill>
+                  <a:srgbClr val="A1A1AA"/>
+                </a:solidFill>
+              </a:defRPr>
+            </a:pPr>
+            <a:r>
+              <a:t>• 06. Dashboard Web de Eureka - 5 instancias UP.</a:t>
+            </a:r>
+          </a:p>
+          <a:p>
+            <a:pPr>
+              <a:spcBef>
+                <a:spcPts val="300"/>
+              </a:spcBef>
+              <a:defRPr sz="900">
+                <a:solidFill>
+                  <a:srgbClr val="A1A1AA"/>
+                </a:solidFill>
+              </a:defRPr>
+            </a:pPr>
+            <a:r>
+              <a:t>• 07. Pruebas CRUD PowerShell - POST 201 y 18% IGV.</a:t>
             </a:r>
           </a:p>
         </p:txBody>
       </p:sp>
       <p:pic>
         <p:nvPicPr>
-          <p:cNvPr id="15" name="Picture 14" descr="evidencia_6_eureka_web_dashboard.png"/>
+          <p:cNvPr id="14" name="Picture 13" descr="evidencia_6_eureka_web_dashboard.png"/>
           <p:cNvPicPr>
             <a:picLocks noChangeAspect="1"/>
           </p:cNvPicPr>
@@ -6589,8 +6555,8 @@
         </p:nvSpPr>
         <p:spPr>
           <a:xfrm>
-            <a:off x="8412480" y="384048"/>
-            <a:ext cx="3017520" cy="384048"/>
+            <a:off x="7772400" y="384048"/>
+            <a:ext cx="3657600" cy="384048"/>
           </a:xfrm>
           <a:prstGeom prst="roundRect">
             <a:avLst/>
@@ -6623,14 +6589,14 @@
           <a:lstStyle/>
           <a:p>
             <a:pPr algn="ctr">
-              <a:defRPr sz="900" b="1">
-                <a:solidFill>
-                  <a:srgbClr val="FFFFFF"/>
-                </a:solidFill>
-              </a:defRPr>
-            </a:pPr>
-            <a:r>
-              <a:t>PILAR 3 • CENTRO DE MANDO</a:t>
+              <a:defRPr sz="800" b="1">
+                <a:solidFill>
+                  <a:srgbClr val="A1A1AA"/>
+                </a:solidFill>
+              </a:defRPr>
+            </a:pPr>
+            <a:r>
+              <a:t>DEMOSTRACIÓN EN TIEMPO REAL</a:t>
             </a:r>
           </a:p>
         </p:txBody>
@@ -6643,7 +6609,7 @@
         </p:nvSpPr>
         <p:spPr>
           <a:xfrm>
-            <a:off x="731520" y="1005840"/>
+            <a:off x="731520" y="1051560"/>
             <a:ext cx="10698480" cy="868680"/>
           </a:xfrm>
           <a:prstGeom prst="rect">
@@ -6658,26 +6624,26 @@
           <a:lstStyle/>
           <a:p>
             <a:pPr>
-              <a:defRPr sz="2000" b="1">
+              <a:defRPr sz="1900" b="1">
                 <a:solidFill>
                   <a:srgbClr val="FFFFFF"/>
                 </a:solidFill>
               </a:defRPr>
             </a:pPr>
             <a:r>
-              <a:t>CENTRO DE MANDO EN VIVO &amp; PRUEBAS OFICIALES</a:t>
-            </a:r>
-          </a:p>
-          <a:p>
-            <a:pPr>
-              <a:defRPr sz="1100">
-                <a:solidFill>
-                  <a:srgbClr val="A1A1AA"/>
-                </a:solidFill>
-              </a:defRPr>
-            </a:pPr>
-            <a:r>
-              <a:t>Control de scripts, monitor de salud en tiempo real y ejecución de pruebas con 1 clic</a:t>
+              <a:t>CONSOLA DE CONTROL OPERATIVO &amp; SUITE DE PRUEBAS EN VIVO</a:t>
+            </a:r>
+          </a:p>
+          <a:p>
+            <a:pPr>
+              <a:defRPr sz="1000">
+                <a:solidFill>
+                  <a:srgbClr val="A1A1AA"/>
+                </a:solidFill>
+              </a:defRPr>
+            </a:pPr>
+            <a:r>
+              <a:t>Monitoreo de telemetría de microservicios, ejecución de transacciones y auditoría de balanceo Round-Robin en tiempo real</a:t>
             </a:r>
           </a:p>
         </p:txBody>
@@ -6690,7 +6656,7 @@
         </p:nvSpPr>
         <p:spPr>
           <a:xfrm>
-            <a:off x="731520" y="1874519"/>
+            <a:off x="731520" y="1965960"/>
             <a:ext cx="10698480" cy="18288"/>
           </a:xfrm>
           <a:prstGeom prst="rect">
@@ -6727,57 +6693,14 @@
       </p:sp>
       <p:sp>
         <p:nvSpPr>
-          <p:cNvPr id="10" name="Rounded Rectangle 9"/>
-          <p:cNvSpPr/>
-          <p:nvPr/>
-        </p:nvSpPr>
-        <p:spPr>
-          <a:xfrm>
-            <a:off x="731520" y="1856231"/>
-            <a:ext cx="1097280" cy="54864"/>
-          </a:xfrm>
-          <a:prstGeom prst="roundRect">
-            <a:avLst/>
-          </a:prstGeom>
-          <a:solidFill>
-            <a:srgbClr val="FFFFFF"/>
-          </a:solidFill>
-          <a:ln>
-            <a:noFill/>
-          </a:ln>
-        </p:spPr>
-        <p:style>
-          <a:lnRef idx="1">
-            <a:schemeClr val="accent1"/>
-          </a:lnRef>
-          <a:fillRef idx="3">
-            <a:schemeClr val="accent1"/>
-          </a:fillRef>
-          <a:effectRef idx="2">
-            <a:schemeClr val="accent1"/>
-          </a:effectRef>
-          <a:fontRef idx="minor">
-            <a:schemeClr val="lt1"/>
-          </a:fontRef>
-        </p:style>
-        <p:txBody>
-          <a:bodyPr rtlCol="0" anchor="ctr"/>
-          <a:lstStyle/>
-          <a:p>
-            <a:pPr algn="ctr"/>
-          </a:p>
-        </p:txBody>
-      </p:sp>
-      <p:sp>
-        <p:nvSpPr>
-          <p:cNvPr id="11" name="TextBox 10"/>
+          <p:cNvPr id="10" name="TextBox 9"/>
           <p:cNvSpPr txBox="1"/>
           <p:nvPr/>
         </p:nvSpPr>
         <p:spPr>
           <a:xfrm>
-            <a:off x="731520" y="6309360"/>
-            <a:ext cx="7315200" cy="365760"/>
+            <a:off x="731520" y="6217920"/>
+            <a:ext cx="7772400" cy="365760"/>
           </a:xfrm>
           <a:prstGeom prst="rect">
             <a:avLst/>
@@ -6791,28 +6714,28 @@
           <a:lstStyle/>
           <a:p>
             <a:pPr>
-              <a:defRPr sz="950" b="1">
-                <a:solidFill>
-                  <a:srgbClr val="A1A1AA"/>
-                </a:solidFill>
-              </a:defRPr>
-            </a:pPr>
-            <a:r>
-              <a:t>🎙️  EJECUCIÓN CONJUNTA EN VIVO</a:t>
-            </a:r>
-          </a:p>
-        </p:txBody>
-      </p:sp>
-      <p:sp>
-        <p:nvSpPr>
-          <p:cNvPr id="12" name="TextBox 11"/>
+              <a:defRPr sz="900">
+                <a:solidFill>
+                  <a:srgbClr val="A1A1AA"/>
+                </a:solidFill>
+              </a:defRPr>
+            </a:pPr>
+            <a:r>
+              <a:t>🎙️ EQUIPO 01 • DEMOSTRACIÓN OPERATIVA EN VIVO</a:t>
+            </a:r>
+          </a:p>
+        </p:txBody>
+      </p:sp>
+      <p:sp>
+        <p:nvSpPr>
+          <p:cNvPr id="11" name="TextBox 10"/>
           <p:cNvSpPr txBox="1"/>
           <p:nvPr/>
         </p:nvSpPr>
         <p:spPr>
           <a:xfrm>
-            <a:off x="10058400" y="6309360"/>
-            <a:ext cx="1371600" cy="365760"/>
+            <a:off x="10241280" y="6217920"/>
+            <a:ext cx="1188720" cy="365760"/>
           </a:xfrm>
           <a:prstGeom prst="rect">
             <a:avLst/>
@@ -6826,9 +6749,9 @@
           <a:lstStyle/>
           <a:p>
             <a:pPr algn="r">
-              <a:defRPr sz="1100" b="1">
-                <a:solidFill>
-                  <a:srgbClr val="FFFFFF"/>
+              <a:defRPr sz="900" b="1">
+                <a:solidFill>
+                  <a:srgbClr val="71717A"/>
                 </a:solidFill>
               </a:defRPr>
             </a:pPr>
@@ -6840,7 +6763,7 @@
       </p:sp>
       <p:sp>
         <p:nvSpPr>
-          <p:cNvPr id="13" name="Rounded Rectangle 12"/>
+          <p:cNvPr id="12" name="Rounded Rectangle 11"/>
           <p:cNvSpPr/>
           <p:nvPr/>
         </p:nvSpPr>
@@ -6885,14 +6808,14 @@
       </p:sp>
       <p:sp>
         <p:nvSpPr>
-          <p:cNvPr id="14" name="TextBox 13"/>
+          <p:cNvPr id="13" name="TextBox 12"/>
           <p:cNvSpPr txBox="1"/>
           <p:nvPr/>
         </p:nvSpPr>
         <p:spPr>
           <a:xfrm>
-            <a:off x="896112" y="2240279"/>
-            <a:ext cx="4882896" cy="3566160"/>
+            <a:off x="868680" y="2240279"/>
+            <a:ext cx="4937760" cy="3566160"/>
           </a:xfrm>
           <a:prstGeom prst="rect">
             <a:avLst/>
@@ -6906,7 +6829,7 @@
           <a:lstStyle/>
           <a:p>
             <a:pPr>
-              <a:defRPr sz="1100" b="1">
+              <a:defRPr sz="1200" b="1">
                 <a:solidFill>
                   <a:srgbClr val="FFFFFF"/>
                 </a:solidFill>
@@ -6918,93 +6841,114 @@
           </a:p>
           <a:p>
             <a:pPr>
-              <a:defRPr sz="900">
-                <a:solidFill>
-                  <a:srgbClr val="A1A1AA"/>
-                </a:solidFill>
-              </a:defRPr>
-            </a:pPr>
-            <a:r>
-              <a:t>▪  1. Lanzadores de 1 Clic:</a:t>
-            </a:r>
-          </a:p>
-          <a:p>
-            <a:pPr>
-              <a:defRPr sz="900">
-                <a:solidFill>
-                  <a:srgbClr val="A1A1AA"/>
-                </a:solidFill>
-              </a:defRPr>
-            </a:pPr>
-            <a:r>
-              <a:t>▪     • Iniciar Ecosistema Completo (iniciar_todo.bat)</a:t>
-            </a:r>
-          </a:p>
-          <a:p>
-            <a:pPr>
-              <a:defRPr sz="900">
-                <a:solidFill>
-                  <a:srgbClr val="A1A1AA"/>
-                </a:solidFill>
-              </a:defRPr>
-            </a:pPr>
-            <a:r>
-              <a:t>▪     • Iniciar PostgreSQL 15 en Docker (:5433)</a:t>
-            </a:r>
-          </a:p>
-          <a:p>
-            <a:pPr>
-              <a:defRPr sz="900">
-                <a:solidFill>
-                  <a:srgbClr val="A1A1AA"/>
-                </a:solidFill>
-              </a:defRPr>
-            </a:pPr>
-            <a:r>
-              <a:t>▪     • Iniciar Grafana (:13000) y Prometheus (:19090)</a:t>
-            </a:r>
-          </a:p>
-          <a:p>
-            <a:pPr>
-              <a:defRPr sz="900">
-                <a:solidFill>
-                  <a:srgbClr val="A1A1AA"/>
-                </a:solidFill>
-              </a:defRPr>
-            </a:pPr>
-            <a:r>
-              <a:t>▪     • Limpieza preventiva de puertos huérfanos</a:t>
-            </a:r>
-          </a:p>
-          <a:p>
-            <a:pPr>
-              <a:defRPr sz="900">
-                <a:solidFill>
-                  <a:srgbClr val="A1A1AA"/>
-                </a:solidFill>
-              </a:defRPr>
-            </a:pPr>
-            <a:r>
-              <a:t>▪  2. Health Check en Tiempo Real:</a:t>
-            </a:r>
-          </a:p>
-          <a:p>
-            <a:pPr>
-              <a:defRPr sz="900">
-                <a:solidFill>
-                  <a:srgbClr val="A1A1AA"/>
-                </a:solidFill>
-              </a:defRPr>
-            </a:pPr>
-            <a:r>
-              <a:t>▪     • Polling activo a 8 servicios (Eureka, Gateway, Config, Catalogo, Orden 1, Orden 2, Postgres, Grafana).</a:t>
-            </a:r>
-          </a:p>
-        </p:txBody>
-      </p:sp>
-      <p:sp>
-        <p:nvSpPr>
-          <p:cNvPr id="15" name="Rounded Rectangle 14"/>
+              <a:spcBef>
+                <a:spcPts val="300"/>
+              </a:spcBef>
+              <a:defRPr sz="900">
+                <a:solidFill>
+                  <a:srgbClr val="A1A1AA"/>
+                </a:solidFill>
+              </a:defRPr>
+            </a:pPr>
+            <a:r>
+              <a:t>• 1. Lanzadores Automatizados:</a:t>
+            </a:r>
+          </a:p>
+          <a:p>
+            <a:pPr>
+              <a:spcBef>
+                <a:spcPts val="300"/>
+              </a:spcBef>
+              <a:defRPr sz="900">
+                <a:solidFill>
+                  <a:srgbClr val="A1A1AA"/>
+                </a:solidFill>
+              </a:defRPr>
+            </a:pPr>
+            <a:r>
+              <a:t>•    • Iniciar Ecosistema Completo (iniciar_todo.bat)</a:t>
+            </a:r>
+          </a:p>
+          <a:p>
+            <a:pPr>
+              <a:spcBef>
+                <a:spcPts val="300"/>
+              </a:spcBef>
+              <a:defRPr sz="900">
+                <a:solidFill>
+                  <a:srgbClr val="A1A1AA"/>
+                </a:solidFill>
+              </a:defRPr>
+            </a:pPr>
+            <a:r>
+              <a:t>•    • Iniciar PostgreSQL 15 en Docker (:5433)</a:t>
+            </a:r>
+          </a:p>
+          <a:p>
+            <a:pPr>
+              <a:spcBef>
+                <a:spcPts val="300"/>
+              </a:spcBef>
+              <a:defRPr sz="900">
+                <a:solidFill>
+                  <a:srgbClr val="A1A1AA"/>
+                </a:solidFill>
+              </a:defRPr>
+            </a:pPr>
+            <a:r>
+              <a:t>•    • Iniciar Grafana (:13000) y Prometheus (:19090)</a:t>
+            </a:r>
+          </a:p>
+          <a:p>
+            <a:pPr>
+              <a:spcBef>
+                <a:spcPts val="300"/>
+              </a:spcBef>
+              <a:defRPr sz="900">
+                <a:solidFill>
+                  <a:srgbClr val="A1A1AA"/>
+                </a:solidFill>
+              </a:defRPr>
+            </a:pPr>
+            <a:r>
+              <a:t>•    • Limpieza preventiva de puertos huérfanos</a:t>
+            </a:r>
+          </a:p>
+          <a:p>
+            <a:pPr>
+              <a:spcBef>
+                <a:spcPts val="300"/>
+              </a:spcBef>
+              <a:defRPr sz="900">
+                <a:solidFill>
+                  <a:srgbClr val="A1A1AA"/>
+                </a:solidFill>
+              </a:defRPr>
+            </a:pPr>
+            <a:r>
+              <a:t>• 2. Monitoreo de Telemetría Activa:</a:t>
+            </a:r>
+          </a:p>
+          <a:p>
+            <a:pPr>
+              <a:spcBef>
+                <a:spcPts val="300"/>
+              </a:spcBef>
+              <a:defRPr sz="900">
+                <a:solidFill>
+                  <a:srgbClr val="A1A1AA"/>
+                </a:solidFill>
+              </a:defRPr>
+            </a:pPr>
+            <a:r>
+              <a:t>•    • Sondeo continuo de 8 servicios (Eureka, Gateway, Config, Catalogo, Orden 1, Orden 2, Postgres, Grafana).</a:t>
+            </a:r>
+          </a:p>
+        </p:txBody>
+      </p:sp>
+      <p:sp>
+        <p:nvSpPr>
+          <p:cNvPr id="14" name="Rounded Rectangle 13"/>
           <p:cNvSpPr/>
           <p:nvPr/>
         </p:nvSpPr>
@@ -7049,14 +6993,14 @@
       </p:sp>
       <p:sp>
         <p:nvSpPr>
-          <p:cNvPr id="16" name="TextBox 15"/>
+          <p:cNvPr id="15" name="TextBox 14"/>
           <p:cNvSpPr txBox="1"/>
           <p:nvPr/>
         </p:nvSpPr>
         <p:spPr>
           <a:xfrm>
-            <a:off x="6382512" y="2240279"/>
-            <a:ext cx="4882896" cy="3566160"/>
+            <a:off x="6355080" y="2240279"/>
+            <a:ext cx="4937760" cy="3566160"/>
           </a:xfrm>
           <a:prstGeom prst="rect">
             <a:avLst/>
@@ -7070,86 +7014,104 @@
           <a:lstStyle/>
           <a:p>
             <a:pPr>
-              <a:defRPr sz="1100" b="1">
+              <a:defRPr sz="1200" b="1">
                 <a:solidFill>
                   <a:srgbClr val="FFFFFF"/>
                 </a:solidFill>
               </a:defRPr>
             </a:pPr>
             <a:r>
-              <a:t>🧪 Suite de Pruebas Oficiales</a:t>
-            </a:r>
-          </a:p>
-          <a:p>
-            <a:pPr>
-              <a:defRPr sz="900">
-                <a:solidFill>
-                  <a:srgbClr val="A1A1AA"/>
-                </a:solidFill>
-              </a:defRPr>
-            </a:pPr>
-            <a:r>
-              <a:t>▪  1. Test 201 Created: Emite orden con IGV 18% persistida en BD.</a:t>
-            </a:r>
-          </a:p>
-          <a:p>
-            <a:pPr>
-              <a:defRPr sz="900">
-                <a:solidFill>
-                  <a:srgbClr val="A1A1AA"/>
-                </a:solidFill>
-              </a:defRPr>
-            </a:pPr>
-            <a:r>
-              <a:t>▪  2. Test 400 Bad Request: Valida rechazo por cliente nulo.</a:t>
-            </a:r>
-          </a:p>
-          <a:p>
-            <a:pPr>
-              <a:defRPr sz="900">
-                <a:solidFill>
-                  <a:srgbClr val="A1A1AA"/>
-                </a:solidFill>
-              </a:defRPr>
-            </a:pPr>
-            <a:r>
-              <a:t>▪  3. Test 404 Not Found: Consulta ID inexistente (99999).</a:t>
-            </a:r>
-          </a:p>
-          <a:p>
-            <a:pPr>
-              <a:defRPr sz="900">
-                <a:solidFill>
-                  <a:srgbClr val="A1A1AA"/>
-                </a:solidFill>
-              </a:defRPr>
-            </a:pPr>
-            <a:r>
-              <a:t>▪  4. Test Balanceo: Envía 4 peticiones comprobando Round-Robin.</a:t>
-            </a:r>
-          </a:p>
-          <a:p>
-            <a:pPr>
-              <a:defRPr sz="900">
-                <a:solidFill>
-                  <a:srgbClr val="A1A1AA"/>
-                </a:solidFill>
-              </a:defRPr>
-            </a:pPr>
-            <a:r>
-              <a:t>▪  5. Kill :8082: Detiene instancia forzosamente demostrando tolerancia a fallos en vivo sin corte de servicio.</a:t>
-            </a:r>
-          </a:p>
-          <a:p>
-            <a:pPr>
-              <a:defRPr sz="900">
-                <a:solidFill>
-                  <a:srgbClr val="A1A1AA"/>
-                </a:solidFill>
-              </a:defRPr>
-            </a:pPr>
-            <a:r>
-              <a:t>▪  Todo ejecutable directamente desde presentacion.html.</a:t>
+              <a:t>🧪 Suite de Pruebas Automatizadas</a:t>
+            </a:r>
+          </a:p>
+          <a:p>
+            <a:pPr>
+              <a:spcBef>
+                <a:spcPts val="300"/>
+              </a:spcBef>
+              <a:defRPr sz="900">
+                <a:solidFill>
+                  <a:srgbClr val="A1A1AA"/>
+                </a:solidFill>
+              </a:defRPr>
+            </a:pPr>
+            <a:r>
+              <a:t>• 1. Test 201 Created: Emite orden con IGV 18% persistida en BD.</a:t>
+            </a:r>
+          </a:p>
+          <a:p>
+            <a:pPr>
+              <a:spcBef>
+                <a:spcPts val="300"/>
+              </a:spcBef>
+              <a:defRPr sz="900">
+                <a:solidFill>
+                  <a:srgbClr val="A1A1AA"/>
+                </a:solidFill>
+              </a:defRPr>
+            </a:pPr>
+            <a:r>
+              <a:t>• 2. Test 400 Bad Request: Valida rechazo por payload nulo o inválido.</a:t>
+            </a:r>
+          </a:p>
+          <a:p>
+            <a:pPr>
+              <a:spcBef>
+                <a:spcPts val="300"/>
+              </a:spcBef>
+              <a:defRPr sz="900">
+                <a:solidFill>
+                  <a:srgbClr val="A1A1AA"/>
+                </a:solidFill>
+              </a:defRPr>
+            </a:pPr>
+            <a:r>
+              <a:t>• 3. Test 404 Not Found: Control de excepción ante ID inexistente.</a:t>
+            </a:r>
+          </a:p>
+          <a:p>
+            <a:pPr>
+              <a:spcBef>
+                <a:spcPts val="300"/>
+              </a:spcBef>
+              <a:defRPr sz="900">
+                <a:solidFill>
+                  <a:srgbClr val="A1A1AA"/>
+                </a:solidFill>
+              </a:defRPr>
+            </a:pPr>
+            <a:r>
+              <a:t>• 4. Test Balanceo: Envía 4 peticiones comprobando Round-Robin.</a:t>
+            </a:r>
+          </a:p>
+          <a:p>
+            <a:pPr>
+              <a:spcBef>
+                <a:spcPts val="300"/>
+              </a:spcBef>
+              <a:defRPr sz="900">
+                <a:solidFill>
+                  <a:srgbClr val="A1A1AA"/>
+                </a:solidFill>
+              </a:defRPr>
+            </a:pPr>
+            <a:r>
+              <a:t>• 5. Simulación de Falla: Detiene instancia forzosamente comprobando tolerancia a fallos sin corte de servicio.</a:t>
+            </a:r>
+          </a:p>
+          <a:p>
+            <a:pPr>
+              <a:spcBef>
+                <a:spcPts val="300"/>
+              </a:spcBef>
+              <a:defRPr sz="900">
+                <a:solidFill>
+                  <a:srgbClr val="A1A1AA"/>
+                </a:solidFill>
+              </a:defRPr>
+            </a:pPr>
+            <a:r>
+              <a:t>• Operable en tiempo real desde la presentación web.</a:t>
             </a:r>
           </a:p>
         </p:txBody>
@@ -7401,8 +7363,8 @@
         </p:nvSpPr>
         <p:spPr>
           <a:xfrm>
-            <a:off x="8412480" y="384048"/>
-            <a:ext cx="3017520" cy="384048"/>
+            <a:off x="7772400" y="384048"/>
+            <a:ext cx="3657600" cy="384048"/>
           </a:xfrm>
           <a:prstGeom prst="roundRect">
             <a:avLst/>
@@ -7435,14 +7397,14 @@
           <a:lstStyle/>
           <a:p>
             <a:pPr algn="ctr">
-              <a:defRPr sz="900" b="1">
-                <a:solidFill>
-                  <a:srgbClr val="FFFFFF"/>
-                </a:solidFill>
-              </a:defRPr>
-            </a:pPr>
-            <a:r>
-              <a:t>ROADMAP UNIDAD I</a:t>
+              <a:defRPr sz="800" b="1">
+                <a:solidFill>
+                  <a:srgbClr val="A1A1AA"/>
+                </a:solidFill>
+              </a:defRPr>
+            </a:pPr>
+            <a:r>
+              <a:t>ROADMAP DE ARQUITECTURA</a:t>
             </a:r>
           </a:p>
         </p:txBody>
@@ -7455,7 +7417,7 @@
         </p:nvSpPr>
         <p:spPr>
           <a:xfrm>
-            <a:off x="731520" y="1005840"/>
+            <a:off x="731520" y="1051560"/>
             <a:ext cx="10698480" cy="868680"/>
           </a:xfrm>
           <a:prstGeom prst="rect">
@@ -7470,26 +7432,26 @@
           <a:lstStyle/>
           <a:p>
             <a:pPr>
-              <a:defRPr sz="2000" b="1">
+              <a:defRPr sz="1900" b="1">
                 <a:solidFill>
                   <a:srgbClr val="FFFFFF"/>
                 </a:solidFill>
               </a:defRPr>
             </a:pPr>
             <a:r>
-              <a:t>EVOLUCIÓN ARQUITECTURAL DEL SISTEMA BASE (S1 A S5)</a:t>
-            </a:r>
-          </a:p>
-          <a:p>
-            <a:pPr>
-              <a:defRPr sz="1100">
-                <a:solidFill>
-                  <a:srgbClr val="A1A1AA"/>
-                </a:solidFill>
-              </a:defRPr>
-            </a:pPr>
-            <a:r>
-              <a:t>Lo que se construyó y acumuló progresivamente en el producto de Unidad I (Tabla 1)</a:t>
+              <a:t>EVOLUCIÓN Y MADURACIÓN DEL ECOSISTEMA DISTRIBUIDO</a:t>
+            </a:r>
+          </a:p>
+          <a:p>
+            <a:pPr>
+              <a:defRPr sz="1000">
+                <a:solidFill>
+                  <a:srgbClr val="A1A1AA"/>
+                </a:solidFill>
+              </a:defRPr>
+            </a:pPr>
+            <a:r>
+              <a:t>Trayectoria sistemática desde componentes aislados hasta la orquestación perimetral con balanceo reactivo</a:t>
             </a:r>
           </a:p>
         </p:txBody>
@@ -7502,7 +7464,7 @@
         </p:nvSpPr>
         <p:spPr>
           <a:xfrm>
-            <a:off x="731520" y="1874519"/>
+            <a:off x="731520" y="1965960"/>
             <a:ext cx="10698480" cy="18288"/>
           </a:xfrm>
           <a:prstGeom prst="rect">
@@ -7539,57 +7501,14 @@
       </p:sp>
       <p:sp>
         <p:nvSpPr>
-          <p:cNvPr id="10" name="Rounded Rectangle 9"/>
-          <p:cNvSpPr/>
-          <p:nvPr/>
-        </p:nvSpPr>
-        <p:spPr>
-          <a:xfrm>
-            <a:off x="731520" y="1856231"/>
-            <a:ext cx="1097280" cy="54864"/>
-          </a:xfrm>
-          <a:prstGeom prst="roundRect">
-            <a:avLst/>
-          </a:prstGeom>
-          <a:solidFill>
-            <a:srgbClr val="FFFFFF"/>
-          </a:solidFill>
-          <a:ln>
-            <a:noFill/>
-          </a:ln>
-        </p:spPr>
-        <p:style>
-          <a:lnRef idx="1">
-            <a:schemeClr val="accent1"/>
-          </a:lnRef>
-          <a:fillRef idx="3">
-            <a:schemeClr val="accent1"/>
-          </a:fillRef>
-          <a:effectRef idx="2">
-            <a:schemeClr val="accent1"/>
-          </a:effectRef>
-          <a:fontRef idx="minor">
-            <a:schemeClr val="lt1"/>
-          </a:fontRef>
-        </p:style>
-        <p:txBody>
-          <a:bodyPr rtlCol="0" anchor="ctr"/>
-          <a:lstStyle/>
-          <a:p>
-            <a:pPr algn="ctr"/>
-          </a:p>
-        </p:txBody>
-      </p:sp>
-      <p:sp>
-        <p:nvSpPr>
-          <p:cNvPr id="11" name="TextBox 10"/>
+          <p:cNvPr id="10" name="TextBox 9"/>
           <p:cNvSpPr txBox="1"/>
           <p:nvPr/>
         </p:nvSpPr>
         <p:spPr>
           <a:xfrm>
-            <a:off x="731520" y="6309360"/>
-            <a:ext cx="7315200" cy="365760"/>
+            <a:off x="731520" y="6217920"/>
+            <a:ext cx="7772400" cy="365760"/>
           </a:xfrm>
           <a:prstGeom prst="rect">
             <a:avLst/>
@@ -7603,28 +7522,28 @@
           <a:lstStyle/>
           <a:p>
             <a:pPr>
-              <a:defRPr sz="950" b="1">
-                <a:solidFill>
-                  <a:srgbClr val="A1A1AA"/>
-                </a:solidFill>
-              </a:defRPr>
-            </a:pPr>
-            <a:r>
-              <a:t>🎙️  HABLA: ELICEO PARILLO (MIN 0-4)</a:t>
-            </a:r>
-          </a:p>
-        </p:txBody>
-      </p:sp>
-      <p:sp>
-        <p:nvSpPr>
-          <p:cNvPr id="12" name="TextBox 11"/>
+              <a:defRPr sz="900">
+                <a:solidFill>
+                  <a:srgbClr val="A1A1AA"/>
+                </a:solidFill>
+              </a:defRPr>
+            </a:pPr>
+            <a:r>
+              <a:t>🎙️ ELICEO PARILLO MOSTAJO • PONENCIA TÉCNICA</a:t>
+            </a:r>
+          </a:p>
+        </p:txBody>
+      </p:sp>
+      <p:sp>
+        <p:nvSpPr>
+          <p:cNvPr id="11" name="TextBox 10"/>
           <p:cNvSpPr txBox="1"/>
           <p:nvPr/>
         </p:nvSpPr>
         <p:spPr>
           <a:xfrm>
-            <a:off x="10058400" y="6309360"/>
-            <a:ext cx="1371600" cy="365760"/>
+            <a:off x="10241280" y="6217920"/>
+            <a:ext cx="1188720" cy="365760"/>
           </a:xfrm>
           <a:prstGeom prst="rect">
             <a:avLst/>
@@ -7638,9 +7557,9 @@
           <a:lstStyle/>
           <a:p>
             <a:pPr algn="r">
-              <a:defRPr sz="1100" b="1">
-                <a:solidFill>
-                  <a:srgbClr val="FFFFFF"/>
+              <a:defRPr sz="900" b="1">
+                <a:solidFill>
+                  <a:srgbClr val="71717A"/>
                 </a:solidFill>
               </a:defRPr>
             </a:pPr>
@@ -7652,7 +7571,7 @@
       </p:sp>
       <p:sp>
         <p:nvSpPr>
-          <p:cNvPr id="13" name="Rounded Rectangle 12"/>
+          <p:cNvPr id="12" name="Rounded Rectangle 11"/>
           <p:cNvSpPr/>
           <p:nvPr/>
         </p:nvSpPr>
@@ -7697,14 +7616,14 @@
       </p:sp>
       <p:sp>
         <p:nvSpPr>
-          <p:cNvPr id="14" name="TextBox 13"/>
+          <p:cNvPr id="13" name="TextBox 12"/>
           <p:cNvSpPr txBox="1"/>
           <p:nvPr/>
         </p:nvSpPr>
         <p:spPr>
           <a:xfrm>
-            <a:off x="896112" y="2240279"/>
-            <a:ext cx="1700784" cy="3566160"/>
+            <a:off x="868680" y="2240279"/>
+            <a:ext cx="1755648" cy="3566160"/>
           </a:xfrm>
           <a:prstGeom prst="rect">
             <a:avLst/>
@@ -7718,57 +7637,66 @@
           <a:lstStyle/>
           <a:p>
             <a:pPr>
-              <a:defRPr sz="1100" b="1">
+              <a:defRPr sz="1200" b="1">
                 <a:solidFill>
                   <a:srgbClr val="FFFFFF"/>
                 </a:solidFill>
               </a:defRPr>
             </a:pPr>
             <a:r>
-              <a:t>S01. Servicio Base</a:t>
-            </a:r>
-          </a:p>
-          <a:p>
-            <a:pPr>
-              <a:defRPr sz="900">
-                <a:solidFill>
-                  <a:srgbClr val="A1A1AA"/>
-                </a:solidFill>
-              </a:defRPr>
-            </a:pPr>
-            <a:r>
-              <a:t>▪  CRUD REST completo en catalogo-ms y orden-ms.</a:t>
-            </a:r>
-          </a:p>
-          <a:p>
-            <a:pPr>
-              <a:defRPr sz="900">
-                <a:solidFill>
-                  <a:srgbClr val="A1A1AA"/>
-                </a:solidFill>
-              </a:defRPr>
-            </a:pPr>
-            <a:r>
-              <a:t>▪  Persistencia en PostgreSQL :5433.</a:t>
-            </a:r>
-          </a:p>
-          <a:p>
-            <a:pPr>
-              <a:defRPr sz="900">
-                <a:solidFill>
-                  <a:srgbClr val="A1A1AA"/>
-                </a:solidFill>
-              </a:defRPr>
-            </a:pPr>
-            <a:r>
-              <a:t>▪  Swagger, Actuator y multi-instancia.</a:t>
-            </a:r>
-          </a:p>
-        </p:txBody>
-      </p:sp>
-      <p:sp>
-        <p:nvSpPr>
-          <p:cNvPr id="15" name="Rounded Rectangle 14"/>
+              <a:t>S01. Dominio Base</a:t>
+            </a:r>
+          </a:p>
+          <a:p>
+            <a:pPr>
+              <a:spcBef>
+                <a:spcPts val="300"/>
+              </a:spcBef>
+              <a:defRPr sz="900">
+                <a:solidFill>
+                  <a:srgbClr val="A1A1AA"/>
+                </a:solidFill>
+              </a:defRPr>
+            </a:pPr>
+            <a:r>
+              <a:t>• CRUD REST completo en catalogo-ms y orden-ms.</a:t>
+            </a:r>
+          </a:p>
+          <a:p>
+            <a:pPr>
+              <a:spcBef>
+                <a:spcPts val="300"/>
+              </a:spcBef>
+              <a:defRPr sz="900">
+                <a:solidFill>
+                  <a:srgbClr val="A1A1AA"/>
+                </a:solidFill>
+              </a:defRPr>
+            </a:pPr>
+            <a:r>
+              <a:t>• Persistencia en PostgreSQL :5433.</a:t>
+            </a:r>
+          </a:p>
+          <a:p>
+            <a:pPr>
+              <a:spcBef>
+                <a:spcPts val="300"/>
+              </a:spcBef>
+              <a:defRPr sz="900">
+                <a:solidFill>
+                  <a:srgbClr val="A1A1AA"/>
+                </a:solidFill>
+              </a:defRPr>
+            </a:pPr>
+            <a:r>
+              <a:t>• Contratos DTO y validaciones normalizadas.</a:t>
+            </a:r>
+          </a:p>
+        </p:txBody>
+      </p:sp>
+      <p:sp>
+        <p:nvSpPr>
+          <p:cNvPr id="14" name="Rounded Rectangle 13"/>
           <p:cNvSpPr/>
           <p:nvPr/>
         </p:nvSpPr>
@@ -7813,14 +7741,14 @@
       </p:sp>
       <p:sp>
         <p:nvSpPr>
-          <p:cNvPr id="16" name="TextBox 15"/>
+          <p:cNvPr id="15" name="TextBox 14"/>
           <p:cNvSpPr txBox="1"/>
           <p:nvPr/>
         </p:nvSpPr>
         <p:spPr>
           <a:xfrm>
-            <a:off x="3072384" y="2240279"/>
-            <a:ext cx="1700784" cy="3566160"/>
+            <a:off x="3044951" y="2240279"/>
+            <a:ext cx="1755648" cy="3566160"/>
           </a:xfrm>
           <a:prstGeom prst="rect">
             <a:avLst/>
@@ -7834,7 +7762,7 @@
           <a:lstStyle/>
           <a:p>
             <a:pPr>
-              <a:defRPr sz="1100" b="1">
+              <a:defRPr sz="1200" b="1">
                 <a:solidFill>
                   <a:srgbClr val="FFFFFF"/>
                 </a:solidFill>
@@ -7846,45 +7774,54 @@
           </a:p>
           <a:p>
             <a:pPr>
-              <a:defRPr sz="900">
-                <a:solidFill>
-                  <a:srgbClr val="A1A1AA"/>
-                </a:solidFill>
-              </a:defRPr>
-            </a:pPr>
-            <a:r>
-              <a:t>▪  Spring Cloud Config en puerto :8888.</a:t>
-            </a:r>
-          </a:p>
-          <a:p>
-            <a:pPr>
-              <a:defRPr sz="900">
-                <a:solidFill>
-                  <a:srgbClr val="A1A1AA"/>
-                </a:solidFill>
-              </a:defRPr>
-            </a:pPr>
-            <a:r>
-              <a:t>▪  Repositorio config-repo externo.</a:t>
-            </a:r>
-          </a:p>
-          <a:p>
-            <a:pPr>
-              <a:defRPr sz="900">
-                <a:solidFill>
-                  <a:srgbClr val="A1A1AA"/>
-                </a:solidFill>
-              </a:defRPr>
-            </a:pPr>
-            <a:r>
-              <a:t>▪  Factor III: Perfiles dev y prod sin secretos.</a:t>
-            </a:r>
-          </a:p>
-        </p:txBody>
-      </p:sp>
-      <p:sp>
-        <p:nvSpPr>
-          <p:cNvPr id="17" name="Rounded Rectangle 16"/>
+              <a:spcBef>
+                <a:spcPts val="300"/>
+              </a:spcBef>
+              <a:defRPr sz="900">
+                <a:solidFill>
+                  <a:srgbClr val="A1A1AA"/>
+                </a:solidFill>
+              </a:defRPr>
+            </a:pPr>
+            <a:r>
+              <a:t>• Spring Cloud Config en puerto :8888.</a:t>
+            </a:r>
+          </a:p>
+          <a:p>
+            <a:pPr>
+              <a:spcBef>
+                <a:spcPts val="300"/>
+              </a:spcBef>
+              <a:defRPr sz="900">
+                <a:solidFill>
+                  <a:srgbClr val="A1A1AA"/>
+                </a:solidFill>
+              </a:defRPr>
+            </a:pPr>
+            <a:r>
+              <a:t>• Repositorio config-repo externo versionado.</a:t>
+            </a:r>
+          </a:p>
+          <a:p>
+            <a:pPr>
+              <a:spcBef>
+                <a:spcPts val="300"/>
+              </a:spcBef>
+              <a:defRPr sz="900">
+                <a:solidFill>
+                  <a:srgbClr val="A1A1AA"/>
+                </a:solidFill>
+              </a:defRPr>
+            </a:pPr>
+            <a:r>
+              <a:t>• Factor III: Perfiles dev y prod sin secretos.</a:t>
+            </a:r>
+          </a:p>
+        </p:txBody>
+      </p:sp>
+      <p:sp>
+        <p:nvSpPr>
+          <p:cNvPr id="16" name="Rounded Rectangle 15"/>
           <p:cNvSpPr/>
           <p:nvPr/>
         </p:nvSpPr>
@@ -7929,14 +7866,14 @@
       </p:sp>
       <p:sp>
         <p:nvSpPr>
-          <p:cNvPr id="18" name="TextBox 17"/>
+          <p:cNvPr id="17" name="TextBox 16"/>
           <p:cNvSpPr txBox="1"/>
           <p:nvPr/>
         </p:nvSpPr>
         <p:spPr>
           <a:xfrm>
-            <a:off x="5248655" y="2240279"/>
-            <a:ext cx="1700784" cy="3566160"/>
+            <a:off x="5221224" y="2240279"/>
+            <a:ext cx="1755648" cy="3566160"/>
           </a:xfrm>
           <a:prstGeom prst="rect">
             <a:avLst/>
@@ -7950,7 +7887,7 @@
           <a:lstStyle/>
           <a:p>
             <a:pPr>
-              <a:defRPr sz="1100" b="1">
+              <a:defRPr sz="1200" b="1">
                 <a:solidFill>
                   <a:srgbClr val="FFFFFF"/>
                 </a:solidFill>
@@ -7962,45 +7899,54 @@
           </a:p>
           <a:p>
             <a:pPr>
-              <a:defRPr sz="900">
-                <a:solidFill>
-                  <a:srgbClr val="A1A1AA"/>
-                </a:solidFill>
-              </a:defRPr>
-            </a:pPr>
-            <a:r>
-              <a:t>▪  Registro dinámico en puerto :8761.</a:t>
-            </a:r>
-          </a:p>
-          <a:p>
-            <a:pPr>
-              <a:defRPr sz="900">
-                <a:solidFill>
-                  <a:srgbClr val="A1A1AA"/>
-                </a:solidFill>
-              </a:defRPr>
-            </a:pPr>
-            <a:r>
-              <a:t>▪  Latidos heartbeats cada 30 segundos.</a:t>
-            </a:r>
-          </a:p>
-          <a:p>
-            <a:pPr>
-              <a:defRPr sz="900">
-                <a:solidFill>
-                  <a:srgbClr val="A1A1AA"/>
-                </a:solidFill>
-              </a:defRPr>
-            </a:pPr>
-            <a:r>
-              <a:t>▪  Observabilidad Prometheus y Grafana.</a:t>
-            </a:r>
-          </a:p>
-        </p:txBody>
-      </p:sp>
-      <p:sp>
-        <p:nvSpPr>
-          <p:cNvPr id="19" name="Rounded Rectangle 18"/>
+              <a:spcBef>
+                <a:spcPts val="300"/>
+              </a:spcBef>
+              <a:defRPr sz="900">
+                <a:solidFill>
+                  <a:srgbClr val="A1A1AA"/>
+                </a:solidFill>
+              </a:defRPr>
+            </a:pPr>
+            <a:r>
+              <a:t>• Registro dinámico en puerto :8761.</a:t>
+            </a:r>
+          </a:p>
+          <a:p>
+            <a:pPr>
+              <a:spcBef>
+                <a:spcPts val="300"/>
+              </a:spcBef>
+              <a:defRPr sz="900">
+                <a:solidFill>
+                  <a:srgbClr val="A1A1AA"/>
+                </a:solidFill>
+              </a:defRPr>
+            </a:pPr>
+            <a:r>
+              <a:t>• Latidos heartbeats cada 30 segundos.</a:t>
+            </a:r>
+          </a:p>
+          <a:p>
+            <a:pPr>
+              <a:spcBef>
+                <a:spcPts val="300"/>
+              </a:spcBef>
+              <a:defRPr sz="900">
+                <a:solidFill>
+                  <a:srgbClr val="A1A1AA"/>
+                </a:solidFill>
+              </a:defRPr>
+            </a:pPr>
+            <a:r>
+              <a:t>• Observabilidad Prometheus y Grafana.</a:t>
+            </a:r>
+          </a:p>
+        </p:txBody>
+      </p:sp>
+      <p:sp>
+        <p:nvSpPr>
+          <p:cNvPr id="18" name="Rounded Rectangle 17"/>
           <p:cNvSpPr/>
           <p:nvPr/>
         </p:nvSpPr>
@@ -8045,14 +7991,14 @@
       </p:sp>
       <p:sp>
         <p:nvSpPr>
-          <p:cNvPr id="20" name="TextBox 19"/>
+          <p:cNvPr id="19" name="TextBox 18"/>
           <p:cNvSpPr txBox="1"/>
           <p:nvPr/>
         </p:nvSpPr>
         <p:spPr>
           <a:xfrm>
-            <a:off x="7424927" y="2240279"/>
-            <a:ext cx="1700784" cy="3566160"/>
+            <a:off x="7397496" y="2240279"/>
+            <a:ext cx="1755648" cy="3566160"/>
           </a:xfrm>
           <a:prstGeom prst="rect">
             <a:avLst/>
@@ -8066,7 +8012,7 @@
           <a:lstStyle/>
           <a:p>
             <a:pPr>
-              <a:defRPr sz="1100" b="1">
+              <a:defRPr sz="1200" b="1">
                 <a:solidFill>
                   <a:srgbClr val="FFFFFF"/>
                 </a:solidFill>
@@ -8078,45 +8024,54 @@
           </a:p>
           <a:p>
             <a:pPr>
-              <a:defRPr sz="900">
-                <a:solidFill>
-                  <a:srgbClr val="A1A1AA"/>
-                </a:solidFill>
-              </a:defRPr>
-            </a:pPr>
-            <a:r>
-              <a:t>▪  Gateway reactivo Netty en :18080.</a:t>
-            </a:r>
-          </a:p>
-          <a:p>
-            <a:pPr>
-              <a:defRPr sz="900">
-                <a:solidFill>
-                  <a:srgbClr val="A1A1AA"/>
-                </a:solidFill>
-              </a:defRPr>
-            </a:pPr>
-            <a:r>
-              <a:t>▪  Resolución de rutas lb:// dinámicas.</a:t>
-            </a:r>
-          </a:p>
-          <a:p>
-            <a:pPr>
-              <a:defRPr sz="900">
-                <a:solidFill>
-                  <a:srgbClr val="A1A1AA"/>
-                </a:solidFill>
-              </a:defRPr>
-            </a:pPr>
-            <a:r>
-              <a:t>▪  Balanceo Round-Robin verificado.</a:t>
-            </a:r>
-          </a:p>
-        </p:txBody>
-      </p:sp>
-      <p:sp>
-        <p:nvSpPr>
-          <p:cNvPr id="21" name="Rounded Rectangle 20"/>
+              <a:spcBef>
+                <a:spcPts val="300"/>
+              </a:spcBef>
+              <a:defRPr sz="900">
+                <a:solidFill>
+                  <a:srgbClr val="A1A1AA"/>
+                </a:solidFill>
+              </a:defRPr>
+            </a:pPr>
+            <a:r>
+              <a:t>• Gateway reactivo Netty en :18080.</a:t>
+            </a:r>
+          </a:p>
+          <a:p>
+            <a:pPr>
+              <a:spcBef>
+                <a:spcPts val="300"/>
+              </a:spcBef>
+              <a:defRPr sz="900">
+                <a:solidFill>
+                  <a:srgbClr val="A1A1AA"/>
+                </a:solidFill>
+              </a:defRPr>
+            </a:pPr>
+            <a:r>
+              <a:t>• Resolución de rutas lb:// dinámicas.</a:t>
+            </a:r>
+          </a:p>
+          <a:p>
+            <a:pPr>
+              <a:spcBef>
+                <a:spcPts val="300"/>
+              </a:spcBef>
+              <a:defRPr sz="900">
+                <a:solidFill>
+                  <a:srgbClr val="A1A1AA"/>
+                </a:solidFill>
+              </a:defRPr>
+            </a:pPr>
+            <a:r>
+              <a:t>• Balanceo Round-Robin verificado.</a:t>
+            </a:r>
+          </a:p>
+        </p:txBody>
+      </p:sp>
+      <p:sp>
+        <p:nvSpPr>
+          <p:cNvPr id="20" name="Rounded Rectangle 19"/>
           <p:cNvSpPr/>
           <p:nvPr/>
         </p:nvSpPr>
@@ -8161,14 +8116,14 @@
       </p:sp>
       <p:sp>
         <p:nvSpPr>
-          <p:cNvPr id="22" name="TextBox 21"/>
+          <p:cNvPr id="21" name="TextBox 20"/>
           <p:cNvSpPr txBox="1"/>
           <p:nvPr/>
         </p:nvSpPr>
         <p:spPr>
           <a:xfrm>
-            <a:off x="9601200" y="2240279"/>
-            <a:ext cx="1700784" cy="3566160"/>
+            <a:off x="9573768" y="2240279"/>
+            <a:ext cx="1755648" cy="3566160"/>
           </a:xfrm>
           <a:prstGeom prst="rect">
             <a:avLst/>
@@ -8182,50 +8137,59 @@
           <a:lstStyle/>
           <a:p>
             <a:pPr>
-              <a:defRPr sz="1100" b="1">
+              <a:defRPr sz="1200" b="1">
                 <a:solidFill>
                   <a:srgbClr val="FFFFFF"/>
                 </a:solidFill>
               </a:defRPr>
             </a:pPr>
             <a:r>
-              <a:t>S05. Ensamblaje</a:t>
-            </a:r>
-          </a:p>
-          <a:p>
-            <a:pPr>
-              <a:defRPr sz="900">
-                <a:solidFill>
-                  <a:srgbClr val="A1A1AA"/>
-                </a:solidFill>
-              </a:defRPr>
-            </a:pPr>
-            <a:r>
-              <a:t>▪  Ecosistema 100% ensamblado.</a:t>
-            </a:r>
-          </a:p>
-          <a:p>
-            <a:pPr>
-              <a:defRPr sz="900">
-                <a:solidFill>
-                  <a:srgbClr val="A1A1AA"/>
-                </a:solidFill>
-              </a:defRPr>
-            </a:pPr>
-            <a:r>
-              <a:t>▪  Cero puertos internos expuestos.</a:t>
-            </a:r>
-          </a:p>
-          <a:p>
-            <a:pPr>
-              <a:defRPr sz="900">
-                <a:solidFill>
-                  <a:srgbClr val="A1A1AA"/>
-                </a:solidFill>
-              </a:defRPr>
-            </a:pPr>
-            <a:r>
-              <a:t>▪  Calificación formal: 20/20 Nivel A.</a:t>
+              <a:t>S05. Ensamblaje Total</a:t>
+            </a:r>
+          </a:p>
+          <a:p>
+            <a:pPr>
+              <a:spcBef>
+                <a:spcPts val="300"/>
+              </a:spcBef>
+              <a:defRPr sz="900">
+                <a:solidFill>
+                  <a:srgbClr val="A1A1AA"/>
+                </a:solidFill>
+              </a:defRPr>
+            </a:pPr>
+            <a:r>
+              <a:t>• Ecosistema 100% ensamblado.</a:t>
+            </a:r>
+          </a:p>
+          <a:p>
+            <a:pPr>
+              <a:spcBef>
+                <a:spcPts val="300"/>
+              </a:spcBef>
+              <a:defRPr sz="900">
+                <a:solidFill>
+                  <a:srgbClr val="A1A1AA"/>
+                </a:solidFill>
+              </a:defRPr>
+            </a:pPr>
+            <a:r>
+              <a:t>• Aislamiento total de puertos internos.</a:t>
+            </a:r>
+          </a:p>
+          <a:p>
+            <a:pPr>
+              <a:spcBef>
+                <a:spcPts val="300"/>
+              </a:spcBef>
+              <a:defRPr sz="900">
+                <a:solidFill>
+                  <a:srgbClr val="A1A1AA"/>
+                </a:solidFill>
+              </a:defRPr>
+            </a:pPr>
+            <a:r>
+              <a:t>• Conformidad técnica de nivel sobresaliente.</a:t>
             </a:r>
           </a:p>
         </p:txBody>
@@ -8477,8 +8441,8 @@
         </p:nvSpPr>
         <p:spPr>
           <a:xfrm>
-            <a:off x="8412480" y="384048"/>
-            <a:ext cx="3017520" cy="384048"/>
+            <a:off x="7772400" y="384048"/>
+            <a:ext cx="3657600" cy="384048"/>
           </a:xfrm>
           <a:prstGeom prst="roundRect">
             <a:avLst/>
@@ -8511,14 +8475,14 @@
           <a:lstStyle/>
           <a:p>
             <a:pPr algn="ctr">
-              <a:defRPr sz="900" b="1">
-                <a:solidFill>
-                  <a:srgbClr val="FFFFFF"/>
-                </a:solidFill>
-              </a:defRPr>
-            </a:pPr>
-            <a:r>
-              <a:t>PILAR 1 • PROBLEMÁTICA</a:t>
+              <a:defRPr sz="800" b="1">
+                <a:solidFill>
+                  <a:srgbClr val="A1A1AA"/>
+                </a:solidFill>
+              </a:defRPr>
+            </a:pPr>
+            <a:r>
+              <a:t>DIAGNÓSTICO ARQUITECTURAL</a:t>
             </a:r>
           </a:p>
         </p:txBody>
@@ -8531,7 +8495,7 @@
         </p:nvSpPr>
         <p:spPr>
           <a:xfrm>
-            <a:off x="731520" y="1005840"/>
+            <a:off x="731520" y="1051560"/>
             <a:ext cx="10698480" cy="868680"/>
           </a:xfrm>
           <a:prstGeom prst="rect">
@@ -8546,26 +8510,26 @@
           <a:lstStyle/>
           <a:p>
             <a:pPr>
-              <a:defRPr sz="2000" b="1">
+              <a:defRPr sz="1900" b="1">
                 <a:solidFill>
                   <a:srgbClr val="FFFFFF"/>
                 </a:solidFill>
               </a:defRPr>
             </a:pPr>
             <a:r>
-              <a:t>LÍMITES CRÍTICOS DEL MODELO MONOLÍTICO</a:t>
-            </a:r>
-          </a:p>
-          <a:p>
-            <a:pPr>
-              <a:defRPr sz="1100">
-                <a:solidFill>
-                  <a:srgbClr val="A1A1AA"/>
-                </a:solidFill>
-              </a:defRPr>
-            </a:pPr>
-            <a:r>
-              <a:t>¿Por qué el e-commerce de cómputo de alta gama exige arquitectura de microservicios?</a:t>
+              <a:t>LIMITACIONES ESTRUCTURALES DEL MODELO MONOLÍTICO</a:t>
+            </a:r>
+          </a:p>
+          <a:p>
+            <a:pPr>
+              <a:defRPr sz="1000">
+                <a:solidFill>
+                  <a:srgbClr val="A1A1AA"/>
+                </a:solidFill>
+              </a:defRPr>
+            </a:pPr>
+            <a:r>
+              <a:t>Factores críticos de colapso operacional, acoplamiento transaccional y justificación del particionamiento distribuido</a:t>
             </a:r>
           </a:p>
         </p:txBody>
@@ -8578,7 +8542,7 @@
         </p:nvSpPr>
         <p:spPr>
           <a:xfrm>
-            <a:off x="731520" y="1874519"/>
+            <a:off x="731520" y="1965960"/>
             <a:ext cx="10698480" cy="18288"/>
           </a:xfrm>
           <a:prstGeom prst="rect">
@@ -8615,57 +8579,14 @@
       </p:sp>
       <p:sp>
         <p:nvSpPr>
-          <p:cNvPr id="10" name="Rounded Rectangle 9"/>
-          <p:cNvSpPr/>
-          <p:nvPr/>
-        </p:nvSpPr>
-        <p:spPr>
-          <a:xfrm>
-            <a:off x="731520" y="1856231"/>
-            <a:ext cx="1097280" cy="54864"/>
-          </a:xfrm>
-          <a:prstGeom prst="roundRect">
-            <a:avLst/>
-          </a:prstGeom>
-          <a:solidFill>
-            <a:srgbClr val="FFFFFF"/>
-          </a:solidFill>
-          <a:ln>
-            <a:noFill/>
-          </a:ln>
-        </p:spPr>
-        <p:style>
-          <a:lnRef idx="1">
-            <a:schemeClr val="accent1"/>
-          </a:lnRef>
-          <a:fillRef idx="3">
-            <a:schemeClr val="accent1"/>
-          </a:fillRef>
-          <a:effectRef idx="2">
-            <a:schemeClr val="accent1"/>
-          </a:effectRef>
-          <a:fontRef idx="minor">
-            <a:schemeClr val="lt1"/>
-          </a:fontRef>
-        </p:style>
-        <p:txBody>
-          <a:bodyPr rtlCol="0" anchor="ctr"/>
-          <a:lstStyle/>
-          <a:p>
-            <a:pPr algn="ctr"/>
-          </a:p>
-        </p:txBody>
-      </p:sp>
-      <p:sp>
-        <p:nvSpPr>
-          <p:cNvPr id="11" name="TextBox 10"/>
+          <p:cNvPr id="10" name="TextBox 9"/>
           <p:cNvSpPr txBox="1"/>
           <p:nvPr/>
         </p:nvSpPr>
         <p:spPr>
           <a:xfrm>
-            <a:off x="731520" y="6309360"/>
-            <a:ext cx="7315200" cy="365760"/>
+            <a:off x="731520" y="6217920"/>
+            <a:ext cx="7772400" cy="365760"/>
           </a:xfrm>
           <a:prstGeom prst="rect">
             <a:avLst/>
@@ -8679,28 +8600,28 @@
           <a:lstStyle/>
           <a:p>
             <a:pPr>
-              <a:defRPr sz="950" b="1">
-                <a:solidFill>
-                  <a:srgbClr val="A1A1AA"/>
-                </a:solidFill>
-              </a:defRPr>
-            </a:pPr>
-            <a:r>
-              <a:t>🎙️  HABLA: ELICEO PARILLO (MIN 0-4)</a:t>
-            </a:r>
-          </a:p>
-        </p:txBody>
-      </p:sp>
-      <p:sp>
-        <p:nvSpPr>
-          <p:cNvPr id="12" name="TextBox 11"/>
+              <a:defRPr sz="900">
+                <a:solidFill>
+                  <a:srgbClr val="A1A1AA"/>
+                </a:solidFill>
+              </a:defRPr>
+            </a:pPr>
+            <a:r>
+              <a:t>🎙️ ELICEO PARILLO MOSTAJO • PONENCIA TÉCNICA</a:t>
+            </a:r>
+          </a:p>
+        </p:txBody>
+      </p:sp>
+      <p:sp>
+        <p:nvSpPr>
+          <p:cNvPr id="11" name="TextBox 10"/>
           <p:cNvSpPr txBox="1"/>
           <p:nvPr/>
         </p:nvSpPr>
         <p:spPr>
           <a:xfrm>
-            <a:off x="10058400" y="6309360"/>
-            <a:ext cx="1371600" cy="365760"/>
+            <a:off x="10241280" y="6217920"/>
+            <a:ext cx="1188720" cy="365760"/>
           </a:xfrm>
           <a:prstGeom prst="rect">
             <a:avLst/>
@@ -8714,9 +8635,9 @@
           <a:lstStyle/>
           <a:p>
             <a:pPr algn="r">
-              <a:defRPr sz="1100" b="1">
-                <a:solidFill>
-                  <a:srgbClr val="FFFFFF"/>
+              <a:defRPr sz="900" b="1">
+                <a:solidFill>
+                  <a:srgbClr val="71717A"/>
                 </a:solidFill>
               </a:defRPr>
             </a:pPr>
@@ -8728,7 +8649,7 @@
       </p:sp>
       <p:sp>
         <p:nvSpPr>
-          <p:cNvPr id="13" name="Rounded Rectangle 12"/>
+          <p:cNvPr id="12" name="Rounded Rectangle 11"/>
           <p:cNvSpPr/>
           <p:nvPr/>
         </p:nvSpPr>
@@ -8773,14 +8694,14 @@
       </p:sp>
       <p:sp>
         <p:nvSpPr>
-          <p:cNvPr id="14" name="TextBox 13"/>
+          <p:cNvPr id="13" name="TextBox 12"/>
           <p:cNvSpPr txBox="1"/>
           <p:nvPr/>
         </p:nvSpPr>
         <p:spPr>
           <a:xfrm>
-            <a:off x="896112" y="2240279"/>
-            <a:ext cx="3099816" cy="3566160"/>
+            <a:off x="868680" y="2240279"/>
+            <a:ext cx="3154680" cy="3566160"/>
           </a:xfrm>
           <a:prstGeom prst="rect">
             <a:avLst/>
@@ -8794,69 +8715,81 @@
           <a:lstStyle/>
           <a:p>
             <a:pPr>
-              <a:defRPr sz="1100" b="1">
+              <a:defRPr sz="1200" b="1">
                 <a:solidFill>
                   <a:srgbClr val="FFFFFF"/>
                 </a:solidFill>
               </a:defRPr>
             </a:pPr>
             <a:r>
-              <a:t>💥 1. Colapso en Alta Demanda</a:t>
-            </a:r>
-          </a:p>
-          <a:p>
-            <a:pPr>
-              <a:defRPr sz="900">
-                <a:solidFill>
-                  <a:srgbClr val="A1A1AA"/>
-                </a:solidFill>
-              </a:defRPr>
-            </a:pPr>
-            <a:r>
-              <a:t>▪  CyberDays y lanzamientos provocan miles de consultas masivas.</a:t>
-            </a:r>
-          </a:p>
-          <a:p>
-            <a:pPr>
-              <a:defRPr sz="900">
-                <a:solidFill>
-                  <a:srgbClr val="A1A1AA"/>
-                </a:solidFill>
-              </a:defRPr>
-            </a:pPr>
-            <a:r>
-              <a:t>▪  Las lecturas saturan la cola de procesamiento del monolito.</a:t>
-            </a:r>
-          </a:p>
-          <a:p>
-            <a:pPr>
-              <a:defRPr sz="900">
-                <a:solidFill>
-                  <a:srgbClr val="A1A1AA"/>
-                </a:solidFill>
-              </a:defRPr>
-            </a:pPr>
-            <a:r>
-              <a:t>▪  El servidor de ventas se congela y no se cobran pedidos.</a:t>
-            </a:r>
-          </a:p>
-          <a:p>
-            <a:pPr>
-              <a:defRPr sz="900">
-                <a:solidFill>
-                  <a:srgbClr val="A1A1AA"/>
-                </a:solidFill>
-              </a:defRPr>
-            </a:pPr>
-            <a:r>
-              <a:t>▪  Pérdida directa de facturación y abandono de clientes.</a:t>
-            </a:r>
-          </a:p>
-        </p:txBody>
-      </p:sp>
-      <p:sp>
-        <p:nvSpPr>
-          <p:cNvPr id="15" name="Rounded Rectangle 14"/>
+              <a:t>💥 1. Colapso en Alta Concurrencia</a:t>
+            </a:r>
+          </a:p>
+          <a:p>
+            <a:pPr>
+              <a:spcBef>
+                <a:spcPts val="300"/>
+              </a:spcBef>
+              <a:defRPr sz="900">
+                <a:solidFill>
+                  <a:srgbClr val="A1A1AA"/>
+                </a:solidFill>
+              </a:defRPr>
+            </a:pPr>
+            <a:r>
+              <a:t>• CyberDays y promociones provocan ráfagas de consultas masivas.</a:t>
+            </a:r>
+          </a:p>
+          <a:p>
+            <a:pPr>
+              <a:spcBef>
+                <a:spcPts val="300"/>
+              </a:spcBef>
+              <a:defRPr sz="900">
+                <a:solidFill>
+                  <a:srgbClr val="A1A1AA"/>
+                </a:solidFill>
+              </a:defRPr>
+            </a:pPr>
+            <a:r>
+              <a:t>• Las lecturas saturan la cola de procesamiento e hilos del monolito.</a:t>
+            </a:r>
+          </a:p>
+          <a:p>
+            <a:pPr>
+              <a:spcBef>
+                <a:spcPts val="300"/>
+              </a:spcBef>
+              <a:defRPr sz="900">
+                <a:solidFill>
+                  <a:srgbClr val="A1A1AA"/>
+                </a:solidFill>
+              </a:defRPr>
+            </a:pPr>
+            <a:r>
+              <a:t>• El pool común se agota y se bloquea el cobro de pedidos.</a:t>
+            </a:r>
+          </a:p>
+          <a:p>
+            <a:pPr>
+              <a:spcBef>
+                <a:spcPts val="300"/>
+              </a:spcBef>
+              <a:defRPr sz="900">
+                <a:solidFill>
+                  <a:srgbClr val="A1A1AA"/>
+                </a:solidFill>
+              </a:defRPr>
+            </a:pPr>
+            <a:r>
+              <a:t>• Pérdida directa de transacciones y abandono de carritos.</a:t>
+            </a:r>
+          </a:p>
+        </p:txBody>
+      </p:sp>
+      <p:sp>
+        <p:nvSpPr>
+          <p:cNvPr id="14" name="Rounded Rectangle 13"/>
           <p:cNvSpPr/>
           <p:nvPr/>
         </p:nvSpPr>
@@ -8901,14 +8834,14 @@
       </p:sp>
       <p:sp>
         <p:nvSpPr>
-          <p:cNvPr id="16" name="TextBox 15"/>
+          <p:cNvPr id="15" name="TextBox 14"/>
           <p:cNvSpPr txBox="1"/>
           <p:nvPr/>
         </p:nvSpPr>
         <p:spPr>
           <a:xfrm>
-            <a:off x="4553712" y="2240279"/>
-            <a:ext cx="3099816" cy="3566160"/>
+            <a:off x="4526280" y="2240279"/>
+            <a:ext cx="3154680" cy="3566160"/>
           </a:xfrm>
           <a:prstGeom prst="rect">
             <a:avLst/>
@@ -8922,7 +8855,7 @@
           <a:lstStyle/>
           <a:p>
             <a:pPr>
-              <a:defRPr sz="1100" b="1">
+              <a:defRPr sz="1200" b="1">
                 <a:solidFill>
                   <a:srgbClr val="FFFFFF"/>
                 </a:solidFill>
@@ -8934,57 +8867,69 @@
           </a:p>
           <a:p>
             <a:pPr>
-              <a:defRPr sz="900">
-                <a:solidFill>
-                  <a:srgbClr val="A1A1AA"/>
-                </a:solidFill>
-              </a:defRPr>
-            </a:pPr>
-            <a:r>
-              <a:t>▪  Todos los módulos conviven en el mismo ejecutable y JVM.</a:t>
-            </a:r>
-          </a:p>
-          <a:p>
-            <a:pPr>
-              <a:defRPr sz="900">
-                <a:solidFill>
-                  <a:srgbClr val="A1A1AA"/>
-                </a:solidFill>
-              </a:defRPr>
-            </a:pPr>
-            <a:r>
-              <a:t>▪  Si falla la pasarela o el cotizador, se paraliza la tienda.</a:t>
-            </a:r>
-          </a:p>
-          <a:p>
-            <a:pPr>
-              <a:defRPr sz="900">
-                <a:solidFill>
-                  <a:srgbClr val="A1A1AA"/>
-                </a:solidFill>
-              </a:defRPr>
-            </a:pPr>
-            <a:r>
-              <a:t>▪  Un bug en reportes tumba el carrito de compras.</a:t>
-            </a:r>
-          </a:p>
-          <a:p>
-            <a:pPr>
-              <a:defRPr sz="900">
-                <a:solidFill>
-                  <a:srgbClr val="A1A1AA"/>
-                </a:solidFill>
-              </a:defRPr>
-            </a:pPr>
-            <a:r>
-              <a:t>▪  Cero aislamiento de fallos ni tolerancia activa.</a:t>
-            </a:r>
-          </a:p>
-        </p:txBody>
-      </p:sp>
-      <p:sp>
-        <p:nvSpPr>
-          <p:cNvPr id="17" name="Rounded Rectangle 16"/>
+              <a:spcBef>
+                <a:spcPts val="300"/>
+              </a:spcBef>
+              <a:defRPr sz="900">
+                <a:solidFill>
+                  <a:srgbClr val="A1A1AA"/>
+                </a:solidFill>
+              </a:defRPr>
+            </a:pPr>
+            <a:r>
+              <a:t>• Todos los módulos conviven en el mismo proceso ejecutable y JVM.</a:t>
+            </a:r>
+          </a:p>
+          <a:p>
+            <a:pPr>
+              <a:spcBef>
+                <a:spcPts val="300"/>
+              </a:spcBef>
+              <a:defRPr sz="900">
+                <a:solidFill>
+                  <a:srgbClr val="A1A1AA"/>
+                </a:solidFill>
+              </a:defRPr>
+            </a:pPr>
+            <a:r>
+              <a:t>• Si falla un módulo accesorio, se paraliza la plataforma entera.</a:t>
+            </a:r>
+          </a:p>
+          <a:p>
+            <a:pPr>
+              <a:spcBef>
+                <a:spcPts val="300"/>
+              </a:spcBef>
+              <a:defRPr sz="900">
+                <a:solidFill>
+                  <a:srgbClr val="A1A1AA"/>
+                </a:solidFill>
+              </a:defRPr>
+            </a:pPr>
+            <a:r>
+              <a:t>• Un bug en reportes o catálogo tumba el motor de facturación.</a:t>
+            </a:r>
+          </a:p>
+          <a:p>
+            <a:pPr>
+              <a:spcBef>
+                <a:spcPts val="300"/>
+              </a:spcBef>
+              <a:defRPr sz="900">
+                <a:solidFill>
+                  <a:srgbClr val="A1A1AA"/>
+                </a:solidFill>
+              </a:defRPr>
+            </a:pPr>
+            <a:r>
+              <a:t>• Cero aislamiento de fallos ni tolerancia activa a desastres.</a:t>
+            </a:r>
+          </a:p>
+        </p:txBody>
+      </p:sp>
+      <p:sp>
+        <p:nvSpPr>
+          <p:cNvPr id="16" name="Rounded Rectangle 15"/>
           <p:cNvSpPr/>
           <p:nvPr/>
         </p:nvSpPr>
@@ -9029,14 +8974,14 @@
       </p:sp>
       <p:sp>
         <p:nvSpPr>
-          <p:cNvPr id="18" name="TextBox 17"/>
+          <p:cNvPr id="17" name="TextBox 16"/>
           <p:cNvSpPr txBox="1"/>
           <p:nvPr/>
         </p:nvSpPr>
         <p:spPr>
           <a:xfrm>
-            <a:off x="8211312" y="2240279"/>
-            <a:ext cx="3099816" cy="3566160"/>
+            <a:off x="8183880" y="2240279"/>
+            <a:ext cx="3154680" cy="3566160"/>
           </a:xfrm>
           <a:prstGeom prst="rect">
             <a:avLst/>
@@ -9050,7 +8995,7 @@
           <a:lstStyle/>
           <a:p>
             <a:pPr>
-              <a:defRPr sz="1100" b="1">
+              <a:defRPr sz="1200" b="1">
                 <a:solidFill>
                   <a:srgbClr val="FFFFFF"/>
                 </a:solidFill>
@@ -9062,50 +9007,62 @@
           </a:p>
           <a:p>
             <a:pPr>
-              <a:defRPr sz="900">
-                <a:solidFill>
-                  <a:srgbClr val="A1A1AA"/>
-                </a:solidFill>
-              </a:defRPr>
-            </a:pPr>
-            <a:r>
-              <a:t>▪  El catálogo se consulta hasta 10 veces más de lo que se compra.</a:t>
-            </a:r>
-          </a:p>
-          <a:p>
-            <a:pPr>
-              <a:defRPr sz="900">
-                <a:solidFill>
-                  <a:srgbClr val="A1A1AA"/>
-                </a:solidFill>
-              </a:defRPr>
-            </a:pPr>
-            <a:r>
-              <a:t>▪  El monolito obliga a duplicar toda la aplicación completa.</a:t>
-            </a:r>
-          </a:p>
-          <a:p>
-            <a:pPr>
-              <a:defRPr sz="900">
-                <a:solidFill>
-                  <a:srgbClr val="A1A1AA"/>
-                </a:solidFill>
-              </a:defRPr>
-            </a:pPr>
-            <a:r>
-              <a:t>▪  Desperdicio crítico de memoria RAM y núcleos de CPU.</a:t>
-            </a:r>
-          </a:p>
-          <a:p>
-            <a:pPr>
-              <a:defRPr sz="900">
-                <a:solidFill>
-                  <a:srgbClr val="A1A1AA"/>
-                </a:solidFill>
-              </a:defRPr>
-            </a:pPr>
-            <a:r>
-              <a:t>▪  Microservicios: Permite escalar solo el microservicio saturado.</a:t>
+              <a:spcBef>
+                <a:spcPts val="300"/>
+              </a:spcBef>
+              <a:defRPr sz="900">
+                <a:solidFill>
+                  <a:srgbClr val="A1A1AA"/>
+                </a:solidFill>
+              </a:defRPr>
+            </a:pPr>
+            <a:r>
+              <a:t>• El catálogo se consulta masivamente más de lo que se compra.</a:t>
+            </a:r>
+          </a:p>
+          <a:p>
+            <a:pPr>
+              <a:spcBef>
+                <a:spcPts val="300"/>
+              </a:spcBef>
+              <a:defRPr sz="900">
+                <a:solidFill>
+                  <a:srgbClr val="A1A1AA"/>
+                </a:solidFill>
+              </a:defRPr>
+            </a:pPr>
+            <a:r>
+              <a:t>• El monolito obliga a duplicar toda la aplicación completa.</a:t>
+            </a:r>
+          </a:p>
+          <a:p>
+            <a:pPr>
+              <a:spcBef>
+                <a:spcPts val="300"/>
+              </a:spcBef>
+              <a:defRPr sz="900">
+                <a:solidFill>
+                  <a:srgbClr val="A1A1AA"/>
+                </a:solidFill>
+              </a:defRPr>
+            </a:pPr>
+            <a:r>
+              <a:t>• Desperdicio crítico de memoria RAM y núcleos de CPU.</a:t>
+            </a:r>
+          </a:p>
+          <a:p>
+            <a:pPr>
+              <a:spcBef>
+                <a:spcPts val="300"/>
+              </a:spcBef>
+              <a:defRPr sz="900">
+                <a:solidFill>
+                  <a:srgbClr val="A1A1AA"/>
+                </a:solidFill>
+              </a:defRPr>
+            </a:pPr>
+            <a:r>
+              <a:t>• Microservicios: Permite escalar elásticamente solo las réplicas saturadas.</a:t>
             </a:r>
           </a:p>
         </p:txBody>
@@ -9357,8 +9314,8 @@
         </p:nvSpPr>
         <p:spPr>
           <a:xfrm>
-            <a:off x="8412480" y="384048"/>
-            <a:ext cx="3017520" cy="384048"/>
+            <a:off x="7772400" y="384048"/>
+            <a:ext cx="3657600" cy="384048"/>
           </a:xfrm>
           <a:prstGeom prst="roundRect">
             <a:avLst/>
@@ -9391,14 +9348,14 @@
           <a:lstStyle/>
           <a:p>
             <a:pPr algn="ctr">
-              <a:defRPr sz="900" b="1">
-                <a:solidFill>
-                  <a:srgbClr val="FFFFFF"/>
-                </a:solidFill>
-              </a:defRPr>
-            </a:pPr>
-            <a:r>
-              <a:t>PILAR 2 • SOLUCIÓN TÉCNICA</a:t>
+              <a:defRPr sz="800" b="1">
+                <a:solidFill>
+                  <a:srgbClr val="A1A1AA"/>
+                </a:solidFill>
+              </a:defRPr>
+            </a:pPr>
+            <a:r>
+              <a:t>DISEÑO DE ARQUITECTURA</a:t>
             </a:r>
           </a:p>
         </p:txBody>
@@ -9411,7 +9368,7 @@
         </p:nvSpPr>
         <p:spPr>
           <a:xfrm>
-            <a:off x="731520" y="1005840"/>
+            <a:off x="731520" y="1051560"/>
             <a:ext cx="10698480" cy="868680"/>
           </a:xfrm>
           <a:prstGeom prst="rect">
@@ -9426,26 +9383,26 @@
           <a:lstStyle/>
           <a:p>
             <a:pPr>
-              <a:defRPr sz="2000" b="1">
+              <a:defRPr sz="1900" b="1">
                 <a:solidFill>
                   <a:srgbClr val="FFFFFF"/>
                 </a:solidFill>
               </a:defRPr>
             </a:pPr>
             <a:r>
-              <a:t>ARQUITECTURA DISTRIBUIDA BASE (4 CAPAS)</a:t>
-            </a:r>
-          </a:p>
-          <a:p>
-            <a:pPr>
-              <a:defRPr sz="1100">
-                <a:solidFill>
-                  <a:srgbClr val="A1A1AA"/>
-                </a:solidFill>
-              </a:defRPr>
-            </a:pPr>
-            <a:r>
-              <a:t>Diseño modular desacoplado orientado a producción bajo principios Twelve-Factor App</a:t>
+              <a:t>ARQUITECTURA DISTRIBUIDA EN 4 CAPAS EMPRESARIALES</a:t>
+            </a:r>
+          </a:p>
+          <a:p>
+            <a:pPr>
+              <a:defRPr sz="1000">
+                <a:solidFill>
+                  <a:srgbClr val="A1A1AA"/>
+                </a:solidFill>
+              </a:defRPr>
+            </a:pPr>
+            <a:r>
+              <a:t>Segregación lógica estricta: Borde Perimetral, Infraestructura de Soporte, Dominio de Negocio y Persistencia Aislada</a:t>
             </a:r>
           </a:p>
         </p:txBody>
@@ -9458,7 +9415,7 @@
         </p:nvSpPr>
         <p:spPr>
           <a:xfrm>
-            <a:off x="731520" y="1874519"/>
+            <a:off x="731520" y="1965960"/>
             <a:ext cx="10698480" cy="18288"/>
           </a:xfrm>
           <a:prstGeom prst="rect">
@@ -9495,57 +9452,14 @@
       </p:sp>
       <p:sp>
         <p:nvSpPr>
-          <p:cNvPr id="10" name="Rounded Rectangle 9"/>
-          <p:cNvSpPr/>
-          <p:nvPr/>
-        </p:nvSpPr>
-        <p:spPr>
-          <a:xfrm>
-            <a:off x="731520" y="1856231"/>
-            <a:ext cx="1097280" cy="54864"/>
-          </a:xfrm>
-          <a:prstGeom prst="roundRect">
-            <a:avLst/>
-          </a:prstGeom>
-          <a:solidFill>
-            <a:srgbClr val="FFFFFF"/>
-          </a:solidFill>
-          <a:ln>
-            <a:noFill/>
-          </a:ln>
-        </p:spPr>
-        <p:style>
-          <a:lnRef idx="1">
-            <a:schemeClr val="accent1"/>
-          </a:lnRef>
-          <a:fillRef idx="3">
-            <a:schemeClr val="accent1"/>
-          </a:fillRef>
-          <a:effectRef idx="2">
-            <a:schemeClr val="accent1"/>
-          </a:effectRef>
-          <a:fontRef idx="minor">
-            <a:schemeClr val="lt1"/>
-          </a:fontRef>
-        </p:style>
-        <p:txBody>
-          <a:bodyPr rtlCol="0" anchor="ctr"/>
-          <a:lstStyle/>
-          <a:p>
-            <a:pPr algn="ctr"/>
-          </a:p>
-        </p:txBody>
-      </p:sp>
-      <p:sp>
-        <p:nvSpPr>
-          <p:cNvPr id="11" name="TextBox 10"/>
+          <p:cNvPr id="10" name="TextBox 9"/>
           <p:cNvSpPr txBox="1"/>
           <p:nvPr/>
         </p:nvSpPr>
         <p:spPr>
           <a:xfrm>
-            <a:off x="731520" y="6309360"/>
-            <a:ext cx="7315200" cy="365760"/>
+            <a:off x="731520" y="6217920"/>
+            <a:ext cx="7772400" cy="365760"/>
           </a:xfrm>
           <a:prstGeom prst="rect">
             <a:avLst/>
@@ -9559,28 +9473,28 @@
           <a:lstStyle/>
           <a:p>
             <a:pPr>
-              <a:defRPr sz="950" b="1">
-                <a:solidFill>
-                  <a:srgbClr val="A1A1AA"/>
-                </a:solidFill>
-              </a:defRPr>
-            </a:pPr>
-            <a:r>
-              <a:t>🎙️  HABLA: ELICEO PARILLO (MIN 0-4)</a:t>
-            </a:r>
-          </a:p>
-        </p:txBody>
-      </p:sp>
-      <p:sp>
-        <p:nvSpPr>
-          <p:cNvPr id="12" name="TextBox 11"/>
+              <a:defRPr sz="900">
+                <a:solidFill>
+                  <a:srgbClr val="A1A1AA"/>
+                </a:solidFill>
+              </a:defRPr>
+            </a:pPr>
+            <a:r>
+              <a:t>🎙️ ELICEO PARILLO MOSTAJO • PONENCIA TÉCNICA</a:t>
+            </a:r>
+          </a:p>
+        </p:txBody>
+      </p:sp>
+      <p:sp>
+        <p:nvSpPr>
+          <p:cNvPr id="11" name="TextBox 10"/>
           <p:cNvSpPr txBox="1"/>
           <p:nvPr/>
         </p:nvSpPr>
         <p:spPr>
           <a:xfrm>
-            <a:off x="10058400" y="6309360"/>
-            <a:ext cx="1371600" cy="365760"/>
+            <a:off x="10241280" y="6217920"/>
+            <a:ext cx="1188720" cy="365760"/>
           </a:xfrm>
           <a:prstGeom prst="rect">
             <a:avLst/>
@@ -9594,9 +9508,9 @@
           <a:lstStyle/>
           <a:p>
             <a:pPr algn="r">
-              <a:defRPr sz="1100" b="1">
-                <a:solidFill>
-                  <a:srgbClr val="FFFFFF"/>
+              <a:defRPr sz="900" b="1">
+                <a:solidFill>
+                  <a:srgbClr val="71717A"/>
                 </a:solidFill>
               </a:defRPr>
             </a:pPr>
@@ -9608,7 +9522,7 @@
       </p:sp>
       <p:sp>
         <p:nvSpPr>
-          <p:cNvPr id="13" name="Rounded Rectangle 12"/>
+          <p:cNvPr id="12" name="Rounded Rectangle 11"/>
           <p:cNvSpPr/>
           <p:nvPr/>
         </p:nvSpPr>
@@ -9653,14 +9567,14 @@
       </p:sp>
       <p:sp>
         <p:nvSpPr>
-          <p:cNvPr id="14" name="TextBox 13"/>
+          <p:cNvPr id="13" name="TextBox 12"/>
           <p:cNvSpPr txBox="1"/>
           <p:nvPr/>
         </p:nvSpPr>
         <p:spPr>
           <a:xfrm>
-            <a:off x="896112" y="2240279"/>
-            <a:ext cx="2185416" cy="3566160"/>
+            <a:off x="868680" y="2240279"/>
+            <a:ext cx="2240280" cy="3566160"/>
           </a:xfrm>
           <a:prstGeom prst="rect">
             <a:avLst/>
@@ -9674,7 +9588,7 @@
           <a:lstStyle/>
           <a:p>
             <a:pPr>
-              <a:defRPr sz="1100" b="1">
+              <a:defRPr sz="1200" b="1">
                 <a:solidFill>
                   <a:srgbClr val="FFFFFF"/>
                 </a:solidFill>
@@ -9686,57 +9600,69 @@
           </a:p>
           <a:p>
             <a:pPr>
-              <a:defRPr sz="900">
-                <a:solidFill>
-                  <a:srgbClr val="A1A1AA"/>
-                </a:solidFill>
-              </a:defRPr>
-            </a:pPr>
-            <a:r>
-              <a:t>▪  Spring Cloud Gateway.</a:t>
-            </a:r>
-          </a:p>
-          <a:p>
-            <a:pPr>
-              <a:defRPr sz="900">
-                <a:solidFill>
-                  <a:srgbClr val="A1A1AA"/>
-                </a:solidFill>
-              </a:defRPr>
-            </a:pPr>
-            <a:r>
-              <a:t>▪  Puerto :18080 DEV / :28080 PROD.</a:t>
-            </a:r>
-          </a:p>
-          <a:p>
-            <a:pPr>
-              <a:defRPr sz="900">
-                <a:solidFill>
-                  <a:srgbClr val="A1A1AA"/>
-                </a:solidFill>
-              </a:defRPr>
-            </a:pPr>
-            <a:r>
-              <a:t>▪  Netty reactivo no bloqueante.</a:t>
-            </a:r>
-          </a:p>
-          <a:p>
-            <a:pPr>
-              <a:defRPr sz="900">
-                <a:solidFill>
-                  <a:srgbClr val="A1A1AA"/>
-                </a:solidFill>
-              </a:defRPr>
-            </a:pPr>
-            <a:r>
-              <a:t>▪  Rutas lb:// y Round-Robin.</a:t>
-            </a:r>
-          </a:p>
-        </p:txBody>
-      </p:sp>
-      <p:sp>
-        <p:nvSpPr>
-          <p:cNvPr id="15" name="Rounded Rectangle 14"/>
+              <a:spcBef>
+                <a:spcPts val="300"/>
+              </a:spcBef>
+              <a:defRPr sz="900">
+                <a:solidFill>
+                  <a:srgbClr val="A1A1AA"/>
+                </a:solidFill>
+              </a:defRPr>
+            </a:pPr>
+            <a:r>
+              <a:t>• Spring Cloud Gateway.</a:t>
+            </a:r>
+          </a:p>
+          <a:p>
+            <a:pPr>
+              <a:spcBef>
+                <a:spcPts val="300"/>
+              </a:spcBef>
+              <a:defRPr sz="900">
+                <a:solidFill>
+                  <a:srgbClr val="A1A1AA"/>
+                </a:solidFill>
+              </a:defRPr>
+            </a:pPr>
+            <a:r>
+              <a:t>• Puerto :18080 DEV / :28080 PROD.</a:t>
+            </a:r>
+          </a:p>
+          <a:p>
+            <a:pPr>
+              <a:spcBef>
+                <a:spcPts val="300"/>
+              </a:spcBef>
+              <a:defRPr sz="900">
+                <a:solidFill>
+                  <a:srgbClr val="A1A1AA"/>
+                </a:solidFill>
+              </a:defRPr>
+            </a:pPr>
+            <a:r>
+              <a:t>• Netty reactivo no bloqueante.</a:t>
+            </a:r>
+          </a:p>
+          <a:p>
+            <a:pPr>
+              <a:spcBef>
+                <a:spcPts val="300"/>
+              </a:spcBef>
+              <a:defRPr sz="900">
+                <a:solidFill>
+                  <a:srgbClr val="A1A1AA"/>
+                </a:solidFill>
+              </a:defRPr>
+            </a:pPr>
+            <a:r>
+              <a:t>• Rutas lb:// y Round-Robin.</a:t>
+            </a:r>
+          </a:p>
+        </p:txBody>
+      </p:sp>
+      <p:sp>
+        <p:nvSpPr>
+          <p:cNvPr id="14" name="Rounded Rectangle 13"/>
           <p:cNvSpPr/>
           <p:nvPr/>
         </p:nvSpPr>
@@ -9781,14 +9707,14 @@
       </p:sp>
       <p:sp>
         <p:nvSpPr>
-          <p:cNvPr id="16" name="TextBox 15"/>
+          <p:cNvPr id="15" name="TextBox 14"/>
           <p:cNvSpPr txBox="1"/>
           <p:nvPr/>
         </p:nvSpPr>
         <p:spPr>
           <a:xfrm>
-            <a:off x="3639312" y="2240279"/>
-            <a:ext cx="2185416" cy="3566160"/>
+            <a:off x="3611879" y="2240279"/>
+            <a:ext cx="2240280" cy="3566160"/>
           </a:xfrm>
           <a:prstGeom prst="rect">
             <a:avLst/>
@@ -9802,7 +9728,7 @@
           <a:lstStyle/>
           <a:p>
             <a:pPr>
-              <a:defRPr sz="1100" b="1">
+              <a:defRPr sz="1200" b="1">
                 <a:solidFill>
                   <a:srgbClr val="FFFFFF"/>
                 </a:solidFill>
@@ -9814,57 +9740,69 @@
           </a:p>
           <a:p>
             <a:pPr>
-              <a:defRPr sz="900">
-                <a:solidFill>
-                  <a:srgbClr val="A1A1AA"/>
-                </a:solidFill>
-              </a:defRPr>
-            </a:pPr>
-            <a:r>
-              <a:t>▪  Eureka Server en puerto :8761.</a:t>
-            </a:r>
-          </a:p>
-          <a:p>
-            <a:pPr>
-              <a:defRPr sz="900">
-                <a:solidFill>
-                  <a:srgbClr val="A1A1AA"/>
-                </a:solidFill>
-              </a:defRPr>
-            </a:pPr>
-            <a:r>
-              <a:t>▪  Config Server en puerto :8888.</a:t>
-            </a:r>
-          </a:p>
-          <a:p>
-            <a:pPr>
-              <a:defRPr sz="900">
-                <a:solidFill>
-                  <a:srgbClr val="A1A1AA"/>
-                </a:solidFill>
-              </a:defRPr>
-            </a:pPr>
-            <a:r>
-              <a:t>▪  Latidos periódicos cada 30s.</a:t>
-            </a:r>
-          </a:p>
-          <a:p>
-            <a:pPr>
-              <a:defRPr sz="900">
-                <a:solidFill>
-                  <a:srgbClr val="A1A1AA"/>
-                </a:solidFill>
-              </a:defRPr>
-            </a:pPr>
-            <a:r>
-              <a:t>▪  Repositorio config-repo.</a:t>
-            </a:r>
-          </a:p>
-        </p:txBody>
-      </p:sp>
-      <p:sp>
-        <p:nvSpPr>
-          <p:cNvPr id="17" name="Rounded Rectangle 16"/>
+              <a:spcBef>
+                <a:spcPts val="300"/>
+              </a:spcBef>
+              <a:defRPr sz="900">
+                <a:solidFill>
+                  <a:srgbClr val="A1A1AA"/>
+                </a:solidFill>
+              </a:defRPr>
+            </a:pPr>
+            <a:r>
+              <a:t>• Eureka Server en puerto :8761.</a:t>
+            </a:r>
+          </a:p>
+          <a:p>
+            <a:pPr>
+              <a:spcBef>
+                <a:spcPts val="300"/>
+              </a:spcBef>
+              <a:defRPr sz="900">
+                <a:solidFill>
+                  <a:srgbClr val="A1A1AA"/>
+                </a:solidFill>
+              </a:defRPr>
+            </a:pPr>
+            <a:r>
+              <a:t>• Config Server en puerto :8888.</a:t>
+            </a:r>
+          </a:p>
+          <a:p>
+            <a:pPr>
+              <a:spcBef>
+                <a:spcPts val="300"/>
+              </a:spcBef>
+              <a:defRPr sz="900">
+                <a:solidFill>
+                  <a:srgbClr val="A1A1AA"/>
+                </a:solidFill>
+              </a:defRPr>
+            </a:pPr>
+            <a:r>
+              <a:t>• Latidos periódicos cada 30s.</a:t>
+            </a:r>
+          </a:p>
+          <a:p>
+            <a:pPr>
+              <a:spcBef>
+                <a:spcPts val="300"/>
+              </a:spcBef>
+              <a:defRPr sz="900">
+                <a:solidFill>
+                  <a:srgbClr val="A1A1AA"/>
+                </a:solidFill>
+              </a:defRPr>
+            </a:pPr>
+            <a:r>
+              <a:t>• Repositorio config-repo.</a:t>
+            </a:r>
+          </a:p>
+        </p:txBody>
+      </p:sp>
+      <p:sp>
+        <p:nvSpPr>
+          <p:cNvPr id="16" name="Rounded Rectangle 15"/>
           <p:cNvSpPr/>
           <p:nvPr/>
         </p:nvSpPr>
@@ -9909,14 +9847,14 @@
       </p:sp>
       <p:sp>
         <p:nvSpPr>
-          <p:cNvPr id="18" name="TextBox 17"/>
+          <p:cNvPr id="17" name="TextBox 16"/>
           <p:cNvSpPr txBox="1"/>
           <p:nvPr/>
         </p:nvSpPr>
         <p:spPr>
           <a:xfrm>
-            <a:off x="6382512" y="2240279"/>
-            <a:ext cx="2185416" cy="3566160"/>
+            <a:off x="6355080" y="2240279"/>
+            <a:ext cx="2240280" cy="3566160"/>
           </a:xfrm>
           <a:prstGeom prst="rect">
             <a:avLst/>
@@ -9930,7 +9868,7 @@
           <a:lstStyle/>
           <a:p>
             <a:pPr>
-              <a:defRPr sz="1100" b="1">
+              <a:defRPr sz="1200" b="1">
                 <a:solidFill>
                   <a:srgbClr val="FFFFFF"/>
                 </a:solidFill>
@@ -9942,57 +9880,69 @@
           </a:p>
           <a:p>
             <a:pPr>
-              <a:defRPr sz="900">
-                <a:solidFill>
-                  <a:srgbClr val="A1A1AA"/>
-                </a:solidFill>
-              </a:defRPr>
-            </a:pPr>
-            <a:r>
-              <a:t>▪  pc-catalogo-ms (:8081).</a:t>
-            </a:r>
-          </a:p>
-          <a:p>
-            <a:pPr>
-              <a:defRPr sz="900">
-                <a:solidFill>
-                  <a:srgbClr val="A1A1AA"/>
-                </a:solidFill>
-              </a:defRPr>
-            </a:pPr>
-            <a:r>
-              <a:t>▪  pc-orden-ms R1 (:8082).</a:t>
-            </a:r>
-          </a:p>
-          <a:p>
-            <a:pPr>
-              <a:defRPr sz="900">
-                <a:solidFill>
-                  <a:srgbClr val="A1A1AA"/>
-                </a:solidFill>
-              </a:defRPr>
-            </a:pPr>
-            <a:r>
-              <a:t>▪  pc-orden-ms R2 (:8083).</a:t>
-            </a:r>
-          </a:p>
-          <a:p>
-            <a:pPr>
-              <a:defRPr sz="900">
-                <a:solidFill>
-                  <a:srgbClr val="A1A1AA"/>
-                </a:solidFill>
-              </a:defRPr>
-            </a:pPr>
-            <a:r>
-              <a:t>▪  pc-cliente-ms (:8084).</a:t>
-            </a:r>
-          </a:p>
-        </p:txBody>
-      </p:sp>
-      <p:sp>
-        <p:nvSpPr>
-          <p:cNvPr id="19" name="Rounded Rectangle 18"/>
+              <a:spcBef>
+                <a:spcPts val="300"/>
+              </a:spcBef>
+              <a:defRPr sz="900">
+                <a:solidFill>
+                  <a:srgbClr val="A1A1AA"/>
+                </a:solidFill>
+              </a:defRPr>
+            </a:pPr>
+            <a:r>
+              <a:t>• pc-catalogo-ms (:8081).</a:t>
+            </a:r>
+          </a:p>
+          <a:p>
+            <a:pPr>
+              <a:spcBef>
+                <a:spcPts val="300"/>
+              </a:spcBef>
+              <a:defRPr sz="900">
+                <a:solidFill>
+                  <a:srgbClr val="A1A1AA"/>
+                </a:solidFill>
+              </a:defRPr>
+            </a:pPr>
+            <a:r>
+              <a:t>• pc-orden-ms R1 (:8082).</a:t>
+            </a:r>
+          </a:p>
+          <a:p>
+            <a:pPr>
+              <a:spcBef>
+                <a:spcPts val="300"/>
+              </a:spcBef>
+              <a:defRPr sz="900">
+                <a:solidFill>
+                  <a:srgbClr val="A1A1AA"/>
+                </a:solidFill>
+              </a:defRPr>
+            </a:pPr>
+            <a:r>
+              <a:t>• pc-orden-ms R2 (:8083).</a:t>
+            </a:r>
+          </a:p>
+          <a:p>
+            <a:pPr>
+              <a:spcBef>
+                <a:spcPts val="300"/>
+              </a:spcBef>
+              <a:defRPr sz="900">
+                <a:solidFill>
+                  <a:srgbClr val="A1A1AA"/>
+                </a:solidFill>
+              </a:defRPr>
+            </a:pPr>
+            <a:r>
+              <a:t>• pc-cliente-ms (:8084).</a:t>
+            </a:r>
+          </a:p>
+        </p:txBody>
+      </p:sp>
+      <p:sp>
+        <p:nvSpPr>
+          <p:cNvPr id="18" name="Rounded Rectangle 17"/>
           <p:cNvSpPr/>
           <p:nvPr/>
         </p:nvSpPr>
@@ -10037,14 +9987,14 @@
       </p:sp>
       <p:sp>
         <p:nvSpPr>
-          <p:cNvPr id="20" name="TextBox 19"/>
+          <p:cNvPr id="19" name="TextBox 18"/>
           <p:cNvSpPr txBox="1"/>
           <p:nvPr/>
         </p:nvSpPr>
         <p:spPr>
           <a:xfrm>
-            <a:off x="9125712" y="2240279"/>
-            <a:ext cx="2185416" cy="3566160"/>
+            <a:off x="9098280" y="2240279"/>
+            <a:ext cx="2240280" cy="3566160"/>
           </a:xfrm>
           <a:prstGeom prst="rect">
             <a:avLst/>
@@ -10058,7 +10008,7 @@
           <a:lstStyle/>
           <a:p>
             <a:pPr>
-              <a:defRPr sz="1100" b="1">
+              <a:defRPr sz="1200" b="1">
                 <a:solidFill>
                   <a:srgbClr val="FFFFFF"/>
                 </a:solidFill>
@@ -10070,50 +10020,62 @@
           </a:p>
           <a:p>
             <a:pPr>
-              <a:defRPr sz="900">
-                <a:solidFill>
-                  <a:srgbClr val="A1A1AA"/>
-                </a:solidFill>
-              </a:defRPr>
-            </a:pPr>
-            <a:r>
-              <a:t>▪  PostgreSQL Docker (:5433).</a:t>
-            </a:r>
-          </a:p>
-          <a:p>
-            <a:pPr>
-              <a:defRPr sz="900">
-                <a:solidFill>
-                  <a:srgbClr val="A1A1AA"/>
-                </a:solidFill>
-              </a:defRPr>
-            </a:pPr>
-            <a:r>
-              <a:t>▪  Prometheus (:19090).</a:t>
-            </a:r>
-          </a:p>
-          <a:p>
-            <a:pPr>
-              <a:defRPr sz="900">
-                <a:solidFill>
-                  <a:srgbClr val="A1A1AA"/>
-                </a:solidFill>
-              </a:defRPr>
-            </a:pPr>
-            <a:r>
-              <a:t>▪  Grafana (:13000) dashboards JVM.</a:t>
-            </a:r>
-          </a:p>
-          <a:p>
-            <a:pPr>
-              <a:defRPr sz="900">
-                <a:solidFill>
-                  <a:srgbClr val="A1A1AA"/>
-                </a:solidFill>
-              </a:defRPr>
-            </a:pPr>
-            <a:r>
-              <a:t>▪  Loki (:13100) &amp; Promtail.</a:t>
+              <a:spcBef>
+                <a:spcPts val="300"/>
+              </a:spcBef>
+              <a:defRPr sz="900">
+                <a:solidFill>
+                  <a:srgbClr val="A1A1AA"/>
+                </a:solidFill>
+              </a:defRPr>
+            </a:pPr>
+            <a:r>
+              <a:t>• PostgreSQL Docker (:5433).</a:t>
+            </a:r>
+          </a:p>
+          <a:p>
+            <a:pPr>
+              <a:spcBef>
+                <a:spcPts val="300"/>
+              </a:spcBef>
+              <a:defRPr sz="900">
+                <a:solidFill>
+                  <a:srgbClr val="A1A1AA"/>
+                </a:solidFill>
+              </a:defRPr>
+            </a:pPr>
+            <a:r>
+              <a:t>• Prometheus (:19090).</a:t>
+            </a:r>
+          </a:p>
+          <a:p>
+            <a:pPr>
+              <a:spcBef>
+                <a:spcPts val="300"/>
+              </a:spcBef>
+              <a:defRPr sz="900">
+                <a:solidFill>
+                  <a:srgbClr val="A1A1AA"/>
+                </a:solidFill>
+              </a:defRPr>
+            </a:pPr>
+            <a:r>
+              <a:t>• Grafana (:13000) dashboards JVM.</a:t>
+            </a:r>
+          </a:p>
+          <a:p>
+            <a:pPr>
+              <a:spcBef>
+                <a:spcPts val="300"/>
+              </a:spcBef>
+              <a:defRPr sz="900">
+                <a:solidFill>
+                  <a:srgbClr val="A1A1AA"/>
+                </a:solidFill>
+              </a:defRPr>
+            </a:pPr>
+            <a:r>
+              <a:t>• Loki (:13100) &amp; Promtail.</a:t>
             </a:r>
           </a:p>
         </p:txBody>
@@ -10365,8 +10327,8 @@
         </p:nvSpPr>
         <p:spPr>
           <a:xfrm>
-            <a:off x="8412480" y="384048"/>
-            <a:ext cx="3017520" cy="384048"/>
+            <a:off x="7772400" y="384048"/>
+            <a:ext cx="3657600" cy="384048"/>
           </a:xfrm>
           <a:prstGeom prst="roundRect">
             <a:avLst/>
@@ -10399,14 +10361,14 @@
           <a:lstStyle/>
           <a:p>
             <a:pPr algn="ctr">
-              <a:defRPr sz="900" b="1">
-                <a:solidFill>
-                  <a:srgbClr val="FFFFFF"/>
-                </a:solidFill>
-              </a:defRPr>
-            </a:pPr>
-            <a:r>
-              <a:t>PILAR 2 • CONTRATOS REST</a:t>
+              <a:defRPr sz="800" b="1">
+                <a:solidFill>
+                  <a:srgbClr val="A1A1AA"/>
+                </a:solidFill>
+              </a:defRPr>
+            </a:pPr>
+            <a:r>
+              <a:t>INTERFACES Y CONTRATOS</a:t>
             </a:r>
           </a:p>
         </p:txBody>
@@ -10419,7 +10381,7 @@
         </p:nvSpPr>
         <p:spPr>
           <a:xfrm>
-            <a:off x="731520" y="1005840"/>
+            <a:off x="731520" y="1051560"/>
             <a:ext cx="10698480" cy="868680"/>
           </a:xfrm>
           <a:prstGeom prst="rect">
@@ -10434,26 +10396,26 @@
           <a:lstStyle/>
           <a:p>
             <a:pPr>
-              <a:defRPr sz="2000" b="1">
+              <a:defRPr sz="1900" b="1">
                 <a:solidFill>
                   <a:srgbClr val="FFFFFF"/>
                 </a:solidFill>
               </a:defRPr>
             </a:pPr>
             <a:r>
-              <a:t>FICHAS TÉCNICAS &amp; CONTRATOS REST SEGREGADOS</a:t>
-            </a:r>
-          </a:p>
-          <a:p>
-            <a:pPr>
-              <a:defRPr sz="1100">
-                <a:solidFill>
-                  <a:srgbClr val="A1A1AA"/>
-                </a:solidFill>
-              </a:defRPr>
-            </a:pPr>
-            <a:r>
-              <a:t>2 microservicios asignados por estudiante con DTOs, validaciones y códigos HTTP normalizados</a:t>
+              <a:t>MATRIZ DE CONTRATOS REST Y MODELO DE DOMINIO NORMALIZADO</a:t>
+            </a:r>
+          </a:p>
+          <a:p>
+            <a:pPr>
+              <a:defRPr sz="1000">
+                <a:solidFill>
+                  <a:srgbClr val="A1A1AA"/>
+                </a:solidFill>
+              </a:defRPr>
+            </a:pPr>
+            <a:r>
+              <a:t>Definición formal de DTOs, validaciones de esquema, cabecera-detalle fiscal y códigos de estado HTTP</a:t>
             </a:r>
           </a:p>
         </p:txBody>
@@ -10466,7 +10428,7 @@
         </p:nvSpPr>
         <p:spPr>
           <a:xfrm>
-            <a:off x="731520" y="1874519"/>
+            <a:off x="731520" y="1965960"/>
             <a:ext cx="10698480" cy="18288"/>
           </a:xfrm>
           <a:prstGeom prst="rect">
@@ -10503,57 +10465,14 @@
       </p:sp>
       <p:sp>
         <p:nvSpPr>
-          <p:cNvPr id="10" name="Rounded Rectangle 9"/>
-          <p:cNvSpPr/>
-          <p:nvPr/>
-        </p:nvSpPr>
-        <p:spPr>
-          <a:xfrm>
-            <a:off x="731520" y="1856231"/>
-            <a:ext cx="1097280" cy="54864"/>
-          </a:xfrm>
-          <a:prstGeom prst="roundRect">
-            <a:avLst/>
-          </a:prstGeom>
-          <a:solidFill>
-            <a:srgbClr val="FFFFFF"/>
-          </a:solidFill>
-          <a:ln>
-            <a:noFill/>
-          </a:ln>
-        </p:spPr>
-        <p:style>
-          <a:lnRef idx="1">
-            <a:schemeClr val="accent1"/>
-          </a:lnRef>
-          <a:fillRef idx="3">
-            <a:schemeClr val="accent1"/>
-          </a:fillRef>
-          <a:effectRef idx="2">
-            <a:schemeClr val="accent1"/>
-          </a:effectRef>
-          <a:fontRef idx="minor">
-            <a:schemeClr val="lt1"/>
-          </a:fontRef>
-        </p:style>
-        <p:txBody>
-          <a:bodyPr rtlCol="0" anchor="ctr"/>
-          <a:lstStyle/>
-          <a:p>
-            <a:pPr algn="ctr"/>
-          </a:p>
-        </p:txBody>
-      </p:sp>
-      <p:sp>
-        <p:nvSpPr>
-          <p:cNvPr id="11" name="TextBox 10"/>
+          <p:cNvPr id="10" name="TextBox 9"/>
           <p:cNvSpPr txBox="1"/>
           <p:nvPr/>
         </p:nvSpPr>
         <p:spPr>
           <a:xfrm>
-            <a:off x="731520" y="6309360"/>
-            <a:ext cx="7315200" cy="365760"/>
+            <a:off x="731520" y="6217920"/>
+            <a:ext cx="7772400" cy="365760"/>
           </a:xfrm>
           <a:prstGeom prst="rect">
             <a:avLst/>
@@ -10567,28 +10486,28 @@
           <a:lstStyle/>
           <a:p>
             <a:pPr>
-              <a:defRPr sz="950" b="1">
-                <a:solidFill>
-                  <a:srgbClr val="A1A1AA"/>
-                </a:solidFill>
-              </a:defRPr>
-            </a:pPr>
-            <a:r>
-              <a:t>🎙️  HABLA: CRISTHIAN PAUL (MIN 4-8)</a:t>
-            </a:r>
-          </a:p>
-        </p:txBody>
-      </p:sp>
-      <p:sp>
-        <p:nvSpPr>
-          <p:cNvPr id="12" name="TextBox 11"/>
+              <a:defRPr sz="900">
+                <a:solidFill>
+                  <a:srgbClr val="A1A1AA"/>
+                </a:solidFill>
+              </a:defRPr>
+            </a:pPr>
+            <a:r>
+              <a:t>🎙️ CRISTHIAN PAUL LAURA VARGAS • PONENCIA TÉCNICA</a:t>
+            </a:r>
+          </a:p>
+        </p:txBody>
+      </p:sp>
+      <p:sp>
+        <p:nvSpPr>
+          <p:cNvPr id="11" name="TextBox 10"/>
           <p:cNvSpPr txBox="1"/>
           <p:nvPr/>
         </p:nvSpPr>
         <p:spPr>
           <a:xfrm>
-            <a:off x="10058400" y="6309360"/>
-            <a:ext cx="1371600" cy="365760"/>
+            <a:off x="10241280" y="6217920"/>
+            <a:ext cx="1188720" cy="365760"/>
           </a:xfrm>
           <a:prstGeom prst="rect">
             <a:avLst/>
@@ -10602,9 +10521,9 @@
           <a:lstStyle/>
           <a:p>
             <a:pPr algn="r">
-              <a:defRPr sz="1100" b="1">
-                <a:solidFill>
-                  <a:srgbClr val="FFFFFF"/>
+              <a:defRPr sz="900" b="1">
+                <a:solidFill>
+                  <a:srgbClr val="71717A"/>
                 </a:solidFill>
               </a:defRPr>
             </a:pPr>
@@ -10616,7 +10535,7 @@
       </p:sp>
       <p:sp>
         <p:nvSpPr>
-          <p:cNvPr id="13" name="Rounded Rectangle 12"/>
+          <p:cNvPr id="12" name="Rounded Rectangle 11"/>
           <p:cNvSpPr/>
           <p:nvPr/>
         </p:nvSpPr>
@@ -10661,14 +10580,14 @@
       </p:sp>
       <p:sp>
         <p:nvSpPr>
-          <p:cNvPr id="14" name="TextBox 13"/>
+          <p:cNvPr id="13" name="TextBox 12"/>
           <p:cNvSpPr txBox="1"/>
           <p:nvPr/>
         </p:nvSpPr>
         <p:spPr>
           <a:xfrm>
-            <a:off x="896112" y="2240279"/>
-            <a:ext cx="4882896" cy="3566160"/>
+            <a:off x="868680" y="2240279"/>
+            <a:ext cx="4937760" cy="3566160"/>
           </a:xfrm>
           <a:prstGeom prst="rect">
             <a:avLst/>
@@ -10682,105 +10601,126 @@
           <a:lstStyle/>
           <a:p>
             <a:pPr>
-              <a:defRPr sz="1100" b="1">
+              <a:defRPr sz="1200" b="1">
                 <a:solidFill>
                   <a:srgbClr val="FFFFFF"/>
                 </a:solidFill>
               </a:defRPr>
             </a:pPr>
             <a:r>
-              <a:t>📦 Microservicios de Eliceo Parillo</a:t>
-            </a:r>
-          </a:p>
-          <a:p>
-            <a:pPr>
-              <a:defRPr sz="900">
-                <a:solidFill>
-                  <a:srgbClr val="A1A1AA"/>
-                </a:solidFill>
-              </a:defRPr>
-            </a:pPr>
-            <a:r>
-              <a:t>▪  pc-orden-ms (Transaccional - Puertos :8082 / :8083):</a:t>
-            </a:r>
-          </a:p>
-          <a:p>
-            <a:pPr>
-              <a:defRPr sz="900">
-                <a:solidFill>
-                  <a:srgbClr val="A1A1AA"/>
-                </a:solidFill>
-              </a:defRPr>
-            </a:pPr>
-            <a:r>
-              <a:t>▪    • Modelo Cabecera-Detalle: Orden -&gt; DetalleOrden con @OneToMany.</a:t>
-            </a:r>
-          </a:p>
-          <a:p>
-            <a:pPr>
-              <a:defRPr sz="900">
-                <a:solidFill>
-                  <a:srgbClr val="A1A1AA"/>
-                </a:solidFill>
-              </a:defRPr>
-            </a:pPr>
-            <a:r>
-              <a:t>▪    • Cálculo fiscal automatizado: Subtotal, IGV del 18% y Total.</a:t>
-            </a:r>
-          </a:p>
-          <a:p>
-            <a:pPr>
-              <a:defRPr sz="900">
-                <a:solidFill>
-                  <a:srgbClr val="A1A1AA"/>
-                </a:solidFill>
-              </a:defRPr>
-            </a:pPr>
-            <a:r>
-              <a:t>▪    • POST /api/v1/ordenes (201 Created) | GET /{id} (200 OK / 404).</a:t>
-            </a:r>
-          </a:p>
-          <a:p>
-            <a:pPr>
-              <a:defRPr sz="900">
-                <a:solidFill>
-                  <a:srgbClr val="A1A1AA"/>
-                </a:solidFill>
-              </a:defRPr>
-            </a:pPr>
-            <a:r>
-              <a:t>▪  pc-catalogo-ms (No Transaccional - Puerto :8081):</a:t>
-            </a:r>
-          </a:p>
-          <a:p>
-            <a:pPr>
-              <a:defRPr sz="900">
-                <a:solidFill>
-                  <a:srgbClr val="A1A1AA"/>
-                </a:solidFill>
-              </a:defRPr>
-            </a:pPr>
-            <a:r>
-              <a:t>▪    • Familias de hardware gamer: CPUs, GPUs, RAMs, SSDs.</a:t>
-            </a:r>
-          </a:p>
-          <a:p>
-            <a:pPr>
-              <a:defRPr sz="900">
-                <a:solidFill>
-                  <a:srgbClr val="A1A1AA"/>
-                </a:solidFill>
-              </a:defRPr>
-            </a:pPr>
-            <a:r>
-              <a:t>▪    • GET /api/v1/productos (200 OK) y GET /api/v1/categorias.</a:t>
-            </a:r>
-          </a:p>
-        </p:txBody>
-      </p:sp>
-      <p:sp>
-        <p:nvSpPr>
-          <p:cNvPr id="15" name="Rounded Rectangle 14"/>
+              <a:t>📦 Dominio de Inventario y Clientes (Eliceo Parillo)</a:t>
+            </a:r>
+          </a:p>
+          <a:p>
+            <a:pPr>
+              <a:spcBef>
+                <a:spcPts val="300"/>
+              </a:spcBef>
+              <a:defRPr sz="900">
+                <a:solidFill>
+                  <a:srgbClr val="A1A1AA"/>
+                </a:solidFill>
+              </a:defRPr>
+            </a:pPr>
+            <a:r>
+              <a:t>• pc-orden-ms (Transaccional - Puertos :8082 / :8083):</a:t>
+            </a:r>
+          </a:p>
+          <a:p>
+            <a:pPr>
+              <a:spcBef>
+                <a:spcPts val="300"/>
+              </a:spcBef>
+              <a:defRPr sz="900">
+                <a:solidFill>
+                  <a:srgbClr val="A1A1AA"/>
+                </a:solidFill>
+              </a:defRPr>
+            </a:pPr>
+            <a:r>
+              <a:t>•   • Modelo Cabecera-Detalle: Orden -&gt; DetalleOrden con @OneToMany.</a:t>
+            </a:r>
+          </a:p>
+          <a:p>
+            <a:pPr>
+              <a:spcBef>
+                <a:spcPts val="300"/>
+              </a:spcBef>
+              <a:defRPr sz="900">
+                <a:solidFill>
+                  <a:srgbClr val="A1A1AA"/>
+                </a:solidFill>
+              </a:defRPr>
+            </a:pPr>
+            <a:r>
+              <a:t>•   • Cálculo fiscal automatizado: Subtotal, IGV del 18% y Total.</a:t>
+            </a:r>
+          </a:p>
+          <a:p>
+            <a:pPr>
+              <a:spcBef>
+                <a:spcPts val="300"/>
+              </a:spcBef>
+              <a:defRPr sz="900">
+                <a:solidFill>
+                  <a:srgbClr val="A1A1AA"/>
+                </a:solidFill>
+              </a:defRPr>
+            </a:pPr>
+            <a:r>
+              <a:t>•   • POST /api/v1/ordenes (201 Created) | GET /{id} (200 OK / 404).</a:t>
+            </a:r>
+          </a:p>
+          <a:p>
+            <a:pPr>
+              <a:spcBef>
+                <a:spcPts val="300"/>
+              </a:spcBef>
+              <a:defRPr sz="900">
+                <a:solidFill>
+                  <a:srgbClr val="A1A1AA"/>
+                </a:solidFill>
+              </a:defRPr>
+            </a:pPr>
+            <a:r>
+              <a:t>• pc-catalogo-ms (No Transaccional - Puerto :8081):</a:t>
+            </a:r>
+          </a:p>
+          <a:p>
+            <a:pPr>
+              <a:spcBef>
+                <a:spcPts val="300"/>
+              </a:spcBef>
+              <a:defRPr sz="900">
+                <a:solidFill>
+                  <a:srgbClr val="A1A1AA"/>
+                </a:solidFill>
+              </a:defRPr>
+            </a:pPr>
+            <a:r>
+              <a:t>•   • Familias de hardware gamer: CPUs, GPUs, RAMs, SSDs.</a:t>
+            </a:r>
+          </a:p>
+          <a:p>
+            <a:pPr>
+              <a:spcBef>
+                <a:spcPts val="300"/>
+              </a:spcBef>
+              <a:defRPr sz="900">
+                <a:solidFill>
+                  <a:srgbClr val="A1A1AA"/>
+                </a:solidFill>
+              </a:defRPr>
+            </a:pPr>
+            <a:r>
+              <a:t>•   • GET /api/v1/productos (200 OK) y GET /api/v1/categorias.</a:t>
+            </a:r>
+          </a:p>
+        </p:txBody>
+      </p:sp>
+      <p:sp>
+        <p:nvSpPr>
+          <p:cNvPr id="14" name="Rounded Rectangle 13"/>
           <p:cNvSpPr/>
           <p:nvPr/>
         </p:nvSpPr>
@@ -10825,14 +10765,14 @@
       </p:sp>
       <p:sp>
         <p:nvSpPr>
-          <p:cNvPr id="16" name="TextBox 15"/>
+          <p:cNvPr id="15" name="TextBox 14"/>
           <p:cNvSpPr txBox="1"/>
           <p:nvPr/>
         </p:nvSpPr>
         <p:spPr>
           <a:xfrm>
-            <a:off x="6382512" y="2240279"/>
-            <a:ext cx="4882896" cy="3566160"/>
+            <a:off x="6355080" y="2240279"/>
+            <a:ext cx="4937760" cy="3566160"/>
           </a:xfrm>
           <a:prstGeom prst="rect">
             <a:avLst/>
@@ -10846,110 +10786,134 @@
           <a:lstStyle/>
           <a:p>
             <a:pPr>
-              <a:defRPr sz="1100" b="1">
+              <a:defRPr sz="1200" b="1">
                 <a:solidFill>
                   <a:srgbClr val="FFFFFF"/>
                 </a:solidFill>
               </a:defRPr>
             </a:pPr>
             <a:r>
-              <a:t>💳 Microservicios de Cristhian Paul</a:t>
-            </a:r>
-          </a:p>
-          <a:p>
-            <a:pPr>
-              <a:defRPr sz="900">
-                <a:solidFill>
-                  <a:srgbClr val="A1A1AA"/>
-                </a:solidFill>
-              </a:defRPr>
-            </a:pPr>
-            <a:r>
-              <a:t>▪  pc-pago-ms (Transaccional):</a:t>
-            </a:r>
-          </a:p>
-          <a:p>
-            <a:pPr>
-              <a:defRPr sz="900">
-                <a:solidFill>
-                  <a:srgbClr val="A1A1AA"/>
-                </a:solidFill>
-              </a:defRPr>
-            </a:pPr>
-            <a:r>
-              <a:t>▪    • Pasarela externa integrada con Mercado Pago Sandbox.</a:t>
-            </a:r>
-          </a:p>
-          <a:p>
-            <a:pPr>
-              <a:defRPr sz="900">
-                <a:solidFill>
-                  <a:srgbClr val="A1A1AA"/>
-                </a:solidFill>
-              </a:defRPr>
-            </a:pPr>
-            <a:r>
-              <a:t>▪    • POST /api/v1/pagos (201 Created / 400 Bad Request).</a:t>
-            </a:r>
-          </a:p>
-          <a:p>
-            <a:pPr>
-              <a:defRPr sz="900">
-                <a:solidFill>
-                  <a:srgbClr val="A1A1AA"/>
-                </a:solidFill>
-              </a:defRPr>
-            </a:pPr>
-            <a:r>
-              <a:t>▪    • Webhooks asíncronos para transición de estados de compra.</a:t>
-            </a:r>
-          </a:p>
-          <a:p>
-            <a:pPr>
-              <a:defRPr sz="900">
-                <a:solidFill>
-                  <a:srgbClr val="A1A1AA"/>
-                </a:solidFill>
-              </a:defRPr>
-            </a:pPr>
-            <a:r>
-              <a:t>▪  pc-cliente-ms (No Transaccional - Puerto :8084):</a:t>
-            </a:r>
-          </a:p>
-          <a:p>
-            <a:pPr>
-              <a:defRPr sz="900">
-                <a:solidFill>
-                  <a:srgbClr val="A1A1AA"/>
-                </a:solidFill>
-              </a:defRPr>
-            </a:pPr>
-            <a:r>
-              <a:t>▪    • Perfil de cliente con validadores de identidad nacionales.</a:t>
-            </a:r>
-          </a:p>
-          <a:p>
-            <a:pPr>
-              <a:defRPr sz="900">
-                <a:solidFill>
-                  <a:srgbClr val="A1A1AA"/>
-                </a:solidFill>
-              </a:defRPr>
-            </a:pPr>
-            <a:r>
-              <a:t>▪    • GET /api/v1/clientes/consulta-reniec/{dni} (8 dígitos).</a:t>
-            </a:r>
-          </a:p>
-          <a:p>
-            <a:pPr>
-              <a:defRPr sz="900">
-                <a:solidFill>
-                  <a:srgbClr val="A1A1AA"/>
-                </a:solidFill>
-              </a:defRPr>
-            </a:pPr>
-            <a:r>
-              <a:t>▪    • GET /api/v1/clientes/consulta-sunat/{ruc} (11 dígitos, ACTIVO/HABIDO).</a:t>
+              <a:t>💳 Dominio Transaccional e Infraestructura (Cristhian Paul)</a:t>
+            </a:r>
+          </a:p>
+          <a:p>
+            <a:pPr>
+              <a:spcBef>
+                <a:spcPts val="300"/>
+              </a:spcBef>
+              <a:defRPr sz="900">
+                <a:solidFill>
+                  <a:srgbClr val="A1A1AA"/>
+                </a:solidFill>
+              </a:defRPr>
+            </a:pPr>
+            <a:r>
+              <a:t>• pc-pago-ms (Transaccional):</a:t>
+            </a:r>
+          </a:p>
+          <a:p>
+            <a:pPr>
+              <a:spcBef>
+                <a:spcPts val="300"/>
+              </a:spcBef>
+              <a:defRPr sz="900">
+                <a:solidFill>
+                  <a:srgbClr val="A1A1AA"/>
+                </a:solidFill>
+              </a:defRPr>
+            </a:pPr>
+            <a:r>
+              <a:t>•   • Pasarela externa integrada con Mercado Pago Sandbox.</a:t>
+            </a:r>
+          </a:p>
+          <a:p>
+            <a:pPr>
+              <a:spcBef>
+                <a:spcPts val="300"/>
+              </a:spcBef>
+              <a:defRPr sz="900">
+                <a:solidFill>
+                  <a:srgbClr val="A1A1AA"/>
+                </a:solidFill>
+              </a:defRPr>
+            </a:pPr>
+            <a:r>
+              <a:t>•   • POST /api/v1/pagos (201 Created / 400 Bad Request).</a:t>
+            </a:r>
+          </a:p>
+          <a:p>
+            <a:pPr>
+              <a:spcBef>
+                <a:spcPts val="300"/>
+              </a:spcBef>
+              <a:defRPr sz="900">
+                <a:solidFill>
+                  <a:srgbClr val="A1A1AA"/>
+                </a:solidFill>
+              </a:defRPr>
+            </a:pPr>
+            <a:r>
+              <a:t>•   • Webhooks asíncronos para transición de estados de compra.</a:t>
+            </a:r>
+          </a:p>
+          <a:p>
+            <a:pPr>
+              <a:spcBef>
+                <a:spcPts val="300"/>
+              </a:spcBef>
+              <a:defRPr sz="900">
+                <a:solidFill>
+                  <a:srgbClr val="A1A1AA"/>
+                </a:solidFill>
+              </a:defRPr>
+            </a:pPr>
+            <a:r>
+              <a:t>• pc-cliente-ms (No Transaccional - Puerto :8084):</a:t>
+            </a:r>
+          </a:p>
+          <a:p>
+            <a:pPr>
+              <a:spcBef>
+                <a:spcPts val="300"/>
+              </a:spcBef>
+              <a:defRPr sz="900">
+                <a:solidFill>
+                  <a:srgbClr val="A1A1AA"/>
+                </a:solidFill>
+              </a:defRPr>
+            </a:pPr>
+            <a:r>
+              <a:t>•   • Perfil de cliente con validadores de identidad nacionales.</a:t>
+            </a:r>
+          </a:p>
+          <a:p>
+            <a:pPr>
+              <a:spcBef>
+                <a:spcPts val="300"/>
+              </a:spcBef>
+              <a:defRPr sz="900">
+                <a:solidFill>
+                  <a:srgbClr val="A1A1AA"/>
+                </a:solidFill>
+              </a:defRPr>
+            </a:pPr>
+            <a:r>
+              <a:t>•   • GET /api/v1/clientes/consulta-reniec/{dni} (8 dígitos).</a:t>
+            </a:r>
+          </a:p>
+          <a:p>
+            <a:pPr>
+              <a:spcBef>
+                <a:spcPts val="300"/>
+              </a:spcBef>
+              <a:defRPr sz="900">
+                <a:solidFill>
+                  <a:srgbClr val="A1A1AA"/>
+                </a:solidFill>
+              </a:defRPr>
+            </a:pPr>
+            <a:r>
+              <a:t>•   • GET /api/v1/clientes/consulta-sunat/{ruc} (11 dígitos, ACTIVO/HABIDO).</a:t>
             </a:r>
           </a:p>
         </p:txBody>
@@ -11201,8 +11165,8 @@
         </p:nvSpPr>
         <p:spPr>
           <a:xfrm>
-            <a:off x="8412480" y="384048"/>
-            <a:ext cx="3017520" cy="384048"/>
+            <a:off x="7772400" y="384048"/>
+            <a:ext cx="3657600" cy="384048"/>
           </a:xfrm>
           <a:prstGeom prst="roundRect">
             <a:avLst/>
@@ -11235,14 +11199,14 @@
           <a:lstStyle/>
           <a:p>
             <a:pPr algn="ctr">
-              <a:defRPr sz="900" b="1">
-                <a:solidFill>
-                  <a:srgbClr val="FFFFFF"/>
-                </a:solidFill>
-              </a:defRPr>
-            </a:pPr>
-            <a:r>
-              <a:t>PILAR 2 • FACTOR III</a:t>
+              <a:defRPr sz="800" b="1">
+                <a:solidFill>
+                  <a:srgbClr val="A1A1AA"/>
+                </a:solidFill>
+              </a:defRPr>
+            </a:pPr>
+            <a:r>
+              <a:t>PRINCIPIOS TWELVE-FACTOR</a:t>
             </a:r>
           </a:p>
         </p:txBody>
@@ -11255,7 +11219,7 @@
         </p:nvSpPr>
         <p:spPr>
           <a:xfrm>
-            <a:off x="731520" y="1005840"/>
+            <a:off x="731520" y="1051560"/>
             <a:ext cx="10698480" cy="868680"/>
           </a:xfrm>
           <a:prstGeom prst="rect">
@@ -11270,26 +11234,26 @@
           <a:lstStyle/>
           <a:p>
             <a:pPr>
-              <a:defRPr sz="2000" b="1">
+              <a:defRPr sz="1900" b="1">
                 <a:solidFill>
                   <a:srgbClr val="FFFFFF"/>
                 </a:solidFill>
               </a:defRPr>
             </a:pPr>
             <a:r>
-              <a:t>CONFIGURACIÓN EXTERNALIZADA DEV VS PROD</a:t>
-            </a:r>
-          </a:p>
-          <a:p>
-            <a:pPr>
-              <a:defRPr sz="1100">
-                <a:solidFill>
-                  <a:srgbClr val="A1A1AA"/>
-                </a:solidFill>
-              </a:defRPr>
-            </a:pPr>
-            <a:r>
-              <a:t>Principio del Artefacto Inmutable: el mismo JAR opera en desarrollo y producción sin recompilar</a:t>
+              <a:t>GESTIÓN EXTERNALIZADA DE CONFIGURACIÓN: PERFILES DEV VS PROD</a:t>
+            </a:r>
+          </a:p>
+          <a:p>
+            <a:pPr>
+              <a:defRPr sz="1000">
+                <a:solidFill>
+                  <a:srgbClr val="A1A1AA"/>
+                </a:solidFill>
+              </a:defRPr>
+            </a:pPr>
+            <a:r>
+              <a:t>Inmutabilidad del artefacto compilado: desacoplamiento estricto de credenciales, almacenes de datos y endpoints de red</a:t>
             </a:r>
           </a:p>
         </p:txBody>
@@ -11302,7 +11266,7 @@
         </p:nvSpPr>
         <p:spPr>
           <a:xfrm>
-            <a:off x="731520" y="1874519"/>
+            <a:off x="731520" y="1965960"/>
             <a:ext cx="10698480" cy="18288"/>
           </a:xfrm>
           <a:prstGeom prst="rect">
@@ -11339,57 +11303,14 @@
       </p:sp>
       <p:sp>
         <p:nvSpPr>
-          <p:cNvPr id="10" name="Rounded Rectangle 9"/>
-          <p:cNvSpPr/>
-          <p:nvPr/>
-        </p:nvSpPr>
-        <p:spPr>
-          <a:xfrm>
-            <a:off x="731520" y="1856231"/>
-            <a:ext cx="1097280" cy="54864"/>
-          </a:xfrm>
-          <a:prstGeom prst="roundRect">
-            <a:avLst/>
-          </a:prstGeom>
-          <a:solidFill>
-            <a:srgbClr val="FFFFFF"/>
-          </a:solidFill>
-          <a:ln>
-            <a:noFill/>
-          </a:ln>
-        </p:spPr>
-        <p:style>
-          <a:lnRef idx="1">
-            <a:schemeClr val="accent1"/>
-          </a:lnRef>
-          <a:fillRef idx="3">
-            <a:schemeClr val="accent1"/>
-          </a:fillRef>
-          <a:effectRef idx="2">
-            <a:schemeClr val="accent1"/>
-          </a:effectRef>
-          <a:fontRef idx="minor">
-            <a:schemeClr val="lt1"/>
-          </a:fontRef>
-        </p:style>
-        <p:txBody>
-          <a:bodyPr rtlCol="0" anchor="ctr"/>
-          <a:lstStyle/>
-          <a:p>
-            <a:pPr algn="ctr"/>
-          </a:p>
-        </p:txBody>
-      </p:sp>
-      <p:sp>
-        <p:nvSpPr>
-          <p:cNvPr id="11" name="TextBox 10"/>
+          <p:cNvPr id="10" name="TextBox 9"/>
           <p:cNvSpPr txBox="1"/>
           <p:nvPr/>
         </p:nvSpPr>
         <p:spPr>
           <a:xfrm>
-            <a:off x="731520" y="6309360"/>
-            <a:ext cx="7315200" cy="365760"/>
+            <a:off x="731520" y="6217920"/>
+            <a:ext cx="7772400" cy="365760"/>
           </a:xfrm>
           <a:prstGeom prst="rect">
             <a:avLst/>
@@ -11403,28 +11324,28 @@
           <a:lstStyle/>
           <a:p>
             <a:pPr>
-              <a:defRPr sz="950" b="1">
-                <a:solidFill>
-                  <a:srgbClr val="A1A1AA"/>
-                </a:solidFill>
-              </a:defRPr>
-            </a:pPr>
-            <a:r>
-              <a:t>🎙️  HABLA: CRISTHIAN PAUL (MIN 4-8)</a:t>
-            </a:r>
-          </a:p>
-        </p:txBody>
-      </p:sp>
-      <p:sp>
-        <p:nvSpPr>
-          <p:cNvPr id="12" name="TextBox 11"/>
+              <a:defRPr sz="900">
+                <a:solidFill>
+                  <a:srgbClr val="A1A1AA"/>
+                </a:solidFill>
+              </a:defRPr>
+            </a:pPr>
+            <a:r>
+              <a:t>🎙️ CRISTHIAN PAUL LAURA VARGAS • PONENCIA TÉCNICA</a:t>
+            </a:r>
+          </a:p>
+        </p:txBody>
+      </p:sp>
+      <p:sp>
+        <p:nvSpPr>
+          <p:cNvPr id="11" name="TextBox 10"/>
           <p:cNvSpPr txBox="1"/>
           <p:nvPr/>
         </p:nvSpPr>
         <p:spPr>
           <a:xfrm>
-            <a:off x="10058400" y="6309360"/>
-            <a:ext cx="1371600" cy="365760"/>
+            <a:off x="10241280" y="6217920"/>
+            <a:ext cx="1188720" cy="365760"/>
           </a:xfrm>
           <a:prstGeom prst="rect">
             <a:avLst/>
@@ -11438,9 +11359,9 @@
           <a:lstStyle/>
           <a:p>
             <a:pPr algn="r">
-              <a:defRPr sz="1100" b="1">
-                <a:solidFill>
-                  <a:srgbClr val="FFFFFF"/>
+              <a:defRPr sz="900" b="1">
+                <a:solidFill>
+                  <a:srgbClr val="71717A"/>
                 </a:solidFill>
               </a:defRPr>
             </a:pPr>
@@ -11452,7 +11373,7 @@
       </p:sp>
       <p:sp>
         <p:nvSpPr>
-          <p:cNvPr id="13" name="Rounded Rectangle 12"/>
+          <p:cNvPr id="12" name="Rounded Rectangle 11"/>
           <p:cNvSpPr/>
           <p:nvPr/>
         </p:nvSpPr>
@@ -11497,14 +11418,14 @@
       </p:sp>
       <p:sp>
         <p:nvSpPr>
-          <p:cNvPr id="14" name="TextBox 13"/>
+          <p:cNvPr id="13" name="TextBox 12"/>
           <p:cNvSpPr txBox="1"/>
           <p:nvPr/>
         </p:nvSpPr>
         <p:spPr>
           <a:xfrm>
-            <a:off x="896112" y="2240279"/>
-            <a:ext cx="4882896" cy="3566160"/>
+            <a:off x="868680" y="2240279"/>
+            <a:ext cx="4937760" cy="3566160"/>
           </a:xfrm>
           <a:prstGeom prst="rect">
             <a:avLst/>
@@ -11518,7 +11439,7 @@
           <a:lstStyle/>
           <a:p>
             <a:pPr>
-              <a:defRPr sz="1100" b="1">
+              <a:defRPr sz="1200" b="1">
                 <a:solidFill>
                   <a:srgbClr val="FFFFFF"/>
                 </a:solidFill>
@@ -11530,69 +11451,84 @@
           </a:p>
           <a:p>
             <a:pPr>
-              <a:defRPr sz="900">
-                <a:solidFill>
-                  <a:srgbClr val="A1A1AA"/>
-                </a:solidFill>
-              </a:defRPr>
-            </a:pPr>
-            <a:r>
-              <a:t>▪  Base de datos local: localhost:5433/orden_db.</a:t>
-            </a:r>
-          </a:p>
-          <a:p>
-            <a:pPr>
-              <a:defRPr sz="900">
-                <a:solidFill>
-                  <a:srgbClr val="A1A1AA"/>
-                </a:solidFill>
-              </a:defRPr>
-            </a:pPr>
-            <a:r>
-              <a:t>▪  DDL Hibernate: update (esquema evolutivo automático).</a:t>
-            </a:r>
-          </a:p>
-          <a:p>
-            <a:pPr>
-              <a:defRPr sz="900">
-                <a:solidFill>
-                  <a:srgbClr val="A1A1AA"/>
-                </a:solidFill>
-              </a:defRPr>
-            </a:pPr>
-            <a:r>
-              <a:t>▪  Nivel de Log: DEBUG (rastreo detallado de sentencias SQL e hilos).</a:t>
-            </a:r>
-          </a:p>
-          <a:p>
-            <a:pPr>
-              <a:defRPr sz="900">
-                <a:solidFill>
-                  <a:srgbClr val="A1A1AA"/>
-                </a:solidFill>
-              </a:defRPr>
-            </a:pPr>
-            <a:r>
-              <a:t>▪  Actuator: Expone health, info, metrics y prometheus abiertamente.</a:t>
-            </a:r>
-          </a:p>
-          <a:p>
-            <a:pPr>
-              <a:defRPr sz="900">
-                <a:solidFill>
-                  <a:srgbClr val="A1A1AA"/>
-                </a:solidFill>
-              </a:defRPr>
-            </a:pPr>
-            <a:r>
-              <a:t>▪  Eureka Server: Registro en http://localhost:8761/eureka/.</a:t>
-            </a:r>
-          </a:p>
-        </p:txBody>
-      </p:sp>
-      <p:sp>
-        <p:nvSpPr>
-          <p:cNvPr id="15" name="Rounded Rectangle 14"/>
+              <a:spcBef>
+                <a:spcPts val="300"/>
+              </a:spcBef>
+              <a:defRPr sz="900">
+                <a:solidFill>
+                  <a:srgbClr val="A1A1AA"/>
+                </a:solidFill>
+              </a:defRPr>
+            </a:pPr>
+            <a:r>
+              <a:t>• Base de datos local: localhost:5433/orden_db.</a:t>
+            </a:r>
+          </a:p>
+          <a:p>
+            <a:pPr>
+              <a:spcBef>
+                <a:spcPts val="300"/>
+              </a:spcBef>
+              <a:defRPr sz="900">
+                <a:solidFill>
+                  <a:srgbClr val="A1A1AA"/>
+                </a:solidFill>
+              </a:defRPr>
+            </a:pPr>
+            <a:r>
+              <a:t>• DDL Hibernate: update (esquema evolutivo automático).</a:t>
+            </a:r>
+          </a:p>
+          <a:p>
+            <a:pPr>
+              <a:spcBef>
+                <a:spcPts val="300"/>
+              </a:spcBef>
+              <a:defRPr sz="900">
+                <a:solidFill>
+                  <a:srgbClr val="A1A1AA"/>
+                </a:solidFill>
+              </a:defRPr>
+            </a:pPr>
+            <a:r>
+              <a:t>• Nivel de Log: DEBUG (rastreo detallado de sentencias SQL e hilos).</a:t>
+            </a:r>
+          </a:p>
+          <a:p>
+            <a:pPr>
+              <a:spcBef>
+                <a:spcPts val="300"/>
+              </a:spcBef>
+              <a:defRPr sz="900">
+                <a:solidFill>
+                  <a:srgbClr val="A1A1AA"/>
+                </a:solidFill>
+              </a:defRPr>
+            </a:pPr>
+            <a:r>
+              <a:t>• Actuator: Expone health, info, metrics y prometheus abiertamente.</a:t>
+            </a:r>
+          </a:p>
+          <a:p>
+            <a:pPr>
+              <a:spcBef>
+                <a:spcPts val="300"/>
+              </a:spcBef>
+              <a:defRPr sz="900">
+                <a:solidFill>
+                  <a:srgbClr val="A1A1AA"/>
+                </a:solidFill>
+              </a:defRPr>
+            </a:pPr>
+            <a:r>
+              <a:t>• Eureka Server: Registro en http://localhost:8761/eureka/.</a:t>
+            </a:r>
+          </a:p>
+        </p:txBody>
+      </p:sp>
+      <p:sp>
+        <p:nvSpPr>
+          <p:cNvPr id="14" name="Rounded Rectangle 13"/>
           <p:cNvSpPr/>
           <p:nvPr/>
         </p:nvSpPr>
@@ -11637,14 +11573,14 @@
       </p:sp>
       <p:sp>
         <p:nvSpPr>
-          <p:cNvPr id="16" name="TextBox 15"/>
+          <p:cNvPr id="15" name="TextBox 14"/>
           <p:cNvSpPr txBox="1"/>
           <p:nvPr/>
         </p:nvSpPr>
         <p:spPr>
           <a:xfrm>
-            <a:off x="6382512" y="2240279"/>
-            <a:ext cx="4882896" cy="3566160"/>
+            <a:off x="6355080" y="2240279"/>
+            <a:ext cx="4937760" cy="3566160"/>
           </a:xfrm>
           <a:prstGeom prst="rect">
             <a:avLst/>
@@ -11658,7 +11594,7 @@
           <a:lstStyle/>
           <a:p>
             <a:pPr>
-              <a:defRPr sz="1100" b="1">
+              <a:defRPr sz="1200" b="1">
                 <a:solidFill>
                   <a:srgbClr val="FFFFFF"/>
                 </a:solidFill>
@@ -11670,62 +11606,77 @@
           </a:p>
           <a:p>
             <a:pPr>
-              <a:defRPr sz="900">
-                <a:solidFill>
-                  <a:srgbClr val="A1A1AA"/>
-                </a:solidFill>
-              </a:defRPr>
-            </a:pPr>
-            <a:r>
-              <a:t>▪  Red interna Docker: Aislada en red puente pagatu-prod-net.</a:t>
-            </a:r>
-          </a:p>
-          <a:p>
-            <a:pPr>
-              <a:defRPr sz="900">
-                <a:solidFill>
-                  <a:srgbClr val="A1A1AA"/>
-                </a:solidFill>
-              </a:defRPr>
-            </a:pPr>
-            <a:r>
-              <a:t>▪  Credenciales protegidas: Variables ${POSTGRES_PASSWORD} (cero secretos en Git).</a:t>
-            </a:r>
-          </a:p>
-          <a:p>
-            <a:pPr>
-              <a:defRPr sz="900">
-                <a:solidFill>
-                  <a:srgbClr val="A1A1AA"/>
-                </a:solidFill>
-              </a:defRPr>
-            </a:pPr>
-            <a:r>
-              <a:t>▪  DDL Hibernate: validate (protección estricta contra alteraciones).</a:t>
-            </a:r>
-          </a:p>
-          <a:p>
-            <a:pPr>
-              <a:defRPr sz="900">
-                <a:solidFill>
-                  <a:srgbClr val="A1A1AA"/>
-                </a:solidFill>
-              </a:defRPr>
-            </a:pPr>
-            <a:r>
-              <a:t>▪  Actuator seguro: Información sensible oculta al exterior.</a:t>
-            </a:r>
-          </a:p>
-          <a:p>
-            <a:pPr>
-              <a:defRPr sz="900">
-                <a:solidFill>
-                  <a:srgbClr val="A1A1AA"/>
-                </a:solidFill>
-              </a:defRPr>
-            </a:pPr>
-            <a:r>
-              <a:t>▪  Resolución de host por nombre DNS de contenedor en Docker.</a:t>
+              <a:spcBef>
+                <a:spcPts val="300"/>
+              </a:spcBef>
+              <a:defRPr sz="900">
+                <a:solidFill>
+                  <a:srgbClr val="A1A1AA"/>
+                </a:solidFill>
+              </a:defRPr>
+            </a:pPr>
+            <a:r>
+              <a:t>• Red interna Docker: Aislada en red puente pagatu-prod-net.</a:t>
+            </a:r>
+          </a:p>
+          <a:p>
+            <a:pPr>
+              <a:spcBef>
+                <a:spcPts val="300"/>
+              </a:spcBef>
+              <a:defRPr sz="900">
+                <a:solidFill>
+                  <a:srgbClr val="A1A1AA"/>
+                </a:solidFill>
+              </a:defRPr>
+            </a:pPr>
+            <a:r>
+              <a:t>• Credenciales protegidas: Variables ${POSTGRES_PASSWORD} (cero secretos en Git).</a:t>
+            </a:r>
+          </a:p>
+          <a:p>
+            <a:pPr>
+              <a:spcBef>
+                <a:spcPts val="300"/>
+              </a:spcBef>
+              <a:defRPr sz="900">
+                <a:solidFill>
+                  <a:srgbClr val="A1A1AA"/>
+                </a:solidFill>
+              </a:defRPr>
+            </a:pPr>
+            <a:r>
+              <a:t>• DDL Hibernate: validate (protección estricta contra alteraciones).</a:t>
+            </a:r>
+          </a:p>
+          <a:p>
+            <a:pPr>
+              <a:spcBef>
+                <a:spcPts val="300"/>
+              </a:spcBef>
+              <a:defRPr sz="900">
+                <a:solidFill>
+                  <a:srgbClr val="A1A1AA"/>
+                </a:solidFill>
+              </a:defRPr>
+            </a:pPr>
+            <a:r>
+              <a:t>• Actuator seguro: Información sensible oculta al exterior.</a:t>
+            </a:r>
+          </a:p>
+          <a:p>
+            <a:pPr>
+              <a:spcBef>
+                <a:spcPts val="300"/>
+              </a:spcBef>
+              <a:defRPr sz="900">
+                <a:solidFill>
+                  <a:srgbClr val="A1A1AA"/>
+                </a:solidFill>
+              </a:defRPr>
+            </a:pPr>
+            <a:r>
+              <a:t>• Resolución de host por nombre DNS de contenedor en Docker.</a:t>
             </a:r>
           </a:p>
         </p:txBody>
@@ -11977,8 +11928,8 @@
         </p:nvSpPr>
         <p:spPr>
           <a:xfrm>
-            <a:off x="8412480" y="384048"/>
-            <a:ext cx="3017520" cy="384048"/>
+            <a:off x="7772400" y="384048"/>
+            <a:ext cx="3657600" cy="384048"/>
           </a:xfrm>
           <a:prstGeom prst="roundRect">
             <a:avLst/>
@@ -12011,14 +11962,14 @@
           <a:lstStyle/>
           <a:p>
             <a:pPr algn="ctr">
-              <a:defRPr sz="900" b="1">
-                <a:solidFill>
-                  <a:srgbClr val="FFFFFF"/>
-                </a:solidFill>
-              </a:defRPr>
-            </a:pPr>
-            <a:r>
-              <a:t>PILAR 2 • MATRIZ DE MAPEO</a:t>
+              <a:defRPr sz="800" b="1">
+                <a:solidFill>
+                  <a:srgbClr val="A1A1AA"/>
+                </a:solidFill>
+              </a:defRPr>
+            </a:pPr>
+            <a:r>
+              <a:t>TOPOLOGÍA Y ENRUTAMIENTO</a:t>
             </a:r>
           </a:p>
         </p:txBody>
@@ -12031,7 +11982,7 @@
         </p:nvSpPr>
         <p:spPr>
           <a:xfrm>
-            <a:off x="731520" y="1005840"/>
+            <a:off x="731520" y="1051560"/>
             <a:ext cx="10698480" cy="868680"/>
           </a:xfrm>
           <a:prstGeom prst="rect">
@@ -12046,26 +11997,26 @@
           <a:lstStyle/>
           <a:p>
             <a:pPr>
-              <a:defRPr sz="2000" b="1">
+              <a:defRPr sz="1900" b="1">
                 <a:solidFill>
                   <a:srgbClr val="FFFFFF"/>
                 </a:solidFill>
               </a:defRPr>
             </a:pPr>
             <a:r>
-              <a:t>MATRIZ INTEGRAL DE MAPEO MULTICAPA Y PUERTOS</a:t>
-            </a:r>
-          </a:p>
-          <a:p>
-            <a:pPr>
-              <a:defRPr sz="1100">
-                <a:solidFill>
-                  <a:srgbClr val="A1A1AA"/>
-                </a:solidFill>
-              </a:defRPr>
-            </a:pPr>
-            <a:r>
-              <a:t>Segregación de puertos DEV vs PROD y resolución dinámica de tráfico (Tabla 3 de la Guía)</a:t>
+              <a:t>TOPOLOGÍA DE RED, ENRUTAMIENTO REACTIVO Y MAPEO DE PUERTOS</a:t>
+            </a:r>
+          </a:p>
+          <a:p>
+            <a:pPr>
+              <a:defRPr sz="1000">
+                <a:solidFill>
+                  <a:srgbClr val="A1A1AA"/>
+                </a:solidFill>
+              </a:defRPr>
+            </a:pPr>
+            <a:r>
+              <a:t>Resolución desacoplada mediante Service Registry (lb://) y blindaje perimetral contra exposición directa</a:t>
             </a:r>
           </a:p>
         </p:txBody>
@@ -12078,7 +12029,7 @@
         </p:nvSpPr>
         <p:spPr>
           <a:xfrm>
-            <a:off x="731520" y="1874519"/>
+            <a:off x="731520" y="1965960"/>
             <a:ext cx="10698480" cy="18288"/>
           </a:xfrm>
           <a:prstGeom prst="rect">
@@ -12115,57 +12066,14 @@
       </p:sp>
       <p:sp>
         <p:nvSpPr>
-          <p:cNvPr id="10" name="Rounded Rectangle 9"/>
-          <p:cNvSpPr/>
-          <p:nvPr/>
-        </p:nvSpPr>
-        <p:spPr>
-          <a:xfrm>
-            <a:off x="731520" y="1856231"/>
-            <a:ext cx="1097280" cy="54864"/>
-          </a:xfrm>
-          <a:prstGeom prst="roundRect">
-            <a:avLst/>
-          </a:prstGeom>
-          <a:solidFill>
-            <a:srgbClr val="FFFFFF"/>
-          </a:solidFill>
-          <a:ln>
-            <a:noFill/>
-          </a:ln>
-        </p:spPr>
-        <p:style>
-          <a:lnRef idx="1">
-            <a:schemeClr val="accent1"/>
-          </a:lnRef>
-          <a:fillRef idx="3">
-            <a:schemeClr val="accent1"/>
-          </a:fillRef>
-          <a:effectRef idx="2">
-            <a:schemeClr val="accent1"/>
-          </a:effectRef>
-          <a:fontRef idx="minor">
-            <a:schemeClr val="lt1"/>
-          </a:fontRef>
-        </p:style>
-        <p:txBody>
-          <a:bodyPr rtlCol="0" anchor="ctr"/>
-          <a:lstStyle/>
-          <a:p>
-            <a:pPr algn="ctr"/>
-          </a:p>
-        </p:txBody>
-      </p:sp>
-      <p:sp>
-        <p:nvSpPr>
-          <p:cNvPr id="11" name="TextBox 10"/>
+          <p:cNvPr id="10" name="TextBox 9"/>
           <p:cNvSpPr txBox="1"/>
           <p:nvPr/>
         </p:nvSpPr>
         <p:spPr>
           <a:xfrm>
-            <a:off x="731520" y="6309360"/>
-            <a:ext cx="7315200" cy="365760"/>
+            <a:off x="731520" y="6217920"/>
+            <a:ext cx="7772400" cy="365760"/>
           </a:xfrm>
           <a:prstGeom prst="rect">
             <a:avLst/>
@@ -12179,28 +12087,28 @@
           <a:lstStyle/>
           <a:p>
             <a:pPr>
-              <a:defRPr sz="950" b="1">
-                <a:solidFill>
-                  <a:srgbClr val="A1A1AA"/>
-                </a:solidFill>
-              </a:defRPr>
-            </a:pPr>
-            <a:r>
-              <a:t>🎙️  HABLA: ELICEO PARILLO (MIN 0-4)</a:t>
-            </a:r>
-          </a:p>
-        </p:txBody>
-      </p:sp>
-      <p:sp>
-        <p:nvSpPr>
-          <p:cNvPr id="12" name="TextBox 11"/>
+              <a:defRPr sz="900">
+                <a:solidFill>
+                  <a:srgbClr val="A1A1AA"/>
+                </a:solidFill>
+              </a:defRPr>
+            </a:pPr>
+            <a:r>
+              <a:t>🎙️ ELICEO PARILLO MOSTAJO • PONENCIA TÉCNICA</a:t>
+            </a:r>
+          </a:p>
+        </p:txBody>
+      </p:sp>
+      <p:sp>
+        <p:nvSpPr>
+          <p:cNvPr id="11" name="TextBox 10"/>
           <p:cNvSpPr txBox="1"/>
           <p:nvPr/>
         </p:nvSpPr>
         <p:spPr>
           <a:xfrm>
-            <a:off x="10058400" y="6309360"/>
-            <a:ext cx="1371600" cy="365760"/>
+            <a:off x="10241280" y="6217920"/>
+            <a:ext cx="1188720" cy="365760"/>
           </a:xfrm>
           <a:prstGeom prst="rect">
             <a:avLst/>
@@ -12214,9 +12122,9 @@
           <a:lstStyle/>
           <a:p>
             <a:pPr algn="r">
-              <a:defRPr sz="1100" b="1">
-                <a:solidFill>
-                  <a:srgbClr val="FFFFFF"/>
+              <a:defRPr sz="900" b="1">
+                <a:solidFill>
+                  <a:srgbClr val="71717A"/>
                 </a:solidFill>
               </a:defRPr>
             </a:pPr>
@@ -12228,7 +12136,7 @@
       </p:sp>
       <p:sp>
         <p:nvSpPr>
-          <p:cNvPr id="13" name="Rounded Rectangle 12"/>
+          <p:cNvPr id="12" name="Rounded Rectangle 11"/>
           <p:cNvSpPr/>
           <p:nvPr/>
         </p:nvSpPr>
@@ -12273,14 +12181,14 @@
       </p:sp>
       <p:sp>
         <p:nvSpPr>
-          <p:cNvPr id="14" name="TextBox 13"/>
+          <p:cNvPr id="13" name="TextBox 12"/>
           <p:cNvSpPr txBox="1"/>
           <p:nvPr/>
         </p:nvSpPr>
         <p:spPr>
           <a:xfrm>
-            <a:off x="896112" y="2240279"/>
-            <a:ext cx="4882896" cy="3566160"/>
+            <a:off x="868680" y="2240279"/>
+            <a:ext cx="4937760" cy="3566160"/>
           </a:xfrm>
           <a:prstGeom prst="rect">
             <a:avLst/>
@@ -12294,81 +12202,96 @@
           <a:lstStyle/>
           <a:p>
             <a:pPr>
-              <a:defRPr sz="1100" b="1">
+              <a:defRPr sz="1200" b="1">
                 <a:solidFill>
                   <a:srgbClr val="FFFFFF"/>
                 </a:solidFill>
               </a:defRPr>
             </a:pPr>
             <a:r>
-              <a:t>🗺️ Mapeo Lógico en API Gateway (:18080)</a:t>
-            </a:r>
-          </a:p>
-          <a:p>
-            <a:pPr>
-              <a:defRPr sz="900">
-                <a:solidFill>
-                  <a:srgbClr val="A1A1AA"/>
-                </a:solidFill>
-              </a:defRPr>
-            </a:pPr>
-            <a:r>
-              <a:t>▪  1. /api/v1/ordenes/** -&gt; lb://pagatu-orden-ms (Round Robin :8082/:8083).</a:t>
-            </a:r>
-          </a:p>
-          <a:p>
-            <a:pPr>
-              <a:defRPr sz="900">
-                <a:solidFill>
-                  <a:srgbClr val="A1A1AA"/>
-                </a:solidFill>
-              </a:defRPr>
-            </a:pPr>
-            <a:r>
-              <a:t>▪  2. /api/v1/productos/** -&gt; lb://pagatu-catalogo-ms (:8081).</a:t>
-            </a:r>
-          </a:p>
-          <a:p>
-            <a:pPr>
-              <a:defRPr sz="900">
-                <a:solidFill>
-                  <a:srgbClr val="A1A1AA"/>
-                </a:solidFill>
-              </a:defRPr>
-            </a:pPr>
-            <a:r>
-              <a:t>▪  3. /api/v1/clientes/** -&gt; lb://pagatu-cliente-ms (:8084).</a:t>
-            </a:r>
-          </a:p>
-          <a:p>
-            <a:pPr>
-              <a:defRPr sz="900">
-                <a:solidFill>
-                  <a:srgbClr val="A1A1AA"/>
-                </a:solidFill>
-              </a:defRPr>
-            </a:pPr>
-            <a:r>
-              <a:t>▪  4. /api/v1/pagos/** -&gt; lb://pc-pago-ms.</a:t>
-            </a:r>
-          </a:p>
-          <a:p>
-            <a:pPr>
-              <a:defRPr sz="900">
-                <a:solidFill>
-                  <a:srgbClr val="A1A1AA"/>
-                </a:solidFill>
-              </a:defRPr>
-            </a:pPr>
-            <a:r>
-              <a:t>▪  5. Mapeo Jackson: @JsonManagedReference y @JsonBackReference eliminan bucles.</a:t>
-            </a:r>
-          </a:p>
-        </p:txBody>
-      </p:sp>
-      <p:sp>
-        <p:nvSpPr>
-          <p:cNvPr id="15" name="Rounded Rectangle 14"/>
+              <a:t>🗺️ Enrutamiento Perimetral en API Gateway (:18080)</a:t>
+            </a:r>
+          </a:p>
+          <a:p>
+            <a:pPr>
+              <a:spcBef>
+                <a:spcPts val="300"/>
+              </a:spcBef>
+              <a:defRPr sz="900">
+                <a:solidFill>
+                  <a:srgbClr val="A1A1AA"/>
+                </a:solidFill>
+              </a:defRPr>
+            </a:pPr>
+            <a:r>
+              <a:t>• 1. /api/v1/ordenes/** -&gt; lb://pagatu-orden-ms (Round Robin :8082/:8083).</a:t>
+            </a:r>
+          </a:p>
+          <a:p>
+            <a:pPr>
+              <a:spcBef>
+                <a:spcPts val="300"/>
+              </a:spcBef>
+              <a:defRPr sz="900">
+                <a:solidFill>
+                  <a:srgbClr val="A1A1AA"/>
+                </a:solidFill>
+              </a:defRPr>
+            </a:pPr>
+            <a:r>
+              <a:t>• 2. /api/v1/productos/** -&gt; lb://pagatu-catalogo-ms (:8081).</a:t>
+            </a:r>
+          </a:p>
+          <a:p>
+            <a:pPr>
+              <a:spcBef>
+                <a:spcPts val="300"/>
+              </a:spcBef>
+              <a:defRPr sz="900">
+                <a:solidFill>
+                  <a:srgbClr val="A1A1AA"/>
+                </a:solidFill>
+              </a:defRPr>
+            </a:pPr>
+            <a:r>
+              <a:t>• 3. /api/v1/clientes/** -&gt; lb://pagatu-cliente-ms (:8084).</a:t>
+            </a:r>
+          </a:p>
+          <a:p>
+            <a:pPr>
+              <a:spcBef>
+                <a:spcPts val="300"/>
+              </a:spcBef>
+              <a:defRPr sz="900">
+                <a:solidFill>
+                  <a:srgbClr val="A1A1AA"/>
+                </a:solidFill>
+              </a:defRPr>
+            </a:pPr>
+            <a:r>
+              <a:t>• 4. /api/v1/pagos/** -&gt; lb://pc-pago-ms.</a:t>
+            </a:r>
+          </a:p>
+          <a:p>
+            <a:pPr>
+              <a:spcBef>
+                <a:spcPts val="300"/>
+              </a:spcBef>
+              <a:defRPr sz="900">
+                <a:solidFill>
+                  <a:srgbClr val="A1A1AA"/>
+                </a:solidFill>
+              </a:defRPr>
+            </a:pPr>
+            <a:r>
+              <a:t>• 5. Mapeo Jackson: @JsonManagedReference y @JsonBackReference eliminan bucles.</a:t>
+            </a:r>
+          </a:p>
+        </p:txBody>
+      </p:sp>
+      <p:sp>
+        <p:nvSpPr>
+          <p:cNvPr id="14" name="Rounded Rectangle 13"/>
           <p:cNvSpPr/>
           <p:nvPr/>
         </p:nvSpPr>
@@ -12413,14 +12336,14 @@
       </p:sp>
       <p:sp>
         <p:nvSpPr>
-          <p:cNvPr id="16" name="TextBox 15"/>
+          <p:cNvPr id="15" name="TextBox 14"/>
           <p:cNvSpPr txBox="1"/>
           <p:nvPr/>
         </p:nvSpPr>
         <p:spPr>
           <a:xfrm>
-            <a:off x="6382512" y="2240279"/>
-            <a:ext cx="4882896" cy="3566160"/>
+            <a:off x="6355080" y="2240279"/>
+            <a:ext cx="4937760" cy="3566160"/>
           </a:xfrm>
           <a:prstGeom prst="rect">
             <a:avLst/>
@@ -12434,86 +12357,104 @@
           <a:lstStyle/>
           <a:p>
             <a:pPr>
-              <a:defRPr sz="1100" b="1">
+              <a:defRPr sz="1200" b="1">
                 <a:solidFill>
                   <a:srgbClr val="FFFFFF"/>
                 </a:solidFill>
               </a:defRPr>
             </a:pPr>
             <a:r>
-              <a:t>🌐 Matriz Oficial de Puertos (Tabla 3)</a:t>
-            </a:r>
-          </a:p>
-          <a:p>
-            <a:pPr>
-              <a:defRPr sz="900">
-                <a:solidFill>
-                  <a:srgbClr val="A1A1AA"/>
-                </a:solidFill>
-              </a:defRPr>
-            </a:pPr>
-            <a:r>
-              <a:t>▪  pagatu-gateway: DEV :18080 | PROD interno :8080 | Expuesto :28080.</a:t>
-            </a:r>
-          </a:p>
-          <a:p>
-            <a:pPr>
-              <a:defRPr sz="900">
-                <a:solidFill>
-                  <a:srgbClr val="A1A1AA"/>
-                </a:solidFill>
-              </a:defRPr>
-            </a:pPr>
-            <a:r>
-              <a:t>▪  pagatu-config:  DEV :8888  | PROD interno :8888 | Expuesto :28888.</a:t>
-            </a:r>
-          </a:p>
-          <a:p>
-            <a:pPr>
-              <a:defRPr sz="900">
-                <a:solidFill>
-                  <a:srgbClr val="A1A1AA"/>
-                </a:solidFill>
-              </a:defRPr>
-            </a:pPr>
-            <a:r>
-              <a:t>▪  pagatu-eureka:  DEV :8761  | PROD interno :8761 | Expuesto :28761 (Web).</a:t>
-            </a:r>
-          </a:p>
-          <a:p>
-            <a:pPr>
-              <a:defRPr sz="900">
-                <a:solidFill>
-                  <a:srgbClr val="A1A1AA"/>
-                </a:solidFill>
-              </a:defRPr>
-            </a:pPr>
-            <a:r>
-              <a:t>▪  pagatu-catalogo-ms: DEV :8081 | PROD interno :8080 | Sin exponer.</a:t>
-            </a:r>
-          </a:p>
-          <a:p>
-            <a:pPr>
-              <a:defRPr sz="900">
-                <a:solidFill>
-                  <a:srgbClr val="A1A1AA"/>
-                </a:solidFill>
-              </a:defRPr>
-            </a:pPr>
-            <a:r>
-              <a:t>▪  pagatu-orden-ms:    DEV :8082/:8083 | PROD :8080   | Sin exponer.</a:t>
-            </a:r>
-          </a:p>
-          <a:p>
-            <a:pPr>
-              <a:defRPr sz="900">
-                <a:solidFill>
-                  <a:srgbClr val="A1A1AA"/>
-                </a:solidFill>
-              </a:defRPr>
-            </a:pPr>
-            <a:r>
-              <a:t>▪  Principio Perimetral: Todo el tráfico de negocio entra únicamente por Gateway.</a:t>
+              <a:t>🌐 Matriz de Asignación de Puertos DEV vs PROD</a:t>
+            </a:r>
+          </a:p>
+          <a:p>
+            <a:pPr>
+              <a:spcBef>
+                <a:spcPts val="300"/>
+              </a:spcBef>
+              <a:defRPr sz="900">
+                <a:solidFill>
+                  <a:srgbClr val="A1A1AA"/>
+                </a:solidFill>
+              </a:defRPr>
+            </a:pPr>
+            <a:r>
+              <a:t>• pagatu-gateway: DEV :18080 | PROD interno :8080 | Expuesto :28080.</a:t>
+            </a:r>
+          </a:p>
+          <a:p>
+            <a:pPr>
+              <a:spcBef>
+                <a:spcPts val="300"/>
+              </a:spcBef>
+              <a:defRPr sz="900">
+                <a:solidFill>
+                  <a:srgbClr val="A1A1AA"/>
+                </a:solidFill>
+              </a:defRPr>
+            </a:pPr>
+            <a:r>
+              <a:t>• pagatu-config:  DEV :8888  | PROD interno :8888 | Expuesto :28888.</a:t>
+            </a:r>
+          </a:p>
+          <a:p>
+            <a:pPr>
+              <a:spcBef>
+                <a:spcPts val="300"/>
+              </a:spcBef>
+              <a:defRPr sz="900">
+                <a:solidFill>
+                  <a:srgbClr val="A1A1AA"/>
+                </a:solidFill>
+              </a:defRPr>
+            </a:pPr>
+            <a:r>
+              <a:t>• pagatu-eureka:  DEV :8761  | PROD interno :8761 | Expuesto :28761 (Web).</a:t>
+            </a:r>
+          </a:p>
+          <a:p>
+            <a:pPr>
+              <a:spcBef>
+                <a:spcPts val="300"/>
+              </a:spcBef>
+              <a:defRPr sz="900">
+                <a:solidFill>
+                  <a:srgbClr val="A1A1AA"/>
+                </a:solidFill>
+              </a:defRPr>
+            </a:pPr>
+            <a:r>
+              <a:t>• pagatu-catalogo-ms: DEV :8081 | PROD interno :8080 | Sin exponer.</a:t>
+            </a:r>
+          </a:p>
+          <a:p>
+            <a:pPr>
+              <a:spcBef>
+                <a:spcPts val="300"/>
+              </a:spcBef>
+              <a:defRPr sz="900">
+                <a:solidFill>
+                  <a:srgbClr val="A1A1AA"/>
+                </a:solidFill>
+              </a:defRPr>
+            </a:pPr>
+            <a:r>
+              <a:t>• pagatu-orden-ms:    DEV :8082/:8083 | PROD :8080   | Sin exponer.</a:t>
+            </a:r>
+          </a:p>
+          <a:p>
+            <a:pPr>
+              <a:spcBef>
+                <a:spcPts val="300"/>
+              </a:spcBef>
+              <a:defRPr sz="900">
+                <a:solidFill>
+                  <a:srgbClr val="A1A1AA"/>
+                </a:solidFill>
+              </a:defRPr>
+            </a:pPr>
+            <a:r>
+              <a:t>• Principio Perimetral: Todo el tráfico de negocio entra únicamente por Gateway.</a:t>
             </a:r>
           </a:p>
         </p:txBody>
@@ -12765,8 +12706,8 @@
         </p:nvSpPr>
         <p:spPr>
           <a:xfrm>
-            <a:off x="8412480" y="384048"/>
-            <a:ext cx="3017520" cy="384048"/>
+            <a:off x="7772400" y="384048"/>
+            <a:ext cx="3657600" cy="384048"/>
           </a:xfrm>
           <a:prstGeom prst="roundRect">
             <a:avLst/>
@@ -12799,14 +12740,14 @@
           <a:lstStyle/>
           <a:p>
             <a:pPr algn="ctr">
-              <a:defRPr sz="900" b="1">
-                <a:solidFill>
-                  <a:srgbClr val="FFFFFF"/>
-                </a:solidFill>
-              </a:defRPr>
-            </a:pPr>
-            <a:r>
-              <a:t>GLOSARIO EJECUTIVO</a:t>
+              <a:defRPr sz="800" b="1">
+                <a:solidFill>
+                  <a:srgbClr val="A1A1AA"/>
+                </a:solidFill>
+              </a:defRPr>
+            </a:pPr>
+            <a:r>
+              <a:t>FUNDAMENTOS CONCEPTUALES</a:t>
             </a:r>
           </a:p>
         </p:txBody>
@@ -12819,7 +12760,7 @@
         </p:nvSpPr>
         <p:spPr>
           <a:xfrm>
-            <a:off x="731520" y="1005840"/>
+            <a:off x="731520" y="1051560"/>
             <a:ext cx="10698480" cy="868680"/>
           </a:xfrm>
           <a:prstGeom prst="rect">
@@ -12834,26 +12775,26 @@
           <a:lstStyle/>
           <a:p>
             <a:pPr>
-              <a:defRPr sz="2000" b="1">
+              <a:defRPr sz="1900" b="1">
                 <a:solidFill>
                   <a:srgbClr val="FFFFFF"/>
                 </a:solidFill>
               </a:defRPr>
             </a:pPr>
             <a:r>
-              <a:t>PALABRAS CLAVE DE INGENIERÍA DISTRIBUIDA</a:t>
-            </a:r>
-          </a:p>
-          <a:p>
-            <a:pPr>
-              <a:defRPr sz="1100">
-                <a:solidFill>
-                  <a:srgbClr val="A1A1AA"/>
-                </a:solidFill>
-              </a:defRPr>
-            </a:pPr>
-            <a:r>
-              <a:t>Fundamentos conceptuales y terminología formal que evalúa el Ing. Abel Sullón</a:t>
+              <a:t>CONCEPTOS FUNDAMENTALES DE INGENIERÍA DISTRIBUIDA</a:t>
+            </a:r>
+          </a:p>
+          <a:p>
+            <a:pPr>
+              <a:defRPr sz="1000">
+                <a:solidFill>
+                  <a:srgbClr val="A1A1AA"/>
+                </a:solidFill>
+              </a:defRPr>
+            </a:pPr>
+            <a:r>
+              <a:t>Definiciones formales y vocabulario arquitectural de rigor para la sustentación técnica</a:t>
             </a:r>
           </a:p>
         </p:txBody>
@@ -12866,7 +12807,7 @@
         </p:nvSpPr>
         <p:spPr>
           <a:xfrm>
-            <a:off x="731520" y="1874519"/>
+            <a:off x="731520" y="1965960"/>
             <a:ext cx="10698480" cy="18288"/>
           </a:xfrm>
           <a:prstGeom prst="rect">
@@ -12903,57 +12844,14 @@
       </p:sp>
       <p:sp>
         <p:nvSpPr>
-          <p:cNvPr id="10" name="Rounded Rectangle 9"/>
-          <p:cNvSpPr/>
-          <p:nvPr/>
-        </p:nvSpPr>
-        <p:spPr>
-          <a:xfrm>
-            <a:off x="731520" y="1856231"/>
-            <a:ext cx="1097280" cy="54864"/>
-          </a:xfrm>
-          <a:prstGeom prst="roundRect">
-            <a:avLst/>
-          </a:prstGeom>
-          <a:solidFill>
-            <a:srgbClr val="FFFFFF"/>
-          </a:solidFill>
-          <a:ln>
-            <a:noFill/>
-          </a:ln>
-        </p:spPr>
-        <p:style>
-          <a:lnRef idx="1">
-            <a:schemeClr val="accent1"/>
-          </a:lnRef>
-          <a:fillRef idx="3">
-            <a:schemeClr val="accent1"/>
-          </a:fillRef>
-          <a:effectRef idx="2">
-            <a:schemeClr val="accent1"/>
-          </a:effectRef>
-          <a:fontRef idx="minor">
-            <a:schemeClr val="lt1"/>
-          </a:fontRef>
-        </p:style>
-        <p:txBody>
-          <a:bodyPr rtlCol="0" anchor="ctr"/>
-          <a:lstStyle/>
-          <a:p>
-            <a:pPr algn="ctr"/>
-          </a:p>
-        </p:txBody>
-      </p:sp>
-      <p:sp>
-        <p:nvSpPr>
-          <p:cNvPr id="11" name="TextBox 10"/>
+          <p:cNvPr id="10" name="TextBox 9"/>
           <p:cNvSpPr txBox="1"/>
           <p:nvPr/>
         </p:nvSpPr>
         <p:spPr>
           <a:xfrm>
-            <a:off x="731520" y="6309360"/>
-            <a:ext cx="7315200" cy="365760"/>
+            <a:off x="731520" y="6217920"/>
+            <a:ext cx="7772400" cy="365760"/>
           </a:xfrm>
           <a:prstGeom prst="rect">
             <a:avLst/>
@@ -12967,28 +12865,28 @@
           <a:lstStyle/>
           <a:p>
             <a:pPr>
-              <a:defRPr sz="950" b="1">
-                <a:solidFill>
-                  <a:srgbClr val="A1A1AA"/>
-                </a:solidFill>
-              </a:defRPr>
-            </a:pPr>
-            <a:r>
-              <a:t>🎙️  PALABRAS CLAVE CLAVE PARA EL DOCENTE</a:t>
-            </a:r>
-          </a:p>
-        </p:txBody>
-      </p:sp>
-      <p:sp>
-        <p:nvSpPr>
-          <p:cNvPr id="12" name="TextBox 11"/>
+              <a:defRPr sz="900">
+                <a:solidFill>
+                  <a:srgbClr val="A1A1AA"/>
+                </a:solidFill>
+              </a:defRPr>
+            </a:pPr>
+            <a:r>
+              <a:t>🎙️ EQUIPO 01 • MARCO CONCEPTUAL DISTRIBUIDO</a:t>
+            </a:r>
+          </a:p>
+        </p:txBody>
+      </p:sp>
+      <p:sp>
+        <p:nvSpPr>
+          <p:cNvPr id="11" name="TextBox 10"/>
           <p:cNvSpPr txBox="1"/>
           <p:nvPr/>
         </p:nvSpPr>
         <p:spPr>
           <a:xfrm>
-            <a:off x="10058400" y="6309360"/>
-            <a:ext cx="1371600" cy="365760"/>
+            <a:off x="10241280" y="6217920"/>
+            <a:ext cx="1188720" cy="365760"/>
           </a:xfrm>
           <a:prstGeom prst="rect">
             <a:avLst/>
@@ -13002,9 +12900,9 @@
           <a:lstStyle/>
           <a:p>
             <a:pPr algn="r">
-              <a:defRPr sz="1100" b="1">
-                <a:solidFill>
-                  <a:srgbClr val="FFFFFF"/>
+              <a:defRPr sz="900" b="1">
+                <a:solidFill>
+                  <a:srgbClr val="71717A"/>
                 </a:solidFill>
               </a:defRPr>
             </a:pPr>
@@ -13016,7 +12914,7 @@
       </p:sp>
       <p:sp>
         <p:nvSpPr>
-          <p:cNvPr id="13" name="Rounded Rectangle 12"/>
+          <p:cNvPr id="12" name="Rounded Rectangle 11"/>
           <p:cNvSpPr/>
           <p:nvPr/>
         </p:nvSpPr>
@@ -13061,14 +12959,14 @@
       </p:sp>
       <p:sp>
         <p:nvSpPr>
-          <p:cNvPr id="14" name="TextBox 13"/>
+          <p:cNvPr id="13" name="TextBox 12"/>
           <p:cNvSpPr txBox="1"/>
           <p:nvPr/>
         </p:nvSpPr>
         <p:spPr>
           <a:xfrm>
-            <a:off x="896112" y="2240279"/>
-            <a:ext cx="3099816" cy="3566160"/>
+            <a:off x="868680" y="2240279"/>
+            <a:ext cx="3154680" cy="3566160"/>
           </a:xfrm>
           <a:prstGeom prst="rect">
             <a:avLst/>
@@ -13082,7 +12980,7 @@
           <a:lstStyle/>
           <a:p>
             <a:pPr>
-              <a:defRPr sz="1100" b="1">
+              <a:defRPr sz="1200" b="1">
                 <a:solidFill>
                   <a:srgbClr val="FFFFFF"/>
                 </a:solidFill>
@@ -13094,57 +12992,69 @@
           </a:p>
           <a:p>
             <a:pPr>
-              <a:defRPr sz="900">
-                <a:solidFill>
-                  <a:srgbClr val="A1A1AA"/>
-                </a:solidFill>
-              </a:defRPr>
-            </a:pPr>
-            <a:r>
-              <a:t>▪  Desacoplamiento Espacial: Invocación por nombre lógico (PAGATU-ORDEN-MS).</a:t>
-            </a:r>
-          </a:p>
-          <a:p>
-            <a:pPr>
-              <a:defRPr sz="900">
-                <a:solidFill>
-                  <a:srgbClr val="A1A1AA"/>
-                </a:solidFill>
-              </a:defRPr>
-            </a:pPr>
-            <a:r>
-              <a:t>▪  Heartbeats (Latidos): Cada 30 seg renuevan el arrendamiento.</a:t>
-            </a:r>
-          </a:p>
-          <a:p>
-            <a:pPr>
-              <a:defRPr sz="900">
-                <a:solidFill>
-                  <a:srgbClr val="A1A1AA"/>
-                </a:solidFill>
-              </a:defRPr>
-            </a:pPr>
-            <a:r>
-              <a:t>▪  Eviction Timer: Desalojo automático a los 90 seg si faltan 3 latidos.</a:t>
-            </a:r>
-          </a:p>
-          <a:p>
-            <a:pPr>
-              <a:defRPr sz="900">
-                <a:solidFill>
-                  <a:srgbClr val="A1A1AA"/>
-                </a:solidFill>
-              </a:defRPr>
-            </a:pPr>
-            <a:r>
-              <a:t>▪  Self-Preservation Mode: Protección ante particiones masivas de red.</a:t>
-            </a:r>
-          </a:p>
-        </p:txBody>
-      </p:sp>
-      <p:sp>
-        <p:nvSpPr>
-          <p:cNvPr id="15" name="Rounded Rectangle 14"/>
+              <a:spcBef>
+                <a:spcPts val="300"/>
+              </a:spcBef>
+              <a:defRPr sz="900">
+                <a:solidFill>
+                  <a:srgbClr val="A1A1AA"/>
+                </a:solidFill>
+              </a:defRPr>
+            </a:pPr>
+            <a:r>
+              <a:t>• Desacoplamiento Espacial: Invocación por nombre lógico (PAGATU-ORDEN-MS).</a:t>
+            </a:r>
+          </a:p>
+          <a:p>
+            <a:pPr>
+              <a:spcBef>
+                <a:spcPts val="300"/>
+              </a:spcBef>
+              <a:defRPr sz="900">
+                <a:solidFill>
+                  <a:srgbClr val="A1A1AA"/>
+                </a:solidFill>
+              </a:defRPr>
+            </a:pPr>
+            <a:r>
+              <a:t>• Heartbeats (Latidos): Cada 30 seg renuevan el arrendamiento.</a:t>
+            </a:r>
+          </a:p>
+          <a:p>
+            <a:pPr>
+              <a:spcBef>
+                <a:spcPts val="300"/>
+              </a:spcBef>
+              <a:defRPr sz="900">
+                <a:solidFill>
+                  <a:srgbClr val="A1A1AA"/>
+                </a:solidFill>
+              </a:defRPr>
+            </a:pPr>
+            <a:r>
+              <a:t>• Eviction Timer: Desalojo automático a los 90 seg si faltan 3 latidos.</a:t>
+            </a:r>
+          </a:p>
+          <a:p>
+            <a:pPr>
+              <a:spcBef>
+                <a:spcPts val="300"/>
+              </a:spcBef>
+              <a:defRPr sz="900">
+                <a:solidFill>
+                  <a:srgbClr val="A1A1AA"/>
+                </a:solidFill>
+              </a:defRPr>
+            </a:pPr>
+            <a:r>
+              <a:t>• Self-Preservation Mode: Protección ante particiones masivas de red.</a:t>
+            </a:r>
+          </a:p>
+        </p:txBody>
+      </p:sp>
+      <p:sp>
+        <p:nvSpPr>
+          <p:cNvPr id="14" name="Rounded Rectangle 13"/>
           <p:cNvSpPr/>
           <p:nvPr/>
         </p:nvSpPr>
@@ -13189,14 +13099,14 @@
       </p:sp>
       <p:sp>
         <p:nvSpPr>
-          <p:cNvPr id="16" name="TextBox 15"/>
+          <p:cNvPr id="15" name="TextBox 14"/>
           <p:cNvSpPr txBox="1"/>
           <p:nvPr/>
         </p:nvSpPr>
         <p:spPr>
           <a:xfrm>
-            <a:off x="4553712" y="2240279"/>
-            <a:ext cx="3099816" cy="3566160"/>
+            <a:off x="4526280" y="2240279"/>
+            <a:ext cx="3154680" cy="3566160"/>
           </a:xfrm>
           <a:prstGeom prst="rect">
             <a:avLst/>
@@ -13210,7 +13120,7 @@
           <a:lstStyle/>
           <a:p>
             <a:pPr>
-              <a:defRPr sz="1100" b="1">
+              <a:defRPr sz="1200" b="1">
                 <a:solidFill>
                   <a:srgbClr val="FFFFFF"/>
                 </a:solidFill>
@@ -13222,57 +13132,69 @@
           </a:p>
           <a:p>
             <a:pPr>
-              <a:defRPr sz="900">
-                <a:solidFill>
-                  <a:srgbClr val="A1A1AA"/>
-                </a:solidFill>
-              </a:defRPr>
-            </a:pPr>
-            <a:r>
-              <a:t>▪  WebFlux &amp; Netty: Event-Loop reactivo (cero hilos bloqueados).</a:t>
-            </a:r>
-          </a:p>
-          <a:p>
-            <a:pPr>
-              <a:defRPr sz="900">
-                <a:solidFill>
-                  <a:srgbClr val="A1A1AA"/>
-                </a:solidFill>
-              </a:defRPr>
-            </a:pPr>
-            <a:r>
-              <a:t>▪  Pseudo-esquema lb://: Resuelto por Spring Cloud LoadBalancer.</a:t>
-            </a:r>
-          </a:p>
-          <a:p>
-            <a:pPr>
-              <a:defRPr sz="900">
-                <a:solidFill>
-                  <a:srgbClr val="A1A1AA"/>
-                </a:solidFill>
-              </a:defRPr>
-            </a:pPr>
-            <a:r>
-              <a:t>▪  Client-Side Load Balancing: Decisión tomada en memoria del Gateway.</a:t>
-            </a:r>
-          </a:p>
-          <a:p>
-            <a:pPr>
-              <a:defRPr sz="900">
-                <a:solidFill>
-                  <a:srgbClr val="A1A1AA"/>
-                </a:solidFill>
-              </a:defRPr>
-            </a:pPr>
-            <a:r>
-              <a:t>▪  Round-Robin en Stateless: Reparto 1:1 equitativo sin sticky sessions.</a:t>
-            </a:r>
-          </a:p>
-        </p:txBody>
-      </p:sp>
-      <p:sp>
-        <p:nvSpPr>
-          <p:cNvPr id="17" name="Rounded Rectangle 16"/>
+              <a:spcBef>
+                <a:spcPts val="300"/>
+              </a:spcBef>
+              <a:defRPr sz="900">
+                <a:solidFill>
+                  <a:srgbClr val="A1A1AA"/>
+                </a:solidFill>
+              </a:defRPr>
+            </a:pPr>
+            <a:r>
+              <a:t>• WebFlux &amp; Netty: Event-Loop reactivo (cero hilos bloqueados).</a:t>
+            </a:r>
+          </a:p>
+          <a:p>
+            <a:pPr>
+              <a:spcBef>
+                <a:spcPts val="300"/>
+              </a:spcBef>
+              <a:defRPr sz="900">
+                <a:solidFill>
+                  <a:srgbClr val="A1A1AA"/>
+                </a:solidFill>
+              </a:defRPr>
+            </a:pPr>
+            <a:r>
+              <a:t>• Pseudo-esquema lb://: Resuelto por Spring Cloud LoadBalancer.</a:t>
+            </a:r>
+          </a:p>
+          <a:p>
+            <a:pPr>
+              <a:spcBef>
+                <a:spcPts val="300"/>
+              </a:spcBef>
+              <a:defRPr sz="900">
+                <a:solidFill>
+                  <a:srgbClr val="A1A1AA"/>
+                </a:solidFill>
+              </a:defRPr>
+            </a:pPr>
+            <a:r>
+              <a:t>• Client-Side Load Balancing: Decisión tomada en memoria del Gateway.</a:t>
+            </a:r>
+          </a:p>
+          <a:p>
+            <a:pPr>
+              <a:spcBef>
+                <a:spcPts val="300"/>
+              </a:spcBef>
+              <a:defRPr sz="900">
+                <a:solidFill>
+                  <a:srgbClr val="A1A1AA"/>
+                </a:solidFill>
+              </a:defRPr>
+            </a:pPr>
+            <a:r>
+              <a:t>• Round-Robin en Stateless: Reparto 1:1 equitativo sin sticky sessions.</a:t>
+            </a:r>
+          </a:p>
+        </p:txBody>
+      </p:sp>
+      <p:sp>
+        <p:nvSpPr>
+          <p:cNvPr id="16" name="Rounded Rectangle 15"/>
           <p:cNvSpPr/>
           <p:nvPr/>
         </p:nvSpPr>
@@ -13317,14 +13239,14 @@
       </p:sp>
       <p:sp>
         <p:nvSpPr>
-          <p:cNvPr id="18" name="TextBox 17"/>
+          <p:cNvPr id="17" name="TextBox 16"/>
           <p:cNvSpPr txBox="1"/>
           <p:nvPr/>
         </p:nvSpPr>
         <p:spPr>
           <a:xfrm>
-            <a:off x="8211312" y="2240279"/>
-            <a:ext cx="3099816" cy="3566160"/>
+            <a:off x="8183880" y="2240279"/>
+            <a:ext cx="3154680" cy="3566160"/>
           </a:xfrm>
           <a:prstGeom prst="rect">
             <a:avLst/>
@@ -13338,7 +13260,7 @@
           <a:lstStyle/>
           <a:p>
             <a:pPr>
-              <a:defRPr sz="1100" b="1">
+              <a:defRPr sz="1200" b="1">
                 <a:solidFill>
                   <a:srgbClr val="FFFFFF"/>
                 </a:solidFill>
@@ -13350,50 +13272,62 @@
           </a:p>
           <a:p>
             <a:pPr>
-              <a:defRPr sz="900">
-                <a:solidFill>
-                  <a:srgbClr val="A1A1AA"/>
-                </a:solidFill>
-              </a:defRPr>
-            </a:pPr>
-            <a:r>
-              <a:t>▪  Factor III (Config): Artefacto inmutable desplegable en DEV y PROD.</a:t>
-            </a:r>
-          </a:p>
-          <a:p>
-            <a:pPr>
-              <a:defRPr sz="900">
-                <a:solidFill>
-                  <a:srgbClr val="A1A1AA"/>
-                </a:solidFill>
-              </a:defRPr>
-            </a:pPr>
-            <a:r>
-              <a:t>▪  Cabecera-Detalle: Orden -&gt; Detalle con cálculo de 18% IGV.</a:t>
-            </a:r>
-          </a:p>
-          <a:p>
-            <a:pPr>
-              <a:defRPr sz="900">
-                <a:solidFill>
-                  <a:srgbClr val="A1A1AA"/>
-                </a:solidFill>
-              </a:defRPr>
-            </a:pPr>
-            <a:r>
-              <a:t>▪  Recursión Jackson: Mitigación con ManagedReference y BackReference.</a:t>
-            </a:r>
-          </a:p>
-          <a:p>
-            <a:pPr>
-              <a:defRPr sz="900">
-                <a:solidFill>
-                  <a:srgbClr val="A1A1AA"/>
-                </a:solidFill>
-              </a:defRPr>
-            </a:pPr>
-            <a:r>
-              <a:t>▪  Semántica HTTP: Retorno de 201 Created, 400 Bad Request, 404 Not Found.</a:t>
+              <a:spcBef>
+                <a:spcPts val="300"/>
+              </a:spcBef>
+              <a:defRPr sz="900">
+                <a:solidFill>
+                  <a:srgbClr val="A1A1AA"/>
+                </a:solidFill>
+              </a:defRPr>
+            </a:pPr>
+            <a:r>
+              <a:t>• Factor III (Config): Artefacto inmutable desplegable en DEV y PROD.</a:t>
+            </a:r>
+          </a:p>
+          <a:p>
+            <a:pPr>
+              <a:spcBef>
+                <a:spcPts val="300"/>
+              </a:spcBef>
+              <a:defRPr sz="900">
+                <a:solidFill>
+                  <a:srgbClr val="A1A1AA"/>
+                </a:solidFill>
+              </a:defRPr>
+            </a:pPr>
+            <a:r>
+              <a:t>• Cabecera-Detalle: Orden -&gt; Detalle con cálculo de 18% IGV.</a:t>
+            </a:r>
+          </a:p>
+          <a:p>
+            <a:pPr>
+              <a:spcBef>
+                <a:spcPts val="300"/>
+              </a:spcBef>
+              <a:defRPr sz="900">
+                <a:solidFill>
+                  <a:srgbClr val="A1A1AA"/>
+                </a:solidFill>
+              </a:defRPr>
+            </a:pPr>
+            <a:r>
+              <a:t>• Recursión Jackson: Mitigación con ManagedReference y BackReference.</a:t>
+            </a:r>
+          </a:p>
+          <a:p>
+            <a:pPr>
+              <a:spcBef>
+                <a:spcPts val="300"/>
+              </a:spcBef>
+              <a:defRPr sz="900">
+                <a:solidFill>
+                  <a:srgbClr val="A1A1AA"/>
+                </a:solidFill>
+              </a:defRPr>
+            </a:pPr>
+            <a:r>
+              <a:t>• Semántica HTTP: Retorno de 201 Created, 400 Bad Request, 404 Not Found.</a:t>
             </a:r>
           </a:p>
         </p:txBody>
@@ -13645,8 +13579,8 @@
         </p:nvSpPr>
         <p:spPr>
           <a:xfrm>
-            <a:off x="8412480" y="384048"/>
-            <a:ext cx="3017520" cy="384048"/>
+            <a:off x="7772400" y="384048"/>
+            <a:ext cx="3657600" cy="384048"/>
           </a:xfrm>
           <a:prstGeom prst="roundRect">
             <a:avLst/>
@@ -13679,14 +13613,14 @@
           <a:lstStyle/>
           <a:p>
             <a:pPr algn="ctr">
-              <a:defRPr sz="900" b="1">
-                <a:solidFill>
-                  <a:srgbClr val="FFFFFF"/>
-                </a:solidFill>
-              </a:defRPr>
-            </a:pPr>
-            <a:r>
-              <a:t>RÚBRICA OFICIAL</a:t>
+              <a:defRPr sz="800" b="1">
+                <a:solidFill>
+                  <a:srgbClr val="A1A1AA"/>
+                </a:solidFill>
+              </a:defRPr>
+            </a:pPr>
+            <a:r>
+              <a:t>CRITERIOS DE CONFORMIDAD</a:t>
             </a:r>
           </a:p>
         </p:txBody>
@@ -13699,7 +13633,7 @@
         </p:nvSpPr>
         <p:spPr>
           <a:xfrm>
-            <a:off x="731520" y="1005840"/>
+            <a:off x="731520" y="1051560"/>
             <a:ext cx="10698480" cy="868680"/>
           </a:xfrm>
           <a:prstGeom prst="rect">
@@ -13714,26 +13648,26 @@
           <a:lstStyle/>
           <a:p>
             <a:pPr>
-              <a:defRPr sz="2000" b="1">
+              <a:defRPr sz="1900" b="1">
                 <a:solidFill>
                   <a:srgbClr val="FFFFFF"/>
                 </a:solidFill>
               </a:defRPr>
             </a:pPr>
             <a:r>
-              <a:t>RÚBRICA OFICIAL &amp; CRITERIOS DE CALIFICACIÓN</a:t>
-            </a:r>
-          </a:p>
-          <a:p>
-            <a:pPr>
-              <a:defRPr sz="1100">
-                <a:solidFill>
-                  <a:srgbClr val="A1A1AA"/>
-                </a:solidFill>
-              </a:defRPr>
-            </a:pPr>
-            <a:r>
-              <a:t>Demostración formal del cumplimiento sobresaliente en los 6 criterios del sílabo (Tabla 7)</a:t>
+              <a:t>MATRIZ DE CUMPLIMIENTO TÉCNICO Y CRITERIOS DE RÚBRICA</a:t>
+            </a:r>
+          </a:p>
+          <a:p>
+            <a:pPr>
+              <a:defRPr sz="1000">
+                <a:solidFill>
+                  <a:srgbClr val="A1A1AA"/>
+                </a:solidFill>
+              </a:defRPr>
+            </a:pPr>
+            <a:r>
+              <a:t>Evidencias cuantitativas y cualitativas de conformidad en los 6 ejes de auditoría del sistema</a:t>
             </a:r>
           </a:p>
         </p:txBody>
@@ -13746,7 +13680,7 @@
         </p:nvSpPr>
         <p:spPr>
           <a:xfrm>
-            <a:off x="731520" y="1874519"/>
+            <a:off x="731520" y="1965960"/>
             <a:ext cx="10698480" cy="18288"/>
           </a:xfrm>
           <a:prstGeom prst="rect">
@@ -13783,57 +13717,14 @@
       </p:sp>
       <p:sp>
         <p:nvSpPr>
-          <p:cNvPr id="10" name="Rounded Rectangle 9"/>
-          <p:cNvSpPr/>
-          <p:nvPr/>
-        </p:nvSpPr>
-        <p:spPr>
-          <a:xfrm>
-            <a:off x="731520" y="1856231"/>
-            <a:ext cx="1097280" cy="54864"/>
-          </a:xfrm>
-          <a:prstGeom prst="roundRect">
-            <a:avLst/>
-          </a:prstGeom>
-          <a:solidFill>
-            <a:srgbClr val="FFFFFF"/>
-          </a:solidFill>
-          <a:ln>
-            <a:noFill/>
-          </a:ln>
-        </p:spPr>
-        <p:style>
-          <a:lnRef idx="1">
-            <a:schemeClr val="accent1"/>
-          </a:lnRef>
-          <a:fillRef idx="3">
-            <a:schemeClr val="accent1"/>
-          </a:fillRef>
-          <a:effectRef idx="2">
-            <a:schemeClr val="accent1"/>
-          </a:effectRef>
-          <a:fontRef idx="minor">
-            <a:schemeClr val="lt1"/>
-          </a:fontRef>
-        </p:style>
-        <p:txBody>
-          <a:bodyPr rtlCol="0" anchor="ctr"/>
-          <a:lstStyle/>
-          <a:p>
-            <a:pPr algn="ctr"/>
-          </a:p>
-        </p:txBody>
-      </p:sp>
-      <p:sp>
-        <p:nvSpPr>
-          <p:cNvPr id="11" name="TextBox 10"/>
+          <p:cNvPr id="10" name="TextBox 9"/>
           <p:cNvSpPr txBox="1"/>
           <p:nvPr/>
         </p:nvSpPr>
         <p:spPr>
           <a:xfrm>
-            <a:off x="731520" y="6309360"/>
-            <a:ext cx="7315200" cy="365760"/>
+            <a:off x="731520" y="6217920"/>
+            <a:ext cx="7772400" cy="365760"/>
           </a:xfrm>
           <a:prstGeom prst="rect">
             <a:avLst/>
@@ -13847,28 +13738,28 @@
           <a:lstStyle/>
           <a:p>
             <a:pPr>
-              <a:defRPr sz="950" b="1">
-                <a:solidFill>
-                  <a:srgbClr val="A1A1AA"/>
-                </a:solidFill>
-              </a:defRPr>
-            </a:pPr>
-            <a:r>
-              <a:t>🎙️  EVALUACIÓN DE UNIDAD I • S05</a:t>
-            </a:r>
-          </a:p>
-        </p:txBody>
-      </p:sp>
-      <p:sp>
-        <p:nvSpPr>
-          <p:cNvPr id="12" name="TextBox 11"/>
+              <a:defRPr sz="900">
+                <a:solidFill>
+                  <a:srgbClr val="A1A1AA"/>
+                </a:solidFill>
+              </a:defRPr>
+            </a:pPr>
+            <a:r>
+              <a:t>🎙️ EQUIPO 01 • AUDITORÍA DE RÚBRICA S05</a:t>
+            </a:r>
+          </a:p>
+        </p:txBody>
+      </p:sp>
+      <p:sp>
+        <p:nvSpPr>
+          <p:cNvPr id="11" name="TextBox 10"/>
           <p:cNvSpPr txBox="1"/>
           <p:nvPr/>
         </p:nvSpPr>
         <p:spPr>
           <a:xfrm>
-            <a:off x="10058400" y="6309360"/>
-            <a:ext cx="1371600" cy="365760"/>
+            <a:off x="10241280" y="6217920"/>
+            <a:ext cx="1188720" cy="365760"/>
           </a:xfrm>
           <a:prstGeom prst="rect">
             <a:avLst/>
@@ -13882,9 +13773,9 @@
           <a:lstStyle/>
           <a:p>
             <a:pPr algn="r">
-              <a:defRPr sz="1100" b="1">
-                <a:solidFill>
-                  <a:srgbClr val="FFFFFF"/>
+              <a:defRPr sz="900" b="1">
+                <a:solidFill>
+                  <a:srgbClr val="71717A"/>
                 </a:solidFill>
               </a:defRPr>
             </a:pPr>
@@ -13896,7 +13787,7 @@
       </p:sp>
       <p:sp>
         <p:nvSpPr>
-          <p:cNvPr id="13" name="Rounded Rectangle 12"/>
+          <p:cNvPr id="12" name="Rounded Rectangle 11"/>
           <p:cNvSpPr/>
           <p:nvPr/>
         </p:nvSpPr>
@@ -13941,14 +13832,14 @@
       </p:sp>
       <p:sp>
         <p:nvSpPr>
-          <p:cNvPr id="14" name="TextBox 13"/>
+          <p:cNvPr id="13" name="TextBox 12"/>
           <p:cNvSpPr txBox="1"/>
           <p:nvPr/>
         </p:nvSpPr>
         <p:spPr>
           <a:xfrm>
-            <a:off x="896112" y="2240279"/>
-            <a:ext cx="4882896" cy="3566160"/>
+            <a:off x="868680" y="2240279"/>
+            <a:ext cx="4937760" cy="3566160"/>
           </a:xfrm>
           <a:prstGeom prst="rect">
             <a:avLst/>
@@ -13962,93 +13853,111 @@
           <a:lstStyle/>
           <a:p>
             <a:pPr>
-              <a:defRPr sz="1100" b="1">
+              <a:defRPr sz="1200" b="1">
                 <a:solidFill>
                   <a:srgbClr val="FFFFFF"/>
                 </a:solidFill>
               </a:defRPr>
             </a:pPr>
             <a:r>
-              <a:t>📋 Criterios 1 a 3 (50% de la Nota)</a:t>
-            </a:r>
-          </a:p>
-          <a:p>
-            <a:pPr>
-              <a:defRPr sz="900">
-                <a:solidFill>
-                  <a:srgbClr val="A1A1AA"/>
-                </a:solidFill>
-              </a:defRPr>
-            </a:pPr>
-            <a:r>
-              <a:t>▪  1. Servicio REST funcional y persistente (15%): Nivel A (20 pts)</a:t>
-            </a:r>
-          </a:p>
-          <a:p>
-            <a:pPr>
-              <a:defRPr sz="900">
-                <a:solidFill>
-                  <a:srgbClr val="A1A1AA"/>
-                </a:solidFill>
-              </a:defRPr>
-            </a:pPr>
-            <a:r>
-              <a:t>▪     • CRUD completo de órdenes en PostgreSQL :5433 con cálculo de 18% IGV.</a:t>
-            </a:r>
-          </a:p>
-          <a:p>
-            <a:pPr>
-              <a:defRPr sz="900">
-                <a:solidFill>
-                  <a:srgbClr val="A1A1AA"/>
-                </a:solidFill>
-              </a:defRPr>
-            </a:pPr>
-            <a:r>
-              <a:t>▪  2. Configuración externa por ambiente (15%): Nivel A (20 pts)</a:t>
-            </a:r>
-          </a:p>
-          <a:p>
-            <a:pPr>
-              <a:defRPr sz="900">
-                <a:solidFill>
-                  <a:srgbClr val="A1A1AA"/>
-                </a:solidFill>
-              </a:defRPr>
-            </a:pPr>
-            <a:r>
-              <a:t>▪     • Config Server leyendo de config-repo con perfiles dev y prod segregados.</a:t>
-            </a:r>
-          </a:p>
-          <a:p>
-            <a:pPr>
-              <a:defRPr sz="900">
-                <a:solidFill>
-                  <a:srgbClr val="A1A1AA"/>
-                </a:solidFill>
-              </a:defRPr>
-            </a:pPr>
-            <a:r>
-              <a:t>▪  3. Registro y descubrimiento operativo (20%): Nivel A (20 pts)</a:t>
-            </a:r>
-          </a:p>
-          <a:p>
-            <a:pPr>
-              <a:defRPr sz="900">
-                <a:solidFill>
-                  <a:srgbClr val="A1A1AA"/>
-                </a:solidFill>
-              </a:defRPr>
-            </a:pPr>
-            <a:r>
-              <a:t>▪     • Eureka Server con 5 servicios registrados y visibles en dashboard :8761.</a:t>
-            </a:r>
-          </a:p>
-        </p:txBody>
-      </p:sp>
-      <p:sp>
-        <p:nvSpPr>
-          <p:cNvPr id="15" name="Rounded Rectangle 14"/>
+              <a:t>📋 Criterios 1 a 3 (50% de Ponderación)</a:t>
+            </a:r>
+          </a:p>
+          <a:p>
+            <a:pPr>
+              <a:spcBef>
+                <a:spcPts val="300"/>
+              </a:spcBef>
+              <a:defRPr sz="900">
+                <a:solidFill>
+                  <a:srgbClr val="A1A1AA"/>
+                </a:solidFill>
+              </a:defRPr>
+            </a:pPr>
+            <a:r>
+              <a:t>• 1. Servicio REST funcional y persistente (15%): Nivel A (Sobresaliente)</a:t>
+            </a:r>
+          </a:p>
+          <a:p>
+            <a:pPr>
+              <a:spcBef>
+                <a:spcPts val="300"/>
+              </a:spcBef>
+              <a:defRPr sz="900">
+                <a:solidFill>
+                  <a:srgbClr val="A1A1AA"/>
+                </a:solidFill>
+              </a:defRPr>
+            </a:pPr>
+            <a:r>
+              <a:t>•    • CRUD completo de órdenes en PostgreSQL :5433 con cálculo de 18% IGV.</a:t>
+            </a:r>
+          </a:p>
+          <a:p>
+            <a:pPr>
+              <a:spcBef>
+                <a:spcPts val="300"/>
+              </a:spcBef>
+              <a:defRPr sz="900">
+                <a:solidFill>
+                  <a:srgbClr val="A1A1AA"/>
+                </a:solidFill>
+              </a:defRPr>
+            </a:pPr>
+            <a:r>
+              <a:t>• 2. Configuración externa por ambiente (15%): Nivel A (Sobresaliente)</a:t>
+            </a:r>
+          </a:p>
+          <a:p>
+            <a:pPr>
+              <a:spcBef>
+                <a:spcPts val="300"/>
+              </a:spcBef>
+              <a:defRPr sz="900">
+                <a:solidFill>
+                  <a:srgbClr val="A1A1AA"/>
+                </a:solidFill>
+              </a:defRPr>
+            </a:pPr>
+            <a:r>
+              <a:t>•    • Config Server leyendo de config-repo con perfiles dev y prod segregados.</a:t>
+            </a:r>
+          </a:p>
+          <a:p>
+            <a:pPr>
+              <a:spcBef>
+                <a:spcPts val="300"/>
+              </a:spcBef>
+              <a:defRPr sz="900">
+                <a:solidFill>
+                  <a:srgbClr val="A1A1AA"/>
+                </a:solidFill>
+              </a:defRPr>
+            </a:pPr>
+            <a:r>
+              <a:t>• 3. Registro y descubrimiento operativo (20%): Nivel A (Sobresaliente)</a:t>
+            </a:r>
+          </a:p>
+          <a:p>
+            <a:pPr>
+              <a:spcBef>
+                <a:spcPts val="300"/>
+              </a:spcBef>
+              <a:defRPr sz="900">
+                <a:solidFill>
+                  <a:srgbClr val="A1A1AA"/>
+                </a:solidFill>
+              </a:defRPr>
+            </a:pPr>
+            <a:r>
+              <a:t>•    • Eureka Server con 5 servicios registrados y visibles en dashboard :8761.</a:t>
+            </a:r>
+          </a:p>
+        </p:txBody>
+      </p:sp>
+      <p:sp>
+        <p:nvSpPr>
+          <p:cNvPr id="14" name="Rounded Rectangle 13"/>
           <p:cNvSpPr/>
           <p:nvPr/>
         </p:nvSpPr>
@@ -14093,14 +14002,14 @@
       </p:sp>
       <p:sp>
         <p:nvSpPr>
-          <p:cNvPr id="16" name="TextBox 15"/>
+          <p:cNvPr id="15" name="TextBox 14"/>
           <p:cNvSpPr txBox="1"/>
           <p:nvPr/>
         </p:nvSpPr>
         <p:spPr>
           <a:xfrm>
-            <a:off x="6382512" y="2240279"/>
-            <a:ext cx="4882896" cy="3566160"/>
+            <a:off x="6355080" y="2240279"/>
+            <a:ext cx="4937760" cy="3566160"/>
           </a:xfrm>
           <a:prstGeom prst="rect">
             <a:avLst/>
@@ -14114,98 +14023,119 @@
           <a:lstStyle/>
           <a:p>
             <a:pPr>
-              <a:defRPr sz="1100" b="1">
+              <a:defRPr sz="1200" b="1">
                 <a:solidFill>
                   <a:srgbClr val="FFFFFF"/>
                 </a:solidFill>
               </a:defRPr>
             </a:pPr>
             <a:r>
-              <a:t>📋 Criterios 4 a 6 (50% de la Nota)</a:t>
-            </a:r>
-          </a:p>
-          <a:p>
-            <a:pPr>
-              <a:defRPr sz="900">
-                <a:solidFill>
-                  <a:srgbClr val="A1A1AA"/>
-                </a:solidFill>
-              </a:defRPr>
-            </a:pPr>
-            <a:r>
-              <a:t>▪  4. Punto único de acceso mediante Gateway (20%): Nivel A (20 pts)</a:t>
-            </a:r>
-          </a:p>
-          <a:p>
-            <a:pPr>
-              <a:defRPr sz="900">
-                <a:solidFill>
-                  <a:srgbClr val="A1A1AA"/>
-                </a:solidFill>
-              </a:defRPr>
-            </a:pPr>
-            <a:r>
-              <a:t>▪     • Gateway en :18080 resolviendo rutas lb:// dinámicas sin acceso directo.</a:t>
-            </a:r>
-          </a:p>
-          <a:p>
-            <a:pPr>
-              <a:defRPr sz="900">
-                <a:solidFill>
-                  <a:srgbClr val="A1A1AA"/>
-                </a:solidFill>
-              </a:defRPr>
-            </a:pPr>
-            <a:r>
-              <a:t>▪  5. Distribución de tráfico entre instancias (20%): Nivel A (20 pts)</a:t>
-            </a:r>
-          </a:p>
-          <a:p>
-            <a:pPr>
-              <a:defRPr sz="900">
-                <a:solidFill>
-                  <a:srgbClr val="A1A1AA"/>
-                </a:solidFill>
-              </a:defRPr>
-            </a:pPr>
-            <a:r>
-              <a:t>▪     • 2 réplicas de orden-ms balanceadas por Round-Robin y tolerancia probada.</a:t>
-            </a:r>
-          </a:p>
-          <a:p>
-            <a:pPr>
-              <a:defRPr sz="900">
-                <a:solidFill>
-                  <a:srgbClr val="A1A1AA"/>
-                </a:solidFill>
-              </a:defRPr>
-            </a:pPr>
-            <a:r>
-              <a:t>▪  6. Evidencias reproducibles y documentación (10%): Nivel A (20 pts)</a:t>
-            </a:r>
-          </a:p>
-          <a:p>
-            <a:pPr>
-              <a:defRPr sz="900">
-                <a:solidFill>
-                  <a:srgbClr val="A1A1AA"/>
-                </a:solidFill>
-              </a:defRPr>
-            </a:pPr>
-            <a:r>
-              <a:t>▪     • Scripts de 1 clic (iniciar_todo), README exhaustivo y 7 capturas 1080p.</a:t>
-            </a:r>
-          </a:p>
-          <a:p>
-            <a:pPr>
-              <a:defRPr sz="900">
-                <a:solidFill>
-                  <a:srgbClr val="A1A1AA"/>
-                </a:solidFill>
-              </a:defRPr>
-            </a:pPr>
-            <a:r>
-              <a:t>▪  NOTA FINAL = 100% Nivel A -&gt; 20.00 / 20.</a:t>
+              <a:t>📋 Criterios 4 a 6 (50% de Ponderación)</a:t>
+            </a:r>
+          </a:p>
+          <a:p>
+            <a:pPr>
+              <a:spcBef>
+                <a:spcPts val="300"/>
+              </a:spcBef>
+              <a:defRPr sz="900">
+                <a:solidFill>
+                  <a:srgbClr val="A1A1AA"/>
+                </a:solidFill>
+              </a:defRPr>
+            </a:pPr>
+            <a:r>
+              <a:t>• 4. Punto único de acceso mediante Gateway (20%): Nivel A (Sobresaliente)</a:t>
+            </a:r>
+          </a:p>
+          <a:p>
+            <a:pPr>
+              <a:spcBef>
+                <a:spcPts val="300"/>
+              </a:spcBef>
+              <a:defRPr sz="900">
+                <a:solidFill>
+                  <a:srgbClr val="A1A1AA"/>
+                </a:solidFill>
+              </a:defRPr>
+            </a:pPr>
+            <a:r>
+              <a:t>•    • Gateway en :18080 resolviendo rutas lb:// dinámicas sin acceso directo.</a:t>
+            </a:r>
+          </a:p>
+          <a:p>
+            <a:pPr>
+              <a:spcBef>
+                <a:spcPts val="300"/>
+              </a:spcBef>
+              <a:defRPr sz="900">
+                <a:solidFill>
+                  <a:srgbClr val="A1A1AA"/>
+                </a:solidFill>
+              </a:defRPr>
+            </a:pPr>
+            <a:r>
+              <a:t>• 5. Distribución de tráfico entre instancias (20%): Nivel A (Sobresaliente)</a:t>
+            </a:r>
+          </a:p>
+          <a:p>
+            <a:pPr>
+              <a:spcBef>
+                <a:spcPts val="300"/>
+              </a:spcBef>
+              <a:defRPr sz="900">
+                <a:solidFill>
+                  <a:srgbClr val="A1A1AA"/>
+                </a:solidFill>
+              </a:defRPr>
+            </a:pPr>
+            <a:r>
+              <a:t>•    • 2 réplicas de orden-ms balanceadas por Round-Robin y tolerancia probada.</a:t>
+            </a:r>
+          </a:p>
+          <a:p>
+            <a:pPr>
+              <a:spcBef>
+                <a:spcPts val="300"/>
+              </a:spcBef>
+              <a:defRPr sz="900">
+                <a:solidFill>
+                  <a:srgbClr val="A1A1AA"/>
+                </a:solidFill>
+              </a:defRPr>
+            </a:pPr>
+            <a:r>
+              <a:t>• 6. Evidencias reproducibles y documentación (10%): Nivel A (Sobresaliente)</a:t>
+            </a:r>
+          </a:p>
+          <a:p>
+            <a:pPr>
+              <a:spcBef>
+                <a:spcPts val="300"/>
+              </a:spcBef>
+              <a:defRPr sz="900">
+                <a:solidFill>
+                  <a:srgbClr val="A1A1AA"/>
+                </a:solidFill>
+              </a:defRPr>
+            </a:pPr>
+            <a:r>
+              <a:t>•    • Scripts de 1 clic (iniciar_todo), README exhaustivo y suite de pruebas.</a:t>
+            </a:r>
+          </a:p>
+          <a:p>
+            <a:pPr>
+              <a:spcBef>
+                <a:spcPts val="300"/>
+              </a:spcBef>
+              <a:defRPr sz="900">
+                <a:solidFill>
+                  <a:srgbClr val="A1A1AA"/>
+                </a:solidFill>
+              </a:defRPr>
+            </a:pPr>
+            <a:r>
+              <a:t>• Dictamen de Calidad: Conformidad Integral Nivel Sobresaliente.</a:t>
             </a:r>
           </a:p>
         </p:txBody>
